--- a/202610_株式会社横浜シミズ御中_LINE公式アカウント運用のご提案.pptx
+++ b/202610_株式会社横浜シミズ御中_LINE公式アカウント運用のご提案.pptx
@@ -13110,7 +13110,7 @@
                 <a:ea typeface="メイリオ"/>
                 <a:cs typeface="メイリオ"/>
               </a:rPr>
-              <a:t>運用プラン・費用｜月額20万円以内（ツール費込み）で運用します</a:t>
+              <a:t>運用プラン・費用｜月額215,000円〜（ツール費込み）で運用します</a:t>
             </a:r>
           </a:p>
         </p:txBody>
@@ -13151,7 +13151,7 @@
                 <a:ea typeface="メイリオ"/>
                 <a:cs typeface="メイリオ"/>
               </a:rPr>
-              <a:t>月額はツール費を含めて165,000円〜（税抜）。想定予算の月額20万円以内に収めています。</a:t>
+              <a:t>月額はツール費を含めて215,000円〜（税抜）。</a:t>
             </a:r>
           </a:p>
           <a:p>
@@ -13443,7 +13443,7 @@
                           <a:latin typeface="メイリオ" panose="020B0604030504040204" pitchFamily="50" charset="-128"/>
                           <a:ea typeface="メイリオ" panose="020B0604030504040204" pitchFamily="50" charset="-128"/>
                         </a:rPr>
-                        <a:t>100,000円</a:t>
+                        <a:t>150,000円</a:t>
                       </a:r>
                       <a:endParaRPr lang="ja-JP" altLang="en-US" sz="1150" dirty="0"/>
                     </a:p>
@@ -13892,7 +13892,7 @@
                           <a:latin typeface="メイリオ" panose="020B0604030504040204" pitchFamily="50" charset="-128"/>
                           <a:ea typeface="メイリオ" panose="020B0604030504040204" pitchFamily="50" charset="-128"/>
                         </a:rPr>
-                        <a:t>合計（予算：月額20万円以内）</a:t>
+                        <a:t>合計</a:t>
                       </a:r>
                       <a:endParaRPr lang="ja-JP" altLang="en-US" sz="1050" dirty="0"/>
                     </a:p>
@@ -13955,7 +13955,7 @@
                           <a:latin typeface="メイリオ" panose="020B0604030504040204" pitchFamily="50" charset="-128"/>
                           <a:ea typeface="メイリオ" panose="020B0604030504040204" pitchFamily="50" charset="-128"/>
                         </a:rPr>
-                        <a:t>165,000円〜</a:t>
+                        <a:t>215,000円〜</a:t>
                       </a:r>
                       <a:endParaRPr lang="ja-JP" altLang="en-US" sz="1400" dirty="0"/>
                     </a:p>
@@ -15901,7 +15901,7 @@
                 <a:latin typeface="メイリオ" panose="020B0604030504040204" pitchFamily="50" charset="-128"/>
                 <a:ea typeface="メイリオ" panose="020B0604030504040204" pitchFamily="50" charset="-128"/>
               </a:rPr>
-              <a:t>月額20万円以内（ツール費込み）で始め、成果を見て調整します。</a:t>
+              <a:t>月額215,000円〜（ツール費込み）で始め、成果を見て調整します。</a:t>
             </a:r>
             <a:endParaRPr lang="ja-JP" altLang="en-US" sz="1100" dirty="0"/>
           </a:p>

--- a/202610_株式会社横浜シミズ御中_LINE公式アカウント運用のご提案.pptx
+++ b/202610_株式会社横浜シミズ御中_LINE公式アカウント運用のご提案.pptx
@@ -12590,7 +12590,7 @@
                           <a:latin typeface="メイリオ" panose="020B0604030504040204" pitchFamily="50" charset="-128"/>
                           <a:ea typeface="メイリオ" panose="020B0604030504040204" pitchFamily="50" charset="-128"/>
                         </a:rPr>
-                        <a:t>795,000円〜</a:t>
+                        <a:t>295,000円〜</a:t>
                       </a:r>
                       <a:endParaRPr lang="ja-JP" altLang="en-US" sz="1500" dirty="0"/>
                     </a:p>
@@ -12716,7 +12716,7 @@
                           <a:latin typeface="メイリオ" panose="020B0604030504040204" pitchFamily="50" charset="-128"/>
                           <a:ea typeface="メイリオ" panose="020B0604030504040204" pitchFamily="50" charset="-128"/>
                         </a:rPr>
-                        <a:t>695,000円〜</a:t>
+                        <a:t>295,000円〜</a:t>
                       </a:r>
                       <a:endParaRPr lang="ja-JP" altLang="en-US" sz="1500" dirty="0"/>
                     </a:p>
@@ -12975,7 +12975,7 @@
                           <a:latin typeface="メイリオ" panose="020B0604030504040204" pitchFamily="50" charset="-128"/>
                           <a:ea typeface="メイリオ" panose="020B0604030504040204" pitchFamily="50" charset="-128"/>
                         </a:rPr>
-                        <a:t>350,000円〜</a:t>
+                        <a:t>250,000円〜</a:t>
                       </a:r>
                       <a:endParaRPr lang="ja-JP" altLang="en-US" sz="1500" dirty="0"/>
                     </a:p>
@@ -13493,7 +13493,7 @@
                           <a:latin typeface="メイリオ" panose="020B0604030504040204" pitchFamily="50" charset="-128"/>
                           <a:ea typeface="メイリオ" panose="020B0604030504040204" pitchFamily="50" charset="-128"/>
                         </a:rPr>
-                        <a:t>415,000円〜</a:t>
+                        <a:t>315,000円〜</a:t>
                       </a:r>
                       <a:endParaRPr lang="ja-JP" altLang="en-US" sz="2000" dirty="0"/>
                     </a:p>
@@ -13586,7 +13586,7 @@
                 <a:latin typeface="メイリオ" panose="020B0604030504040204" pitchFamily="50" charset="-128"/>
                 <a:ea typeface="メイリオ" panose="020B0604030504040204" pitchFamily="50" charset="-128"/>
               </a:rPr>
-              <a:t>※初期費用＝運用設計・構築（①600,000円〜／②100,000円〜／③500,000円〜）＋離脱防止 15,000円＋サンクスLINE誘導 150,000円＋アカウント開設 30,000円</a:t>
+              <a:t>※初期費用＝運用設計・構築 100,000円〜＋離脱防止 15,000円＋サンクスLINE誘導 150,000円＋LINE公式アカウント開設 30,000円</a:t>
             </a:r>
             <a:endParaRPr lang="ja-JP" altLang="en-US" sz="1200" dirty="0"/>
           </a:p>

--- a/202610_株式会社横浜シミズ御中_LINE公式アカウント運用のご提案.pptx
+++ b/202610_株式会社横浜シミズ御中_LINE公式アカウント運用のご提案.pptx
@@ -15704,7 +15704,7 @@
                           <a:latin typeface="メイリオ" panose="020B0604030504040204" pitchFamily="50" charset="-128"/>
                           <a:ea typeface="メイリオ" panose="020B0604030504040204" pitchFamily="50" charset="-128"/>
                         </a:rPr>
-                        <a:t>（送信も代行）</a:t>
+                        <a:t>（送信は貴社）</a:t>
                       </a:r>
                       <a:endParaRPr lang="ja-JP" altLang="en-US" sz="1300" dirty="0"/>
                     </a:p>

--- a/202610_株式会社横浜シミズ御中_LINE公式アカウント運用のご提案.pptx
+++ b/202610_株式会社横浜シミズ御中_LINE公式アカウント運用のご提案.pptx
@@ -11378,7 +11378,7 @@
                 <a:latin typeface="メイリオ"/>
                 <a:ea typeface="メイリオ"/>
               </a:rPr>
-              <a:t>設置</a:t>
+              <a:t>リンク・画像の用意</a:t>
             </a:r>
             <a:endParaRPr lang="en-US" sz="1300" b="0" u="none" strike="noStrike">
               <a:solidFill>
@@ -14673,7 +14673,23 @@
                           <a:latin typeface="メイリオ" panose="020B0604030504040204" pitchFamily="50" charset="-128"/>
                           <a:ea typeface="メイリオ" panose="020B0604030504040204" pitchFamily="50" charset="-128"/>
                         </a:rPr>
-                        <a:t>設置</a:t>
+                        <a:t>リンク・画像の用意</a:t>
+                      </a:r>
+                      <a:endParaRPr lang="ja-JP" altLang="en-US" sz="1300" dirty="0"/>
+                    </a:p>
+                    <a:p>
+                      <a:pPr algn="ctr">
+                        <a:buNone/>
+                      </a:pPr>
+                      <a:r>
+                        <a:rPr lang="ja-JP" altLang="en-US" sz="1300" b="0" dirty="0">
+                          <a:solidFill>
+                            <a:srgbClr val="333333"/>
+                          </a:solidFill>
+                          <a:latin typeface="メイリオ" panose="020B0604030504040204" pitchFamily="50" charset="-128"/>
+                          <a:ea typeface="メイリオ" panose="020B0604030504040204" pitchFamily="50" charset="-128"/>
+                        </a:rPr>
+                        <a:t>（設置は貴社）</a:t>
                       </a:r>
                       <a:endParaRPr lang="ja-JP" altLang="en-US" sz="1300" dirty="0"/>
                     </a:p>
@@ -14736,7 +14752,23 @@
                           <a:latin typeface="メイリオ" panose="020B0604030504040204" pitchFamily="50" charset="-128"/>
                           <a:ea typeface="メイリオ" panose="020B0604030504040204" pitchFamily="50" charset="-128"/>
                         </a:rPr>
-                        <a:t>設置</a:t>
+                        <a:t>リンク・画像の用意</a:t>
+                      </a:r>
+                      <a:endParaRPr lang="ja-JP" altLang="en-US" sz="1300" dirty="0"/>
+                    </a:p>
+                    <a:p>
+                      <a:pPr algn="ctr">
+                        <a:buNone/>
+                      </a:pPr>
+                      <a:r>
+                        <a:rPr lang="ja-JP" altLang="en-US" sz="1300" b="0" dirty="0">
+                          <a:solidFill>
+                            <a:srgbClr val="333333"/>
+                          </a:solidFill>
+                          <a:latin typeface="メイリオ" panose="020B0604030504040204" pitchFamily="50" charset="-128"/>
+                          <a:ea typeface="メイリオ" panose="020B0604030504040204" pitchFamily="50" charset="-128"/>
+                        </a:rPr>
+                        <a:t>（設置は貴社）</a:t>
                       </a:r>
                       <a:endParaRPr lang="ja-JP" altLang="en-US" sz="1300" dirty="0"/>
                     </a:p>
@@ -14799,7 +14831,23 @@
                           <a:latin typeface="メイリオ" panose="020B0604030504040204" pitchFamily="50" charset="-128"/>
                           <a:ea typeface="メイリオ" panose="020B0604030504040204" pitchFamily="50" charset="-128"/>
                         </a:rPr>
-                        <a:t>設置</a:t>
+                        <a:t>リンク・画像の用意</a:t>
+                      </a:r>
+                      <a:endParaRPr lang="ja-JP" altLang="en-US" sz="1300" dirty="0"/>
+                    </a:p>
+                    <a:p>
+                      <a:pPr algn="ctr">
+                        <a:buNone/>
+                      </a:pPr>
+                      <a:r>
+                        <a:rPr lang="ja-JP" altLang="en-US" sz="1300" b="0" dirty="0">
+                          <a:solidFill>
+                            <a:srgbClr val="333333"/>
+                          </a:solidFill>
+                          <a:latin typeface="メイリオ" panose="020B0604030504040204" pitchFamily="50" charset="-128"/>
+                          <a:ea typeface="メイリオ" panose="020B0604030504040204" pitchFamily="50" charset="-128"/>
+                        </a:rPr>
+                        <a:t>（設置は貴社）</a:t>
                       </a:r>
                       <a:endParaRPr lang="ja-JP" altLang="en-US" sz="1300" dirty="0"/>
                     </a:p>

--- a/202610_株式会社横浜シミズ御中_LINE公式アカウント運用のご提案.pptx
+++ b/202610_株式会社横浜シミズ御中_LINE公式アカウント運用のご提案.pptx
@@ -11226,7 +11226,7 @@
       </p:sp>
       <p:sp>
         <p:nvSpPr>
-          <p:cNvPr id="369" name="正方形/長方形 25"/>
+          <p:cNvPr id="371" name="正方形/長方形 33"/>
           <p:cNvSpPr/>
           <p:nvPr/>
         </p:nvSpPr>
@@ -11280,7 +11280,7 @@
                 <a:latin typeface="メイリオ"/>
                 <a:ea typeface="メイリオ"/>
               </a:rPr>
-              <a:t>サイトの</a:t>
+              <a:t>ステップ配信</a:t>
             </a:r>
             <a:endParaRPr lang="en-US" sz="1300" b="0" u="none" strike="noStrike">
               <a:solidFill>
@@ -11291,38 +11291,11 @@
               <a:latin typeface="メイリオ"/>
             </a:endParaRPr>
           </a:p>
-          <a:p>
-            <a:pPr algn="ctr" defTabSz="914400">
-              <a:lnSpc>
-                <a:spcPct val="100000"/>
-              </a:lnSpc>
-            </a:pPr>
-            <a:r>
-              <a:rPr lang="ja-JP" sz="1300" b="0" u="none" strike="noStrike">
-                <a:solidFill>
-                  <a:schemeClr val="lt1"/>
-                </a:solidFill>
-                <a:effectLst/>
-                <a:uFillTx/>
-                <a:latin typeface="メイリオ"/>
-                <a:ea typeface="メイリオ"/>
-              </a:rPr>
-              <a:t>LINEボタン</a:t>
-            </a:r>
-            <a:endParaRPr lang="en-US" sz="1300" b="0" u="none" strike="noStrike">
-              <a:solidFill>
-                <a:srgbClr val="FFFFFF"/>
-              </a:solidFill>
-              <a:effectLst/>
-              <a:uFillTx/>
-              <a:latin typeface="メイリオ"/>
-            </a:endParaRPr>
-          </a:p>
         </p:txBody>
       </p:sp>
       <p:sp>
         <p:nvSpPr>
-          <p:cNvPr id="370" name="正方形/長方形 29"/>
+          <p:cNvPr id="372" name="正方形/長方形 37"/>
           <p:cNvSpPr/>
           <p:nvPr/>
         </p:nvSpPr>
@@ -11369,7 +11342,7 @@
               </a:lnSpc>
             </a:pPr>
             <a:r>
-              <a:rPr lang="en-US" sz="1300" b="0" u="none" strike="noStrike">
+              <a:rPr lang="ja-JP" sz="1300" b="0" u="none" strike="noStrike">
                 <a:solidFill>
                   <a:schemeClr val="dk1"/>
                 </a:solidFill>
@@ -11378,7 +11351,7 @@
                 <a:latin typeface="メイリオ"/>
                 <a:ea typeface="メイリオ"/>
               </a:rPr>
-              <a:t>リンク・画像の用意</a:t>
+              <a:t>4通を構築</a:t>
             </a:r>
             <a:endParaRPr lang="en-US" sz="1300" b="0" u="none" strike="noStrike">
               <a:solidFill>
@@ -11393,7 +11366,7 @@
       </p:sp>
       <p:sp>
         <p:nvSpPr>
-          <p:cNvPr id="371" name="正方形/長方形 33"/>
+          <p:cNvPr id="373" name="正方形/長方形 41"/>
           <p:cNvSpPr/>
           <p:nvPr/>
         </p:nvSpPr>
@@ -11447,7 +11420,7 @@
                 <a:latin typeface="メイリオ"/>
                 <a:ea typeface="メイリオ"/>
               </a:rPr>
-              <a:t>ステップ配信</a:t>
+              <a:t>勤務前の案内</a:t>
             </a:r>
             <a:endParaRPr lang="en-US" sz="1300" b="0" u="none" strike="noStrike">
               <a:solidFill>
@@ -11462,153 +11435,13 @@
       </p:sp>
       <p:sp>
         <p:nvSpPr>
-          <p:cNvPr id="372" name="正方形/長方形 37"/>
-          <p:cNvSpPr/>
-          <p:nvPr/>
-        </p:nvSpPr>
-        <p:spPr>
-          <a:xfrm>
-            <a:off x="1770120" y="4558320"/>
-            <a:ext cx="1343880" cy="447840"/>
-          </a:xfrm>
-          <a:prstGeom prst="rect">
-            <a:avLst/>
-          </a:prstGeom>
-          <a:solidFill>
-            <a:schemeClr val="bg1">
-              <a:lumMod val="95000"/>
-            </a:schemeClr>
-          </a:solidFill>
-          <a:ln>
-            <a:noFill/>
-          </a:ln>
-        </p:spPr>
-        <p:style>
-          <a:lnRef idx="2">
-            <a:schemeClr val="accent1">
-              <a:shade val="15000"/>
-            </a:schemeClr>
-          </a:lnRef>
-          <a:fillRef idx="1">
-            <a:schemeClr val="accent1"/>
-          </a:fillRef>
-          <a:effectRef idx="0">
-            <a:schemeClr val="accent1"/>
-          </a:effectRef>
-          <a:fontRef idx="minor"/>
-        </p:style>
-        <p:txBody>
-          <a:bodyPr lIns="45720" tIns="18360" rIns="45720" bIns="18360" anchor="ctr">
-            <a:noAutofit/>
-          </a:bodyPr>
-          <a:lstStyle/>
-          <a:p>
-            <a:pPr algn="ctr" defTabSz="914400">
-              <a:lnSpc>
-                <a:spcPct val="100000"/>
-              </a:lnSpc>
-            </a:pPr>
-            <a:r>
-              <a:rPr lang="ja-JP" sz="1300" b="0" u="none" strike="noStrike">
-                <a:solidFill>
-                  <a:schemeClr val="dk1"/>
-                </a:solidFill>
-                <a:effectLst/>
-                <a:uFillTx/>
-                <a:latin typeface="メイリオ"/>
-                <a:ea typeface="メイリオ"/>
-              </a:rPr>
-              <a:t>4通を構築</a:t>
-            </a:r>
-            <a:endParaRPr lang="en-US" sz="1300" b="0" u="none" strike="noStrike">
-              <a:solidFill>
-                <a:srgbClr val="000000"/>
-              </a:solidFill>
-              <a:effectLst/>
-              <a:uFillTx/>
-              <a:latin typeface="メイリオ"/>
-            </a:endParaRPr>
-          </a:p>
-        </p:txBody>
-      </p:sp>
-      <p:sp>
-        <p:nvSpPr>
-          <p:cNvPr id="373" name="正方形/長方形 41"/>
-          <p:cNvSpPr/>
-          <p:nvPr/>
-        </p:nvSpPr>
-        <p:spPr>
-          <a:xfrm>
-            <a:off x="307080" y="5047560"/>
-            <a:ext cx="1425960" cy="447840"/>
-          </a:xfrm>
-          <a:prstGeom prst="rect">
-            <a:avLst/>
-          </a:prstGeom>
-          <a:solidFill>
-            <a:srgbClr val="00B050"/>
-          </a:solidFill>
-          <a:ln>
-            <a:noFill/>
-          </a:ln>
-        </p:spPr>
-        <p:style>
-          <a:lnRef idx="2">
-            <a:schemeClr val="accent1">
-              <a:shade val="15000"/>
-            </a:schemeClr>
-          </a:lnRef>
-          <a:fillRef idx="1">
-            <a:schemeClr val="accent1"/>
-          </a:fillRef>
-          <a:effectRef idx="0">
-            <a:schemeClr val="accent1"/>
-          </a:effectRef>
-          <a:fontRef idx="minor"/>
-        </p:style>
-        <p:txBody>
-          <a:bodyPr lIns="45720" tIns="18360" rIns="45720" bIns="18360" anchor="ctr">
-            <a:noAutofit/>
-          </a:bodyPr>
-          <a:lstStyle/>
-          <a:p>
-            <a:pPr algn="ctr" defTabSz="914400">
-              <a:lnSpc>
-                <a:spcPct val="100000"/>
-              </a:lnSpc>
-            </a:pPr>
-            <a:r>
-              <a:rPr lang="ja-JP" sz="1300" b="0" u="none" strike="noStrike">
-                <a:solidFill>
-                  <a:schemeClr val="lt1"/>
-                </a:solidFill>
-                <a:effectLst/>
-                <a:uFillTx/>
-                <a:latin typeface="メイリオ"/>
-                <a:ea typeface="メイリオ"/>
-              </a:rPr>
-              <a:t>勤務前の案内</a:t>
-            </a:r>
-            <a:endParaRPr lang="en-US" sz="1300" b="0" u="none" strike="noStrike">
-              <a:solidFill>
-                <a:srgbClr val="FFFFFF"/>
-              </a:solidFill>
-              <a:effectLst/>
-              <a:uFillTx/>
-              <a:latin typeface="メイリオ"/>
-            </a:endParaRPr>
-          </a:p>
-        </p:txBody>
-      </p:sp>
-      <p:sp>
-        <p:nvSpPr>
           <p:cNvPr id="374" name="正方形/長方形 46"/>
           <p:cNvSpPr/>
           <p:nvPr/>
         </p:nvSpPr>
         <p:spPr>
           <a:xfrm>
-            <a:off x="1770120" y="5047560"/>
+            <a:off x="1770120" y="4558320"/>
             <a:ext cx="1343880" cy="447840"/>
           </a:xfrm>
           <a:prstGeom prst="rect">
@@ -13975,7 +13808,7 @@
         </p:nvGraphicFramePr>
         <p:xfrm>
           <a:off x="384048" y="1353312"/>
-          <a:ext cx="9144000" cy="3642969"/>
+          <a:ext cx="9144000" cy="3149193"/>
         </p:xfrm>
         <a:graphic>
           <a:graphicData uri="http://schemas.openxmlformats.org/drawingml/2006/table">
@@ -14590,313 +14423,6 @@
                 <a:extLst>
                   <a:ext uri="{0D108BD9-81ED-4DB2-BD59-A6C34878D82A}">
                     <a16:rowId xmlns:a16="http://schemas.microsoft.com/office/drawing/2014/main" val="10002"/>
-                  </a:ext>
-                </a:extLst>
-              </a:tr>
-              <a:tr h="493776">
-                <a:tc>
-                  <a:txBody>
-                    <a:bodyPr/>
-                    <a:lstStyle/>
-                    <a:p>
-                      <a:pPr algn="ctr">
-                        <a:buNone/>
-                      </a:pPr>
-                      <a:r>
-                        <a:rPr lang="ja-JP" altLang="en-US" sz="1300" b="1" dirty="0">
-                          <a:solidFill>
-                            <a:srgbClr val="1F285A"/>
-                          </a:solidFill>
-                          <a:latin typeface="メイリオ" panose="020B0604030504040204" pitchFamily="50" charset="-128"/>
-                          <a:ea typeface="メイリオ" panose="020B0604030504040204" pitchFamily="50" charset="-128"/>
-                        </a:rPr>
-                        <a:t>サイトのLINEボタン</a:t>
-                      </a:r>
-                      <a:endParaRPr lang="ja-JP" altLang="en-US" sz="1300" dirty="0"/>
-                    </a:p>
-                  </a:txBody>
-                  <a:tcPr marL="73152" marR="73152" marT="27432" marB="27432" anchor="ctr">
-                    <a:lnL w="9525" cap="flat" cmpd="sng" algn="ctr">
-                      <a:solidFill>
-                        <a:srgbClr val="BFC8DC"/>
-                      </a:solidFill>
-                      <a:prstDash val="solid"/>
-                      <a:round/>
-                      <a:headEnd type="none" w="med" len="med"/>
-                      <a:tailEnd type="none" w="med" len="med"/>
-                    </a:lnL>
-                    <a:lnR w="9525" cap="flat" cmpd="sng" algn="ctr">
-                      <a:solidFill>
-                        <a:srgbClr val="BFC8DC"/>
-                      </a:solidFill>
-                      <a:prstDash val="solid"/>
-                      <a:round/>
-                      <a:headEnd type="none" w="med" len="med"/>
-                      <a:tailEnd type="none" w="med" len="med"/>
-                    </a:lnR>
-                    <a:lnT w="9525" cap="flat" cmpd="sng" algn="ctr">
-                      <a:solidFill>
-                        <a:srgbClr val="BFC8DC"/>
-                      </a:solidFill>
-                      <a:prstDash val="solid"/>
-                      <a:round/>
-                      <a:headEnd type="none" w="med" len="med"/>
-                      <a:tailEnd type="none" w="med" len="med"/>
-                    </a:lnT>
-                    <a:lnB w="9525" cap="flat" cmpd="sng" algn="ctr">
-                      <a:solidFill>
-                        <a:srgbClr val="BFC8DC"/>
-                      </a:solidFill>
-                      <a:prstDash val="solid"/>
-                      <a:round/>
-                      <a:headEnd type="none" w="med" len="med"/>
-                      <a:tailEnd type="none" w="med" len="med"/>
-                    </a:lnB>
-                    <a:solidFill>
-                      <a:srgbClr val="E8ECF6"/>
-                    </a:solidFill>
-                  </a:tcPr>
-                </a:tc>
-                <a:tc>
-                  <a:txBody>
-                    <a:bodyPr/>
-                    <a:lstStyle/>
-                    <a:p>
-                      <a:pPr algn="ctr">
-                        <a:buNone/>
-                      </a:pPr>
-                      <a:r>
-                        <a:rPr lang="ja-JP" altLang="en-US" sz="1300" b="0" dirty="0">
-                          <a:solidFill>
-                            <a:srgbClr val="333333"/>
-                          </a:solidFill>
-                          <a:latin typeface="メイリオ" panose="020B0604030504040204" pitchFamily="50" charset="-128"/>
-                          <a:ea typeface="メイリオ" panose="020B0604030504040204" pitchFamily="50" charset="-128"/>
-                        </a:rPr>
-                        <a:t>リンク・画像の用意</a:t>
-                      </a:r>
-                      <a:endParaRPr lang="ja-JP" altLang="en-US" sz="1300" dirty="0"/>
-                    </a:p>
-                    <a:p>
-                      <a:pPr algn="ctr">
-                        <a:buNone/>
-                      </a:pPr>
-                      <a:r>
-                        <a:rPr lang="ja-JP" altLang="en-US" sz="1300" b="0" dirty="0">
-                          <a:solidFill>
-                            <a:srgbClr val="333333"/>
-                          </a:solidFill>
-                          <a:latin typeface="メイリオ" panose="020B0604030504040204" pitchFamily="50" charset="-128"/>
-                          <a:ea typeface="メイリオ" panose="020B0604030504040204" pitchFamily="50" charset="-128"/>
-                        </a:rPr>
-                        <a:t>（設置は貴社）</a:t>
-                      </a:r>
-                      <a:endParaRPr lang="ja-JP" altLang="en-US" sz="1300" dirty="0"/>
-                    </a:p>
-                  </a:txBody>
-                  <a:tcPr marL="73152" marR="73152" marT="27432" marB="27432" anchor="ctr">
-                    <a:lnL w="9525" cap="flat" cmpd="sng" algn="ctr">
-                      <a:solidFill>
-                        <a:srgbClr val="BFC8DC"/>
-                      </a:solidFill>
-                      <a:prstDash val="solid"/>
-                      <a:round/>
-                      <a:headEnd type="none" w="med" len="med"/>
-                      <a:tailEnd type="none" w="med" len="med"/>
-                    </a:lnL>
-                    <a:lnR w="9525" cap="flat" cmpd="sng" algn="ctr">
-                      <a:solidFill>
-                        <a:srgbClr val="BFC8DC"/>
-                      </a:solidFill>
-                      <a:prstDash val="solid"/>
-                      <a:round/>
-                      <a:headEnd type="none" w="med" len="med"/>
-                      <a:tailEnd type="none" w="med" len="med"/>
-                    </a:lnR>
-                    <a:lnT w="9525" cap="flat" cmpd="sng" algn="ctr">
-                      <a:solidFill>
-                        <a:srgbClr val="BFC8DC"/>
-                      </a:solidFill>
-                      <a:prstDash val="solid"/>
-                      <a:round/>
-                      <a:headEnd type="none" w="med" len="med"/>
-                      <a:tailEnd type="none" w="med" len="med"/>
-                    </a:lnT>
-                    <a:lnB w="9525" cap="flat" cmpd="sng" algn="ctr">
-                      <a:solidFill>
-                        <a:srgbClr val="BFC8DC"/>
-                      </a:solidFill>
-                      <a:prstDash val="solid"/>
-                      <a:round/>
-                      <a:headEnd type="none" w="med" len="med"/>
-                      <a:tailEnd type="none" w="med" len="med"/>
-                    </a:lnB>
-                    <a:solidFill>
-                      <a:srgbClr val="FFFFFF"/>
-                    </a:solidFill>
-                  </a:tcPr>
-                </a:tc>
-                <a:tc>
-                  <a:txBody>
-                    <a:bodyPr/>
-                    <a:lstStyle/>
-                    <a:p>
-                      <a:pPr algn="ctr">
-                        <a:buNone/>
-                      </a:pPr>
-                      <a:r>
-                        <a:rPr lang="ja-JP" altLang="en-US" sz="1300" b="0" dirty="0">
-                          <a:solidFill>
-                            <a:srgbClr val="333333"/>
-                          </a:solidFill>
-                          <a:latin typeface="メイリオ" panose="020B0604030504040204" pitchFamily="50" charset="-128"/>
-                          <a:ea typeface="メイリオ" panose="020B0604030504040204" pitchFamily="50" charset="-128"/>
-                        </a:rPr>
-                        <a:t>リンク・画像の用意</a:t>
-                      </a:r>
-                      <a:endParaRPr lang="ja-JP" altLang="en-US" sz="1300" dirty="0"/>
-                    </a:p>
-                    <a:p>
-                      <a:pPr algn="ctr">
-                        <a:buNone/>
-                      </a:pPr>
-                      <a:r>
-                        <a:rPr lang="ja-JP" altLang="en-US" sz="1300" b="0" dirty="0">
-                          <a:solidFill>
-                            <a:srgbClr val="333333"/>
-                          </a:solidFill>
-                          <a:latin typeface="メイリオ" panose="020B0604030504040204" pitchFamily="50" charset="-128"/>
-                          <a:ea typeface="メイリオ" panose="020B0604030504040204" pitchFamily="50" charset="-128"/>
-                        </a:rPr>
-                        <a:t>（設置は貴社）</a:t>
-                      </a:r>
-                      <a:endParaRPr lang="ja-JP" altLang="en-US" sz="1300" dirty="0"/>
-                    </a:p>
-                  </a:txBody>
-                  <a:tcPr marL="73152" marR="73152" marT="27432" marB="27432" anchor="ctr">
-                    <a:lnL w="9525" cap="flat" cmpd="sng" algn="ctr">
-                      <a:solidFill>
-                        <a:srgbClr val="BFC8DC"/>
-                      </a:solidFill>
-                      <a:prstDash val="solid"/>
-                      <a:round/>
-                      <a:headEnd type="none" w="med" len="med"/>
-                      <a:tailEnd type="none" w="med" len="med"/>
-                    </a:lnL>
-                    <a:lnR w="9525" cap="flat" cmpd="sng" algn="ctr">
-                      <a:solidFill>
-                        <a:srgbClr val="BFC8DC"/>
-                      </a:solidFill>
-                      <a:prstDash val="solid"/>
-                      <a:round/>
-                      <a:headEnd type="none" w="med" len="med"/>
-                      <a:tailEnd type="none" w="med" len="med"/>
-                    </a:lnR>
-                    <a:lnT w="9525" cap="flat" cmpd="sng" algn="ctr">
-                      <a:solidFill>
-                        <a:srgbClr val="BFC8DC"/>
-                      </a:solidFill>
-                      <a:prstDash val="solid"/>
-                      <a:round/>
-                      <a:headEnd type="none" w="med" len="med"/>
-                      <a:tailEnd type="none" w="med" len="med"/>
-                    </a:lnT>
-                    <a:lnB w="9525" cap="flat" cmpd="sng" algn="ctr">
-                      <a:solidFill>
-                        <a:srgbClr val="BFC8DC"/>
-                      </a:solidFill>
-                      <a:prstDash val="solid"/>
-                      <a:round/>
-                      <a:headEnd type="none" w="med" len="med"/>
-                      <a:tailEnd type="none" w="med" len="med"/>
-                    </a:lnB>
-                    <a:solidFill>
-                      <a:srgbClr val="FFFFFF"/>
-                    </a:solidFill>
-                  </a:tcPr>
-                </a:tc>
-                <a:tc>
-                  <a:txBody>
-                    <a:bodyPr/>
-                    <a:lstStyle/>
-                    <a:p>
-                      <a:pPr algn="ctr">
-                        <a:buNone/>
-                      </a:pPr>
-                      <a:r>
-                        <a:rPr lang="ja-JP" altLang="en-US" sz="1300" b="0" dirty="0">
-                          <a:solidFill>
-                            <a:srgbClr val="333333"/>
-                          </a:solidFill>
-                          <a:latin typeface="メイリオ" panose="020B0604030504040204" pitchFamily="50" charset="-128"/>
-                          <a:ea typeface="メイリオ" panose="020B0604030504040204" pitchFamily="50" charset="-128"/>
-                        </a:rPr>
-                        <a:t>リンク・画像の用意</a:t>
-                      </a:r>
-                      <a:endParaRPr lang="ja-JP" altLang="en-US" sz="1300" dirty="0"/>
-                    </a:p>
-                    <a:p>
-                      <a:pPr algn="ctr">
-                        <a:buNone/>
-                      </a:pPr>
-                      <a:r>
-                        <a:rPr lang="ja-JP" altLang="en-US" sz="1300" b="0" dirty="0">
-                          <a:solidFill>
-                            <a:srgbClr val="333333"/>
-                          </a:solidFill>
-                          <a:latin typeface="メイリオ" panose="020B0604030504040204" pitchFamily="50" charset="-128"/>
-                          <a:ea typeface="メイリオ" panose="020B0604030504040204" pitchFamily="50" charset="-128"/>
-                        </a:rPr>
-                        <a:t>（設置は貴社）</a:t>
-                      </a:r>
-                      <a:endParaRPr lang="ja-JP" altLang="en-US" sz="1300" dirty="0"/>
-                    </a:p>
-                  </a:txBody>
-                  <a:tcPr marL="73152" marR="73152" marT="27432" marB="27432" anchor="ctr">
-                    <a:lnL w="9525" cap="flat" cmpd="sng" algn="ctr">
-                      <a:solidFill>
-                        <a:srgbClr val="BFC8DC"/>
-                      </a:solidFill>
-                      <a:prstDash val="solid"/>
-                      <a:round/>
-                      <a:headEnd type="none" w="med" len="med"/>
-                      <a:tailEnd type="none" w="med" len="med"/>
-                    </a:lnL>
-                    <a:lnR w="9525" cap="flat" cmpd="sng" algn="ctr">
-                      <a:solidFill>
-                        <a:srgbClr val="BFC8DC"/>
-                      </a:solidFill>
-                      <a:prstDash val="solid"/>
-                      <a:round/>
-                      <a:headEnd type="none" w="med" len="med"/>
-                      <a:tailEnd type="none" w="med" len="med"/>
-                    </a:lnR>
-                    <a:lnT w="9525" cap="flat" cmpd="sng" algn="ctr">
-                      <a:solidFill>
-                        <a:srgbClr val="BFC8DC"/>
-                      </a:solidFill>
-                      <a:prstDash val="solid"/>
-                      <a:round/>
-                      <a:headEnd type="none" w="med" len="med"/>
-                      <a:tailEnd type="none" w="med" len="med"/>
-                    </a:lnT>
-                    <a:lnB w="9525" cap="flat" cmpd="sng" algn="ctr">
-                      <a:solidFill>
-                        <a:srgbClr val="BFC8DC"/>
-                      </a:solidFill>
-                      <a:prstDash val="solid"/>
-                      <a:round/>
-                      <a:headEnd type="none" w="med" len="med"/>
-                      <a:tailEnd type="none" w="med" len="med"/>
-                    </a:lnB>
-                    <a:solidFill>
-                      <a:srgbClr val="FFFFFF"/>
-                    </a:solidFill>
-                  </a:tcPr>
-                </a:tc>
-                <a:extLst>
-                  <a:ext uri="{0D108BD9-81ED-4DB2-BD59-A6C34878D82A}">
-                    <a16:rowId xmlns:a16="http://schemas.microsoft.com/office/drawing/2014/main" val="10003"/>
                   </a:ext>
                 </a:extLst>
               </a:tr>

--- a/202610_株式会社横浜シミズ御中_LINE公式アカウント運用のご提案.pptx
+++ b/202610_株式会社横浜シミズ御中_LINE公式アカウント運用のご提案.pptx
@@ -14093,7 +14093,7 @@
         </p:nvSpPr>
         <p:spPr>
           <a:xfrm>
-            <a:off x="309600" y="687600"/>
+            <a:off x="431292" y="824484"/>
             <a:ext cx="9331200" cy="585216"/>
           </a:xfrm>
           <a:prstGeom prst="rect">
@@ -14113,7 +14113,7 @@
               </a:lnSpc>
             </a:pPr>
             <a:r>
-              <a:rPr sz="1400" b="1">
+              <a:rPr sz="1400" b="1" dirty="0" err="1">
                 <a:solidFill>
                   <a:srgbClr val="1E2761"/>
                 </a:solidFill>
@@ -14121,7 +14121,18 @@
                 <a:ea typeface="メイリオ"/>
                 <a:cs typeface="メイリオ"/>
               </a:rPr>
-              <a:t>まず横浜シミズで、友だち獲得・勤務連絡・再応募の運用モデルをつくり、成果と運用の負荷を確かめます。</a:t>
+              <a:t>まず横浜シミズで、友だち獲得・勤務連絡・再応募の運用モデルをつくり、成果と運用の負荷を確かめます</a:t>
+            </a:r>
+            <a:r>
+              <a:rPr sz="1400" b="1" dirty="0">
+                <a:solidFill>
+                  <a:srgbClr val="1E2761"/>
+                </a:solidFill>
+                <a:latin typeface="メイリオ"/>
+                <a:ea typeface="メイリオ"/>
+                <a:cs typeface="メイリオ"/>
+              </a:rPr>
+              <a:t>。</a:t>
             </a:r>
           </a:p>
           <a:p>
@@ -14131,7 +14142,7 @@
               </a:lnSpc>
             </a:pPr>
             <a:r>
-              <a:rPr sz="1400" b="1">
+              <a:rPr sz="1400" b="1" dirty="0" err="1">
                 <a:solidFill>
                   <a:srgbClr val="FF0000"/>
                 </a:solidFill>
@@ -14139,7 +14150,18 @@
                 <a:ea typeface="メイリオ"/>
                 <a:cs typeface="メイリオ"/>
               </a:rPr>
-              <a:t>成果をふまえ、シミズグループの他社でも使えるモデルとして整理することを目指します。</a:t>
+              <a:t>成果をふまえ、シミズグループの他社でも使えるモデルとして整理することを目指します</a:t>
+            </a:r>
+            <a:r>
+              <a:rPr sz="1400" b="1" dirty="0">
+                <a:solidFill>
+                  <a:srgbClr val="FF0000"/>
+                </a:solidFill>
+                <a:latin typeface="メイリオ"/>
+                <a:ea typeface="メイリオ"/>
+                <a:cs typeface="メイリオ"/>
+              </a:rPr>
+              <a:t>。</a:t>
             </a:r>
           </a:p>
         </p:txBody>
@@ -14152,7 +14174,7 @@
         </p:nvSpPr>
         <p:spPr>
           <a:xfrm>
-            <a:off x="429768" y="5596128"/>
+            <a:off x="431292" y="4876800"/>
             <a:ext cx="9043416" cy="374904"/>
           </a:xfrm>
           <a:prstGeom prst="rect">
@@ -14197,7 +14219,7 @@
         </p:nvSpPr>
         <p:spPr>
           <a:xfrm>
-            <a:off x="429768" y="5596128"/>
+            <a:off x="431292" y="4876800"/>
             <a:ext cx="9043416" cy="374904"/>
           </a:xfrm>
           <a:prstGeom prst="rect">
@@ -14239,7 +14261,7 @@
         </p:nvSpPr>
         <p:spPr>
           <a:xfrm>
-            <a:off x="429768" y="1371600"/>
+            <a:off x="431292" y="1676400"/>
             <a:ext cx="2983992" cy="457200"/>
           </a:xfrm>
           <a:prstGeom prst="homePlate">
@@ -14283,8 +14305,8 @@
         </p:nvSpPr>
         <p:spPr>
           <a:xfrm>
-            <a:off x="475488" y="1920240"/>
-            <a:ext cx="2801112" cy="1325880"/>
+            <a:off x="477012" y="2225040"/>
+            <a:ext cx="2801112" cy="979714"/>
           </a:xfrm>
           <a:prstGeom prst="roundRect">
             <a:avLst>
@@ -14391,7 +14413,7 @@
         </p:nvSpPr>
         <p:spPr>
           <a:xfrm>
-            <a:off x="3459480" y="1371600"/>
+            <a:off x="3461004" y="1676400"/>
             <a:ext cx="2983992" cy="457200"/>
           </a:xfrm>
           <a:prstGeom prst="chevron">
@@ -14435,8 +14457,8 @@
         </p:nvSpPr>
         <p:spPr>
           <a:xfrm>
-            <a:off x="3505199" y="1920240"/>
-            <a:ext cx="2801112" cy="1325880"/>
+            <a:off x="3506723" y="2225040"/>
+            <a:ext cx="2801112" cy="979714"/>
           </a:xfrm>
           <a:prstGeom prst="roundRect">
             <a:avLst>
@@ -14524,7 +14546,7 @@
         </p:nvSpPr>
         <p:spPr>
           <a:xfrm>
-            <a:off x="6489192" y="1371600"/>
+            <a:off x="6490716" y="1676400"/>
             <a:ext cx="2983992" cy="457200"/>
           </a:xfrm>
           <a:prstGeom prst="chevron">
@@ -14568,8 +14590,8 @@
         </p:nvSpPr>
         <p:spPr>
           <a:xfrm>
-            <a:off x="6534912" y="1920240"/>
-            <a:ext cx="2801112" cy="1325880"/>
+            <a:off x="6536436" y="2225040"/>
+            <a:ext cx="2801112" cy="979714"/>
           </a:xfrm>
           <a:prstGeom prst="roundRect">
             <a:avLst>
@@ -14657,8 +14679,8 @@
         </p:nvSpPr>
         <p:spPr>
           <a:xfrm>
-            <a:off x="429768" y="3429000"/>
-            <a:ext cx="5532120" cy="2011680"/>
+            <a:off x="431292" y="3429000"/>
+            <a:ext cx="5532120" cy="1264920"/>
           </a:xfrm>
           <a:prstGeom prst="roundRect">
             <a:avLst>
@@ -14784,8 +14806,8 @@
         </p:nvSpPr>
         <p:spPr>
           <a:xfrm>
-            <a:off x="6099048" y="3429000"/>
-            <a:ext cx="3374136" cy="2011680"/>
+            <a:off x="6100572" y="3429000"/>
+            <a:ext cx="3374136" cy="1264920"/>
           </a:xfrm>
           <a:prstGeom prst="roundRect">
             <a:avLst>
@@ -15801,7 +15823,7 @@
         </p:nvSpPr>
         <p:spPr>
           <a:xfrm>
-            <a:off x="429768" y="5596128"/>
+            <a:off x="431292" y="5421708"/>
             <a:ext cx="9043416" cy="374904"/>
           </a:xfrm>
           <a:prstGeom prst="rect">
@@ -15887,7 +15909,7 @@
         </p:nvSpPr>
         <p:spPr>
           <a:xfrm>
-            <a:off x="429768" y="5596128"/>
+            <a:off x="431292" y="5421708"/>
             <a:ext cx="9043416" cy="374904"/>
           </a:xfrm>
           <a:prstGeom prst="rect">
@@ -15929,8 +15951,8 @@
         </p:nvSpPr>
         <p:spPr>
           <a:xfrm>
-            <a:off x="429768" y="1371600"/>
-            <a:ext cx="5120640" cy="4069080"/>
+            <a:off x="431508" y="1485216"/>
+            <a:ext cx="5120640" cy="3696789"/>
           </a:xfrm>
           <a:prstGeom prst="roundRect">
             <a:avLst>
@@ -15967,7 +15989,7 @@
         </p:nvSpPr>
         <p:spPr>
           <a:xfrm>
-            <a:off x="566928" y="1481328"/>
+            <a:off x="568668" y="1594944"/>
             <a:ext cx="3017520" cy="292608"/>
           </a:xfrm>
           <a:prstGeom prst="roundRect">
@@ -16013,7 +16035,7 @@
         </p:nvSpPr>
         <p:spPr>
           <a:xfrm>
-            <a:off x="539496" y="1920240"/>
+            <a:off x="541236" y="2033856"/>
             <a:ext cx="4901184" cy="3429000"/>
           </a:xfrm>
           <a:prstGeom prst="rect">
@@ -16226,10 +16248,16 @@
           <p:cNvGraphicFramePr>
             <a:graphicFrameLocks noGrp="1"/>
           </p:cNvGraphicFramePr>
-          <p:nvPr/>
+          <p:nvPr>
+            <p:extLst>
+              <p:ext uri="{D42A27DB-BD31-4B8C-83A1-F6EECF244321}">
+                <p14:modId xmlns:p14="http://schemas.microsoft.com/office/powerpoint/2010/main" val="1651680487"/>
+              </p:ext>
+            </p:extLst>
+          </p:nvPr>
         </p:nvGraphicFramePr>
         <p:xfrm>
-          <a:off x="5715000" y="1371600"/>
+          <a:off x="5716740" y="1485216"/>
           <a:ext cx="3758184" cy="2414016"/>
         </p:xfrm>
         <a:graphic>
@@ -17084,8 +17112,8 @@
         </p:nvSpPr>
         <p:spPr>
           <a:xfrm>
-            <a:off x="5715000" y="3886200"/>
-            <a:ext cx="3758184" cy="1554480"/>
+            <a:off x="5716740" y="3999816"/>
+            <a:ext cx="3758184" cy="1182189"/>
           </a:xfrm>
           <a:prstGeom prst="roundRect">
             <a:avLst>
@@ -17298,7 +17326,7 @@
         </p:nvSpPr>
         <p:spPr>
           <a:xfrm>
-            <a:off x="429768" y="5596128"/>
+            <a:off x="429768" y="5330952"/>
             <a:ext cx="9043416" cy="374904"/>
           </a:xfrm>
           <a:prstGeom prst="rect">
@@ -17384,7 +17412,7 @@
         </p:nvSpPr>
         <p:spPr>
           <a:xfrm>
-            <a:off x="429768" y="5596128"/>
+            <a:off x="429768" y="5330952"/>
             <a:ext cx="9043416" cy="374904"/>
           </a:xfrm>
           <a:prstGeom prst="rect">
@@ -17427,7 +17455,7 @@
         <p:spPr>
           <a:xfrm>
             <a:off x="429768" y="1371600"/>
-            <a:ext cx="4160520" cy="1234440"/>
+            <a:ext cx="4160520" cy="960120"/>
           </a:xfrm>
           <a:prstGeom prst="roundRect">
             <a:avLst>
@@ -17497,7 +17525,7 @@
         <p:spPr>
           <a:xfrm>
             <a:off x="429768" y="2743200"/>
-            <a:ext cx="4160520" cy="1234440"/>
+            <a:ext cx="4160520" cy="960120"/>
           </a:xfrm>
           <a:prstGeom prst="roundRect">
             <a:avLst>
@@ -17567,7 +17595,7 @@
         <p:spPr>
           <a:xfrm>
             <a:off x="429768" y="4114800"/>
-            <a:ext cx="4160520" cy="1234440"/>
+            <a:ext cx="4160520" cy="960120"/>
           </a:xfrm>
           <a:prstGeom prst="roundRect">
             <a:avLst>
@@ -17636,8 +17664,8 @@
         </p:nvSpPr>
         <p:spPr>
           <a:xfrm>
-            <a:off x="4773168" y="1371600"/>
-            <a:ext cx="4700016" cy="3977639"/>
+            <a:off x="4773168" y="1391688"/>
+            <a:ext cx="4700016" cy="3683233"/>
           </a:xfrm>
           <a:prstGeom prst="roundRect">
             <a:avLst>
@@ -18035,48 +18063,6 @@
               <a:t>副業 確定申告 20万円以下／ダブルワーク 扶養内 いくらまで</a:t>
             </a:r>
             <a:endParaRPr lang="ja-JP" altLang="en-US" sz="1100" dirty="0"/>
-          </a:p>
-        </p:txBody>
-      </p:sp>
-      <p:sp>
-        <p:nvSpPr>
-          <p:cNvPr id="33" name="Rectangle 32"/>
-          <p:cNvSpPr/>
-          <p:nvPr/>
-        </p:nvSpPr>
-        <p:spPr>
-          <a:xfrm>
-            <a:off x="4910328" y="4937760"/>
-            <a:ext cx="4425696" cy="365760"/>
-          </a:xfrm>
-          <a:prstGeom prst="rect">
-            <a:avLst/>
-          </a:prstGeom>
-          <a:noFill/>
-          <a:ln>
-            <a:noFill/>
-          </a:ln>
-        </p:spPr>
-        <p:txBody>
-          <a:bodyPr wrap="square" lIns="0" tIns="0" rIns="0" bIns="0" rtlCol="0" anchor="ctr">
-            <a:noAutofit/>
-          </a:bodyPr>
-          <a:lstStyle/>
-          <a:p>
-            <a:pPr algn="l">
-              <a:buNone/>
-            </a:pPr>
-            <a:r>
-              <a:rPr lang="ja-JP" altLang="en-US" sz="950" b="0" dirty="0">
-                <a:solidFill>
-                  <a:srgbClr val="595959"/>
-                </a:solidFill>
-                <a:latin typeface="メイリオ" panose="020B0604030504040204" pitchFamily="50" charset="-128"/>
-                <a:ea typeface="メイリオ" panose="020B0604030504040204" pitchFamily="50" charset="-128"/>
-              </a:rPr>
-              <a:t>★ 検索行動のデータです。応募者ご本人の行動と同一ではありません。</a:t>
-            </a:r>
-            <a:endParaRPr lang="ja-JP" altLang="en-US" sz="950" dirty="0"/>
           </a:p>
         </p:txBody>
       </p:sp>
@@ -18213,7 +18199,7 @@
         </p:nvSpPr>
         <p:spPr>
           <a:xfrm>
-            <a:off x="429768" y="5596128"/>
+            <a:off x="431292" y="4931227"/>
             <a:ext cx="9043416" cy="374904"/>
           </a:xfrm>
           <a:prstGeom prst="rect">
@@ -18299,7 +18285,7 @@
         </p:nvSpPr>
         <p:spPr>
           <a:xfrm>
-            <a:off x="429768" y="5596128"/>
+            <a:off x="431292" y="4931227"/>
             <a:ext cx="9043416" cy="374904"/>
           </a:xfrm>
           <a:prstGeom prst="rect">
@@ -18341,7 +18327,7 @@
         </p:nvSpPr>
         <p:spPr>
           <a:xfrm>
-            <a:off x="429768" y="1371600"/>
+            <a:off x="429768" y="1653758"/>
             <a:ext cx="2880360" cy="310896"/>
           </a:xfrm>
           <a:prstGeom prst="roundRect">
@@ -18387,8 +18373,8 @@
         </p:nvSpPr>
         <p:spPr>
           <a:xfrm>
-            <a:off x="429768" y="1783080"/>
-            <a:ext cx="2880360" cy="1051560"/>
+            <a:off x="429768" y="2065238"/>
+            <a:ext cx="2880360" cy="759823"/>
           </a:xfrm>
           <a:prstGeom prst="roundRect">
             <a:avLst>
@@ -18500,7 +18486,7 @@
         <p:spPr>
           <a:xfrm>
             <a:off x="429768" y="3154680"/>
-            <a:ext cx="2880360" cy="1051560"/>
+            <a:ext cx="2880360" cy="658368"/>
           </a:xfrm>
           <a:prstGeom prst="roundRect">
             <a:avLst>
@@ -18569,7 +18555,7 @@
         </p:nvSpPr>
         <p:spPr>
           <a:xfrm>
-            <a:off x="3511296" y="1371600"/>
+            <a:off x="3511296" y="1653758"/>
             <a:ext cx="2880360" cy="310896"/>
           </a:xfrm>
           <a:prstGeom prst="roundRect">
@@ -18615,8 +18601,8 @@
         </p:nvSpPr>
         <p:spPr>
           <a:xfrm>
-            <a:off x="3511296" y="1783080"/>
-            <a:ext cx="2880360" cy="1051560"/>
+            <a:off x="3511296" y="2065238"/>
+            <a:ext cx="2880360" cy="759823"/>
           </a:xfrm>
           <a:prstGeom prst="roundRect">
             <a:avLst>
@@ -18727,8 +18713,8 @@
         </p:nvSpPr>
         <p:spPr>
           <a:xfrm>
-            <a:off x="3511296" y="3154680"/>
-            <a:ext cx="2880360" cy="1051560"/>
+            <a:off x="3511296" y="3154681"/>
+            <a:ext cx="2880360" cy="658368"/>
           </a:xfrm>
           <a:prstGeom prst="roundRect">
             <a:avLst>
@@ -18797,7 +18783,7 @@
         </p:nvSpPr>
         <p:spPr>
           <a:xfrm>
-            <a:off x="6592824" y="1371600"/>
+            <a:off x="6592824" y="1653758"/>
             <a:ext cx="2880360" cy="310896"/>
           </a:xfrm>
           <a:prstGeom prst="roundRect">
@@ -18843,8 +18829,8 @@
         </p:nvSpPr>
         <p:spPr>
           <a:xfrm>
-            <a:off x="6592824" y="1783080"/>
-            <a:ext cx="2880360" cy="1051560"/>
+            <a:off x="6592824" y="2065238"/>
+            <a:ext cx="2880360" cy="759823"/>
           </a:xfrm>
           <a:prstGeom prst="roundRect">
             <a:avLst>
@@ -18956,7 +18942,7 @@
         <p:spPr>
           <a:xfrm>
             <a:off x="6592824" y="3154680"/>
-            <a:ext cx="2880360" cy="1051560"/>
+            <a:ext cx="2880360" cy="658368"/>
           </a:xfrm>
           <a:prstGeom prst="roundRect">
             <a:avLst>
@@ -19025,8 +19011,8 @@
         </p:nvSpPr>
         <p:spPr>
           <a:xfrm>
-            <a:off x="429768" y="4389120"/>
-            <a:ext cx="4421124" cy="1024128"/>
+            <a:off x="429768" y="4042954"/>
+            <a:ext cx="4421124" cy="658368"/>
           </a:xfrm>
           <a:prstGeom prst="roundRect">
             <a:avLst>
@@ -19063,7 +19049,7 @@
         </p:nvSpPr>
         <p:spPr>
           <a:xfrm>
-            <a:off x="566928" y="4434840"/>
+            <a:off x="566928" y="3931920"/>
             <a:ext cx="2431618" cy="932688"/>
           </a:xfrm>
           <a:prstGeom prst="rect">
@@ -19127,7 +19113,7 @@
         </p:nvSpPr>
         <p:spPr>
           <a:xfrm>
-            <a:off x="2861386" y="4434840"/>
+            <a:off x="2861386" y="3931920"/>
             <a:ext cx="1852345" cy="932688"/>
           </a:xfrm>
           <a:prstGeom prst="rect">
@@ -19169,8 +19155,8 @@
         </p:nvSpPr>
         <p:spPr>
           <a:xfrm>
-            <a:off x="5052059" y="4389120"/>
-            <a:ext cx="4421124" cy="1024128"/>
+            <a:off x="5052059" y="4042954"/>
+            <a:ext cx="4421124" cy="658368"/>
           </a:xfrm>
           <a:prstGeom prst="roundRect">
             <a:avLst>
@@ -19207,7 +19193,7 @@
         </p:nvSpPr>
         <p:spPr>
           <a:xfrm>
-            <a:off x="5189220" y="4434840"/>
+            <a:off x="5189220" y="3931920"/>
             <a:ext cx="2431618" cy="932688"/>
           </a:xfrm>
           <a:prstGeom prst="rect">
@@ -19271,7 +19257,7 @@
         </p:nvSpPr>
         <p:spPr>
           <a:xfrm>
-            <a:off x="7483678" y="4434840"/>
+            <a:off x="7483678" y="3931920"/>
             <a:ext cx="1852345" cy="932688"/>
           </a:xfrm>
           <a:prstGeom prst="rect">

--- a/202610_株式会社横浜シミズ御中_LINE公式アカウント運用のご提案.pptx
+++ b/202610_株式会社横浜シミズ御中_LINE公式アカウント運用のご提案.pptx
@@ -19,7 +19,7 @@
     <p:sldId id="2367" r:id="rId7"/>
     <p:sldId id="2368" r:id="rId8"/>
     <p:sldId id="2369" r:id="rId9"/>
-    <p:sldId id="2370" r:id="rId10"/>
+    <p:sldId id="257" r:id="rId10"/>
     <p:sldId id="2371" r:id="rId11"/>
     <p:sldId id="2372" r:id="rId12"/>
     <p:sldId id="2373" r:id="rId13"/>
@@ -7004,8 +7004,8 @@
         </p:nvSpPr>
         <p:spPr>
           <a:xfrm>
-            <a:off x="6684264" y="1920240"/>
-            <a:ext cx="1303020" cy="914400"/>
+            <a:off x="6647688" y="2240280"/>
+            <a:ext cx="893064" cy="914400"/>
           </a:xfrm>
           <a:prstGeom prst="rect">
             <a:avLst/>
@@ -7018,7 +7018,7 @@
           </a:ln>
         </p:spPr>
         <p:txBody>
-          <a:bodyPr wrap="square" lIns="36576" tIns="18288" rIns="36576" bIns="18288" rtlCol="0" anchor="ctr">
+          <a:bodyPr wrap="square" lIns="18288" tIns="18288" rIns="18288" bIns="18288" rtlCol="0" anchor="ctr">
             <a:noAutofit/>
           </a:bodyPr>
           <a:lstStyle/>
@@ -7056,7 +7056,26 @@
                 <a:latin typeface="メイリオ" panose="020B0604030504040204" pitchFamily="50" charset="-128"/>
                 <a:ea typeface="メイリオ" panose="020B0604030504040204" pitchFamily="50" charset="-128"/>
               </a:rPr>
-              <a:t>募集中のイベント</a:t>
+              <a:t>募集中の</a:t>
+            </a:r>
+            <a:br>
+              <a:rPr lang="ja-JP" altLang="en-US" sz="950" b="0" dirty="0">
+                <a:solidFill>
+                  <a:srgbClr val="FFFFFF"/>
+                </a:solidFill>
+                <a:latin typeface="メイリオ" panose="020B0604030504040204" pitchFamily="50" charset="-128"/>
+                <a:ea typeface="メイリオ" panose="020B0604030504040204" pitchFamily="50" charset="-128"/>
+              </a:rPr>
+            </a:br>
+            <a:r>
+              <a:rPr lang="ja-JP" altLang="en-US" sz="950" b="0" dirty="0">
+                <a:solidFill>
+                  <a:srgbClr val="FFFFFF"/>
+                </a:solidFill>
+                <a:latin typeface="メイリオ" panose="020B0604030504040204" pitchFamily="50" charset="-128"/>
+                <a:ea typeface="メイリオ" panose="020B0604030504040204" pitchFamily="50" charset="-128"/>
+              </a:rPr>
+              <a:t>イベント</a:t>
             </a:r>
             <a:endParaRPr lang="ja-JP" altLang="en-US" sz="1100" dirty="0"/>
           </a:p>
@@ -7070,8 +7089,8 @@
         </p:nvSpPr>
         <p:spPr>
           <a:xfrm>
-            <a:off x="8078724" y="1920240"/>
-            <a:ext cx="1303020" cy="914400"/>
+            <a:off x="7586472" y="2240280"/>
+            <a:ext cx="893064" cy="914400"/>
           </a:xfrm>
           <a:prstGeom prst="rect">
             <a:avLst/>
@@ -7086,7 +7105,7 @@
           </a:ln>
         </p:spPr>
         <p:txBody>
-          <a:bodyPr wrap="square" lIns="36576" tIns="18288" rIns="36576" bIns="18288" rtlCol="0" anchor="ctr">
+          <a:bodyPr wrap="square" lIns="18288" tIns="18288" rIns="18288" bIns="18288" rtlCol="0" anchor="ctr">
             <a:noAutofit/>
           </a:bodyPr>
           <a:lstStyle/>
@@ -7138,8 +7157,8 @@
         </p:nvSpPr>
         <p:spPr>
           <a:xfrm>
-            <a:off x="6684264" y="2926080"/>
-            <a:ext cx="1303020" cy="914400"/>
+            <a:off x="8525256" y="2240280"/>
+            <a:ext cx="893064" cy="914400"/>
           </a:xfrm>
           <a:prstGeom prst="rect">
             <a:avLst/>
@@ -7154,7 +7173,7 @@
           </a:ln>
         </p:spPr>
         <p:txBody>
-          <a:bodyPr wrap="square" lIns="36576" tIns="18288" rIns="36576" bIns="18288" rtlCol="0" anchor="ctr">
+          <a:bodyPr wrap="square" lIns="18288" tIns="18288" rIns="18288" bIns="18288" rtlCol="0" anchor="ctr">
             <a:noAutofit/>
           </a:bodyPr>
           <a:lstStyle/>
@@ -7173,7 +7192,26 @@
                 <a:latin typeface="メイリオ" panose="020B0604030504040204" pitchFamily="50" charset="-128"/>
                 <a:ea typeface="メイリオ" panose="020B0604030504040204" pitchFamily="50" charset="-128"/>
               </a:rPr>
-              <a:t>希望条件を変える</a:t>
+              <a:t>希望条件を</a:t>
+            </a:r>
+            <a:br>
+              <a:rPr lang="ja-JP" altLang="en-US" sz="1150" b="1" dirty="0">
+                <a:solidFill>
+                  <a:srgbClr val="323366"/>
+                </a:solidFill>
+                <a:latin typeface="メイリオ" panose="020B0604030504040204" pitchFamily="50" charset="-128"/>
+                <a:ea typeface="メイリオ" panose="020B0604030504040204" pitchFamily="50" charset="-128"/>
+              </a:rPr>
+            </a:br>
+            <a:r>
+              <a:rPr lang="ja-JP" altLang="en-US" sz="1150" b="1" dirty="0">
+                <a:solidFill>
+                  <a:srgbClr val="323366"/>
+                </a:solidFill>
+                <a:latin typeface="メイリオ" panose="020B0604030504040204" pitchFamily="50" charset="-128"/>
+                <a:ea typeface="メイリオ" panose="020B0604030504040204" pitchFamily="50" charset="-128"/>
+              </a:rPr>
+              <a:t>変える</a:t>
             </a:r>
             <a:endParaRPr lang="ja-JP" altLang="en-US" sz="1100" dirty="0"/>
           </a:p>
@@ -7206,8 +7244,8 @@
         </p:nvSpPr>
         <p:spPr>
           <a:xfrm>
-            <a:off x="8078724" y="2926080"/>
-            <a:ext cx="1303020" cy="914400"/>
+            <a:off x="6647688" y="3200400"/>
+            <a:ext cx="893064" cy="914400"/>
           </a:xfrm>
           <a:prstGeom prst="rect">
             <a:avLst/>
@@ -7222,7 +7260,7 @@
           </a:ln>
         </p:spPr>
         <p:txBody>
-          <a:bodyPr wrap="square" lIns="36576" tIns="18288" rIns="36576" bIns="18288" rtlCol="0" anchor="ctr">
+          <a:bodyPr wrap="square" lIns="18288" tIns="18288" rIns="18288" bIns="18288" rtlCol="0" anchor="ctr">
             <a:noAutofit/>
           </a:bodyPr>
           <a:lstStyle/>
@@ -7241,7 +7279,26 @@
                 <a:latin typeface="メイリオ" panose="020B0604030504040204" pitchFamily="50" charset="-128"/>
                 <a:ea typeface="メイリオ" panose="020B0604030504040204" pitchFamily="50" charset="-128"/>
               </a:rPr>
-              <a:t>よくある質問</a:t>
+              <a:t>よくある</a:t>
+            </a:r>
+            <a:br>
+              <a:rPr lang="ja-JP" altLang="en-US" sz="1150" b="1" dirty="0">
+                <a:solidFill>
+                  <a:srgbClr val="323366"/>
+                </a:solidFill>
+                <a:latin typeface="メイリオ" panose="020B0604030504040204" pitchFamily="50" charset="-128"/>
+                <a:ea typeface="メイリオ" panose="020B0604030504040204" pitchFamily="50" charset="-128"/>
+              </a:rPr>
+            </a:br>
+            <a:r>
+              <a:rPr lang="ja-JP" altLang="en-US" sz="1150" b="1" dirty="0">
+                <a:solidFill>
+                  <a:srgbClr val="323366"/>
+                </a:solidFill>
+                <a:latin typeface="メイリオ" panose="020B0604030504040204" pitchFamily="50" charset="-128"/>
+                <a:ea typeface="メイリオ" panose="020B0604030504040204" pitchFamily="50" charset="-128"/>
+              </a:rPr>
+              <a:t>質問</a:t>
             </a:r>
             <a:endParaRPr lang="ja-JP" altLang="en-US" sz="1100" dirty="0"/>
           </a:p>
@@ -7274,8 +7331,8 @@
         </p:nvSpPr>
         <p:spPr>
           <a:xfrm>
-            <a:off x="6684264" y="3931920"/>
-            <a:ext cx="1303020" cy="914400"/>
+            <a:off x="7586472" y="3200400"/>
+            <a:ext cx="893064" cy="914400"/>
           </a:xfrm>
           <a:prstGeom prst="rect">
             <a:avLst/>
@@ -7290,7 +7347,7 @@
           </a:ln>
         </p:spPr>
         <p:txBody>
-          <a:bodyPr wrap="square" lIns="36576" tIns="18288" rIns="36576" bIns="18288" rtlCol="0" anchor="ctr">
+          <a:bodyPr wrap="square" lIns="18288" tIns="18288" rIns="18288" bIns="18288" rtlCol="0" anchor="ctr">
             <a:noAutofit/>
           </a:bodyPr>
           <a:lstStyle/>
@@ -7309,7 +7366,26 @@
                 <a:latin typeface="メイリオ" panose="020B0604030504040204" pitchFamily="50" charset="-128"/>
                 <a:ea typeface="メイリオ" panose="020B0604030504040204" pitchFamily="50" charset="-128"/>
               </a:rPr>
-              <a:t>お問い合わせ</a:t>
+              <a:t>お問い</a:t>
+            </a:r>
+            <a:br>
+              <a:rPr lang="ja-JP" altLang="en-US" sz="1150" b="1" dirty="0">
+                <a:solidFill>
+                  <a:srgbClr val="323366"/>
+                </a:solidFill>
+                <a:latin typeface="メイリオ" panose="020B0604030504040204" pitchFamily="50" charset="-128"/>
+                <a:ea typeface="メイリオ" panose="020B0604030504040204" pitchFamily="50" charset="-128"/>
+              </a:rPr>
+            </a:br>
+            <a:r>
+              <a:rPr lang="ja-JP" altLang="en-US" sz="1150" b="1" dirty="0">
+                <a:solidFill>
+                  <a:srgbClr val="323366"/>
+                </a:solidFill>
+                <a:latin typeface="メイリオ" panose="020B0604030504040204" pitchFamily="50" charset="-128"/>
+                <a:ea typeface="メイリオ" panose="020B0604030504040204" pitchFamily="50" charset="-128"/>
+              </a:rPr>
+              <a:t>合わせ</a:t>
             </a:r>
             <a:endParaRPr lang="ja-JP" altLang="en-US" sz="1100" dirty="0"/>
           </a:p>
@@ -7342,8 +7418,8 @@
         </p:nvSpPr>
         <p:spPr>
           <a:xfrm>
-            <a:off x="8078724" y="3931920"/>
-            <a:ext cx="1303020" cy="914400"/>
+            <a:off x="8525256" y="3200400"/>
+            <a:ext cx="893064" cy="914400"/>
           </a:xfrm>
           <a:prstGeom prst="rect">
             <a:avLst/>
@@ -7358,7 +7434,7 @@
           </a:ln>
         </p:spPr>
         <p:txBody>
-          <a:bodyPr wrap="square" lIns="36576" tIns="18288" rIns="36576" bIns="18288" rtlCol="0" anchor="ctr">
+          <a:bodyPr wrap="square" lIns="18288" tIns="18288" rIns="18288" bIns="18288" rtlCol="0" anchor="ctr">
             <a:noAutofit/>
           </a:bodyPr>
           <a:lstStyle/>
@@ -7377,7 +7453,26 @@
                 <a:latin typeface="メイリオ" panose="020B0604030504040204" pitchFamily="50" charset="-128"/>
                 <a:ea typeface="メイリオ" panose="020B0604030504040204" pitchFamily="50" charset="-128"/>
               </a:rPr>
-              <a:t>横浜シミズとは</a:t>
+              <a:t>横浜シミズ</a:t>
+            </a:r>
+            <a:br>
+              <a:rPr lang="ja-JP" altLang="en-US" sz="1150" b="1" dirty="0">
+                <a:solidFill>
+                  <a:srgbClr val="323366"/>
+                </a:solidFill>
+                <a:latin typeface="メイリオ" panose="020B0604030504040204" pitchFamily="50" charset="-128"/>
+                <a:ea typeface="メイリオ" panose="020B0604030504040204" pitchFamily="50" charset="-128"/>
+              </a:rPr>
+            </a:br>
+            <a:r>
+              <a:rPr lang="ja-JP" altLang="en-US" sz="1150" b="1" dirty="0">
+                <a:solidFill>
+                  <a:srgbClr val="323366"/>
+                </a:solidFill>
+                <a:latin typeface="メイリオ" panose="020B0604030504040204" pitchFamily="50" charset="-128"/>
+                <a:ea typeface="メイリオ" panose="020B0604030504040204" pitchFamily="50" charset="-128"/>
+              </a:rPr>
+              <a:t>とは</a:t>
             </a:r>
             <a:endParaRPr lang="ja-JP" altLang="en-US" sz="1100" dirty="0"/>
           </a:p>
@@ -7396,7 +7491,26 @@
                 <a:latin typeface="メイリオ" panose="020B0604030504040204" pitchFamily="50" charset="-128"/>
                 <a:ea typeface="メイリオ" panose="020B0604030504040204" pitchFamily="50" charset="-128"/>
               </a:rPr>
-              <a:t>会社・現場の紹介</a:t>
+              <a:t>会社・現場</a:t>
+            </a:r>
+            <a:br>
+              <a:rPr lang="ja-JP" altLang="en-US" sz="950" b="0" dirty="0">
+                <a:solidFill>
+                  <a:srgbClr val="323366"/>
+                </a:solidFill>
+                <a:latin typeface="メイリオ" panose="020B0604030504040204" pitchFamily="50" charset="-128"/>
+                <a:ea typeface="メイリオ" panose="020B0604030504040204" pitchFamily="50" charset="-128"/>
+              </a:rPr>
+            </a:br>
+            <a:r>
+              <a:rPr lang="ja-JP" altLang="en-US" sz="950" b="0" dirty="0">
+                <a:solidFill>
+                  <a:srgbClr val="323366"/>
+                </a:solidFill>
+                <a:latin typeface="メイリオ" panose="020B0604030504040204" pitchFamily="50" charset="-128"/>
+                <a:ea typeface="メイリオ" panose="020B0604030504040204" pitchFamily="50" charset="-128"/>
+              </a:rPr>
+              <a:t>の紹介</a:t>
             </a:r>
             <a:endParaRPr lang="ja-JP" altLang="en-US" sz="1100" dirty="0"/>
           </a:p>
@@ -12210,7 +12324,7 @@
           <p:nvPr>
             <p:extLst>
               <p:ext uri="{D42A27DB-BD31-4B8C-83A1-F6EECF244321}">
-                <p14:modId xmlns:p14="http://schemas.microsoft.com/office/powerpoint/2010/main" val="1717859464"/>
+                <p14:modId xmlns:p14="http://schemas.microsoft.com/office/powerpoint/2010/main" val="950625100"/>
               </p:ext>
             </p:extLst>
           </p:nvPr>
@@ -15764,7 +15878,7 @@
         </p:nvSpPr>
         <p:spPr>
           <a:xfrm>
-            <a:off x="309600" y="687600"/>
+            <a:off x="430860" y="862696"/>
             <a:ext cx="9331200" cy="585216"/>
           </a:xfrm>
           <a:prstGeom prst="rect">
@@ -15784,7 +15898,7 @@
               </a:lnSpc>
             </a:pPr>
             <a:r>
-              <a:rPr sz="1400" b="1">
+              <a:rPr sz="1400" b="1" dirty="0" err="1">
                 <a:solidFill>
                   <a:srgbClr val="1E2761"/>
                 </a:solidFill>
@@ -15792,7 +15906,18 @@
                 <a:ea typeface="メイリオ"/>
                 <a:cs typeface="メイリオ"/>
               </a:rPr>
-              <a:t>登録制のアルバイトスタッフとともに、神奈川・静岡全域のイベント会場の運営・警備・設営を担う会社です。</a:t>
+              <a:t>登録制のアルバイトスタッフとともに、神奈川・静岡全域のイベント会場の運営・警備・設営を担う会社です</a:t>
+            </a:r>
+            <a:r>
+              <a:rPr sz="1400" b="1" dirty="0">
+                <a:solidFill>
+                  <a:srgbClr val="1E2761"/>
+                </a:solidFill>
+                <a:latin typeface="メイリオ"/>
+                <a:ea typeface="メイリオ"/>
+                <a:cs typeface="メイリオ"/>
+              </a:rPr>
+              <a:t>。</a:t>
             </a:r>
           </a:p>
           <a:p>
@@ -15802,7 +15927,7 @@
               </a:lnSpc>
             </a:pPr>
             <a:r>
-              <a:rPr sz="1400" b="1">
+              <a:rPr sz="1400" b="1" dirty="0" err="1">
                 <a:solidFill>
                   <a:srgbClr val="FF0000"/>
                 </a:solidFill>
@@ -15810,7 +15935,18 @@
                 <a:ea typeface="メイリオ"/>
                 <a:cs typeface="メイリオ"/>
               </a:rPr>
-              <a:t>イベントごとに人を集める事業だからこそ、勤務後の接点が次の人員確保につながると考えます。</a:t>
+              <a:t>イベントごとに人を集める事業だからこそ、勤務後の接点が次の人員確保につながると考えます</a:t>
+            </a:r>
+            <a:r>
+              <a:rPr sz="1400" b="1" dirty="0">
+                <a:solidFill>
+                  <a:srgbClr val="FF0000"/>
+                </a:solidFill>
+                <a:latin typeface="メイリオ"/>
+                <a:ea typeface="メイリオ"/>
+                <a:cs typeface="メイリオ"/>
+              </a:rPr>
+              <a:t>。</a:t>
             </a:r>
           </a:p>
         </p:txBody>
@@ -15823,8 +15959,8 @@
         </p:nvSpPr>
         <p:spPr>
           <a:xfrm>
-            <a:off x="431292" y="5421708"/>
-            <a:ext cx="9043416" cy="374904"/>
+            <a:off x="430860" y="4826699"/>
+            <a:ext cx="8773451" cy="374904"/>
           </a:xfrm>
           <a:prstGeom prst="rect">
             <a:avLst/>
@@ -15909,7 +16045,7 @@
         </p:nvSpPr>
         <p:spPr>
           <a:xfrm>
-            <a:off x="431292" y="5421708"/>
+            <a:off x="430860" y="4826699"/>
             <a:ext cx="9043416" cy="374904"/>
           </a:xfrm>
           <a:prstGeom prst="rect">
@@ -15951,8 +16087,8 @@
         </p:nvSpPr>
         <p:spPr>
           <a:xfrm>
-            <a:off x="431508" y="1485216"/>
-            <a:ext cx="5120640" cy="3696789"/>
+            <a:off x="431292" y="1650519"/>
+            <a:ext cx="4636881" cy="2973573"/>
           </a:xfrm>
           <a:prstGeom prst="roundRect">
             <a:avLst>
@@ -15989,7 +16125,7 @@
         </p:nvSpPr>
         <p:spPr>
           <a:xfrm>
-            <a:off x="568668" y="1594944"/>
+            <a:off x="568452" y="1760247"/>
             <a:ext cx="3017520" cy="292608"/>
           </a:xfrm>
           <a:prstGeom prst="roundRect">
@@ -16035,8 +16171,8 @@
         </p:nvSpPr>
         <p:spPr>
           <a:xfrm>
-            <a:off x="541236" y="2033856"/>
-            <a:ext cx="4901184" cy="3429000"/>
+            <a:off x="541236" y="2157997"/>
+            <a:ext cx="4526937" cy="2329138"/>
           </a:xfrm>
           <a:prstGeom prst="rect">
             <a:avLst/>
@@ -16242,868 +16378,6 @@
           </a:p>
         </p:txBody>
       </p:sp>
-      <p:graphicFrame>
-        <p:nvGraphicFramePr>
-          <p:cNvPr id="25" name="表 24"/>
-          <p:cNvGraphicFramePr>
-            <a:graphicFrameLocks noGrp="1"/>
-          </p:cNvGraphicFramePr>
-          <p:nvPr>
-            <p:extLst>
-              <p:ext uri="{D42A27DB-BD31-4B8C-83A1-F6EECF244321}">
-                <p14:modId xmlns:p14="http://schemas.microsoft.com/office/powerpoint/2010/main" val="1651680487"/>
-              </p:ext>
-            </p:extLst>
-          </p:nvPr>
-        </p:nvGraphicFramePr>
-        <p:xfrm>
-          <a:off x="5716740" y="1485216"/>
-          <a:ext cx="3758184" cy="2414016"/>
-        </p:xfrm>
-        <a:graphic>
-          <a:graphicData uri="http://schemas.openxmlformats.org/drawingml/2006/table">
-            <a:tbl>
-              <a:tblPr/>
-              <a:tblGrid>
-                <a:gridCol w="1600200">
-                  <a:extLst>
-                    <a:ext uri="{9D8B030D-6E8A-4147-A177-3AD203B41FA5}">
-                      <a16:colId xmlns:a16="http://schemas.microsoft.com/office/drawing/2014/main" val="20000"/>
-                    </a:ext>
-                  </a:extLst>
-                </a:gridCol>
-                <a:gridCol w="2157984">
-                  <a:extLst>
-                    <a:ext uri="{9D8B030D-6E8A-4147-A177-3AD203B41FA5}">
-                      <a16:colId xmlns:a16="http://schemas.microsoft.com/office/drawing/2014/main" val="20001"/>
-                    </a:ext>
-                  </a:extLst>
-                </a:gridCol>
-              </a:tblGrid>
-              <a:tr h="310896">
-                <a:tc gridSpan="2">
-                  <a:txBody>
-                    <a:bodyPr/>
-                    <a:lstStyle/>
-                    <a:p>
-                      <a:pPr algn="l">
-                        <a:buNone/>
-                      </a:pPr>
-                      <a:r>
-                        <a:rPr lang="ja-JP" altLang="en-US" sz="1050" b="1" dirty="0">
-                          <a:solidFill>
-                            <a:srgbClr val="FFFFFF"/>
-                          </a:solidFill>
-                          <a:latin typeface="メイリオ" panose="020B0604030504040204" pitchFamily="50" charset="-128"/>
-                          <a:ea typeface="メイリオ" panose="020B0604030504040204" pitchFamily="50" charset="-128"/>
-                        </a:rPr>
-                        <a:t>いただいている情報・確認したいこと</a:t>
-                      </a:r>
-                      <a:endParaRPr lang="ja-JP" altLang="en-US" sz="1050" dirty="0"/>
-                    </a:p>
-                  </a:txBody>
-                  <a:tcPr marL="73152" marR="73152" marT="27432" marB="27432" anchor="ctr">
-                    <a:lnL w="9525" cap="flat" cmpd="sng" algn="ctr">
-                      <a:solidFill>
-                        <a:srgbClr val="BFC8DC"/>
-                      </a:solidFill>
-                      <a:prstDash val="solid"/>
-                      <a:round/>
-                      <a:headEnd type="none" w="med" len="med"/>
-                      <a:tailEnd type="none" w="med" len="med"/>
-                    </a:lnL>
-                    <a:lnR w="9525" cap="flat" cmpd="sng" algn="ctr">
-                      <a:solidFill>
-                        <a:srgbClr val="BFC8DC"/>
-                      </a:solidFill>
-                      <a:prstDash val="solid"/>
-                      <a:round/>
-                      <a:headEnd type="none" w="med" len="med"/>
-                      <a:tailEnd type="none" w="med" len="med"/>
-                    </a:lnR>
-                    <a:lnT w="9525" cap="flat" cmpd="sng" algn="ctr">
-                      <a:solidFill>
-                        <a:srgbClr val="BFC8DC"/>
-                      </a:solidFill>
-                      <a:prstDash val="solid"/>
-                      <a:round/>
-                      <a:headEnd type="none" w="med" len="med"/>
-                      <a:tailEnd type="none" w="med" len="med"/>
-                    </a:lnT>
-                    <a:lnB w="9525" cap="flat" cmpd="sng" algn="ctr">
-                      <a:solidFill>
-                        <a:srgbClr val="BFC8DC"/>
-                      </a:solidFill>
-                      <a:prstDash val="solid"/>
-                      <a:round/>
-                      <a:headEnd type="none" w="med" len="med"/>
-                      <a:tailEnd type="none" w="med" len="med"/>
-                    </a:lnB>
-                    <a:solidFill>
-                      <a:srgbClr val="1E2761"/>
-                    </a:solidFill>
-                  </a:tcPr>
-                </a:tc>
-                <a:tc hMerge="1">
-                  <a:txBody>
-                    <a:bodyPr/>
-                    <a:lstStyle/>
-                    <a:p>
-                      <a:pPr algn="ctr">
-                        <a:buNone/>
-                      </a:pPr>
-                      <a:endParaRPr lang="ja-JP" altLang="en-US" sz="1050" dirty="0"/>
-                    </a:p>
-                  </a:txBody>
-                  <a:tcPr marL="73152" marR="73152" marT="27432" marB="27432" anchor="ctr">
-                    <a:lnL w="9525" cap="flat" cmpd="sng" algn="ctr">
-                      <a:solidFill>
-                        <a:srgbClr val="BFC8DC"/>
-                      </a:solidFill>
-                      <a:prstDash val="solid"/>
-                      <a:round/>
-                      <a:headEnd type="none" w="med" len="med"/>
-                      <a:tailEnd type="none" w="med" len="med"/>
-                    </a:lnL>
-                    <a:lnR w="9525" cap="flat" cmpd="sng" algn="ctr">
-                      <a:solidFill>
-                        <a:srgbClr val="BFC8DC"/>
-                      </a:solidFill>
-                      <a:prstDash val="solid"/>
-                      <a:round/>
-                      <a:headEnd type="none" w="med" len="med"/>
-                      <a:tailEnd type="none" w="med" len="med"/>
-                    </a:lnR>
-                    <a:lnT w="9525" cap="flat" cmpd="sng" algn="ctr">
-                      <a:solidFill>
-                        <a:srgbClr val="BFC8DC"/>
-                      </a:solidFill>
-                      <a:prstDash val="solid"/>
-                      <a:round/>
-                      <a:headEnd type="none" w="med" len="med"/>
-                      <a:tailEnd type="none" w="med" len="med"/>
-                    </a:lnT>
-                    <a:lnB w="9525" cap="flat" cmpd="sng" algn="ctr">
-                      <a:solidFill>
-                        <a:srgbClr val="BFC8DC"/>
-                      </a:solidFill>
-                      <a:prstDash val="solid"/>
-                      <a:round/>
-                      <a:headEnd type="none" w="med" len="med"/>
-                      <a:tailEnd type="none" w="med" len="med"/>
-                    </a:lnB>
-                    <a:solidFill>
-                      <a:srgbClr val="1E2761"/>
-                    </a:solidFill>
-                  </a:tcPr>
-                </a:tc>
-                <a:extLst>
-                  <a:ext uri="{0D108BD9-81ED-4DB2-BD59-A6C34878D82A}">
-                    <a16:rowId xmlns:a16="http://schemas.microsoft.com/office/drawing/2014/main" val="10000"/>
-                  </a:ext>
-                </a:extLst>
-              </a:tr>
-              <a:tr h="365760">
-                <a:tc>
-                  <a:txBody>
-                    <a:bodyPr/>
-                    <a:lstStyle/>
-                    <a:p>
-                      <a:pPr algn="l">
-                        <a:buNone/>
-                      </a:pPr>
-                      <a:r>
-                        <a:rPr lang="ja-JP" altLang="en-US" sz="1050" b="1" dirty="0">
-                          <a:solidFill>
-                            <a:srgbClr val="323366"/>
-                          </a:solidFill>
-                          <a:latin typeface="メイリオ" panose="020B0604030504040204" pitchFamily="50" charset="-128"/>
-                          <a:ea typeface="メイリオ" panose="020B0604030504040204" pitchFamily="50" charset="-128"/>
-                        </a:rPr>
-                        <a:t>サイトUU</a:t>
-                      </a:r>
-                      <a:endParaRPr lang="ja-JP" altLang="en-US" sz="1050" dirty="0"/>
-                    </a:p>
-                  </a:txBody>
-                  <a:tcPr marL="73152" marR="73152" marT="27432" marB="27432" anchor="ctr">
-                    <a:lnL w="9525" cap="flat" cmpd="sng" algn="ctr">
-                      <a:solidFill>
-                        <a:srgbClr val="BFC8DC"/>
-                      </a:solidFill>
-                      <a:prstDash val="solid"/>
-                      <a:round/>
-                      <a:headEnd type="none" w="med" len="med"/>
-                      <a:tailEnd type="none" w="med" len="med"/>
-                    </a:lnL>
-                    <a:lnR w="9525" cap="flat" cmpd="sng" algn="ctr">
-                      <a:solidFill>
-                        <a:srgbClr val="BFC8DC"/>
-                      </a:solidFill>
-                      <a:prstDash val="solid"/>
-                      <a:round/>
-                      <a:headEnd type="none" w="med" len="med"/>
-                      <a:tailEnd type="none" w="med" len="med"/>
-                    </a:lnR>
-                    <a:lnT w="9525" cap="flat" cmpd="sng" algn="ctr">
-                      <a:solidFill>
-                        <a:srgbClr val="BFC8DC"/>
-                      </a:solidFill>
-                      <a:prstDash val="solid"/>
-                      <a:round/>
-                      <a:headEnd type="none" w="med" len="med"/>
-                      <a:tailEnd type="none" w="med" len="med"/>
-                    </a:lnT>
-                    <a:lnB w="9525" cap="flat" cmpd="sng" algn="ctr">
-                      <a:solidFill>
-                        <a:srgbClr val="BFC8DC"/>
-                      </a:solidFill>
-                      <a:prstDash val="solid"/>
-                      <a:round/>
-                      <a:headEnd type="none" w="med" len="med"/>
-                      <a:tailEnd type="none" w="med" len="med"/>
-                    </a:lnB>
-                    <a:solidFill>
-                      <a:srgbClr val="EEF2F9"/>
-                    </a:solidFill>
-                  </a:tcPr>
-                </a:tc>
-                <a:tc>
-                  <a:txBody>
-                    <a:bodyPr/>
-                    <a:lstStyle/>
-                    <a:p>
-                      <a:pPr algn="l">
-                        <a:buNone/>
-                      </a:pPr>
-                      <a:r>
-                        <a:rPr lang="ja-JP" altLang="en-US" sz="1050" b="0" dirty="0">
-                          <a:solidFill>
-                            <a:srgbClr val="333333"/>
-                          </a:solidFill>
-                          <a:latin typeface="メイリオ" panose="020B0604030504040204" pitchFamily="50" charset="-128"/>
-                          <a:ea typeface="メイリオ" panose="020B0604030504040204" pitchFamily="50" charset="-128"/>
-                        </a:rPr>
-                        <a:t>8,947（集計期間：未確認）</a:t>
-                      </a:r>
-                      <a:endParaRPr lang="ja-JP" altLang="en-US" sz="1050" dirty="0"/>
-                    </a:p>
-                  </a:txBody>
-                  <a:tcPr marL="73152" marR="73152" marT="27432" marB="27432" anchor="ctr">
-                    <a:lnL w="9525" cap="flat" cmpd="sng" algn="ctr">
-                      <a:solidFill>
-                        <a:srgbClr val="BFC8DC"/>
-                      </a:solidFill>
-                      <a:prstDash val="solid"/>
-                      <a:round/>
-                      <a:headEnd type="none" w="med" len="med"/>
-                      <a:tailEnd type="none" w="med" len="med"/>
-                    </a:lnL>
-                    <a:lnR w="9525" cap="flat" cmpd="sng" algn="ctr">
-                      <a:solidFill>
-                        <a:srgbClr val="BFC8DC"/>
-                      </a:solidFill>
-                      <a:prstDash val="solid"/>
-                      <a:round/>
-                      <a:headEnd type="none" w="med" len="med"/>
-                      <a:tailEnd type="none" w="med" len="med"/>
-                    </a:lnR>
-                    <a:lnT w="9525" cap="flat" cmpd="sng" algn="ctr">
-                      <a:solidFill>
-                        <a:srgbClr val="BFC8DC"/>
-                      </a:solidFill>
-                      <a:prstDash val="solid"/>
-                      <a:round/>
-                      <a:headEnd type="none" w="med" len="med"/>
-                      <a:tailEnd type="none" w="med" len="med"/>
-                    </a:lnT>
-                    <a:lnB w="9525" cap="flat" cmpd="sng" algn="ctr">
-                      <a:solidFill>
-                        <a:srgbClr val="BFC8DC"/>
-                      </a:solidFill>
-                      <a:prstDash val="solid"/>
-                      <a:round/>
-                      <a:headEnd type="none" w="med" len="med"/>
-                      <a:tailEnd type="none" w="med" len="med"/>
-                    </a:lnB>
-                    <a:solidFill>
-                      <a:srgbClr val="FFFFFF"/>
-                    </a:solidFill>
-                  </a:tcPr>
-                </a:tc>
-                <a:extLst>
-                  <a:ext uri="{0D108BD9-81ED-4DB2-BD59-A6C34878D82A}">
-                    <a16:rowId xmlns:a16="http://schemas.microsoft.com/office/drawing/2014/main" val="10001"/>
-                  </a:ext>
-                </a:extLst>
-              </a:tr>
-              <a:tr h="365760">
-                <a:tc>
-                  <a:txBody>
-                    <a:bodyPr/>
-                    <a:lstStyle/>
-                    <a:p>
-                      <a:pPr algn="l">
-                        <a:buNone/>
-                      </a:pPr>
-                      <a:r>
-                        <a:rPr lang="ja-JP" altLang="en-US" sz="1050" b="1" dirty="0">
-                          <a:solidFill>
-                            <a:srgbClr val="323366"/>
-                          </a:solidFill>
-                          <a:latin typeface="メイリオ" panose="020B0604030504040204" pitchFamily="50" charset="-128"/>
-                          <a:ea typeface="メイリオ" panose="020B0604030504040204" pitchFamily="50" charset="-128"/>
-                        </a:rPr>
-                        <a:t>月間の応募数</a:t>
-                      </a:r>
-                      <a:endParaRPr lang="ja-JP" altLang="en-US" sz="1050" dirty="0"/>
-                    </a:p>
-                  </a:txBody>
-                  <a:tcPr marL="73152" marR="73152" marT="27432" marB="27432" anchor="ctr">
-                    <a:lnL w="9525" cap="flat" cmpd="sng" algn="ctr">
-                      <a:solidFill>
-                        <a:srgbClr val="BFC8DC"/>
-                      </a:solidFill>
-                      <a:prstDash val="solid"/>
-                      <a:round/>
-                      <a:headEnd type="none" w="med" len="med"/>
-                      <a:tailEnd type="none" w="med" len="med"/>
-                    </a:lnL>
-                    <a:lnR w="9525" cap="flat" cmpd="sng" algn="ctr">
-                      <a:solidFill>
-                        <a:srgbClr val="BFC8DC"/>
-                      </a:solidFill>
-                      <a:prstDash val="solid"/>
-                      <a:round/>
-                      <a:headEnd type="none" w="med" len="med"/>
-                      <a:tailEnd type="none" w="med" len="med"/>
-                    </a:lnR>
-                    <a:lnT w="9525" cap="flat" cmpd="sng" algn="ctr">
-                      <a:solidFill>
-                        <a:srgbClr val="BFC8DC"/>
-                      </a:solidFill>
-                      <a:prstDash val="solid"/>
-                      <a:round/>
-                      <a:headEnd type="none" w="med" len="med"/>
-                      <a:tailEnd type="none" w="med" len="med"/>
-                    </a:lnT>
-                    <a:lnB w="9525" cap="flat" cmpd="sng" algn="ctr">
-                      <a:solidFill>
-                        <a:srgbClr val="BFC8DC"/>
-                      </a:solidFill>
-                      <a:prstDash val="solid"/>
-                      <a:round/>
-                      <a:headEnd type="none" w="med" len="med"/>
-                      <a:tailEnd type="none" w="med" len="med"/>
-                    </a:lnB>
-                    <a:solidFill>
-                      <a:srgbClr val="EEF2F9"/>
-                    </a:solidFill>
-                  </a:tcPr>
-                </a:tc>
-                <a:tc>
-                  <a:txBody>
-                    <a:bodyPr/>
-                    <a:lstStyle/>
-                    <a:p>
-                      <a:pPr algn="l">
-                        <a:buNone/>
-                      </a:pPr>
-                      <a:r>
-                        <a:rPr lang="ja-JP" altLang="en-US" sz="1050" b="0" dirty="0">
-                          <a:solidFill>
-                            <a:srgbClr val="FF0000"/>
-                          </a:solidFill>
-                          <a:latin typeface="メイリオ" panose="020B0604030504040204" pitchFamily="50" charset="-128"/>
-                          <a:ea typeface="メイリオ" panose="020B0604030504040204" pitchFamily="50" charset="-128"/>
-                        </a:rPr>
-                        <a:t>未確認</a:t>
-                      </a:r>
-                      <a:endParaRPr lang="ja-JP" altLang="en-US" sz="1050" dirty="0"/>
-                    </a:p>
-                  </a:txBody>
-                  <a:tcPr marL="73152" marR="73152" marT="27432" marB="27432" anchor="ctr">
-                    <a:lnL w="9525" cap="flat" cmpd="sng" algn="ctr">
-                      <a:solidFill>
-                        <a:srgbClr val="BFC8DC"/>
-                      </a:solidFill>
-                      <a:prstDash val="solid"/>
-                      <a:round/>
-                      <a:headEnd type="none" w="med" len="med"/>
-                      <a:tailEnd type="none" w="med" len="med"/>
-                    </a:lnL>
-                    <a:lnR w="9525" cap="flat" cmpd="sng" algn="ctr">
-                      <a:solidFill>
-                        <a:srgbClr val="BFC8DC"/>
-                      </a:solidFill>
-                      <a:prstDash val="solid"/>
-                      <a:round/>
-                      <a:headEnd type="none" w="med" len="med"/>
-                      <a:tailEnd type="none" w="med" len="med"/>
-                    </a:lnR>
-                    <a:lnT w="9525" cap="flat" cmpd="sng" algn="ctr">
-                      <a:solidFill>
-                        <a:srgbClr val="BFC8DC"/>
-                      </a:solidFill>
-                      <a:prstDash val="solid"/>
-                      <a:round/>
-                      <a:headEnd type="none" w="med" len="med"/>
-                      <a:tailEnd type="none" w="med" len="med"/>
-                    </a:lnT>
-                    <a:lnB w="9525" cap="flat" cmpd="sng" algn="ctr">
-                      <a:solidFill>
-                        <a:srgbClr val="BFC8DC"/>
-                      </a:solidFill>
-                      <a:prstDash val="solid"/>
-                      <a:round/>
-                      <a:headEnd type="none" w="med" len="med"/>
-                      <a:tailEnd type="none" w="med" len="med"/>
-                    </a:lnB>
-                    <a:solidFill>
-                      <a:srgbClr val="FFFFFF"/>
-                    </a:solidFill>
-                  </a:tcPr>
-                </a:tc>
-                <a:extLst>
-                  <a:ext uri="{0D108BD9-81ED-4DB2-BD59-A6C34878D82A}">
-                    <a16:rowId xmlns:a16="http://schemas.microsoft.com/office/drawing/2014/main" val="10002"/>
-                  </a:ext>
-                </a:extLst>
-              </a:tr>
-              <a:tr h="365760">
-                <a:tc>
-                  <a:txBody>
-                    <a:bodyPr/>
-                    <a:lstStyle/>
-                    <a:p>
-                      <a:pPr algn="l">
-                        <a:buNone/>
-                      </a:pPr>
-                      <a:r>
-                        <a:rPr lang="ja-JP" altLang="en-US" sz="1050" b="1" dirty="0">
-                          <a:solidFill>
-                            <a:srgbClr val="323366"/>
-                          </a:solidFill>
-                          <a:latin typeface="メイリオ" panose="020B0604030504040204" pitchFamily="50" charset="-128"/>
-                          <a:ea typeface="メイリオ" panose="020B0604030504040204" pitchFamily="50" charset="-128"/>
-                        </a:rPr>
-                        <a:t>広告の実施状況</a:t>
-                      </a:r>
-                      <a:endParaRPr lang="ja-JP" altLang="en-US" sz="1050" dirty="0"/>
-                    </a:p>
-                  </a:txBody>
-                  <a:tcPr marL="73152" marR="73152" marT="27432" marB="27432" anchor="ctr">
-                    <a:lnL w="9525" cap="flat" cmpd="sng" algn="ctr">
-                      <a:solidFill>
-                        <a:srgbClr val="BFC8DC"/>
-                      </a:solidFill>
-                      <a:prstDash val="solid"/>
-                      <a:round/>
-                      <a:headEnd type="none" w="med" len="med"/>
-                      <a:tailEnd type="none" w="med" len="med"/>
-                    </a:lnL>
-                    <a:lnR w="9525" cap="flat" cmpd="sng" algn="ctr">
-                      <a:solidFill>
-                        <a:srgbClr val="BFC8DC"/>
-                      </a:solidFill>
-                      <a:prstDash val="solid"/>
-                      <a:round/>
-                      <a:headEnd type="none" w="med" len="med"/>
-                      <a:tailEnd type="none" w="med" len="med"/>
-                    </a:lnR>
-                    <a:lnT w="9525" cap="flat" cmpd="sng" algn="ctr">
-                      <a:solidFill>
-                        <a:srgbClr val="BFC8DC"/>
-                      </a:solidFill>
-                      <a:prstDash val="solid"/>
-                      <a:round/>
-                      <a:headEnd type="none" w="med" len="med"/>
-                      <a:tailEnd type="none" w="med" len="med"/>
-                    </a:lnT>
-                    <a:lnB w="9525" cap="flat" cmpd="sng" algn="ctr">
-                      <a:solidFill>
-                        <a:srgbClr val="BFC8DC"/>
-                      </a:solidFill>
-                      <a:prstDash val="solid"/>
-                      <a:round/>
-                      <a:headEnd type="none" w="med" len="med"/>
-                      <a:tailEnd type="none" w="med" len="med"/>
-                    </a:lnB>
-                    <a:solidFill>
-                      <a:srgbClr val="EEF2F9"/>
-                    </a:solidFill>
-                  </a:tcPr>
-                </a:tc>
-                <a:tc>
-                  <a:txBody>
-                    <a:bodyPr/>
-                    <a:lstStyle/>
-                    <a:p>
-                      <a:pPr algn="l">
-                        <a:buNone/>
-                      </a:pPr>
-                      <a:r>
-                        <a:rPr lang="ja-JP" altLang="en-US" sz="1050" b="0" dirty="0">
-                          <a:solidFill>
-                            <a:srgbClr val="FF0000"/>
-                          </a:solidFill>
-                          <a:latin typeface="メイリオ" panose="020B0604030504040204" pitchFamily="50" charset="-128"/>
-                          <a:ea typeface="メイリオ" panose="020B0604030504040204" pitchFamily="50" charset="-128"/>
-                        </a:rPr>
-                        <a:t>未確認</a:t>
-                      </a:r>
-                      <a:endParaRPr lang="ja-JP" altLang="en-US" sz="1050" dirty="0"/>
-                    </a:p>
-                  </a:txBody>
-                  <a:tcPr marL="73152" marR="73152" marT="27432" marB="27432" anchor="ctr">
-                    <a:lnL w="9525" cap="flat" cmpd="sng" algn="ctr">
-                      <a:solidFill>
-                        <a:srgbClr val="BFC8DC"/>
-                      </a:solidFill>
-                      <a:prstDash val="solid"/>
-                      <a:round/>
-                      <a:headEnd type="none" w="med" len="med"/>
-                      <a:tailEnd type="none" w="med" len="med"/>
-                    </a:lnL>
-                    <a:lnR w="9525" cap="flat" cmpd="sng" algn="ctr">
-                      <a:solidFill>
-                        <a:srgbClr val="BFC8DC"/>
-                      </a:solidFill>
-                      <a:prstDash val="solid"/>
-                      <a:round/>
-                      <a:headEnd type="none" w="med" len="med"/>
-                      <a:tailEnd type="none" w="med" len="med"/>
-                    </a:lnR>
-                    <a:lnT w="9525" cap="flat" cmpd="sng" algn="ctr">
-                      <a:solidFill>
-                        <a:srgbClr val="BFC8DC"/>
-                      </a:solidFill>
-                      <a:prstDash val="solid"/>
-                      <a:round/>
-                      <a:headEnd type="none" w="med" len="med"/>
-                      <a:tailEnd type="none" w="med" len="med"/>
-                    </a:lnT>
-                    <a:lnB w="9525" cap="flat" cmpd="sng" algn="ctr">
-                      <a:solidFill>
-                        <a:srgbClr val="BFC8DC"/>
-                      </a:solidFill>
-                      <a:prstDash val="solid"/>
-                      <a:round/>
-                      <a:headEnd type="none" w="med" len="med"/>
-                      <a:tailEnd type="none" w="med" len="med"/>
-                    </a:lnB>
-                    <a:solidFill>
-                      <a:srgbClr val="FFFFFF"/>
-                    </a:solidFill>
-                  </a:tcPr>
-                </a:tc>
-                <a:extLst>
-                  <a:ext uri="{0D108BD9-81ED-4DB2-BD59-A6C34878D82A}">
-                    <a16:rowId xmlns:a16="http://schemas.microsoft.com/office/drawing/2014/main" val="10003"/>
-                  </a:ext>
-                </a:extLst>
-              </a:tr>
-              <a:tr h="502920">
-                <a:tc>
-                  <a:txBody>
-                    <a:bodyPr/>
-                    <a:lstStyle/>
-                    <a:p>
-                      <a:pPr algn="l">
-                        <a:buNone/>
-                      </a:pPr>
-                      <a:r>
-                        <a:rPr lang="ja-JP" altLang="en-US" sz="1050" b="1" dirty="0">
-                          <a:solidFill>
-                            <a:srgbClr val="323366"/>
-                          </a:solidFill>
-                          <a:latin typeface="メイリオ" panose="020B0604030504040204" pitchFamily="50" charset="-128"/>
-                          <a:ea typeface="メイリオ" panose="020B0604030504040204" pitchFamily="50" charset="-128"/>
-                        </a:rPr>
-                        <a:t>LINE公式アカウントの</a:t>
-                      </a:r>
-                      <a:endParaRPr lang="ja-JP" altLang="en-US" sz="1050" dirty="0"/>
-                    </a:p>
-                    <a:p>
-                      <a:pPr algn="l">
-                        <a:buNone/>
-                      </a:pPr>
-                      <a:r>
-                        <a:rPr lang="ja-JP" altLang="en-US" sz="1050" b="1" dirty="0">
-                          <a:solidFill>
-                            <a:srgbClr val="323366"/>
-                          </a:solidFill>
-                          <a:latin typeface="メイリオ" panose="020B0604030504040204" pitchFamily="50" charset="-128"/>
-                          <a:ea typeface="メイリオ" panose="020B0604030504040204" pitchFamily="50" charset="-128"/>
-                        </a:rPr>
-                        <a:t>現在の使い方</a:t>
-                      </a:r>
-                      <a:endParaRPr lang="ja-JP" altLang="en-US" sz="1050" dirty="0"/>
-                    </a:p>
-                  </a:txBody>
-                  <a:tcPr marL="73152" marR="73152" marT="27432" marB="27432" anchor="ctr">
-                    <a:lnL w="9525" cap="flat" cmpd="sng" algn="ctr">
-                      <a:solidFill>
-                        <a:srgbClr val="BFC8DC"/>
-                      </a:solidFill>
-                      <a:prstDash val="solid"/>
-                      <a:round/>
-                      <a:headEnd type="none" w="med" len="med"/>
-                      <a:tailEnd type="none" w="med" len="med"/>
-                    </a:lnL>
-                    <a:lnR w="9525" cap="flat" cmpd="sng" algn="ctr">
-                      <a:solidFill>
-                        <a:srgbClr val="BFC8DC"/>
-                      </a:solidFill>
-                      <a:prstDash val="solid"/>
-                      <a:round/>
-                      <a:headEnd type="none" w="med" len="med"/>
-                      <a:tailEnd type="none" w="med" len="med"/>
-                    </a:lnR>
-                    <a:lnT w="9525" cap="flat" cmpd="sng" algn="ctr">
-                      <a:solidFill>
-                        <a:srgbClr val="BFC8DC"/>
-                      </a:solidFill>
-                      <a:prstDash val="solid"/>
-                      <a:round/>
-                      <a:headEnd type="none" w="med" len="med"/>
-                      <a:tailEnd type="none" w="med" len="med"/>
-                    </a:lnT>
-                    <a:lnB w="9525" cap="flat" cmpd="sng" algn="ctr">
-                      <a:solidFill>
-                        <a:srgbClr val="BFC8DC"/>
-                      </a:solidFill>
-                      <a:prstDash val="solid"/>
-                      <a:round/>
-                      <a:headEnd type="none" w="med" len="med"/>
-                      <a:tailEnd type="none" w="med" len="med"/>
-                    </a:lnB>
-                    <a:solidFill>
-                      <a:srgbClr val="EEF2F9"/>
-                    </a:solidFill>
-                  </a:tcPr>
-                </a:tc>
-                <a:tc>
-                  <a:txBody>
-                    <a:bodyPr/>
-                    <a:lstStyle/>
-                    <a:p>
-                      <a:pPr algn="l">
-                        <a:buNone/>
-                      </a:pPr>
-                      <a:r>
-                        <a:rPr lang="ja-JP" altLang="en-US" sz="1050" b="0" dirty="0">
-                          <a:solidFill>
-                            <a:srgbClr val="FF0000"/>
-                          </a:solidFill>
-                          <a:latin typeface="メイリオ" panose="020B0604030504040204" pitchFamily="50" charset="-128"/>
-                          <a:ea typeface="メイリオ" panose="020B0604030504040204" pitchFamily="50" charset="-128"/>
-                        </a:rPr>
-                        <a:t>未確認</a:t>
-                      </a:r>
-                      <a:endParaRPr lang="ja-JP" altLang="en-US" sz="1050" dirty="0"/>
-                    </a:p>
-                  </a:txBody>
-                  <a:tcPr marL="73152" marR="73152" marT="27432" marB="27432" anchor="ctr">
-                    <a:lnL w="9525" cap="flat" cmpd="sng" algn="ctr">
-                      <a:solidFill>
-                        <a:srgbClr val="BFC8DC"/>
-                      </a:solidFill>
-                      <a:prstDash val="solid"/>
-                      <a:round/>
-                      <a:headEnd type="none" w="med" len="med"/>
-                      <a:tailEnd type="none" w="med" len="med"/>
-                    </a:lnL>
-                    <a:lnR w="9525" cap="flat" cmpd="sng" algn="ctr">
-                      <a:solidFill>
-                        <a:srgbClr val="BFC8DC"/>
-                      </a:solidFill>
-                      <a:prstDash val="solid"/>
-                      <a:round/>
-                      <a:headEnd type="none" w="med" len="med"/>
-                      <a:tailEnd type="none" w="med" len="med"/>
-                    </a:lnR>
-                    <a:lnT w="9525" cap="flat" cmpd="sng" algn="ctr">
-                      <a:solidFill>
-                        <a:srgbClr val="BFC8DC"/>
-                      </a:solidFill>
-                      <a:prstDash val="solid"/>
-                      <a:round/>
-                      <a:headEnd type="none" w="med" len="med"/>
-                      <a:tailEnd type="none" w="med" len="med"/>
-                    </a:lnT>
-                    <a:lnB w="9525" cap="flat" cmpd="sng" algn="ctr">
-                      <a:solidFill>
-                        <a:srgbClr val="BFC8DC"/>
-                      </a:solidFill>
-                      <a:prstDash val="solid"/>
-                      <a:round/>
-                      <a:headEnd type="none" w="med" len="med"/>
-                      <a:tailEnd type="none" w="med" len="med"/>
-                    </a:lnB>
-                    <a:solidFill>
-                      <a:srgbClr val="FFFFFF"/>
-                    </a:solidFill>
-                  </a:tcPr>
-                </a:tc>
-                <a:extLst>
-                  <a:ext uri="{0D108BD9-81ED-4DB2-BD59-A6C34878D82A}">
-                    <a16:rowId xmlns:a16="http://schemas.microsoft.com/office/drawing/2014/main" val="10004"/>
-                  </a:ext>
-                </a:extLst>
-              </a:tr>
-              <a:tr h="502920">
-                <a:tc>
-                  <a:txBody>
-                    <a:bodyPr/>
-                    <a:lstStyle/>
-                    <a:p>
-                      <a:pPr algn="l">
-                        <a:buNone/>
-                      </a:pPr>
-                      <a:r>
-                        <a:rPr lang="ja-JP" altLang="en-US" sz="1050" b="1" dirty="0">
-                          <a:solidFill>
-                            <a:srgbClr val="323366"/>
-                          </a:solidFill>
-                          <a:latin typeface="メイリオ" panose="020B0604030504040204" pitchFamily="50" charset="-128"/>
-                          <a:ea typeface="メイリオ" panose="020B0604030504040204" pitchFamily="50" charset="-128"/>
-                        </a:rPr>
-                        <a:t>想定予算</a:t>
-                      </a:r>
-                      <a:endParaRPr lang="ja-JP" altLang="en-US" sz="1050" dirty="0"/>
-                    </a:p>
-                  </a:txBody>
-                  <a:tcPr marL="73152" marR="73152" marT="27432" marB="27432" anchor="ctr">
-                    <a:lnL w="9525" cap="flat" cmpd="sng" algn="ctr">
-                      <a:solidFill>
-                        <a:srgbClr val="BFC8DC"/>
-                      </a:solidFill>
-                      <a:prstDash val="solid"/>
-                      <a:round/>
-                      <a:headEnd type="none" w="med" len="med"/>
-                      <a:tailEnd type="none" w="med" len="med"/>
-                    </a:lnL>
-                    <a:lnR w="9525" cap="flat" cmpd="sng" algn="ctr">
-                      <a:solidFill>
-                        <a:srgbClr val="BFC8DC"/>
-                      </a:solidFill>
-                      <a:prstDash val="solid"/>
-                      <a:round/>
-                      <a:headEnd type="none" w="med" len="med"/>
-                      <a:tailEnd type="none" w="med" len="med"/>
-                    </a:lnR>
-                    <a:lnT w="9525" cap="flat" cmpd="sng" algn="ctr">
-                      <a:solidFill>
-                        <a:srgbClr val="BFC8DC"/>
-                      </a:solidFill>
-                      <a:prstDash val="solid"/>
-                      <a:round/>
-                      <a:headEnd type="none" w="med" len="med"/>
-                      <a:tailEnd type="none" w="med" len="med"/>
-                    </a:lnT>
-                    <a:lnB w="9525" cap="flat" cmpd="sng" algn="ctr">
-                      <a:solidFill>
-                        <a:srgbClr val="BFC8DC"/>
-                      </a:solidFill>
-                      <a:prstDash val="solid"/>
-                      <a:round/>
-                      <a:headEnd type="none" w="med" len="med"/>
-                      <a:tailEnd type="none" w="med" len="med"/>
-                    </a:lnB>
-                    <a:solidFill>
-                      <a:srgbClr val="EEF2F9"/>
-                    </a:solidFill>
-                  </a:tcPr>
-                </a:tc>
-                <a:tc>
-                  <a:txBody>
-                    <a:bodyPr/>
-                    <a:lstStyle/>
-                    <a:p>
-                      <a:pPr algn="l">
-                        <a:buNone/>
-                      </a:pPr>
-                      <a:r>
-                        <a:rPr lang="ja-JP" altLang="en-US" sz="1050" b="0" dirty="0">
-                          <a:solidFill>
-                            <a:srgbClr val="333333"/>
-                          </a:solidFill>
-                          <a:latin typeface="メイリオ" panose="020B0604030504040204" pitchFamily="50" charset="-128"/>
-                          <a:ea typeface="メイリオ" panose="020B0604030504040204" pitchFamily="50" charset="-128"/>
-                        </a:rPr>
-                        <a:t>月額20万円（ツール費込み）</a:t>
-                      </a:r>
-                      <a:endParaRPr lang="ja-JP" altLang="en-US" sz="1050" dirty="0"/>
-                    </a:p>
-                    <a:p>
-                      <a:pPr algn="l">
-                        <a:buNone/>
-                      </a:pPr>
-                      <a:r>
-                        <a:rPr lang="ja-JP" altLang="en-US" sz="1050" b="0" dirty="0">
-                          <a:solidFill>
-                            <a:srgbClr val="333333"/>
-                          </a:solidFill>
-                          <a:latin typeface="メイリオ" panose="020B0604030504040204" pitchFamily="50" charset="-128"/>
-                          <a:ea typeface="メイリオ" panose="020B0604030504040204" pitchFamily="50" charset="-128"/>
-                        </a:rPr>
-                        <a:t>初期費用は別途</a:t>
-                      </a:r>
-                      <a:endParaRPr lang="ja-JP" altLang="en-US" sz="1050" dirty="0"/>
-                    </a:p>
-                  </a:txBody>
-                  <a:tcPr marL="73152" marR="73152" marT="27432" marB="27432" anchor="ctr">
-                    <a:lnL w="9525" cap="flat" cmpd="sng" algn="ctr">
-                      <a:solidFill>
-                        <a:srgbClr val="BFC8DC"/>
-                      </a:solidFill>
-                      <a:prstDash val="solid"/>
-                      <a:round/>
-                      <a:headEnd type="none" w="med" len="med"/>
-                      <a:tailEnd type="none" w="med" len="med"/>
-                    </a:lnL>
-                    <a:lnR w="9525" cap="flat" cmpd="sng" algn="ctr">
-                      <a:solidFill>
-                        <a:srgbClr val="BFC8DC"/>
-                      </a:solidFill>
-                      <a:prstDash val="solid"/>
-                      <a:round/>
-                      <a:headEnd type="none" w="med" len="med"/>
-                      <a:tailEnd type="none" w="med" len="med"/>
-                    </a:lnR>
-                    <a:lnT w="9525" cap="flat" cmpd="sng" algn="ctr">
-                      <a:solidFill>
-                        <a:srgbClr val="BFC8DC"/>
-                      </a:solidFill>
-                      <a:prstDash val="solid"/>
-                      <a:round/>
-                      <a:headEnd type="none" w="med" len="med"/>
-                      <a:tailEnd type="none" w="med" len="med"/>
-                    </a:lnT>
-                    <a:lnB w="9525" cap="flat" cmpd="sng" algn="ctr">
-                      <a:solidFill>
-                        <a:srgbClr val="BFC8DC"/>
-                      </a:solidFill>
-                      <a:prstDash val="solid"/>
-                      <a:round/>
-                      <a:headEnd type="none" w="med" len="med"/>
-                      <a:tailEnd type="none" w="med" len="med"/>
-                    </a:lnB>
-                    <a:solidFill>
-                      <a:srgbClr val="FFFFFF"/>
-                    </a:solidFill>
-                  </a:tcPr>
-                </a:tc>
-                <a:extLst>
-                  <a:ext uri="{0D108BD9-81ED-4DB2-BD59-A6C34878D82A}">
-                    <a16:rowId xmlns:a16="http://schemas.microsoft.com/office/drawing/2014/main" val="10005"/>
-                  </a:ext>
-                </a:extLst>
-              </a:tr>
-            </a:tbl>
-          </a:graphicData>
-        </a:graphic>
-      </p:graphicFrame>
       <p:sp>
         <p:nvSpPr>
           <p:cNvPr id="26" name="Rounded Rectangle 25"/>
@@ -17112,7 +16386,7 @@
         </p:nvSpPr>
         <p:spPr>
           <a:xfrm>
-            <a:off x="5716740" y="3999816"/>
+            <a:off x="5446127" y="1650519"/>
             <a:ext cx="3758184" cy="1182189"/>
           </a:xfrm>
           <a:prstGeom prst="roundRect">
@@ -17142,7 +16416,7 @@
               <a:buNone/>
             </a:pPr>
             <a:r>
-              <a:rPr lang="ja-JP" altLang="en-US" sz="1100" b="1" dirty="0">
+              <a:rPr lang="ja-JP" altLang="en-US" sz="1200" b="1" dirty="0">
                 <a:solidFill>
                   <a:srgbClr val="323366"/>
                 </a:solidFill>
@@ -17151,7 +16425,7 @@
               </a:rPr>
               <a:t>想定している課題（仮説）</a:t>
             </a:r>
-            <a:endParaRPr lang="ja-JP" altLang="en-US" sz="1100" dirty="0"/>
+            <a:endParaRPr lang="ja-JP" altLang="en-US" sz="1200" dirty="0"/>
           </a:p>
           <a:p>
             <a:pPr algn="l">
@@ -17161,7 +16435,7 @@
               <a:buNone/>
             </a:pPr>
             <a:r>
-              <a:rPr lang="ja-JP" altLang="en-US" sz="1100" b="0" dirty="0">
+              <a:rPr lang="ja-JP" altLang="en-US" sz="1200" b="0" dirty="0">
                 <a:solidFill>
                   <a:srgbClr val="333333"/>
                 </a:solidFill>
@@ -17170,7 +16444,7 @@
               </a:rPr>
               <a:t>イベントの勤務が終わると、スタッフの方との連絡が途切れやすい。</a:t>
             </a:r>
-            <a:endParaRPr lang="ja-JP" altLang="en-US" sz="1100" dirty="0"/>
+            <a:endParaRPr lang="ja-JP" altLang="en-US" sz="1200" dirty="0"/>
           </a:p>
           <a:p>
             <a:pPr algn="l">
@@ -17180,7 +16454,7 @@
               <a:buNone/>
             </a:pPr>
             <a:r>
-              <a:rPr lang="ja-JP" altLang="en-US" sz="1100" b="0" dirty="0">
+              <a:rPr lang="ja-JP" altLang="en-US" sz="1200" b="0" dirty="0">
                 <a:solidFill>
                   <a:srgbClr val="333333"/>
                 </a:solidFill>
@@ -17189,7 +16463,7 @@
               </a:rPr>
               <a:t>次のイベントでも働いていただける接点を残すことが、継続的な人員確保の鍵と考えます。</a:t>
             </a:r>
-            <a:endParaRPr lang="ja-JP" altLang="en-US" sz="1100" dirty="0"/>
+            <a:endParaRPr lang="ja-JP" altLang="en-US" sz="1200" dirty="0"/>
           </a:p>
         </p:txBody>
       </p:sp>
@@ -17327,7 +16601,7 @@
         <p:spPr>
           <a:xfrm>
             <a:off x="429768" y="5330952"/>
-            <a:ext cx="9043416" cy="374904"/>
+            <a:ext cx="8906255" cy="374904"/>
           </a:xfrm>
           <a:prstGeom prst="rect">
             <a:avLst/>
@@ -17664,8 +16938,8 @@
         </p:nvSpPr>
         <p:spPr>
           <a:xfrm>
-            <a:off x="4773168" y="1391688"/>
-            <a:ext cx="4700016" cy="3683233"/>
+            <a:off x="4773168" y="1391689"/>
+            <a:ext cx="4562855" cy="3683232"/>
           </a:xfrm>
           <a:prstGeom prst="roundRect">
             <a:avLst>
@@ -18140,7 +17414,7 @@
         </p:nvSpPr>
         <p:spPr>
           <a:xfrm>
-            <a:off x="309600" y="687600"/>
+            <a:off x="429768" y="696249"/>
             <a:ext cx="9331200" cy="585216"/>
           </a:xfrm>
           <a:prstGeom prst="rect">
@@ -18160,7 +17434,7 @@
               </a:lnSpc>
             </a:pPr>
             <a:r>
-              <a:rPr sz="1400" b="1">
+              <a:rPr sz="1400" b="1" dirty="0" err="1">
                 <a:solidFill>
                   <a:srgbClr val="1E2761"/>
                 </a:solidFill>
@@ -18168,7 +17442,18 @@
                 <a:ea typeface="メイリオ"/>
                 <a:cs typeface="メイリオ"/>
               </a:rPr>
-              <a:t>応募から勤務までの連絡、勤務前の案内、次の募集。どれも人数が増えるほど手間が増えます。</a:t>
+              <a:t>応募から勤務までの連絡、勤務前の案内、次の募集。どれも人数が増えるほど手間が増えます</a:t>
+            </a:r>
+            <a:r>
+              <a:rPr sz="1400" b="1" dirty="0">
+                <a:solidFill>
+                  <a:srgbClr val="1E2761"/>
+                </a:solidFill>
+                <a:latin typeface="メイリオ"/>
+                <a:ea typeface="メイリオ"/>
+                <a:cs typeface="メイリオ"/>
+              </a:rPr>
+              <a:t>。</a:t>
             </a:r>
           </a:p>
           <a:p>
@@ -18178,7 +17463,7 @@
               </a:lnSpc>
             </a:pPr>
             <a:r>
-              <a:rPr sz="1400" b="1">
+              <a:rPr sz="1400" b="1" dirty="0" err="1">
                 <a:solidFill>
                   <a:srgbClr val="FF0000"/>
                 </a:solidFill>
@@ -18186,7 +17471,18 @@
                 <a:ea typeface="メイリオ"/>
                 <a:cs typeface="メイリオ"/>
               </a:rPr>
-              <a:t>連絡をLINEに集めることで、届きやすく、次の募集にもつなげやすくなります。</a:t>
+              <a:t>連絡をLINEに集めることで、届きやすく、次の募集にもつなげやすくなります</a:t>
+            </a:r>
+            <a:r>
+              <a:rPr sz="1400" b="1" dirty="0">
+                <a:solidFill>
+                  <a:srgbClr val="FF0000"/>
+                </a:solidFill>
+                <a:latin typeface="メイリオ"/>
+                <a:ea typeface="メイリオ"/>
+                <a:cs typeface="メイリオ"/>
+              </a:rPr>
+              <a:t>。</a:t>
             </a:r>
           </a:p>
         </p:txBody>
@@ -18199,7 +17495,7 @@
         </p:nvSpPr>
         <p:spPr>
           <a:xfrm>
-            <a:off x="431292" y="4931227"/>
+            <a:off x="431292" y="5002638"/>
             <a:ext cx="9043416" cy="374904"/>
           </a:xfrm>
           <a:prstGeom prst="rect">
@@ -18285,7 +17581,7 @@
         </p:nvSpPr>
         <p:spPr>
           <a:xfrm>
-            <a:off x="431292" y="4931227"/>
+            <a:off x="431292" y="5002638"/>
             <a:ext cx="9043416" cy="374904"/>
           </a:xfrm>
           <a:prstGeom prst="rect">
@@ -19011,7 +18307,7 @@
         </p:nvSpPr>
         <p:spPr>
           <a:xfrm>
-            <a:off x="429768" y="4042954"/>
+            <a:off x="429768" y="4114365"/>
             <a:ext cx="4421124" cy="658368"/>
           </a:xfrm>
           <a:prstGeom prst="roundRect">
@@ -19049,8 +18345,8 @@
         </p:nvSpPr>
         <p:spPr>
           <a:xfrm>
-            <a:off x="566928" y="3931920"/>
-            <a:ext cx="2431618" cy="932688"/>
+            <a:off x="566928" y="4114363"/>
+            <a:ext cx="2431618" cy="658368"/>
           </a:xfrm>
           <a:prstGeom prst="rect">
             <a:avLst/>
@@ -19113,8 +18409,8 @@
         </p:nvSpPr>
         <p:spPr>
           <a:xfrm>
-            <a:off x="2861386" y="3931920"/>
-            <a:ext cx="1852345" cy="932688"/>
+            <a:off x="2861386" y="4114364"/>
+            <a:ext cx="1852345" cy="658368"/>
           </a:xfrm>
           <a:prstGeom prst="rect">
             <a:avLst/>
@@ -19155,7 +18451,7 @@
         </p:nvSpPr>
         <p:spPr>
           <a:xfrm>
-            <a:off x="5052059" y="4042954"/>
+            <a:off x="5052059" y="4114365"/>
             <a:ext cx="4421124" cy="658368"/>
           </a:xfrm>
           <a:prstGeom prst="roundRect">
@@ -19193,8 +18489,8 @@
         </p:nvSpPr>
         <p:spPr>
           <a:xfrm>
-            <a:off x="5189220" y="3931920"/>
-            <a:ext cx="2431618" cy="932688"/>
+            <a:off x="5189220" y="4114364"/>
+            <a:ext cx="2431618" cy="658368"/>
           </a:xfrm>
           <a:prstGeom prst="rect">
             <a:avLst/>
@@ -19257,8 +18553,8 @@
         </p:nvSpPr>
         <p:spPr>
           <a:xfrm>
-            <a:off x="7483678" y="3931920"/>
-            <a:ext cx="1852345" cy="932688"/>
+            <a:off x="7483678" y="4114364"/>
+            <a:ext cx="1852345" cy="658368"/>
           </a:xfrm>
           <a:prstGeom prst="rect">
             <a:avLst/>
@@ -25540,7 +24836,7 @@
         <p:spPr>
           <a:xfrm>
             <a:off x="4180597" y="1172815"/>
-            <a:ext cx="4937760" cy="384048"/>
+            <a:ext cx="3833883" cy="230832"/>
           </a:xfrm>
           <a:prstGeom prst="rect">
             <a:avLst/>
@@ -25556,14 +24852,50 @@
             <a:r>
               <a:rPr lang="en-US" altLang="ja-JP" sz="900" dirty="0">
                 <a:solidFill>
-                  <a:srgbClr val="595959"/>
+                  <a:srgbClr val="FF0000"/>
                 </a:solidFill>
                 <a:latin typeface="メイリオ" panose="020B0604030504040204" pitchFamily="50" charset="-128"/>
                 <a:ea typeface="メイリオ" panose="020B0604030504040204" pitchFamily="50" charset="-128"/>
                 <a:cs typeface="メイリオ"/>
                 <a:sym typeface="Meiryo"/>
               </a:rPr>
-              <a:t>※画面は動作のイメージです（他業種の例）。ほかのツールと併用できるかも、事前に確認します。</a:t>
+              <a:t>※</a:t>
+            </a:r>
+            <a:r>
+              <a:rPr lang="ja-JP" altLang="en-US" sz="900" dirty="0">
+                <a:solidFill>
+                  <a:srgbClr val="FF0000"/>
+                </a:solidFill>
+                <a:latin typeface="メイリオ" panose="020B0604030504040204" pitchFamily="50" charset="-128"/>
+                <a:ea typeface="メイリオ" panose="020B0604030504040204" pitchFamily="50" charset="-128"/>
+                <a:cs typeface="メイリオ"/>
+                <a:sym typeface="Meiryo"/>
+              </a:rPr>
+              <a:t>既存</a:t>
+            </a:r>
+            <a:r>
+              <a:rPr lang="en-US" altLang="ja-JP" sz="900" dirty="0">
+                <a:solidFill>
+                  <a:srgbClr val="FF0000"/>
+                </a:solidFill>
+                <a:latin typeface="メイリオ" panose="020B0604030504040204" pitchFamily="50" charset="-128"/>
+                <a:ea typeface="メイリオ" panose="020B0604030504040204" pitchFamily="50" charset="-128"/>
+                <a:cs typeface="メイリオ"/>
+                <a:sym typeface="Meiryo"/>
+              </a:rPr>
+              <a:t>API</a:t>
+            </a:r>
+            <a:r>
+              <a:rPr lang="ja-JP" altLang="en-US" sz="900" dirty="0">
+                <a:solidFill>
+                  <a:srgbClr val="FF0000"/>
+                </a:solidFill>
+                <a:latin typeface="メイリオ" panose="020B0604030504040204" pitchFamily="50" charset="-128"/>
+                <a:ea typeface="メイリオ" panose="020B0604030504040204" pitchFamily="50" charset="-128"/>
+                <a:cs typeface="メイリオ"/>
+                <a:sym typeface="Meiryo"/>
+              </a:rPr>
+              <a:t>ツールとの併用についても、問題なく稼働が可能。</a:t>
             </a:r>
             <a:endParaRPr lang="ja-JP" altLang="en-US" sz="900" dirty="0">
               <a:solidFill>
@@ -26139,7 +25471,37 @@
                 <a:latin typeface="メイリオ" panose="020B0604030504040204" pitchFamily="50" charset="-128"/>
                 <a:ea typeface="メイリオ" panose="020B0604030504040204" pitchFamily="50" charset="-128"/>
               </a:rPr>
-              <a:t>応募後 約2〜3秒で</a:t>
+              <a:t>CV</a:t>
+            </a:r>
+            <a:r>
+              <a:rPr lang="ja-JP" altLang="en-US" sz="1100" dirty="0">
+                <a:solidFill>
+                  <a:schemeClr val="tx1"/>
+                </a:solidFill>
+                <a:latin typeface="メイリオ" panose="020B0604030504040204" pitchFamily="50" charset="-128"/>
+                <a:ea typeface="メイリオ" panose="020B0604030504040204" pitchFamily="50" charset="-128"/>
+              </a:rPr>
+              <a:t>完了後約</a:t>
+            </a:r>
+            <a:r>
+              <a:rPr lang="en-US" altLang="ja-JP" sz="1100" dirty="0">
+                <a:solidFill>
+                  <a:schemeClr val="tx1"/>
+                </a:solidFill>
+                <a:latin typeface="メイリオ" panose="020B0604030504040204" pitchFamily="50" charset="-128"/>
+                <a:ea typeface="メイリオ" panose="020B0604030504040204" pitchFamily="50" charset="-128"/>
+              </a:rPr>
+              <a:t>2~3</a:t>
+            </a:r>
+            <a:r>
+              <a:rPr lang="ja-JP" altLang="en-US" sz="1100" dirty="0">
+                <a:solidFill>
+                  <a:schemeClr val="tx1"/>
+                </a:solidFill>
+                <a:latin typeface="メイリオ" panose="020B0604030504040204" pitchFamily="50" charset="-128"/>
+                <a:ea typeface="メイリオ" panose="020B0604030504040204" pitchFamily="50" charset="-128"/>
+              </a:rPr>
+              <a:t>秒で</a:t>
             </a:r>
             <a:br>
               <a:rPr lang="en-US" altLang="ja-JP" sz="1100" dirty="0">
@@ -26281,109 +25643,283 @@
       </p:sp>
       <p:sp>
         <p:nvSpPr>
-          <p:cNvPr id="1053" name="Rounded Rectangle 1052"/>
+          <p:cNvPr id="41" name="四角形: 角を丸くする 40">
+            <a:extLst>
+              <a:ext uri="{FF2B5EF4-FFF2-40B4-BE49-F238E27FC236}">
+                <a16:creationId xmlns:a16="http://schemas.microsoft.com/office/drawing/2014/main" id="{3DEB8AF5-27EB-F2A5-5738-9D4876D62932}"/>
+              </a:ext>
+            </a:extLst>
+          </p:cNvPr>
           <p:cNvSpPr/>
           <p:nvPr/>
         </p:nvSpPr>
         <p:spPr>
           <a:xfrm>
-            <a:off x="429768" y="5340096"/>
-            <a:ext cx="4846320" cy="1143000"/>
+            <a:off x="1331634" y="5386674"/>
+            <a:ext cx="3965148" cy="1126724"/>
           </a:xfrm>
           <a:prstGeom prst="roundRect">
             <a:avLst>
-              <a:gd name="adj" fmla="val 5000"/>
+              <a:gd name="adj" fmla="val 8129"/>
             </a:avLst>
           </a:prstGeom>
           <a:solidFill>
-            <a:srgbClr val="FFFFFF"/>
+            <a:schemeClr val="bg1">
+              <a:lumMod val="85000"/>
+            </a:schemeClr>
           </a:solidFill>
-          <a:ln w="9525">
+          <a:ln w="12700">
             <a:solidFill>
-              <a:srgbClr val="1E2761"/>
+              <a:schemeClr val="tx2"/>
             </a:solidFill>
           </a:ln>
         </p:spPr>
-        <p:txBody>
-          <a:bodyPr wrap="square" lIns="91440" tIns="45720" rIns="73152" bIns="36576" rtlCol="0" anchor="t">
-            <a:noAutofit/>
+        <p:style>
+          <a:lnRef idx="2">
+            <a:schemeClr val="accent1">
+              <a:shade val="15000"/>
+            </a:schemeClr>
+          </a:lnRef>
+          <a:fillRef idx="1">
+            <a:schemeClr val="accent1"/>
+          </a:fillRef>
+          <a:effectRef idx="0">
+            <a:schemeClr val="accent1"/>
+          </a:effectRef>
+          <a:fontRef idx="minor">
+            <a:schemeClr val="lt1"/>
+          </a:fontRef>
+        </p:style>
+        <p:txBody>
+          <a:bodyPr rtlCol="0" anchor="ctr"/>
+          <a:lstStyle/>
+          <a:p>
+            <a:pPr algn="ctr"/>
+            <a:endParaRPr kumimoji="1" lang="ja-JP" altLang="en-US"/>
+          </a:p>
+        </p:txBody>
+      </p:sp>
+      <p:pic>
+        <p:nvPicPr>
+          <p:cNvPr id="43" name="図 42">
+            <a:extLst>
+              <a:ext uri="{FF2B5EF4-FFF2-40B4-BE49-F238E27FC236}">
+                <a16:creationId xmlns:a16="http://schemas.microsoft.com/office/drawing/2014/main" id="{F4AEE4F6-B4F2-3B63-B340-970573C6BC9B}"/>
+              </a:ext>
+            </a:extLst>
+          </p:cNvPr>
+          <p:cNvPicPr>
+            <a:picLocks noChangeAspect="1"/>
+          </p:cNvPicPr>
+          <p:nvPr/>
+        </p:nvPicPr>
+        <p:blipFill>
+          <a:blip r:embed="rId10">
+            <a:extLst>
+              <a:ext uri="{28A0092B-C50C-407E-A947-70E740481C1C}">
+                <a14:useLocalDpi xmlns:a14="http://schemas.microsoft.com/office/drawing/2010/main" val="0"/>
+              </a:ext>
+            </a:extLst>
+          </a:blip>
+          <a:stretch>
+            <a:fillRect/>
+          </a:stretch>
+        </p:blipFill>
+        <p:spPr>
+          <a:xfrm>
+            <a:off x="1407362" y="5422614"/>
+            <a:ext cx="1068810" cy="1060107"/>
+          </a:xfrm>
+          <a:prstGeom prst="rect">
+            <a:avLst/>
+          </a:prstGeom>
+        </p:spPr>
+      </p:pic>
+      <p:sp>
+        <p:nvSpPr>
+          <p:cNvPr id="50" name="テキスト ボックス 49">
+            <a:extLst>
+              <a:ext uri="{FF2B5EF4-FFF2-40B4-BE49-F238E27FC236}">
+                <a16:creationId xmlns:a16="http://schemas.microsoft.com/office/drawing/2014/main" id="{9E529396-156F-55A0-24A1-E3F30C8D079F}"/>
+              </a:ext>
+            </a:extLst>
+          </p:cNvPr>
+          <p:cNvSpPr txBox="1"/>
+          <p:nvPr/>
+        </p:nvSpPr>
+        <p:spPr>
+          <a:xfrm>
+            <a:off x="2607260" y="6011736"/>
+            <a:ext cx="1740223" cy="430887"/>
+          </a:xfrm>
+          <a:prstGeom prst="rect">
+            <a:avLst/>
+          </a:prstGeom>
+          <a:noFill/>
+        </p:spPr>
+        <p:txBody>
+          <a:bodyPr wrap="square">
+            <a:spAutoFit/>
           </a:bodyPr>
           <a:lstStyle/>
           <a:p>
-            <a:pPr algn="l">
-              <a:spcAft>
-                <a:spcPts val="100"/>
-              </a:spcAft>
-              <a:buNone/>
-            </a:pPr>
-            <a:r>
-              <a:rPr lang="ja-JP" altLang="en-US" sz="1100" b="1" dirty="0">
-                <a:solidFill>
-                  <a:srgbClr val="323366"/>
-                </a:solidFill>
+            <a:r>
+              <a:rPr lang="ja-JP" altLang="ja-JP" sz="1050" b="1" dirty="0">
                 <a:latin typeface="メイリオ" panose="020B0604030504040204" pitchFamily="50" charset="-128"/>
                 <a:ea typeface="メイリオ" panose="020B0604030504040204" pitchFamily="50" charset="-128"/>
               </a:rPr>
-              <a:t>横浜シミズでの導線</a:t>
-            </a:r>
-            <a:endParaRPr lang="ja-JP" altLang="en-US" sz="1000" dirty="0"/>
-          </a:p>
-          <a:p>
-            <a:pPr algn="l">
-              <a:spcAft>
-                <a:spcPts val="100"/>
-              </a:spcAft>
-              <a:buNone/>
-            </a:pPr>
-            <a:r>
-              <a:rPr lang="ja-JP" altLang="en-US" sz="1000" b="0" dirty="0">
-                <a:solidFill>
-                  <a:srgbClr val="333333"/>
-                </a:solidFill>
+              <a:t>QRコードを読み取って</a:t>
+            </a:r>
+            <a:endParaRPr lang="en-US" altLang="ja-JP" sz="1050" b="1" dirty="0">
+              <a:latin typeface="メイリオ" panose="020B0604030504040204" pitchFamily="50" charset="-128"/>
+              <a:ea typeface="メイリオ" panose="020B0604030504040204" pitchFamily="50" charset="-128"/>
+            </a:endParaRPr>
+          </a:p>
+          <a:p>
+            <a:r>
+              <a:rPr lang="ja-JP" altLang="ja-JP" sz="1050" b="1" dirty="0">
                 <a:latin typeface="メイリオ" panose="020B0604030504040204" pitchFamily="50" charset="-128"/>
                 <a:ea typeface="メイリオ" panose="020B0604030504040204" pitchFamily="50" charset="-128"/>
               </a:rPr>
-              <a:t>採用サイトで応募 → 面接予約の完了 → 自動でLINEへ → 友だち追加 → 勤務の案内・次回の募集</a:t>
-            </a:r>
-            <a:endParaRPr lang="ja-JP" altLang="en-US" sz="1000" dirty="0"/>
-          </a:p>
-          <a:p>
-            <a:pPr algn="l">
-              <a:spcAft>
-                <a:spcPts val="100"/>
-              </a:spcAft>
-              <a:buNone/>
-            </a:pPr>
-            <a:r>
-              <a:rPr lang="ja-JP" altLang="en-US" sz="1000" b="0" dirty="0">
-                <a:solidFill>
-                  <a:srgbClr val="323366"/>
+              <a:t>動画を見る（約22秒）</a:t>
+            </a:r>
+            <a:endParaRPr lang="en-US" altLang="ja-JP" sz="1050" b="1" dirty="0">
+              <a:latin typeface="メイリオ" panose="020B0604030504040204" pitchFamily="50" charset="-128"/>
+              <a:ea typeface="メイリオ" panose="020B0604030504040204" pitchFamily="50" charset="-128"/>
+            </a:endParaRPr>
+          </a:p>
+        </p:txBody>
+      </p:sp>
+      <p:sp>
+        <p:nvSpPr>
+          <p:cNvPr id="52" name="テキスト ボックス 51">
+            <a:extLst>
+              <a:ext uri="{FF2B5EF4-FFF2-40B4-BE49-F238E27FC236}">
+                <a16:creationId xmlns:a16="http://schemas.microsoft.com/office/drawing/2014/main" id="{FA39FB9E-0354-C79E-71A4-67DB6A28B75A}"/>
+              </a:ext>
+            </a:extLst>
+          </p:cNvPr>
+          <p:cNvSpPr txBox="1"/>
+          <p:nvPr/>
+        </p:nvSpPr>
+        <p:spPr>
+          <a:xfrm>
+            <a:off x="4032248" y="5546685"/>
+            <a:ext cx="869321" cy="276999"/>
+          </a:xfrm>
+          <a:prstGeom prst="rect">
+            <a:avLst/>
+          </a:prstGeom>
+          <a:solidFill>
+            <a:schemeClr val="tx2"/>
+          </a:solidFill>
+        </p:spPr>
+        <p:txBody>
+          <a:bodyPr wrap="square">
+            <a:spAutoFit/>
+          </a:bodyPr>
+          <a:lstStyle/>
+          <a:p>
+            <a:r>
+              <a:rPr lang="ja-JP" altLang="en-US" sz="1200" dirty="0">
+                <a:solidFill>
+                  <a:schemeClr val="bg1"/>
                 </a:solidFill>
                 <a:latin typeface="メイリオ" panose="020B0604030504040204" pitchFamily="50" charset="-128"/>
                 <a:ea typeface="メイリオ" panose="020B0604030504040204" pitchFamily="50" charset="-128"/>
-              </a:rPr>
-              <a:t>応募を済ませた、働く意思のある方を、そのまま友だちにできます。</a:t>
-            </a:r>
-            <a:endParaRPr lang="ja-JP" altLang="en-US" sz="1000" dirty="0"/>
-          </a:p>
-          <a:p>
-            <a:pPr algn="l">
-              <a:spcAft>
-                <a:spcPts val="100"/>
-              </a:spcAft>
-              <a:buNone/>
-            </a:pPr>
-            <a:r>
-              <a:rPr lang="ja-JP" altLang="en-US" sz="900" b="0" dirty="0">
-                <a:solidFill>
-                  <a:srgbClr val="595959"/>
+                <a:hlinkClick r:id="rId11">
+                  <a:extLst>
+                    <a:ext uri="{A12FA001-AC4F-418D-AE19-62706E023703}">
+                      <ahyp:hlinkClr xmlns:ahyp="http://schemas.microsoft.com/office/drawing/2018/hyperlinkcolor" val="tx"/>
+                    </a:ext>
+                  </a:extLst>
+                </a:hlinkClick>
+              </a:rPr>
+              <a:t>再生</a:t>
+            </a:r>
+            <a:r>
+              <a:rPr lang="ja-JP" altLang="en-US" sz="1200" dirty="0">
+                <a:solidFill>
+                  <a:srgbClr val="0000FF"/>
                 </a:solidFill>
                 <a:latin typeface="メイリオ" panose="020B0604030504040204" pitchFamily="50" charset="-128"/>
                 <a:ea typeface="メイリオ" panose="020B0604030504040204" pitchFamily="50" charset="-128"/>
-              </a:rPr>
-              <a:t>※採用サイト（応募フォーム）の完了画面に設置できるかは確認事項です。</a:t>
-            </a:r>
-            <a:endParaRPr lang="ja-JP" altLang="en-US" sz="1000" dirty="0"/>
+                <a:hlinkClick r:id="rId11">
+                  <a:extLst>
+                    <a:ext uri="{A12FA001-AC4F-418D-AE19-62706E023703}">
+                      <ahyp:hlinkClr xmlns:ahyp="http://schemas.microsoft.com/office/drawing/2018/hyperlinkcolor" val="tx"/>
+                    </a:ext>
+                  </a:extLst>
+                </a:hlinkClick>
+              </a:rPr>
+              <a:t> </a:t>
+            </a:r>
+            <a:r>
+              <a:rPr lang="en-US" altLang="ja-JP" sz="1200" dirty="0">
+                <a:solidFill>
+                  <a:schemeClr val="bg1"/>
+                </a:solidFill>
+                <a:latin typeface="メイリオ" panose="020B0604030504040204" pitchFamily="50" charset="-128"/>
+                <a:ea typeface="メイリオ" panose="020B0604030504040204" pitchFamily="50" charset="-128"/>
+                <a:hlinkClick r:id="rId11">
+                  <a:extLst>
+                    <a:ext uri="{A12FA001-AC4F-418D-AE19-62706E023703}">
+                      <ahyp:hlinkClr xmlns:ahyp="http://schemas.microsoft.com/office/drawing/2018/hyperlinkcolor" val="tx"/>
+                    </a:ext>
+                  </a:extLst>
+                </a:hlinkClick>
+              </a:rPr>
+              <a:t>[▷]</a:t>
+            </a:r>
+            <a:endParaRPr lang="ja-JP" altLang="en-US" sz="1200" dirty="0">
+              <a:solidFill>
+                <a:schemeClr val="bg1"/>
+              </a:solidFill>
+              <a:latin typeface="メイリオ" panose="020B0604030504040204" pitchFamily="50" charset="-128"/>
+              <a:ea typeface="メイリオ" panose="020B0604030504040204" pitchFamily="50" charset="-128"/>
+            </a:endParaRPr>
+          </a:p>
+        </p:txBody>
+      </p:sp>
+      <p:sp>
+        <p:nvSpPr>
+          <p:cNvPr id="54" name="テキスト ボックス 53">
+            <a:extLst>
+              <a:ext uri="{FF2B5EF4-FFF2-40B4-BE49-F238E27FC236}">
+                <a16:creationId xmlns:a16="http://schemas.microsoft.com/office/drawing/2014/main" id="{C2099EF7-D4DC-D52C-E0A5-F84C559A9E47}"/>
+              </a:ext>
+            </a:extLst>
+          </p:cNvPr>
+          <p:cNvSpPr txBox="1"/>
+          <p:nvPr/>
+        </p:nvSpPr>
+        <p:spPr>
+          <a:xfrm>
+            <a:off x="2648894" y="5570417"/>
+            <a:ext cx="1740223" cy="253916"/>
+          </a:xfrm>
+          <a:prstGeom prst="rect">
+            <a:avLst/>
+          </a:prstGeom>
+          <a:noFill/>
+        </p:spPr>
+        <p:txBody>
+          <a:bodyPr wrap="square">
+            <a:spAutoFit/>
+          </a:bodyPr>
+          <a:lstStyle/>
+          <a:p>
+            <a:r>
+              <a:rPr lang="ja-JP" altLang="en-US" sz="1050" b="1" dirty="0">
+                <a:latin typeface="メイリオ" panose="020B0604030504040204" pitchFamily="50" charset="-128"/>
+                <a:ea typeface="メイリオ" panose="020B0604030504040204" pitchFamily="50" charset="-128"/>
+              </a:rPr>
+              <a:t>クリックして再生</a:t>
+            </a:r>
+            <a:endParaRPr lang="en-US" altLang="ja-JP" sz="1050" b="1" dirty="0">
+              <a:latin typeface="メイリオ" panose="020B0604030504040204" pitchFamily="50" charset="-128"/>
+              <a:ea typeface="メイリオ" panose="020B0604030504040204" pitchFamily="50" charset="-128"/>
+            </a:endParaRPr>
           </a:p>
         </p:txBody>
       </p:sp>

--- a/202610_株式会社横浜シミズ御中_LINE公式アカウント運用のご提案.pptx
+++ b/202610_株式会社横浜シミズ御中_LINE公式アカウント運用のご提案.pptx
@@ -23,6 +23,7 @@
     <p:sldId id="2371" r:id="rId11"/>
     <p:sldId id="2372" r:id="rId12"/>
     <p:sldId id="2373" r:id="rId13"/>
+    <p:sldId id="2381" r:id="rId26"/>
     <p:sldId id="2374" r:id="rId14"/>
     <p:sldId id="2378" r:id="rId15"/>
     <p:sldId id="2379" r:id="rId16"/>
@@ -15809,6 +15810,1051 @@
     <a:masterClrMapping/>
   </p:clrMapOvr>
   <p:transition spd="slow"/>
+</p:sld>
+</file>
+
+<file path=ppt/slides/slide18.xml><?xml version="1.0" encoding="utf-8"?>
+<p:sld xmlns:a="http://schemas.openxmlformats.org/drawingml/2006/main" xmlns:p="http://schemas.openxmlformats.org/presentationml/2006/main" xmlns:r="http://schemas.openxmlformats.org/officeDocument/2006/relationships">
+  <p:cSld>
+    <p:spTree>
+      <p:nvGrpSpPr>
+        <p:cNvPr id="1" name=""/>
+        <p:cNvGrpSpPr/>
+        <p:nvPr/>
+      </p:nvGrpSpPr>
+      <p:grpSpPr/>
+      <p:sp>
+        <p:nvSpPr>
+          <p:cNvPr id="2" name="Google Shape;752;p28"/>
+          <p:cNvSpPr/>
+          <p:nvPr/>
+        </p:nvSpPr>
+        <p:spPr>
+          <a:xfrm>
+            <a:off x="549000" y="138240"/>
+            <a:ext cx="7680960" cy="338040"/>
+          </a:xfrm>
+          <a:prstGeom prst="rect">
+            <a:avLst/>
+          </a:prstGeom>
+          <a:noFill/>
+          <a:ln w="0">
+            <a:noFill/>
+          </a:ln>
+        </p:spPr>
+        <p:style>
+          <a:lnRef idx="0">
+            <a:scrgbClr r="0" g="0" b="0"/>
+          </a:lnRef>
+          <a:fillRef idx="0">
+            <a:scrgbClr r="0" g="0" b="0"/>
+          </a:fillRef>
+          <a:effectRef idx="0">
+            <a:scrgbClr r="0" g="0" b="0"/>
+          </a:effectRef>
+          <a:fontRef idx="minor"/>
+        </p:style>
+        <p:txBody>
+          <a:bodyPr anchor="ctr">
+            <a:spAutoFit/>
+          </a:bodyPr>
+          <a:lstStyle/>
+          <a:p>
+            <a:pPr defTabSz="914400">
+              <a:lnSpc>
+                <a:spcPct val="100000"/>
+              </a:lnSpc>
+            </a:pPr>
+            <a:r>
+              <a:rPr lang="ja-JP" sz="1600" b="1" u="none" strike="noStrike">
+                <a:solidFill>
+                  <a:srgbClr val="323366"/>
+                </a:solidFill>
+                <a:effectLst/>
+                <a:uFillTx/>
+                <a:latin typeface="メイリオ"/>
+                <a:ea typeface="メイリオ"/>
+              </a:rPr>
+              <a:t>前後検索「単発バイト」｜当日に何社も比べ、その後は給与・働き方を調べる</a:t>
+            </a:r>
+            <a:endParaRPr lang="en-US" sz="1600" b="0" u="none" strike="noStrike">
+              <a:solidFill>
+                <a:srgbClr val="000000"/>
+              </a:solidFill>
+              <a:effectLst/>
+              <a:uFillTx/>
+              <a:latin typeface="メイリオ"/>
+            </a:endParaRPr>
+          </a:p>
+        </p:txBody>
+      </p:sp>
+      <p:sp>
+        <p:nvSpPr>
+          <p:cNvPr id="3" name="正方形/長方形 2"/>
+          <p:cNvSpPr/>
+          <p:nvPr/>
+        </p:nvSpPr>
+        <p:spPr>
+          <a:xfrm>
+            <a:off x="0" y="577800"/>
+            <a:ext cx="9905760" cy="812520"/>
+          </a:xfrm>
+          <a:prstGeom prst="rect">
+            <a:avLst/>
+          </a:prstGeom>
+          <a:noFill/>
+          <a:ln>
+            <a:noFill/>
+          </a:ln>
+          <a:effectLst>
+            <a:outerShdw blurRad="39960" dist="23040" dir="5400000" rotWithShape="0">
+              <a:srgbClr val="000000">
+                <a:alpha val="35000"/>
+              </a:srgbClr>
+            </a:outerShdw>
+          </a:effectLst>
+        </p:spPr>
+        <p:style>
+          <a:lnRef idx="1">
+            <a:schemeClr val="accent1"/>
+          </a:lnRef>
+          <a:fillRef idx="3">
+            <a:schemeClr val="accent1"/>
+          </a:fillRef>
+          <a:effectRef idx="2">
+            <a:schemeClr val="accent1"/>
+          </a:effectRef>
+          <a:fontRef idx="minor"/>
+        </p:style>
+        <p:txBody>
+          <a:bodyPr lIns="90000" tIns="45000" rIns="90000" bIns="45000" anchor="ctr">
+            <a:noAutofit/>
+          </a:bodyPr>
+          <a:lstStyle/>
+          <a:p>
+            <a:pPr algn="ctr" defTabSz="914400">
+              <a:lnSpc>
+                <a:spcPct val="100000"/>
+              </a:lnSpc>
+            </a:pPr>
+            <a:endParaRPr lang="en-US" sz="1800" b="0" u="none" strike="noStrike">
+              <a:solidFill>
+                <a:schemeClr val="lt1"/>
+              </a:solidFill>
+              <a:effectLst/>
+              <a:uFillTx/>
+              <a:latin typeface="メイリオ"/>
+              <a:ea typeface="メイリオ"/>
+            </a:endParaRPr>
+          </a:p>
+        </p:txBody>
+      </p:sp>
+      <p:sp>
+        <p:nvSpPr>
+          <p:cNvPr id="4" name="正方形/長方形 3"/>
+          <p:cNvSpPr/>
+          <p:nvPr/>
+        </p:nvSpPr>
+        <p:spPr>
+          <a:xfrm>
+            <a:off x="379800" y="635040"/>
+            <a:ext cx="9160560" cy="698040"/>
+          </a:xfrm>
+          <a:prstGeom prst="rect">
+            <a:avLst/>
+          </a:prstGeom>
+          <a:noFill/>
+          <a:ln>
+            <a:noFill/>
+          </a:ln>
+        </p:spPr>
+        <p:style>
+          <a:lnRef idx="2">
+            <a:schemeClr val="accent1">
+              <a:shade val="50000"/>
+            </a:schemeClr>
+          </a:lnRef>
+          <a:fillRef idx="1">
+            <a:schemeClr val="accent1"/>
+          </a:fillRef>
+          <a:effectRef idx="0">
+            <a:schemeClr val="accent1"/>
+          </a:effectRef>
+          <a:fontRef idx="minor"/>
+        </p:style>
+        <p:txBody>
+          <a:bodyPr lIns="90000" tIns="90000" rIns="90000" bIns="45000" anchor="ctr">
+            <a:noAutofit/>
+          </a:bodyPr>
+          <a:lstStyle/>
+          <a:p>
+            <a:pPr algn="ctr" defTabSz="914400">
+              <a:lnSpc>
+                <a:spcPts val="2455"/>
+              </a:lnSpc>
+            </a:pPr>
+            <a:endParaRPr lang="en-US" sz="1400" b="0" u="none" strike="noStrike">
+              <a:solidFill>
+                <a:srgbClr val="343434"/>
+              </a:solidFill>
+              <a:effectLst/>
+              <a:uFillTx/>
+              <a:latin typeface="メイリオ"/>
+              <a:ea typeface="メイリオ"/>
+            </a:endParaRPr>
+          </a:p>
+        </p:txBody>
+      </p:sp>
+      <p:cxnSp>
+        <p:nvCxnSpPr>
+          <p:cNvPr id="5" name="直線コネクタ 1"/>
+          <p:cNvCxnSpPr/>
+          <p:nvPr/>
+        </p:nvCxnSpPr>
+        <p:spPr>
+          <a:xfrm>
+            <a:off x="0" y="1390320"/>
+            <a:ext cx="9906120" cy="360"/>
+          </a:xfrm>
+          <a:prstGeom prst="straightConnector1">
+            <a:avLst/>
+          </a:prstGeom>
+          <a:ln w="19050">
+            <a:solidFill>
+              <a:schemeClr val="lt1">
+                <a:lumMod val="85000"/>
+                <a:alpha val="60000"/>
+              </a:schemeClr>
+            </a:solidFill>
+            <a:round/>
+          </a:ln>
+        </p:spPr>
+      </p:cxnSp>
+      <p:sp>
+        <p:nvSpPr>
+          <p:cNvPr id="6" name="テキスト ボックス 30"/>
+          <p:cNvSpPr/>
+          <p:nvPr/>
+        </p:nvSpPr>
+        <p:spPr>
+          <a:xfrm>
+            <a:off x="426240" y="635400"/>
+            <a:ext cx="9068760" cy="698400"/>
+          </a:xfrm>
+          <a:prstGeom prst="rect">
+            <a:avLst/>
+          </a:prstGeom>
+          <a:noFill/>
+          <a:ln w="0">
+            <a:noFill/>
+          </a:ln>
+        </p:spPr>
+        <p:style>
+          <a:lnRef idx="0">
+            <a:scrgbClr r="0" g="0" b="0"/>
+          </a:lnRef>
+          <a:fillRef idx="0">
+            <a:scrgbClr r="0" g="0" b="0"/>
+          </a:fillRef>
+          <a:effectRef idx="0">
+            <a:scrgbClr r="0" g="0" b="0"/>
+          </a:effectRef>
+          <a:fontRef idx="minor"/>
+        </p:style>
+        <p:txBody>
+          <a:bodyPr lIns="90000" tIns="45000" rIns="90000" bIns="45000" anchor="ctr">
+            <a:noAutofit/>
+          </a:bodyPr>
+          <a:lstStyle/>
+          <a:p>
+            <a:pPr algn="ctr" defTabSz="914400">
+              <a:lnSpc>
+                <a:spcPct val="100000"/>
+              </a:lnSpc>
+            </a:pPr>
+            <a:r>
+              <a:rPr lang="ja-JP" sz="1400" b="1" u="none" strike="noStrike" dirty="0">
+                <a:effectLst/>
+                <a:uFillTx/>
+                <a:latin typeface="メイリオ" panose="020B0604030504040204" pitchFamily="50" charset="-128"/>
+                <a:ea typeface="メイリオ" panose="020B0604030504040204" pitchFamily="50" charset="-128"/>
+              </a:rPr>
+              <a:t>応募の前後に調べていることを、LINEで先に届ける</a:t>
+            </a:r>
+            <a:endParaRPr lang="en-US" sz="1400" b="1" u="none" strike="noStrike" dirty="0">
+              <a:effectLst/>
+              <a:uFillTx/>
+              <a:latin typeface="メイリオ"/>
+            </a:endParaRPr>
+          </a:p>
+        </p:txBody>
+      </p:sp>
+      <p:pic>
+        <p:nvPicPr>
+          <p:cNvPr id="7" name="前後検索 単発バイト（色分け）" descr="tanaka_zengo_chumon_color.png"/>
+          <p:cNvPicPr>
+            <a:picLocks noChangeAspect="1"/>
+          </p:cNvPicPr>
+          <p:nvPr/>
+        </p:nvPicPr>
+        <p:blipFill>
+          <a:blip r:embed="rId4"/>
+          <a:stretch>
+            <a:fillRect/>
+          </a:stretch>
+        </p:blipFill>
+        <p:spPr>
+          <a:xfrm>
+            <a:off x="502920" y="1600200"/>
+            <a:ext cx="5943600" cy="3468090"/>
+          </a:xfrm>
+          <a:prstGeom prst="rect">
+            <a:avLst/>
+          </a:prstGeom>
+        </p:spPr>
+      </p:pic>
+      <p:sp>
+        <p:nvSpPr>
+          <p:cNvPr id="8" name="LINE追加の時期"/>
+          <p:cNvSpPr/>
+          <p:nvPr/>
+        </p:nvSpPr>
+        <p:spPr>
+          <a:xfrm>
+            <a:off x="3584676" y="1644777"/>
+            <a:ext cx="692429" cy="3239261"/>
+          </a:xfrm>
+          <a:prstGeom prst="rect">
+            <a:avLst/>
+          </a:prstGeom>
+          <a:solidFill>
+            <a:srgbClr val="06C755">
+              <a:alpha val="16000"/>
+            </a:srgbClr>
+          </a:solidFill>
+          <a:ln>
+            <a:noFill/>
+          </a:ln>
+          <a:effectLst/>
+        </p:spPr>
+        <p:style>
+          <a:lnRef idx="1">
+            <a:schemeClr val="accent1"/>
+          </a:lnRef>
+          <a:fillRef idx="3">
+            <a:schemeClr val="accent1"/>
+          </a:fillRef>
+          <a:effectRef idx="2">
+            <a:schemeClr val="accent1"/>
+          </a:effectRef>
+          <a:fontRef idx="minor">
+            <a:schemeClr val="lt1"/>
+          </a:fontRef>
+        </p:style>
+        <p:txBody>
+          <a:bodyPr rtlCol="0" anchor="ctr"/>
+          <a:lstStyle/>
+          <a:p>
+            <a:pPr algn="ctr"/>
+          </a:p>
+        </p:txBody>
+      </p:sp>
+      <p:sp>
+        <p:nvSpPr>
+          <p:cNvPr id="9" name="LINE追加 札"/>
+          <p:cNvSpPr/>
+          <p:nvPr/>
+        </p:nvSpPr>
+        <p:spPr>
+          <a:xfrm>
+            <a:off x="3473690" y="5104866"/>
+            <a:ext cx="914400" cy="237744"/>
+          </a:xfrm>
+          <a:prstGeom prst="rect">
+            <a:avLst/>
+          </a:prstGeom>
+          <a:solidFill>
+            <a:srgbClr val="C6EFCE"/>
+          </a:solidFill>
+          <a:ln>
+            <a:noFill/>
+          </a:ln>
+        </p:spPr>
+        <p:txBody>
+          <a:bodyPr wrap="square" lIns="0" tIns="0" rIns="0" bIns="0" rtlCol="0" anchor="ctr">
+            <a:noAutofit/>
+          </a:bodyPr>
+          <a:lstStyle/>
+          <a:p>
+            <a:pPr algn="ctr">
+              <a:buNone/>
+            </a:pPr>
+            <a:r>
+              <a:rPr lang="ja-JP" altLang="en-US" sz="950" b="1" dirty="0">
+                <a:solidFill>
+                  <a:srgbClr val="00873C"/>
+                </a:solidFill>
+                <a:latin typeface="メイリオ" panose="020B0604030504040204" pitchFamily="50" charset="-128"/>
+                <a:ea typeface="メイリオ" panose="020B0604030504040204" pitchFamily="50" charset="-128"/>
+              </a:rPr>
+              <a:t>LINE追加</a:t>
+            </a:r>
+            <a:endParaRPr lang="ja-JP" altLang="en-US" sz="1200" dirty="0"/>
+          </a:p>
+        </p:txBody>
+      </p:sp>
+      <p:sp>
+        <p:nvSpPr>
+          <p:cNvPr id="10" name="凡例の色"/>
+          <p:cNvSpPr/>
+          <p:nvPr/>
+        </p:nvSpPr>
+        <p:spPr>
+          <a:xfrm>
+            <a:off x="6629400" y="1655064"/>
+            <a:ext cx="137160" cy="137160"/>
+          </a:xfrm>
+          <a:prstGeom prst="rect">
+            <a:avLst/>
+          </a:prstGeom>
+          <a:solidFill>
+            <a:srgbClr val="3467B2"/>
+          </a:solidFill>
+          <a:ln>
+            <a:noFill/>
+          </a:ln>
+        </p:spPr>
+        <p:txBody>
+          <a:bodyPr wrap="square" lIns="0" tIns="0" rIns="0" bIns="0" rtlCol="0" anchor="ctr">
+            <a:noAutofit/>
+          </a:bodyPr>
+          <a:lstStyle/>
+          <a:p>
+            <a:pPr algn="l">
+              <a:buNone/>
+            </a:pPr>
+            <a:endParaRPr lang="ja-JP" altLang="en-US" sz="1200" dirty="0"/>
+          </a:p>
+        </p:txBody>
+      </p:sp>
+      <p:sp>
+        <p:nvSpPr>
+          <p:cNvPr id="11" name="凡例"/>
+          <p:cNvSpPr/>
+          <p:nvPr/>
+        </p:nvSpPr>
+        <p:spPr>
+          <a:xfrm>
+            <a:off x="6812280" y="1600200"/>
+            <a:ext cx="2587752" cy="246888"/>
+          </a:xfrm>
+          <a:prstGeom prst="rect">
+            <a:avLst/>
+          </a:prstGeom>
+          <a:noFill/>
+          <a:ln>
+            <a:noFill/>
+          </a:ln>
+        </p:spPr>
+        <p:txBody>
+          <a:bodyPr wrap="square" lIns="0" tIns="0" rIns="0" bIns="0" rtlCol="0" anchor="ctr">
+            <a:noAutofit/>
+          </a:bodyPr>
+          <a:lstStyle/>
+          <a:p>
+            <a:pPr algn="l">
+              <a:buNone/>
+            </a:pPr>
+            <a:r>
+              <a:rPr lang="ja-JP" altLang="en-US" sz="1100" b="0" dirty="0">
+                <a:solidFill>
+                  <a:srgbClr val="333333"/>
+                </a:solidFill>
+                <a:latin typeface="メイリオ" panose="020B0604030504040204" pitchFamily="50" charset="-128"/>
+                <a:ea typeface="メイリオ" panose="020B0604030504040204" pitchFamily="50" charset="-128"/>
+              </a:rPr>
+              <a:t>求人サービスを比べる</a:t>
+            </a:r>
+            <a:endParaRPr lang="ja-JP" altLang="en-US" sz="1200" dirty="0"/>
+          </a:p>
+        </p:txBody>
+      </p:sp>
+      <p:sp>
+        <p:nvSpPr>
+          <p:cNvPr id="12" name="凡例の色"/>
+          <p:cNvSpPr/>
+          <p:nvPr/>
+        </p:nvSpPr>
+        <p:spPr>
+          <a:xfrm>
+            <a:off x="6629400" y="1901952"/>
+            <a:ext cx="137160" cy="137160"/>
+          </a:xfrm>
+          <a:prstGeom prst="rect">
+            <a:avLst/>
+          </a:prstGeom>
+          <a:solidFill>
+            <a:srgbClr val="8E4EC6"/>
+          </a:solidFill>
+          <a:ln>
+            <a:noFill/>
+          </a:ln>
+        </p:spPr>
+        <p:txBody>
+          <a:bodyPr wrap="square" lIns="0" tIns="0" rIns="0" bIns="0" rtlCol="0" anchor="ctr">
+            <a:noAutofit/>
+          </a:bodyPr>
+          <a:lstStyle/>
+          <a:p>
+            <a:pPr algn="l">
+              <a:buNone/>
+            </a:pPr>
+            <a:endParaRPr lang="ja-JP" altLang="en-US" sz="1200" dirty="0"/>
+          </a:p>
+        </p:txBody>
+      </p:sp>
+      <p:sp>
+        <p:nvSpPr>
+          <p:cNvPr id="13" name="凡例"/>
+          <p:cNvSpPr/>
+          <p:nvPr/>
+        </p:nvSpPr>
+        <p:spPr>
+          <a:xfrm>
+            <a:off x="6812280" y="1847088"/>
+            <a:ext cx="2587752" cy="246888"/>
+          </a:xfrm>
+          <a:prstGeom prst="rect">
+            <a:avLst/>
+          </a:prstGeom>
+          <a:noFill/>
+          <a:ln>
+            <a:noFill/>
+          </a:ln>
+        </p:spPr>
+        <p:txBody>
+          <a:bodyPr wrap="square" lIns="0" tIns="0" rIns="0" bIns="0" rtlCol="0" anchor="ctr">
+            <a:noAutofit/>
+          </a:bodyPr>
+          <a:lstStyle/>
+          <a:p>
+            <a:pPr algn="l">
+              <a:buNone/>
+            </a:pPr>
+            <a:r>
+              <a:rPr lang="ja-JP" altLang="en-US" sz="1100" b="0" dirty="0">
+                <a:solidFill>
+                  <a:srgbClr val="333333"/>
+                </a:solidFill>
+                <a:latin typeface="メイリオ" panose="020B0604030504040204" pitchFamily="50" charset="-128"/>
+                <a:ea typeface="メイリオ" panose="020B0604030504040204" pitchFamily="50" charset="-128"/>
+              </a:rPr>
+              <a:t>応募・面接の準備</a:t>
+            </a:r>
+            <a:endParaRPr lang="ja-JP" altLang="en-US" sz="1200" dirty="0"/>
+          </a:p>
+        </p:txBody>
+      </p:sp>
+      <p:sp>
+        <p:nvSpPr>
+          <p:cNvPr id="14" name="凡例の色"/>
+          <p:cNvSpPr/>
+          <p:nvPr/>
+        </p:nvSpPr>
+        <p:spPr>
+          <a:xfrm>
+            <a:off x="6629400" y="2148840"/>
+            <a:ext cx="137160" cy="137160"/>
+          </a:xfrm>
+          <a:prstGeom prst="rect">
+            <a:avLst/>
+          </a:prstGeom>
+          <a:solidFill>
+            <a:srgbClr val="00897B"/>
+          </a:solidFill>
+          <a:ln>
+            <a:noFill/>
+          </a:ln>
+        </p:spPr>
+        <p:txBody>
+          <a:bodyPr wrap="square" lIns="0" tIns="0" rIns="0" bIns="0" rtlCol="0" anchor="ctr">
+            <a:noAutofit/>
+          </a:bodyPr>
+          <a:lstStyle/>
+          <a:p>
+            <a:pPr algn="l">
+              <a:buNone/>
+            </a:pPr>
+            <a:endParaRPr lang="ja-JP" altLang="en-US" sz="1200" dirty="0"/>
+          </a:p>
+        </p:txBody>
+      </p:sp>
+      <p:sp>
+        <p:nvSpPr>
+          <p:cNvPr id="15" name="凡例"/>
+          <p:cNvSpPr/>
+          <p:nvPr/>
+        </p:nvSpPr>
+        <p:spPr>
+          <a:xfrm>
+            <a:off x="6812280" y="2093976"/>
+            <a:ext cx="2587752" cy="246888"/>
+          </a:xfrm>
+          <a:prstGeom prst="rect">
+            <a:avLst/>
+          </a:prstGeom>
+          <a:noFill/>
+          <a:ln>
+            <a:noFill/>
+          </a:ln>
+        </p:spPr>
+        <p:txBody>
+          <a:bodyPr wrap="square" lIns="0" tIns="0" rIns="0" bIns="0" rtlCol="0" anchor="ctr">
+            <a:noAutofit/>
+          </a:bodyPr>
+          <a:lstStyle/>
+          <a:p>
+            <a:pPr algn="l">
+              <a:buNone/>
+            </a:pPr>
+            <a:r>
+              <a:rPr lang="ja-JP" altLang="en-US" sz="1100" b="0" dirty="0">
+                <a:solidFill>
+                  <a:srgbClr val="333333"/>
+                </a:solidFill>
+                <a:latin typeface="メイリオ" panose="020B0604030504040204" pitchFamily="50" charset="-128"/>
+                <a:ea typeface="メイリオ" panose="020B0604030504040204" pitchFamily="50" charset="-128"/>
+              </a:rPr>
+              <a:t>給与・働き方を調べる</a:t>
+            </a:r>
+            <a:endParaRPr lang="ja-JP" altLang="en-US" sz="1200" dirty="0"/>
+          </a:p>
+        </p:txBody>
+      </p:sp>
+      <p:sp>
+        <p:nvSpPr>
+          <p:cNvPr id="18" name="分析 当日"/>
+          <p:cNvSpPr/>
+          <p:nvPr/>
+        </p:nvSpPr>
+        <p:spPr>
+          <a:xfrm>
+            <a:off x="6629400" y="2404872"/>
+            <a:ext cx="2770632" cy="274320"/>
+          </a:xfrm>
+          <a:prstGeom prst="rect">
+            <a:avLst/>
+          </a:prstGeom>
+          <a:solidFill>
+            <a:srgbClr val="1F285A"/>
+          </a:solidFill>
+          <a:ln>
+            <a:noFill/>
+          </a:ln>
+        </p:spPr>
+        <p:txBody>
+          <a:bodyPr wrap="square" lIns="73152" tIns="36576" rIns="73152" bIns="36576" rtlCol="0" anchor="ctr">
+            <a:noAutofit/>
+          </a:bodyPr>
+          <a:lstStyle/>
+          <a:p>
+            <a:pPr algn="ctr">
+              <a:buNone/>
+            </a:pPr>
+            <a:r>
+              <a:rPr lang="ja-JP" altLang="en-US" sz="1150" b="1" dirty="0">
+                <a:solidFill>
+                  <a:srgbClr val="FFFFFF"/>
+                </a:solidFill>
+                <a:latin typeface="メイリオ" panose="020B0604030504040204" pitchFamily="50" charset="-128"/>
+                <a:ea typeface="メイリオ" panose="020B0604030504040204" pitchFamily="50" charset="-128"/>
+              </a:rPr>
+              <a:t>検索前</a:t>
+            </a:r>
+            <a:endParaRPr lang="ja-JP" altLang="en-US" sz="1200" dirty="0"/>
+          </a:p>
+        </p:txBody>
+      </p:sp>
+      <p:sp>
+        <p:nvSpPr>
+          <p:cNvPr id="19" name="分析 当日 本文"/>
+          <p:cNvSpPr/>
+          <p:nvPr/>
+        </p:nvSpPr>
+        <p:spPr>
+          <a:xfrm>
+            <a:off x="6629400" y="2679191"/>
+            <a:ext cx="2770632" cy="713232"/>
+          </a:xfrm>
+          <a:prstGeom prst="rect">
+            <a:avLst/>
+          </a:prstGeom>
+          <a:noFill/>
+          <a:ln w="9525">
+            <a:solidFill>
+              <a:srgbClr val="D9D9D9"/>
+            </a:solidFill>
+          </a:ln>
+        </p:spPr>
+        <p:txBody>
+          <a:bodyPr wrap="square" lIns="73152" tIns="36576" rIns="73152" bIns="27432" rtlCol="0" anchor="t">
+            <a:noAutofit/>
+          </a:bodyPr>
+          <a:lstStyle/>
+          <a:p>
+            <a:pPr algn="l">
+              <a:lnSpc>
+                <a:spcPct val="110000"/>
+              </a:lnSpc>
+              <a:buNone/>
+            </a:pPr>
+            <a:r>
+              <a:rPr lang="ja-JP" altLang="en-US" sz="1200" b="1" dirty="0">
+                <a:solidFill>
+                  <a:srgbClr val="1F285A"/>
+                </a:solidFill>
+                <a:latin typeface="メイリオ" panose="020B0604030504040204" pitchFamily="50" charset="-128"/>
+                <a:ea typeface="メイリオ" panose="020B0604030504040204" pitchFamily="50" charset="-128"/>
+              </a:rPr>
+              <a:t>求人サイトで探し始める</a:t>
+            </a:r>
+            <a:endParaRPr lang="ja-JP" altLang="en-US" sz="1200" dirty="0"/>
+          </a:p>
+          <a:p>
+            <a:pPr algn="l">
+              <a:lnSpc>
+                <a:spcPct val="110000"/>
+              </a:lnSpc>
+              <a:buNone/>
+            </a:pPr>
+            <a:r>
+              <a:rPr lang="ja-JP" altLang="en-US" sz="1100" b="0" dirty="0">
+                <a:solidFill>
+                  <a:srgbClr val="333333"/>
+                </a:solidFill>
+                <a:latin typeface="メイリオ" panose="020B0604030504040204" pitchFamily="50" charset="-128"/>
+                <a:ea typeface="メイリオ" panose="020B0604030504040204" pitchFamily="50" charset="-128"/>
+              </a:rPr>
+              <a:t>バイト 求人・タウンワークなど</a:t>
+            </a:r>
+            <a:endParaRPr lang="ja-JP" altLang="en-US" sz="1200" dirty="0"/>
+          </a:p>
+        </p:txBody>
+      </p:sp>
+      <p:sp>
+        <p:nvSpPr>
+          <p:cNvPr id="20" name="分析 1〜7日後"/>
+          <p:cNvSpPr/>
+          <p:nvPr/>
+        </p:nvSpPr>
+        <p:spPr>
+          <a:xfrm>
+            <a:off x="6629400" y="3447288"/>
+            <a:ext cx="2770632" cy="274320"/>
+          </a:xfrm>
+          <a:prstGeom prst="rect">
+            <a:avLst/>
+          </a:prstGeom>
+          <a:solidFill>
+            <a:srgbClr val="1F285A"/>
+          </a:solidFill>
+          <a:ln>
+            <a:noFill/>
+          </a:ln>
+        </p:spPr>
+        <p:txBody>
+          <a:bodyPr wrap="square" lIns="73152" tIns="36576" rIns="73152" bIns="36576" rtlCol="0" anchor="ctr">
+            <a:noAutofit/>
+          </a:bodyPr>
+          <a:lstStyle/>
+          <a:p>
+            <a:pPr algn="ctr">
+              <a:buNone/>
+            </a:pPr>
+            <a:r>
+              <a:rPr lang="ja-JP" altLang="en-US" sz="1150" b="1" dirty="0">
+                <a:solidFill>
+                  <a:srgbClr val="FFFFFF"/>
+                </a:solidFill>
+                <a:latin typeface="メイリオ" panose="020B0604030504040204" pitchFamily="50" charset="-128"/>
+                <a:ea typeface="メイリオ" panose="020B0604030504040204" pitchFamily="50" charset="-128"/>
+              </a:rPr>
+              <a:t>当日</a:t>
+            </a:r>
+            <a:endParaRPr lang="ja-JP" altLang="en-US" sz="1200" dirty="0"/>
+          </a:p>
+        </p:txBody>
+      </p:sp>
+      <p:sp>
+        <p:nvSpPr>
+          <p:cNvPr id="21" name="分析 1〜7日後 本文"/>
+          <p:cNvSpPr/>
+          <p:nvPr/>
+        </p:nvSpPr>
+        <p:spPr>
+          <a:xfrm>
+            <a:off x="6629400" y="3721608"/>
+            <a:ext cx="2770632" cy="713232"/>
+          </a:xfrm>
+          <a:prstGeom prst="rect">
+            <a:avLst/>
+          </a:prstGeom>
+          <a:noFill/>
+          <a:ln w="9525">
+            <a:solidFill>
+              <a:srgbClr val="D9D9D9"/>
+            </a:solidFill>
+          </a:ln>
+        </p:spPr>
+        <p:txBody>
+          <a:bodyPr wrap="square" lIns="73152" tIns="36576" rIns="73152" bIns="27432" rtlCol="0" anchor="t">
+            <a:noAutofit/>
+          </a:bodyPr>
+          <a:lstStyle/>
+          <a:p>
+            <a:pPr algn="l">
+              <a:lnSpc>
+                <a:spcPct val="110000"/>
+              </a:lnSpc>
+              <a:buNone/>
+            </a:pPr>
+            <a:r>
+              <a:rPr lang="ja-JP" altLang="en-US" sz="1200" b="1" dirty="0">
+                <a:solidFill>
+                  <a:srgbClr val="1F285A"/>
+                </a:solidFill>
+                <a:latin typeface="メイリオ" panose="020B0604030504040204" pitchFamily="50" charset="-128"/>
+                <a:ea typeface="メイリオ" panose="020B0604030504040204" pitchFamily="50" charset="-128"/>
+              </a:rPr>
+              <a:t>単発のサービスを比べる</a:t>
+            </a:r>
+            <a:endParaRPr lang="ja-JP" altLang="en-US" sz="1200" dirty="0"/>
+          </a:p>
+          <a:p>
+            <a:pPr algn="l">
+              <a:lnSpc>
+                <a:spcPct val="110000"/>
+              </a:lnSpc>
+              <a:buNone/>
+            </a:pPr>
+            <a:r>
+              <a:rPr lang="ja-JP" altLang="en-US" sz="1100" b="0" dirty="0">
+                <a:solidFill>
+                  <a:srgbClr val="333333"/>
+                </a:solidFill>
+                <a:latin typeface="メイリオ" panose="020B0604030504040204" pitchFamily="50" charset="-128"/>
+                <a:ea typeface="メイリオ" panose="020B0604030504040204" pitchFamily="50" charset="-128"/>
+              </a:rPr>
+              <a:t>タイミー・バイトル・短期バイトなど。履歴書の書き方も</a:t>
+            </a:r>
+            <a:endParaRPr lang="ja-JP" altLang="en-US" sz="1200" dirty="0"/>
+          </a:p>
+        </p:txBody>
+      </p:sp>
+      <p:sp>
+        <p:nvSpPr>
+          <p:cNvPr id="22" name="分析 7〜15日後"/>
+          <p:cNvSpPr/>
+          <p:nvPr/>
+        </p:nvSpPr>
+        <p:spPr>
+          <a:xfrm>
+            <a:off x="6629400" y="4489704"/>
+            <a:ext cx="2770632" cy="274320"/>
+          </a:xfrm>
+          <a:prstGeom prst="rect">
+            <a:avLst/>
+          </a:prstGeom>
+          <a:solidFill>
+            <a:srgbClr val="1F285A"/>
+          </a:solidFill>
+          <a:ln>
+            <a:noFill/>
+          </a:ln>
+        </p:spPr>
+        <p:txBody>
+          <a:bodyPr wrap="square" lIns="73152" tIns="36576" rIns="73152" bIns="36576" rtlCol="0" anchor="ctr">
+            <a:noAutofit/>
+          </a:bodyPr>
+          <a:lstStyle/>
+          <a:p>
+            <a:pPr algn="ctr">
+              <a:buNone/>
+            </a:pPr>
+            <a:r>
+              <a:rPr lang="ja-JP" altLang="en-US" sz="1150" b="1" dirty="0">
+                <a:solidFill>
+                  <a:srgbClr val="FFFFFF"/>
+                </a:solidFill>
+                <a:latin typeface="メイリオ" panose="020B0604030504040204" pitchFamily="50" charset="-128"/>
+                <a:ea typeface="メイリオ" panose="020B0604030504040204" pitchFamily="50" charset="-128"/>
+              </a:rPr>
+              <a:t>1〜15日後</a:t>
+            </a:r>
+            <a:endParaRPr lang="ja-JP" altLang="en-US" sz="1200" dirty="0"/>
+          </a:p>
+        </p:txBody>
+      </p:sp>
+      <p:sp>
+        <p:nvSpPr>
+          <p:cNvPr id="23" name="分析 7〜15日後 本文"/>
+          <p:cNvSpPr/>
+          <p:nvPr/>
+        </p:nvSpPr>
+        <p:spPr>
+          <a:xfrm>
+            <a:off x="6629400" y="4764024"/>
+            <a:ext cx="2770632" cy="713232"/>
+          </a:xfrm>
+          <a:prstGeom prst="rect">
+            <a:avLst/>
+          </a:prstGeom>
+          <a:noFill/>
+          <a:ln w="9525">
+            <a:solidFill>
+              <a:srgbClr val="D9D9D9"/>
+            </a:solidFill>
+          </a:ln>
+        </p:spPr>
+        <p:txBody>
+          <a:bodyPr wrap="square" lIns="73152" tIns="36576" rIns="73152" bIns="27432" rtlCol="0" anchor="t">
+            <a:noAutofit/>
+          </a:bodyPr>
+          <a:lstStyle/>
+          <a:p>
+            <a:pPr algn="l">
+              <a:lnSpc>
+                <a:spcPct val="110000"/>
+              </a:lnSpc>
+              <a:buNone/>
+            </a:pPr>
+            <a:r>
+              <a:rPr lang="ja-JP" altLang="en-US" sz="1200" b="1" dirty="0">
+                <a:solidFill>
+                  <a:srgbClr val="1F285A"/>
+                </a:solidFill>
+                <a:latin typeface="メイリオ" panose="020B0604030504040204" pitchFamily="50" charset="-128"/>
+                <a:ea typeface="メイリオ" panose="020B0604030504040204" pitchFamily="50" charset="-128"/>
+              </a:rPr>
+              <a:t>給与・働き方を調べる</a:t>
+            </a:r>
+            <a:endParaRPr lang="ja-JP" altLang="en-US" sz="1200" dirty="0"/>
+          </a:p>
+          <a:p>
+            <a:pPr algn="l">
+              <a:lnSpc>
+                <a:spcPct val="110000"/>
+              </a:lnSpc>
+              <a:buNone/>
+            </a:pPr>
+            <a:r>
+              <a:rPr lang="ja-JP" altLang="en-US" sz="1100" b="0" dirty="0">
+                <a:solidFill>
+                  <a:srgbClr val="333333"/>
+                </a:solidFill>
+                <a:latin typeface="メイリオ" panose="020B0604030504040204" pitchFamily="50" charset="-128"/>
+                <a:ea typeface="メイリオ" panose="020B0604030504040204" pitchFamily="50" charset="-128"/>
+              </a:rPr>
+              <a:t>日払い・確定申告・ダブルワークの扶養。面接の服装も</a:t>
+            </a:r>
+            <a:endParaRPr lang="ja-JP" altLang="en-US" sz="1200" dirty="0"/>
+          </a:p>
+        </p:txBody>
+      </p:sp>
+      <p:sp>
+        <p:nvSpPr>
+          <p:cNvPr id="24" name="示唆"/>
+          <p:cNvSpPr/>
+          <p:nvPr/>
+        </p:nvSpPr>
+        <p:spPr>
+          <a:xfrm>
+            <a:off x="502920" y="5779008"/>
+            <a:ext cx="8897112" cy="411480"/>
+          </a:xfrm>
+          <a:prstGeom prst="rect">
+            <a:avLst/>
+          </a:prstGeom>
+          <a:solidFill>
+            <a:srgbClr val="F4F7FF"/>
+          </a:solidFill>
+          <a:ln>
+            <a:noFill/>
+          </a:ln>
+        </p:spPr>
+        <p:txBody>
+          <a:bodyPr wrap="square" lIns="73152" tIns="36576" rIns="73152" bIns="36576" rtlCol="0" anchor="ctr">
+            <a:noAutofit/>
+          </a:bodyPr>
+          <a:lstStyle/>
+          <a:p>
+            <a:pPr algn="ctr">
+              <a:buNone/>
+            </a:pPr>
+            <a:r>
+              <a:rPr lang="ja-JP" altLang="en-US" sz="1400" b="1" dirty="0">
+                <a:solidFill>
+                  <a:srgbClr val="1F285A"/>
+                </a:solidFill>
+                <a:latin typeface="メイリオ" panose="020B0604030504040204" pitchFamily="50" charset="-128"/>
+                <a:ea typeface="メイリオ" panose="020B0604030504040204" pitchFamily="50" charset="-128"/>
+              </a:rPr>
+              <a:t>求人サービスを比べる → 応募・面接の準備 → 給与・働き方 の順に調べている</a:t>
+            </a:r>
+            <a:endParaRPr lang="ja-JP" altLang="en-US" sz="1200" dirty="0"/>
+          </a:p>
+        </p:txBody>
+      </p:sp>
+      <p:sp>
+        <p:nvSpPr>
+          <p:cNvPr id="25" name="注記"/>
+          <p:cNvSpPr/>
+          <p:nvPr/>
+        </p:nvSpPr>
+        <p:spPr>
+          <a:xfrm>
+            <a:off x="502920" y="6236208"/>
+            <a:ext cx="8897112" cy="228600"/>
+          </a:xfrm>
+          <a:prstGeom prst="rect">
+            <a:avLst/>
+          </a:prstGeom>
+          <a:noFill/>
+          <a:ln>
+            <a:noFill/>
+          </a:ln>
+        </p:spPr>
+        <p:txBody>
+          <a:bodyPr wrap="square" lIns="0" tIns="0" rIns="0" bIns="0" rtlCol="0" anchor="t">
+            <a:noAutofit/>
+          </a:bodyPr>
+          <a:lstStyle/>
+          <a:p>
+            <a:pPr algn="l">
+              <a:lnSpc>
+                <a:spcPct val="115000"/>
+              </a:lnSpc>
+              <a:buNone/>
+            </a:pPr>
+            <a:r>
+              <a:rPr lang="ja-JP" altLang="en-US" sz="850" b="0" dirty="0">
+                <a:solidFill>
+                  <a:srgbClr val="7F7F7F"/>
+                </a:solidFill>
+                <a:latin typeface="メイリオ" panose="020B0604030504040204" pitchFamily="50" charset="-128"/>
+                <a:ea typeface="メイリオ" panose="020B0604030504040204" pitchFamily="50" charset="-128"/>
+              </a:rPr>
+              <a:t>※LINEヤフー社の前後検索データより。「単発バイト」を検索した方が、前後15日間に検索した言葉（縦軸＝検索した人数）。</a:t>
+            </a:r>
+            <a:endParaRPr lang="ja-JP" altLang="en-US" sz="1200" dirty="0"/>
+          </a:p>
+        </p:txBody>
+      </p:sp>
+    </p:spTree>
+  </p:cSld>
+  <p:clrMapOvr>
+    <a:masterClrMapping/>
+  </p:clrMapOvr>
 </p:sld>
 </file>
 

--- a/202610_株式会社横浜シミズ御中_LINE公式アカウント運用のご提案.pptx
+++ b/202610_株式会社横浜シミズ御中_LINE公式アカウント運用のご提案.pptx
@@ -6,10 +6,10 @@
     <p:sldMasterId id="2147483687" r:id="rId2"/>
   </p:sldMasterIdLst>
   <p:notesMasterIdLst>
-    <p:notesMasterId r:id="rId20"/>
+    <p:notesMasterId r:id="rId21"/>
   </p:notesMasterIdLst>
   <p:handoutMasterIdLst>
-    <p:handoutMasterId r:id="rId21"/>
+    <p:handoutMasterId r:id="rId22"/>
   </p:handoutMasterIdLst>
   <p:sldIdLst>
     <p:sldId id="2363" r:id="rId3"/>
@@ -23,13 +23,14 @@
     <p:sldId id="2371" r:id="rId11"/>
     <p:sldId id="2372" r:id="rId12"/>
     <p:sldId id="2373" r:id="rId13"/>
-    <p:sldId id="2381" r:id="rId26"/>
-    <p:sldId id="2374" r:id="rId14"/>
-    <p:sldId id="2378" r:id="rId15"/>
-    <p:sldId id="2379" r:id="rId16"/>
-    <p:sldId id="2380" r:id="rId17"/>
-    <p:sldId id="2377" r:id="rId18"/>
-    <p:sldId id="1169" r:id="rId19"/>
+    <p:sldId id="2381" r:id="rId14"/>
+    <p:sldId id="2374" r:id="rId15"/>
+    <p:sldId id="2378" r:id="rId16"/>
+    <p:sldId id="2379" r:id="rId17"/>
+    <p:sldId id="2382" r:id="rId27"/>
+    <p:sldId id="2380" r:id="rId18"/>
+    <p:sldId id="2377" r:id="rId19"/>
+    <p:sldId id="1169" r:id="rId20"/>
   </p:sldIdLst>
   <p:sldSz cx="9906000" cy="6858000" type="A4"/>
   <p:notesSz cx="6807200" cy="9939338"/>
@@ -735,7 +736,7 @@
               <a:pPr defTabSz="956886">
                 <a:defRPr/>
               </a:pPr>
-              <a:t>17</a:t>
+              <a:t>18</a:t>
             </a:fld>
             <a:endParaRPr lang="ja-JP" altLang="en-US">
               <a:solidFill>
@@ -2887,7 +2888,7 @@
                 <a:latin typeface="メイリオ"/>
                 <a:ea typeface="メイリオ"/>
               </a:rPr>
-              <a:t>応募から勤務連絡、次回イベントへの再応募までをLINEでつなぐ</a:t>
+              <a:t>応募から勤務連絡、次回への再応募までをLINEでつなぐ</a:t>
             </a:r>
           </a:p>
         </p:txBody>
@@ -3332,7 +3333,7 @@
               <a:buNone/>
             </a:pPr>
             <a:r>
-              <a:rPr lang="ja-JP" altLang="en-US" sz="1150" b="1" dirty="0">
+              <a:rPr lang="ja-JP" altLang="en-US" sz="1200" b="1" dirty="0">
                 <a:solidFill>
                   <a:srgbClr val="FFFFFF"/>
                 </a:solidFill>
@@ -3341,7 +3342,7 @@
               </a:rPr>
               <a:t>勤務の前にお届けする情報</a:t>
             </a:r>
-            <a:endParaRPr lang="ja-JP" altLang="en-US" sz="1150" dirty="0"/>
+            <a:endParaRPr lang="ja-JP" altLang="en-US" sz="1200" dirty="0"/>
           </a:p>
         </p:txBody>
       </p:sp>
@@ -3383,7 +3384,7 @@
               <a:buNone/>
             </a:pPr>
             <a:r>
-              <a:rPr lang="ja-JP" altLang="en-US" sz="1150" b="1" dirty="0">
+              <a:rPr lang="ja-JP" altLang="en-US" sz="1200" b="1" dirty="0">
                 <a:solidFill>
                   <a:srgbClr val="323366"/>
                 </a:solidFill>
@@ -3392,7 +3393,7 @@
               </a:rPr>
               <a:t>勤務が決まったら</a:t>
             </a:r>
-            <a:endParaRPr lang="ja-JP" altLang="en-US" sz="1100" dirty="0"/>
+            <a:endParaRPr lang="ja-JP" altLang="en-US" sz="1200" dirty="0"/>
           </a:p>
           <a:p>
             <a:pPr algn="l">
@@ -3402,7 +3403,7 @@
               <a:buNone/>
             </a:pPr>
             <a:r>
-              <a:rPr lang="ja-JP" altLang="en-US" sz="1100" b="0" dirty="0">
+              <a:rPr lang="ja-JP" altLang="en-US" sz="1200" b="0" dirty="0">
                 <a:solidFill>
                   <a:srgbClr val="333333"/>
                 </a:solidFill>
@@ -3411,7 +3412,7 @@
               </a:rPr>
               <a:t>会場・集合場所と時間・持ち物・服装</a:t>
             </a:r>
-            <a:endParaRPr lang="ja-JP" altLang="en-US" sz="1100" dirty="0"/>
+            <a:endParaRPr lang="ja-JP" altLang="en-US" sz="1200" dirty="0"/>
           </a:p>
         </p:txBody>
       </p:sp>
@@ -3453,7 +3454,7 @@
               <a:buNone/>
             </a:pPr>
             <a:r>
-              <a:rPr lang="ja-JP" altLang="en-US" sz="1150" b="1" dirty="0">
+              <a:rPr lang="ja-JP" altLang="en-US" sz="1200" b="1" dirty="0">
                 <a:solidFill>
                   <a:srgbClr val="323366"/>
                 </a:solidFill>
@@ -3462,7 +3463,7 @@
               </a:rPr>
               <a:t>勤務の前日</a:t>
             </a:r>
-            <a:endParaRPr lang="ja-JP" altLang="en-US" sz="1100" dirty="0"/>
+            <a:endParaRPr lang="ja-JP" altLang="en-US" sz="1200" dirty="0"/>
           </a:p>
           <a:p>
             <a:pPr algn="l">
@@ -3472,7 +3473,7 @@
               <a:buNone/>
             </a:pPr>
             <a:r>
-              <a:rPr lang="ja-JP" altLang="en-US" sz="1100" b="0" dirty="0">
+              <a:rPr lang="ja-JP" altLang="en-US" sz="1200" b="0" dirty="0">
                 <a:solidFill>
                   <a:srgbClr val="333333"/>
                 </a:solidFill>
@@ -3481,7 +3482,7 @@
               </a:rPr>
               <a:t>リマインド（集合時間・持ち物・天候による変更など）</a:t>
             </a:r>
-            <a:endParaRPr lang="ja-JP" altLang="en-US" sz="1100" dirty="0"/>
+            <a:endParaRPr lang="ja-JP" altLang="en-US" sz="1200" dirty="0"/>
           </a:p>
         </p:txBody>
       </p:sp>
@@ -3523,7 +3524,7 @@
               <a:buNone/>
             </a:pPr>
             <a:r>
-              <a:rPr lang="ja-JP" altLang="en-US" sz="1150" b="1" dirty="0">
+              <a:rPr lang="ja-JP" altLang="en-US" sz="1200" b="1" dirty="0">
                 <a:solidFill>
                   <a:srgbClr val="323366"/>
                 </a:solidFill>
@@ -3532,7 +3533,7 @@
               </a:rPr>
               <a:t>勤務の当日</a:t>
             </a:r>
-            <a:endParaRPr lang="ja-JP" altLang="en-US" sz="1100" dirty="0"/>
+            <a:endParaRPr lang="ja-JP" altLang="en-US" sz="1200" dirty="0"/>
           </a:p>
           <a:p>
             <a:pPr algn="l">
@@ -3542,7 +3543,7 @@
               <a:buNone/>
             </a:pPr>
             <a:r>
-              <a:rPr lang="ja-JP" altLang="en-US" sz="1100" b="0" dirty="0">
+              <a:rPr lang="ja-JP" altLang="en-US" sz="1200" b="0" dirty="0">
                 <a:solidFill>
                   <a:srgbClr val="333333"/>
                 </a:solidFill>
@@ -3551,7 +3552,7 @@
               </a:rPr>
               <a:t>注意事項・当日の連絡先</a:t>
             </a:r>
-            <a:endParaRPr lang="ja-JP" altLang="en-US" sz="1100" dirty="0"/>
+            <a:endParaRPr lang="ja-JP" altLang="en-US" sz="1200" dirty="0"/>
           </a:p>
         </p:txBody>
       </p:sp>
@@ -3588,7 +3589,7 @@
               <a:buNone/>
             </a:pPr>
             <a:r>
-              <a:rPr lang="ja-JP" altLang="en-US" sz="1150" b="1" dirty="0">
+              <a:rPr lang="ja-JP" altLang="en-US" sz="1200" b="1" dirty="0">
                 <a:solidFill>
                   <a:srgbClr val="FFFFFF"/>
                 </a:solidFill>
@@ -3597,7 +3598,7 @@
               </a:rPr>
               <a:t>届け方（運用に合わせて選びます）</a:t>
             </a:r>
-            <a:endParaRPr lang="ja-JP" altLang="en-US" sz="1150" dirty="0"/>
+            <a:endParaRPr lang="ja-JP" altLang="en-US" sz="1200" dirty="0"/>
           </a:p>
         </p:txBody>
       </p:sp>
@@ -3639,7 +3640,7 @@
               <a:buNone/>
             </a:pPr>
             <a:r>
-              <a:rPr lang="ja-JP" altLang="en-US" sz="1150" b="1" dirty="0">
+              <a:rPr lang="ja-JP" altLang="en-US" sz="1200" b="1" dirty="0">
                 <a:solidFill>
                   <a:srgbClr val="323366"/>
                 </a:solidFill>
@@ -3648,7 +3649,7 @@
               </a:rPr>
               <a:t>一斉案内</a:t>
             </a:r>
-            <a:endParaRPr lang="ja-JP" altLang="en-US" sz="1100" dirty="0"/>
+            <a:endParaRPr lang="ja-JP" altLang="en-US" sz="1200" dirty="0"/>
           </a:p>
           <a:p>
             <a:pPr algn="l">
@@ -3658,16 +3659,41 @@
               <a:buNone/>
             </a:pPr>
             <a:r>
-              <a:rPr lang="ja-JP" altLang="en-US" sz="1100" b="0" dirty="0">
+              <a:rPr lang="ja-JP" altLang="en-US" sz="1200" b="0" dirty="0">
                 <a:solidFill>
                   <a:srgbClr val="333333"/>
                 </a:solidFill>
                 <a:latin typeface="メイリオ" panose="020B0604030504040204" pitchFamily="50" charset="-128"/>
                 <a:ea typeface="メイリオ" panose="020B0604030504040204" pitchFamily="50" charset="-128"/>
               </a:rPr>
-              <a:t>同じイベントに勤務する方へ、まとめて案内</a:t>
-            </a:r>
-            <a:endParaRPr lang="ja-JP" altLang="en-US" sz="1100" dirty="0"/>
+              <a:t>同じイベントに勤務する方へ、</a:t>
+            </a:r>
+            <a:endParaRPr lang="en-US" altLang="ja-JP" sz="1200" b="0" dirty="0">
+              <a:solidFill>
+                <a:srgbClr val="333333"/>
+              </a:solidFill>
+              <a:latin typeface="メイリオ" panose="020B0604030504040204" pitchFamily="50" charset="-128"/>
+              <a:ea typeface="メイリオ" panose="020B0604030504040204" pitchFamily="50" charset="-128"/>
+            </a:endParaRPr>
+          </a:p>
+          <a:p>
+            <a:pPr algn="l">
+              <a:spcAft>
+                <a:spcPts val="200"/>
+              </a:spcAft>
+              <a:buNone/>
+            </a:pPr>
+            <a:r>
+              <a:rPr lang="ja-JP" altLang="en-US" sz="1200" b="0" dirty="0">
+                <a:solidFill>
+                  <a:srgbClr val="333333"/>
+                </a:solidFill>
+                <a:latin typeface="メイリオ" panose="020B0604030504040204" pitchFamily="50" charset="-128"/>
+                <a:ea typeface="メイリオ" panose="020B0604030504040204" pitchFamily="50" charset="-128"/>
+              </a:rPr>
+              <a:t>まとめて案内</a:t>
+            </a:r>
+            <a:endParaRPr lang="ja-JP" altLang="en-US" sz="1200" dirty="0"/>
           </a:p>
         </p:txBody>
       </p:sp>
@@ -3709,7 +3735,7 @@
               <a:buNone/>
             </a:pPr>
             <a:r>
-              <a:rPr lang="ja-JP" altLang="en-US" sz="1150" b="1" dirty="0">
+              <a:rPr lang="ja-JP" altLang="en-US" sz="1200" b="1" dirty="0">
                 <a:solidFill>
                   <a:srgbClr val="323366"/>
                 </a:solidFill>
@@ -3718,7 +3744,7 @@
               </a:rPr>
               <a:t>タグで対象者別</a:t>
             </a:r>
-            <a:endParaRPr lang="ja-JP" altLang="en-US" sz="1100" dirty="0"/>
+            <a:endParaRPr lang="ja-JP" altLang="en-US" sz="1200" dirty="0"/>
           </a:p>
           <a:p>
             <a:pPr algn="l">
@@ -3728,16 +3754,41 @@
               <a:buNone/>
             </a:pPr>
             <a:r>
-              <a:rPr lang="ja-JP" altLang="en-US" sz="1100" b="0" dirty="0">
+              <a:rPr lang="ja-JP" altLang="en-US" sz="1200" b="0" dirty="0">
                 <a:solidFill>
                   <a:srgbClr val="333333"/>
                 </a:solidFill>
                 <a:latin typeface="メイリオ" panose="020B0604030504040204" pitchFamily="50" charset="-128"/>
                 <a:ea typeface="メイリオ" panose="020B0604030504040204" pitchFamily="50" charset="-128"/>
               </a:rPr>
-              <a:t>会場・業務ごとに、対象の方だけに案内</a:t>
-            </a:r>
-            <a:endParaRPr lang="ja-JP" altLang="en-US" sz="1100" dirty="0"/>
+              <a:t>会場・業務ごとに、対象の方だけに</a:t>
+            </a:r>
+            <a:endParaRPr lang="en-US" altLang="ja-JP" sz="1200" b="0" dirty="0">
+              <a:solidFill>
+                <a:srgbClr val="333333"/>
+              </a:solidFill>
+              <a:latin typeface="メイリオ" panose="020B0604030504040204" pitchFamily="50" charset="-128"/>
+              <a:ea typeface="メイリオ" panose="020B0604030504040204" pitchFamily="50" charset="-128"/>
+            </a:endParaRPr>
+          </a:p>
+          <a:p>
+            <a:pPr algn="l">
+              <a:spcAft>
+                <a:spcPts val="200"/>
+              </a:spcAft>
+              <a:buNone/>
+            </a:pPr>
+            <a:r>
+              <a:rPr lang="ja-JP" altLang="en-US" sz="1200" b="0" dirty="0">
+                <a:solidFill>
+                  <a:srgbClr val="333333"/>
+                </a:solidFill>
+                <a:latin typeface="メイリオ" panose="020B0604030504040204" pitchFamily="50" charset="-128"/>
+                <a:ea typeface="メイリオ" panose="020B0604030504040204" pitchFamily="50" charset="-128"/>
+              </a:rPr>
+              <a:t>案内</a:t>
+            </a:r>
+            <a:endParaRPr lang="ja-JP" altLang="en-US" sz="1200" dirty="0"/>
           </a:p>
         </p:txBody>
       </p:sp>
@@ -3779,7 +3830,7 @@
               <a:buNone/>
             </a:pPr>
             <a:r>
-              <a:rPr lang="ja-JP" altLang="en-US" sz="1150" b="1" dirty="0">
+              <a:rPr lang="ja-JP" altLang="en-US" sz="1200" b="1" dirty="0">
                 <a:solidFill>
                   <a:srgbClr val="323366"/>
                 </a:solidFill>
@@ -3788,7 +3839,7 @@
               </a:rPr>
               <a:t>個別連絡（チャット）</a:t>
             </a:r>
-            <a:endParaRPr lang="ja-JP" altLang="en-US" sz="1100" dirty="0"/>
+            <a:endParaRPr lang="ja-JP" altLang="en-US" sz="1200" dirty="0"/>
           </a:p>
           <a:p>
             <a:pPr algn="l">
@@ -3798,16 +3849,41 @@
               <a:buNone/>
             </a:pPr>
             <a:r>
-              <a:rPr lang="ja-JP" altLang="en-US" sz="1100" b="0" dirty="0">
+              <a:rPr lang="ja-JP" altLang="en-US" sz="1200" b="0" dirty="0">
                 <a:solidFill>
                   <a:srgbClr val="333333"/>
                 </a:solidFill>
                 <a:latin typeface="メイリオ" panose="020B0604030504040204" pitchFamily="50" charset="-128"/>
                 <a:ea typeface="メイリオ" panose="020B0604030504040204" pitchFamily="50" charset="-128"/>
               </a:rPr>
-              <a:t>勤務の変更・欠席・質問など、1対1のやり取り</a:t>
-            </a:r>
-            <a:endParaRPr lang="ja-JP" altLang="en-US" sz="1100" dirty="0"/>
+              <a:t>勤務の変更・欠席・質問など、</a:t>
+            </a:r>
+            <a:endParaRPr lang="en-US" altLang="ja-JP" sz="1200" b="0" dirty="0">
+              <a:solidFill>
+                <a:srgbClr val="333333"/>
+              </a:solidFill>
+              <a:latin typeface="メイリオ" panose="020B0604030504040204" pitchFamily="50" charset="-128"/>
+              <a:ea typeface="メイリオ" panose="020B0604030504040204" pitchFamily="50" charset="-128"/>
+            </a:endParaRPr>
+          </a:p>
+          <a:p>
+            <a:pPr algn="l">
+              <a:spcAft>
+                <a:spcPts val="200"/>
+              </a:spcAft>
+              <a:buNone/>
+            </a:pPr>
+            <a:r>
+              <a:rPr lang="ja-JP" altLang="en-US" sz="1200" b="0" dirty="0">
+                <a:solidFill>
+                  <a:srgbClr val="333333"/>
+                </a:solidFill>
+                <a:latin typeface="メイリオ" panose="020B0604030504040204" pitchFamily="50" charset="-128"/>
+                <a:ea typeface="メイリオ" panose="020B0604030504040204" pitchFamily="50" charset="-128"/>
+              </a:rPr>
+              <a:t>1対1のやり取り</a:t>
+            </a:r>
+            <a:endParaRPr lang="ja-JP" altLang="en-US" sz="1200" dirty="0"/>
           </a:p>
         </p:txBody>
       </p:sp>
@@ -3844,7 +3920,7 @@
               <a:buNone/>
             </a:pPr>
             <a:r>
-              <a:rPr lang="ja-JP" altLang="en-US" sz="1150" b="1" dirty="0">
+              <a:rPr lang="ja-JP" altLang="en-US" sz="1200" b="1" dirty="0">
                 <a:solidFill>
                   <a:srgbClr val="FFFFFF"/>
                 </a:solidFill>
@@ -3853,7 +3929,7 @@
               </a:rPr>
               <a:t>期待できること</a:t>
             </a:r>
-            <a:endParaRPr lang="ja-JP" altLang="en-US" sz="1150" dirty="0"/>
+            <a:endParaRPr lang="ja-JP" altLang="en-US" sz="1200" dirty="0"/>
           </a:p>
         </p:txBody>
       </p:sp>
@@ -3895,7 +3971,7 @@
               <a:buNone/>
             </a:pPr>
             <a:r>
-              <a:rPr lang="ja-JP" altLang="en-US" sz="1150" b="1" dirty="0">
+              <a:rPr lang="ja-JP" altLang="en-US" sz="1200" b="1" dirty="0">
                 <a:solidFill>
                   <a:srgbClr val="323366"/>
                 </a:solidFill>
@@ -3904,7 +3980,7 @@
               </a:rPr>
               <a:t>スタッフの皆さま</a:t>
             </a:r>
-            <a:endParaRPr lang="ja-JP" altLang="en-US" sz="1100" dirty="0"/>
+            <a:endParaRPr lang="ja-JP" altLang="en-US" sz="1200" dirty="0"/>
           </a:p>
           <a:p>
             <a:pPr algn="l">
@@ -3914,16 +3990,41 @@
               <a:buNone/>
             </a:pPr>
             <a:r>
-              <a:rPr lang="ja-JP" altLang="en-US" sz="1100" b="0" dirty="0">
+              <a:rPr lang="ja-JP" altLang="en-US" sz="1200" b="0" dirty="0">
                 <a:solidFill>
                   <a:srgbClr val="333333"/>
                 </a:solidFill>
                 <a:latin typeface="メイリオ" panose="020B0604030504040204" pitchFamily="50" charset="-128"/>
                 <a:ea typeface="メイリオ" panose="020B0604030504040204" pitchFamily="50" charset="-128"/>
               </a:rPr>
-              <a:t>必要な情報をLINEで見返せる。通知で気づける。質問しやすい</a:t>
-            </a:r>
-            <a:endParaRPr lang="ja-JP" altLang="en-US" sz="1100" dirty="0"/>
+              <a:t>必要な情報をLINEで見返せる。</a:t>
+            </a:r>
+            <a:endParaRPr lang="en-US" altLang="ja-JP" sz="1200" b="0" dirty="0">
+              <a:solidFill>
+                <a:srgbClr val="333333"/>
+              </a:solidFill>
+              <a:latin typeface="メイリオ" panose="020B0604030504040204" pitchFamily="50" charset="-128"/>
+              <a:ea typeface="メイリオ" panose="020B0604030504040204" pitchFamily="50" charset="-128"/>
+            </a:endParaRPr>
+          </a:p>
+          <a:p>
+            <a:pPr algn="l">
+              <a:spcAft>
+                <a:spcPts val="200"/>
+              </a:spcAft>
+              <a:buNone/>
+            </a:pPr>
+            <a:r>
+              <a:rPr lang="ja-JP" altLang="en-US" sz="1200" b="0" dirty="0">
+                <a:solidFill>
+                  <a:srgbClr val="333333"/>
+                </a:solidFill>
+                <a:latin typeface="メイリオ" panose="020B0604030504040204" pitchFamily="50" charset="-128"/>
+                <a:ea typeface="メイリオ" panose="020B0604030504040204" pitchFamily="50" charset="-128"/>
+              </a:rPr>
+              <a:t>通知で気づける。質問しやすい</a:t>
+            </a:r>
+            <a:endParaRPr lang="ja-JP" altLang="en-US" sz="1200" dirty="0"/>
           </a:p>
         </p:txBody>
       </p:sp>
@@ -3965,7 +4066,7 @@
               <a:buNone/>
             </a:pPr>
             <a:r>
-              <a:rPr lang="ja-JP" altLang="en-US" sz="1150" b="1" dirty="0">
+              <a:rPr lang="ja-JP" altLang="en-US" sz="1200" b="1" dirty="0">
                 <a:solidFill>
                   <a:srgbClr val="323366"/>
                 </a:solidFill>
@@ -3974,7 +4075,7 @@
               </a:rPr>
               <a:t>横浜シミズ様（管理側）</a:t>
             </a:r>
-            <a:endParaRPr lang="ja-JP" altLang="en-US" sz="1100" dirty="0"/>
+            <a:endParaRPr lang="ja-JP" altLang="en-US" sz="1200" dirty="0"/>
           </a:p>
           <a:p>
             <a:pPr algn="l">
@@ -3984,16 +4085,41 @@
               <a:buNone/>
             </a:pPr>
             <a:r>
-              <a:rPr lang="ja-JP" altLang="en-US" sz="1100" b="0" dirty="0">
+              <a:rPr lang="ja-JP" altLang="en-US" sz="1200" b="0" dirty="0">
                 <a:solidFill>
                   <a:srgbClr val="333333"/>
                 </a:solidFill>
                 <a:latin typeface="メイリオ" panose="020B0604030504040204" pitchFamily="50" charset="-128"/>
                 <a:ea typeface="メイリオ" panose="020B0604030504040204" pitchFamily="50" charset="-128"/>
               </a:rPr>
-              <a:t>一斉に送れる。案内の型をつくり、毎回の作成の手間を減らす</a:t>
-            </a:r>
-            <a:endParaRPr lang="ja-JP" altLang="en-US" sz="1100" dirty="0"/>
+              <a:t>一斉に送れる。案内の型をつくり、</a:t>
+            </a:r>
+            <a:endParaRPr lang="en-US" altLang="ja-JP" sz="1200" b="0" dirty="0">
+              <a:solidFill>
+                <a:srgbClr val="333333"/>
+              </a:solidFill>
+              <a:latin typeface="メイリオ" panose="020B0604030504040204" pitchFamily="50" charset="-128"/>
+              <a:ea typeface="メイリオ" panose="020B0604030504040204" pitchFamily="50" charset="-128"/>
+            </a:endParaRPr>
+          </a:p>
+          <a:p>
+            <a:pPr algn="l">
+              <a:spcAft>
+                <a:spcPts val="200"/>
+              </a:spcAft>
+              <a:buNone/>
+            </a:pPr>
+            <a:r>
+              <a:rPr lang="ja-JP" altLang="en-US" sz="1200" b="0" dirty="0">
+                <a:solidFill>
+                  <a:srgbClr val="333333"/>
+                </a:solidFill>
+                <a:latin typeface="メイリオ" panose="020B0604030504040204" pitchFamily="50" charset="-128"/>
+                <a:ea typeface="メイリオ" panose="020B0604030504040204" pitchFamily="50" charset="-128"/>
+              </a:rPr>
+              <a:t>毎回の作成の手間を減らす</a:t>
+            </a:r>
+            <a:endParaRPr lang="ja-JP" altLang="en-US" sz="1200" dirty="0"/>
           </a:p>
         </p:txBody>
       </p:sp>
@@ -4035,7 +4161,7 @@
               <a:buNone/>
             </a:pPr>
             <a:r>
-              <a:rPr lang="ja-JP" altLang="en-US" sz="1150" b="1" dirty="0">
+              <a:rPr lang="ja-JP" altLang="en-US" sz="1200" b="1" dirty="0">
                 <a:solidFill>
                   <a:srgbClr val="323366"/>
                 </a:solidFill>
@@ -4044,7 +4170,7 @@
               </a:rPr>
               <a:t>横浜シミズ様（管理側）</a:t>
             </a:r>
-            <a:endParaRPr lang="ja-JP" altLang="en-US" sz="1100" dirty="0"/>
+            <a:endParaRPr lang="ja-JP" altLang="en-US" sz="1200" dirty="0"/>
           </a:p>
           <a:p>
             <a:pPr algn="l">
@@ -4054,7 +4180,7 @@
               <a:buNone/>
             </a:pPr>
             <a:r>
-              <a:rPr lang="ja-JP" altLang="en-US" sz="1100" b="0" dirty="0">
+              <a:rPr lang="ja-JP" altLang="en-US" sz="1200" b="0" dirty="0">
                 <a:solidFill>
                   <a:srgbClr val="333333"/>
                 </a:solidFill>
@@ -4063,7 +4189,7 @@
               </a:rPr>
               <a:t>電話・メールでの個別の確認を減らせる（期待効果）</a:t>
             </a:r>
-            <a:endParaRPr lang="ja-JP" altLang="en-US" sz="1100" dirty="0"/>
+            <a:endParaRPr lang="ja-JP" altLang="en-US" sz="1200" dirty="0"/>
           </a:p>
         </p:txBody>
       </p:sp>
@@ -4327,32 +4453,38 @@
           <p:cNvGraphicFramePr>
             <a:graphicFrameLocks noGrp="1"/>
           </p:cNvGraphicFramePr>
-          <p:nvPr/>
+          <p:nvPr>
+            <p:extLst>
+              <p:ext uri="{D42A27DB-BD31-4B8C-83A1-F6EECF244321}">
+                <p14:modId xmlns:p14="http://schemas.microsoft.com/office/powerpoint/2010/main" val="1362775021"/>
+              </p:ext>
+            </p:extLst>
+          </p:nvPr>
         </p:nvGraphicFramePr>
         <p:xfrm>
-          <a:off x="429768" y="1371600"/>
-          <a:ext cx="4937760" cy="2889504"/>
+          <a:off x="429767" y="1371600"/>
+          <a:ext cx="5039379" cy="2889504"/>
         </p:xfrm>
         <a:graphic>
           <a:graphicData uri="http://schemas.openxmlformats.org/drawingml/2006/table">
             <a:tbl>
               <a:tblPr/>
               <a:tblGrid>
-                <a:gridCol w="1143000">
+                <a:gridCol w="1166523">
                   <a:extLst>
                     <a:ext uri="{9D8B030D-6E8A-4147-A177-3AD203B41FA5}">
                       <a16:colId xmlns:a16="http://schemas.microsoft.com/office/drawing/2014/main" val="20000"/>
                     </a:ext>
                   </a:extLst>
                 </a:gridCol>
-                <a:gridCol w="2240280">
+                <a:gridCol w="2286385">
                   <a:extLst>
                     <a:ext uri="{9D8B030D-6E8A-4147-A177-3AD203B41FA5}">
                       <a16:colId xmlns:a16="http://schemas.microsoft.com/office/drawing/2014/main" val="20001"/>
                     </a:ext>
                   </a:extLst>
                 </a:gridCol>
-                <a:gridCol w="1554480">
+                <a:gridCol w="1586471">
                   <a:extLst>
                     <a:ext uri="{9D8B030D-6E8A-4147-A177-3AD203B41FA5}">
                       <a16:colId xmlns:a16="http://schemas.microsoft.com/office/drawing/2014/main" val="20002"/>
@@ -4433,7 +4565,7 @@
                         <a:buNone/>
                       </a:pPr>
                       <a:r>
-                        <a:rPr lang="ja-JP" altLang="en-US" sz="1050" b="1" dirty="0">
+                        <a:rPr lang="ja-JP" altLang="en-US" sz="1100" b="1" dirty="0">
                           <a:solidFill>
                             <a:srgbClr val="FFFFFF"/>
                           </a:solidFill>
@@ -4442,7 +4574,7 @@
                         </a:rPr>
                         <a:t>例</a:t>
                       </a:r>
-                      <a:endParaRPr lang="ja-JP" altLang="en-US" sz="1050" dirty="0"/>
+                      <a:endParaRPr lang="ja-JP" altLang="en-US" sz="1100" dirty="0"/>
                     </a:p>
                   </a:txBody>
                   <a:tcPr marL="73152" marR="73152" marT="27432" marB="27432" anchor="ctr">
@@ -4496,7 +4628,7 @@
                         <a:buNone/>
                       </a:pPr>
                       <a:r>
-                        <a:rPr lang="ja-JP" altLang="en-US" sz="1050" b="1" dirty="0">
+                        <a:rPr lang="ja-JP" altLang="en-US" sz="1100" b="1" dirty="0">
                           <a:solidFill>
                             <a:srgbClr val="FFFFFF"/>
                           </a:solidFill>
@@ -4505,7 +4637,7 @@
                         </a:rPr>
                         <a:t>取り方</a:t>
                       </a:r>
-                      <a:endParaRPr lang="ja-JP" altLang="en-US" sz="1050" dirty="0"/>
+                      <a:endParaRPr lang="ja-JP" altLang="en-US" sz="1100" dirty="0"/>
                     </a:p>
                   </a:txBody>
                   <a:tcPr marL="73152" marR="73152" marT="27432" marB="27432" anchor="ctr">
@@ -4629,7 +4761,7 @@
                         <a:buNone/>
                       </a:pPr>
                       <a:r>
-                        <a:rPr lang="ja-JP" altLang="en-US" sz="1050" b="0" dirty="0">
+                        <a:rPr lang="ja-JP" altLang="en-US" sz="1100" b="0" dirty="0">
                           <a:solidFill>
                             <a:srgbClr val="333333"/>
                           </a:solidFill>
@@ -4638,7 +4770,7 @@
                         </a:rPr>
                         <a:t>神奈川（横浜・川崎・湘南など）／静岡</a:t>
                       </a:r>
-                      <a:endParaRPr lang="ja-JP" altLang="en-US" sz="1050" dirty="0"/>
+                      <a:endParaRPr lang="ja-JP" altLang="en-US" sz="1100" dirty="0"/>
                     </a:p>
                   </a:txBody>
                   <a:tcPr marL="73152" marR="73152" marT="27432" marB="27432" anchor="ctr">
@@ -4692,16 +4824,38 @@
                         <a:buNone/>
                       </a:pPr>
                       <a:r>
-                        <a:rPr lang="ja-JP" altLang="en-US" sz="1000" b="0" dirty="0">
+                        <a:rPr lang="ja-JP" altLang="en-US" sz="1050" b="0" dirty="0">
                           <a:solidFill>
                             <a:srgbClr val="333333"/>
                           </a:solidFill>
                           <a:latin typeface="メイリオ" panose="020B0604030504040204" pitchFamily="50" charset="-128"/>
                           <a:ea typeface="メイリオ" panose="020B0604030504040204" pitchFamily="50" charset="-128"/>
                         </a:rPr>
-                        <a:t>追加後の質問（選択式）</a:t>
+                        <a:t>追加後の質問</a:t>
                       </a:r>
-                      <a:endParaRPr lang="ja-JP" altLang="en-US" sz="1000" dirty="0"/>
+                      <a:endParaRPr lang="en-US" altLang="ja-JP" sz="1050" b="0" dirty="0">
+                        <a:solidFill>
+                          <a:srgbClr val="333333"/>
+                        </a:solidFill>
+                        <a:latin typeface="メイリオ" panose="020B0604030504040204" pitchFamily="50" charset="-128"/>
+                        <a:ea typeface="メイリオ" panose="020B0604030504040204" pitchFamily="50" charset="-128"/>
+                      </a:endParaRPr>
+                    </a:p>
+                    <a:p>
+                      <a:pPr algn="l">
+                        <a:buNone/>
+                      </a:pPr>
+                      <a:r>
+                        <a:rPr lang="ja-JP" altLang="en-US" sz="1050" b="0" dirty="0">
+                          <a:solidFill>
+                            <a:srgbClr val="333333"/>
+                          </a:solidFill>
+                          <a:latin typeface="メイリオ" panose="020B0604030504040204" pitchFamily="50" charset="-128"/>
+                          <a:ea typeface="メイリオ" panose="020B0604030504040204" pitchFamily="50" charset="-128"/>
+                        </a:rPr>
+                        <a:t>（選択式）</a:t>
+                      </a:r>
+                      <a:endParaRPr lang="ja-JP" altLang="en-US" sz="1050" dirty="0"/>
                     </a:p>
                   </a:txBody>
                   <a:tcPr marL="73152" marR="73152" marT="27432" marB="27432" anchor="ctr">
@@ -4825,7 +4979,7 @@
                         <a:buNone/>
                       </a:pPr>
                       <a:r>
-                        <a:rPr lang="ja-JP" altLang="en-US" sz="1050" b="0" dirty="0">
+                        <a:rPr lang="ja-JP" altLang="en-US" sz="1100" b="0" dirty="0">
                           <a:solidFill>
                             <a:srgbClr val="333333"/>
                           </a:solidFill>
@@ -4834,7 +4988,7 @@
                         </a:rPr>
                         <a:t>日産スタジアム・横浜アリーナ・横浜スタジアムなど</a:t>
                       </a:r>
-                      <a:endParaRPr lang="ja-JP" altLang="en-US" sz="1050" dirty="0"/>
+                      <a:endParaRPr lang="ja-JP" altLang="en-US" sz="1100" dirty="0"/>
                     </a:p>
                   </a:txBody>
                   <a:tcPr marL="73152" marR="73152" marT="27432" marB="27432" anchor="ctr">
@@ -4888,7 +5042,7 @@
                         <a:buNone/>
                       </a:pPr>
                       <a:r>
-                        <a:rPr lang="ja-JP" altLang="en-US" sz="1000" b="0" dirty="0">
+                        <a:rPr lang="ja-JP" altLang="en-US" sz="1050" b="0" dirty="0">
                           <a:solidFill>
                             <a:srgbClr val="333333"/>
                           </a:solidFill>
@@ -4897,7 +5051,7 @@
                         </a:rPr>
                         <a:t>追加後の質問・勤務の案内時</a:t>
                       </a:r>
-                      <a:endParaRPr lang="ja-JP" altLang="en-US" sz="1000" dirty="0"/>
+                      <a:endParaRPr lang="ja-JP" altLang="en-US" sz="1050" dirty="0"/>
                     </a:p>
                   </a:txBody>
                   <a:tcPr marL="73152" marR="73152" marT="27432" marB="27432" anchor="ctr">
@@ -5021,16 +5175,38 @@
                         <a:buNone/>
                       </a:pPr>
                       <a:r>
-                        <a:rPr lang="ja-JP" altLang="en-US" sz="1050" b="0" dirty="0">
+                        <a:rPr lang="ja-JP" altLang="en-US" sz="1100" b="0" dirty="0">
                           <a:solidFill>
                             <a:srgbClr val="333333"/>
                           </a:solidFill>
                           <a:latin typeface="メイリオ" panose="020B0604030504040204" pitchFamily="50" charset="-128"/>
                           <a:ea typeface="メイリオ" panose="020B0604030504040204" pitchFamily="50" charset="-128"/>
                         </a:rPr>
-                        <a:t>案内・誘導／販売／警備／設営・撤去</a:t>
+                        <a:t>案内・誘導／販売／警備／</a:t>
                       </a:r>
-                      <a:endParaRPr lang="ja-JP" altLang="en-US" sz="1050" dirty="0"/>
+                      <a:endParaRPr lang="en-US" altLang="ja-JP" sz="1100" b="0" dirty="0">
+                        <a:solidFill>
+                          <a:srgbClr val="333333"/>
+                        </a:solidFill>
+                        <a:latin typeface="メイリオ" panose="020B0604030504040204" pitchFamily="50" charset="-128"/>
+                        <a:ea typeface="メイリオ" panose="020B0604030504040204" pitchFamily="50" charset="-128"/>
+                      </a:endParaRPr>
+                    </a:p>
+                    <a:p>
+                      <a:pPr algn="l">
+                        <a:buNone/>
+                      </a:pPr>
+                      <a:r>
+                        <a:rPr lang="ja-JP" altLang="en-US" sz="1100" b="0" dirty="0">
+                          <a:solidFill>
+                            <a:srgbClr val="333333"/>
+                          </a:solidFill>
+                          <a:latin typeface="メイリオ" panose="020B0604030504040204" pitchFamily="50" charset="-128"/>
+                          <a:ea typeface="メイリオ" panose="020B0604030504040204" pitchFamily="50" charset="-128"/>
+                        </a:rPr>
+                        <a:t>設営・撤去</a:t>
+                      </a:r>
+                      <a:endParaRPr lang="ja-JP" altLang="en-US" sz="1100" dirty="0"/>
                     </a:p>
                   </a:txBody>
                   <a:tcPr marL="73152" marR="73152" marT="27432" marB="27432" anchor="ctr">
@@ -5084,7 +5260,7 @@
                         <a:buNone/>
                       </a:pPr>
                       <a:r>
-                        <a:rPr lang="ja-JP" altLang="en-US" sz="1000" b="0" dirty="0">
+                        <a:rPr lang="ja-JP" altLang="en-US" sz="1050" b="0" dirty="0">
                           <a:solidFill>
                             <a:srgbClr val="333333"/>
                           </a:solidFill>
@@ -5093,7 +5269,7 @@
                         </a:rPr>
                         <a:t>追加後の質問</a:t>
                       </a:r>
-                      <a:endParaRPr lang="ja-JP" altLang="en-US" sz="1000" dirty="0"/>
+                      <a:endParaRPr lang="ja-JP" altLang="en-US" sz="1050" dirty="0"/>
                     </a:p>
                   </a:txBody>
                   <a:tcPr marL="73152" marR="73152" marT="27432" marB="27432" anchor="ctr">
@@ -5217,7 +5393,7 @@
                         <a:buNone/>
                       </a:pPr>
                       <a:r>
-                        <a:rPr lang="ja-JP" altLang="en-US" sz="1050" b="0" dirty="0">
+                        <a:rPr lang="ja-JP" altLang="en-US" sz="1100" b="0" dirty="0">
                           <a:solidFill>
                             <a:srgbClr val="333333"/>
                           </a:solidFill>
@@ -5226,7 +5402,7 @@
                         </a:rPr>
                         <a:t>土日祝／平日／夜</a:t>
                       </a:r>
-                      <a:endParaRPr lang="ja-JP" altLang="en-US" sz="1050" dirty="0"/>
+                      <a:endParaRPr lang="ja-JP" altLang="en-US" sz="1100" dirty="0"/>
                     </a:p>
                   </a:txBody>
                   <a:tcPr marL="73152" marR="73152" marT="27432" marB="27432" anchor="ctr">
@@ -5280,16 +5456,38 @@
                         <a:buNone/>
                       </a:pPr>
                       <a:r>
-                        <a:rPr lang="ja-JP" altLang="en-US" sz="1000" b="0" dirty="0">
+                        <a:rPr lang="ja-JP" altLang="en-US" sz="1050" b="0" dirty="0">
                           <a:solidFill>
                             <a:srgbClr val="333333"/>
                           </a:solidFill>
                           <a:latin typeface="メイリオ" panose="020B0604030504040204" pitchFamily="50" charset="-128"/>
                           <a:ea typeface="メイリオ" panose="020B0604030504040204" pitchFamily="50" charset="-128"/>
                         </a:rPr>
-                        <a:t>追加後の質問・メニューで変更</a:t>
+                        <a:t>追加後の質問・</a:t>
                       </a:r>
-                      <a:endParaRPr lang="ja-JP" altLang="en-US" sz="1000" dirty="0"/>
+                      <a:endParaRPr lang="en-US" altLang="ja-JP" sz="1050" b="0" dirty="0">
+                        <a:solidFill>
+                          <a:srgbClr val="333333"/>
+                        </a:solidFill>
+                        <a:latin typeface="メイリオ" panose="020B0604030504040204" pitchFamily="50" charset="-128"/>
+                        <a:ea typeface="メイリオ" panose="020B0604030504040204" pitchFamily="50" charset="-128"/>
+                      </a:endParaRPr>
+                    </a:p>
+                    <a:p>
+                      <a:pPr algn="l">
+                        <a:buNone/>
+                      </a:pPr>
+                      <a:r>
+                        <a:rPr lang="ja-JP" altLang="en-US" sz="1050" b="0" dirty="0">
+                          <a:solidFill>
+                            <a:srgbClr val="333333"/>
+                          </a:solidFill>
+                          <a:latin typeface="メイリオ" panose="020B0604030504040204" pitchFamily="50" charset="-128"/>
+                          <a:ea typeface="メイリオ" panose="020B0604030504040204" pitchFamily="50" charset="-128"/>
+                        </a:rPr>
+                        <a:t>メニューで変更</a:t>
+                      </a:r>
+                      <a:endParaRPr lang="ja-JP" altLang="en-US" sz="1050" dirty="0"/>
                     </a:p>
                   </a:txBody>
                   <a:tcPr marL="73152" marR="73152" marT="27432" marB="27432" anchor="ctr">
@@ -5413,7 +5611,7 @@
                         <a:buNone/>
                       </a:pPr>
                       <a:r>
-                        <a:rPr lang="ja-JP" altLang="en-US" sz="1050" b="0" dirty="0">
+                        <a:rPr lang="ja-JP" altLang="en-US" sz="1100" b="0" dirty="0">
                           <a:solidFill>
                             <a:srgbClr val="333333"/>
                           </a:solidFill>
@@ -5422,7 +5620,7 @@
                         </a:rPr>
                         <a:t>勤務あり／まだ勤務なし</a:t>
                       </a:r>
-                      <a:endParaRPr lang="ja-JP" altLang="en-US" sz="1050" dirty="0"/>
+                      <a:endParaRPr lang="ja-JP" altLang="en-US" sz="1100" dirty="0"/>
                     </a:p>
                   </a:txBody>
                   <a:tcPr marL="73152" marR="73152" marT="27432" marB="27432" anchor="ctr">
@@ -5476,7 +5674,7 @@
                         <a:buNone/>
                       </a:pPr>
                       <a:r>
-                        <a:rPr lang="ja-JP" altLang="en-US" sz="1000" b="0" dirty="0">
+                        <a:rPr lang="ja-JP" altLang="en-US" sz="1050" b="0" dirty="0">
                           <a:solidFill>
                             <a:srgbClr val="333333"/>
                           </a:solidFill>
@@ -5485,7 +5683,7 @@
                         </a:rPr>
                         <a:t>勤務の案内を送った方に付ける</a:t>
                       </a:r>
-                      <a:endParaRPr lang="ja-JP" altLang="en-US" sz="1000" dirty="0"/>
+                      <a:endParaRPr lang="ja-JP" altLang="en-US" sz="1050" dirty="0"/>
                     </a:p>
                   </a:txBody>
                   <a:tcPr marL="73152" marR="73152" marT="27432" marB="27432" anchor="ctr">
@@ -6194,120 +6392,312 @@
       </p:grpSpPr>
       <p:sp>
         <p:nvSpPr>
-          <p:cNvPr id="2" name="TextBox 1"/>
-          <p:cNvSpPr txBox="1"/>
-          <p:nvPr/>
-        </p:nvSpPr>
-        <p:spPr>
-          <a:xfrm>
-            <a:off x="547200" y="136800"/>
-            <a:ext cx="7920000" cy="338400"/>
+          <p:cNvPr id="2" name="Google Shape;752;p28"/>
+          <p:cNvSpPr/>
+          <p:nvPr/>
+        </p:nvSpPr>
+        <p:spPr>
+          <a:xfrm>
+            <a:off x="549000" y="138240"/>
+            <a:ext cx="7680960" cy="338040"/>
           </a:xfrm>
           <a:prstGeom prst="rect">
             <a:avLst/>
           </a:prstGeom>
           <a:noFill/>
-        </p:spPr>
-        <p:txBody>
-          <a:bodyPr wrap="square" lIns="28800" tIns="7200" rIns="28800" bIns="7200" anchor="ctr">
+          <a:ln w="0">
+            <a:noFill/>
+          </a:ln>
+        </p:spPr>
+        <p:style>
+          <a:lnRef idx="0">
+            <a:scrgbClr r="0" g="0" b="0"/>
+          </a:lnRef>
+          <a:fillRef idx="0">
+            <a:scrgbClr r="0" g="0" b="0"/>
+          </a:fillRef>
+          <a:effectRef idx="0">
+            <a:scrgbClr r="0" g="0" b="0"/>
+          </a:effectRef>
+          <a:fontRef idx="minor"/>
+        </p:style>
+        <p:txBody>
+          <a:bodyPr anchor="ctr">
             <a:spAutoFit/>
           </a:bodyPr>
           <a:lstStyle/>
           <a:p>
-            <a:pPr algn="l">
+            <a:pPr defTabSz="914400">
               <a:lnSpc>
-                <a:spcPct val="120000"/>
+                <a:spcPct val="100000"/>
               </a:lnSpc>
             </a:pPr>
             <a:r>
-              <a:rPr sz="1600" b="1">
+              <a:rPr lang="ja-JP" sz="1600" b="1" u="none" strike="noStrike">
                 <a:solidFill>
                   <a:srgbClr val="323366"/>
                 </a:solidFill>
+                <a:effectLst/>
+                <a:uFillTx/>
                 <a:latin typeface="メイリオ"/>
                 <a:ea typeface="メイリオ"/>
-                <a:cs typeface="メイリオ"/>
-              </a:rPr>
-              <a:t>配信イメージ｜勤務前の案内・次回の募集・リッチメニュー</a:t>
-            </a:r>
-          </a:p>
-        </p:txBody>
-      </p:sp>
-      <p:sp>
-        <p:nvSpPr>
-          <p:cNvPr id="3" name="TextBox 2"/>
-          <p:cNvSpPr txBox="1"/>
-          <p:nvPr/>
-        </p:nvSpPr>
-        <p:spPr>
-          <a:xfrm>
-            <a:off x="309600" y="687600"/>
-            <a:ext cx="9331200" cy="585216"/>
+              </a:rPr>
+              <a:t>前後検索「単発バイト」｜当日に何社も比べ、その後は給与・働き方を調べる</a:t>
+            </a:r>
+            <a:endParaRPr lang="en-US" sz="1600" b="0" u="none" strike="noStrike">
+              <a:solidFill>
+                <a:srgbClr val="000000"/>
+              </a:solidFill>
+              <a:effectLst/>
+              <a:uFillTx/>
+              <a:latin typeface="メイリオ"/>
+            </a:endParaRPr>
+          </a:p>
+        </p:txBody>
+      </p:sp>
+      <p:sp>
+        <p:nvSpPr>
+          <p:cNvPr id="3" name="正方形/長方形 2"/>
+          <p:cNvSpPr/>
+          <p:nvPr/>
+        </p:nvSpPr>
+        <p:spPr>
+          <a:xfrm>
+            <a:off x="0" y="577800"/>
+            <a:ext cx="9905760" cy="812520"/>
           </a:xfrm>
           <a:prstGeom prst="rect">
             <a:avLst/>
           </a:prstGeom>
           <a:noFill/>
-        </p:spPr>
-        <p:txBody>
-          <a:bodyPr wrap="square" lIns="28800" tIns="7200" rIns="28800" bIns="7200" anchor="ctr">
-            <a:spAutoFit/>
+          <a:ln>
+            <a:noFill/>
+          </a:ln>
+          <a:effectLst>
+            <a:outerShdw blurRad="39960" dist="23040" dir="5400000" rotWithShape="0">
+              <a:srgbClr val="000000">
+                <a:alpha val="35000"/>
+              </a:srgbClr>
+            </a:outerShdw>
+          </a:effectLst>
+        </p:spPr>
+        <p:style>
+          <a:lnRef idx="1">
+            <a:schemeClr val="accent1"/>
+          </a:lnRef>
+          <a:fillRef idx="3">
+            <a:schemeClr val="accent1"/>
+          </a:fillRef>
+          <a:effectRef idx="2">
+            <a:schemeClr val="accent1"/>
+          </a:effectRef>
+          <a:fontRef idx="minor"/>
+        </p:style>
+        <p:txBody>
+          <a:bodyPr lIns="90000" tIns="45000" rIns="90000" bIns="45000" anchor="ctr">
+            <a:noAutofit/>
           </a:bodyPr>
           <a:lstStyle/>
           <a:p>
-            <a:pPr algn="l">
+            <a:pPr algn="ctr" defTabSz="914400">
               <a:lnSpc>
-                <a:spcPct val="120000"/>
+                <a:spcPct val="100000"/>
               </a:lnSpc>
             </a:pPr>
-            <a:r>
-              <a:rPr sz="1400" b="1">
-                <a:solidFill>
-                  <a:srgbClr val="1E2761"/>
-                </a:solidFill>
-                <a:latin typeface="メイリオ"/>
-                <a:ea typeface="メイリオ"/>
-                <a:cs typeface="メイリオ"/>
-              </a:rPr>
-              <a:t>横浜シミズ向けの配信の文面と、リッチメニューの構成案です。</a:t>
-            </a:r>
-          </a:p>
-          <a:p>
-            <a:pPr algn="l">
-              <a:lnSpc>
-                <a:spcPct val="120000"/>
-              </a:lnSpc>
-            </a:pPr>
-            <a:r>
-              <a:rPr sz="1400" b="1">
-                <a:solidFill>
-                  <a:srgbClr val="FF0000"/>
-                </a:solidFill>
-                <a:latin typeface="メイリオ"/>
-                <a:ea typeface="メイリオ"/>
-                <a:cs typeface="メイリオ"/>
-              </a:rPr>
-              <a:t>文面・項目は例です。運用を始める前にすり合わせて確定します。</a:t>
-            </a:r>
-          </a:p>
-        </p:txBody>
-      </p:sp>
-      <p:sp>
-        <p:nvSpPr>
-          <p:cNvPr id="18" name="Rectangle 17"/>
+            <a:endParaRPr lang="en-US" sz="1800" b="0" u="none" strike="noStrike">
+              <a:solidFill>
+                <a:schemeClr val="lt1"/>
+              </a:solidFill>
+              <a:effectLst/>
+              <a:uFillTx/>
+              <a:latin typeface="メイリオ"/>
+              <a:ea typeface="メイリオ"/>
+            </a:endParaRPr>
+          </a:p>
+        </p:txBody>
+      </p:sp>
+      <p:sp>
+        <p:nvSpPr>
+          <p:cNvPr id="4" name="正方形/長方形 3"/>
           <p:cNvSpPr/>
           <p:nvPr/>
         </p:nvSpPr>
         <p:spPr>
           <a:xfrm>
-            <a:off x="429768" y="5596128"/>
-            <a:ext cx="9043416" cy="374904"/>
+            <a:off x="379800" y="635040"/>
+            <a:ext cx="9160560" cy="698040"/>
           </a:xfrm>
           <a:prstGeom prst="rect">
             <a:avLst/>
           </a:prstGeom>
+          <a:noFill/>
+          <a:ln>
+            <a:noFill/>
+          </a:ln>
+        </p:spPr>
+        <p:style>
+          <a:lnRef idx="2">
+            <a:schemeClr val="accent1">
+              <a:shade val="50000"/>
+            </a:schemeClr>
+          </a:lnRef>
+          <a:fillRef idx="1">
+            <a:schemeClr val="accent1"/>
+          </a:fillRef>
+          <a:effectRef idx="0">
+            <a:schemeClr val="accent1"/>
+          </a:effectRef>
+          <a:fontRef idx="minor"/>
+        </p:style>
+        <p:txBody>
+          <a:bodyPr lIns="90000" tIns="90000" rIns="90000" bIns="45000" anchor="ctr">
+            <a:noAutofit/>
+          </a:bodyPr>
+          <a:lstStyle/>
+          <a:p>
+            <a:pPr algn="ctr" defTabSz="914400">
+              <a:lnSpc>
+                <a:spcPts val="2455"/>
+              </a:lnSpc>
+            </a:pPr>
+            <a:endParaRPr lang="en-US" sz="1400" b="0" u="none" strike="noStrike">
+              <a:solidFill>
+                <a:srgbClr val="343434"/>
+              </a:solidFill>
+              <a:effectLst/>
+              <a:uFillTx/>
+              <a:latin typeface="メイリオ"/>
+              <a:ea typeface="メイリオ"/>
+            </a:endParaRPr>
+          </a:p>
+        </p:txBody>
+      </p:sp>
+      <p:cxnSp>
+        <p:nvCxnSpPr>
+          <p:cNvPr id="5" name="直線コネクタ 1"/>
+          <p:cNvCxnSpPr/>
+          <p:nvPr/>
+        </p:nvCxnSpPr>
+        <p:spPr>
+          <a:xfrm>
+            <a:off x="0" y="1390320"/>
+            <a:ext cx="9906120" cy="360"/>
+          </a:xfrm>
+          <a:prstGeom prst="straightConnector1">
+            <a:avLst/>
+          </a:prstGeom>
+          <a:ln w="19050">
+            <a:solidFill>
+              <a:schemeClr val="lt1">
+                <a:lumMod val="85000"/>
+                <a:alpha val="60000"/>
+              </a:schemeClr>
+            </a:solidFill>
+            <a:round/>
+          </a:ln>
+        </p:spPr>
+      </p:cxnSp>
+      <p:sp>
+        <p:nvSpPr>
+          <p:cNvPr id="6" name="テキスト ボックス 30"/>
+          <p:cNvSpPr/>
+          <p:nvPr/>
+        </p:nvSpPr>
+        <p:spPr>
+          <a:xfrm>
+            <a:off x="426240" y="635400"/>
+            <a:ext cx="9068760" cy="698400"/>
+          </a:xfrm>
+          <a:prstGeom prst="rect">
+            <a:avLst/>
+          </a:prstGeom>
+          <a:noFill/>
+          <a:ln w="0">
+            <a:noFill/>
+          </a:ln>
+        </p:spPr>
+        <p:style>
+          <a:lnRef idx="0">
+            <a:scrgbClr r="0" g="0" b="0"/>
+          </a:lnRef>
+          <a:fillRef idx="0">
+            <a:scrgbClr r="0" g="0" b="0"/>
+          </a:fillRef>
+          <a:effectRef idx="0">
+            <a:scrgbClr r="0" g="0" b="0"/>
+          </a:effectRef>
+          <a:fontRef idx="minor"/>
+        </p:style>
+        <p:txBody>
+          <a:bodyPr lIns="90000" tIns="45000" rIns="90000" bIns="45000" anchor="ctr">
+            <a:noAutofit/>
+          </a:bodyPr>
+          <a:lstStyle/>
+          <a:p>
+            <a:pPr algn="ctr" defTabSz="914400">
+              <a:lnSpc>
+                <a:spcPct val="100000"/>
+              </a:lnSpc>
+            </a:pPr>
+            <a:r>
+              <a:rPr lang="ja-JP" sz="1400" b="1" u="none" strike="noStrike" dirty="0">
+                <a:effectLst/>
+                <a:uFillTx/>
+                <a:latin typeface="メイリオ" panose="020B0604030504040204" pitchFamily="50" charset="-128"/>
+                <a:ea typeface="メイリオ" panose="020B0604030504040204" pitchFamily="50" charset="-128"/>
+              </a:rPr>
+              <a:t>応募の前後に調べていることを、LINEで先に届ける</a:t>
+            </a:r>
+            <a:endParaRPr lang="en-US" sz="1400" b="1" u="none" strike="noStrike" dirty="0">
+              <a:effectLst/>
+              <a:uFillTx/>
+              <a:latin typeface="メイリオ"/>
+            </a:endParaRPr>
+          </a:p>
+        </p:txBody>
+      </p:sp>
+      <p:pic>
+        <p:nvPicPr>
+          <p:cNvPr id="7" name="前後検索 単発バイト（色分け）" descr="tanaka_zengo_chumon_color.png"/>
+          <p:cNvPicPr>
+            <a:picLocks noChangeAspect="1"/>
+          </p:cNvPicPr>
+          <p:nvPr/>
+        </p:nvPicPr>
+        <p:blipFill>
+          <a:blip r:embed="rId2"/>
+          <a:stretch>
+            <a:fillRect/>
+          </a:stretch>
+        </p:blipFill>
+        <p:spPr>
+          <a:xfrm>
+            <a:off x="502920" y="1600200"/>
+            <a:ext cx="5943600" cy="3730824"/>
+          </a:xfrm>
+          <a:prstGeom prst="rect">
+            <a:avLst/>
+          </a:prstGeom>
+        </p:spPr>
+      </p:pic>
+      <p:sp>
+        <p:nvSpPr>
+          <p:cNvPr id="8" name="LINE追加の時期"/>
+          <p:cNvSpPr/>
+          <p:nvPr/>
+        </p:nvSpPr>
+        <p:spPr>
+          <a:xfrm>
+            <a:off x="3584676" y="1644777"/>
+            <a:ext cx="692429" cy="3485439"/>
+          </a:xfrm>
+          <a:prstGeom prst="rect">
+            <a:avLst/>
+          </a:prstGeom>
           <a:solidFill>
-            <a:srgbClr val="002060"/>
+            <a:srgbClr val="06C755">
+              <a:alpha val="16000"/>
+            </a:srgbClr>
           </a:solidFill>
           <a:ln>
             <a:noFill/>
@@ -6339,14 +6729,92 @@
       </p:sp>
       <p:sp>
         <p:nvSpPr>
-          <p:cNvPr id="21" name="Rectangle 20"/>
+          <p:cNvPr id="9" name="LINE追加 札"/>
           <p:cNvSpPr/>
           <p:nvPr/>
         </p:nvSpPr>
         <p:spPr>
           <a:xfrm>
-            <a:off x="429768" y="5596128"/>
-            <a:ext cx="9043416" cy="374904"/>
+            <a:off x="3473690" y="5377104"/>
+            <a:ext cx="914400" cy="237744"/>
+          </a:xfrm>
+          <a:prstGeom prst="rect">
+            <a:avLst/>
+          </a:prstGeom>
+          <a:solidFill>
+            <a:srgbClr val="C6EFCE"/>
+          </a:solidFill>
+          <a:ln>
+            <a:noFill/>
+          </a:ln>
+        </p:spPr>
+        <p:txBody>
+          <a:bodyPr wrap="square" lIns="0" tIns="0" rIns="0" bIns="0" rtlCol="0" anchor="ctr">
+            <a:noAutofit/>
+          </a:bodyPr>
+          <a:lstStyle/>
+          <a:p>
+            <a:pPr algn="ctr">
+              <a:buNone/>
+            </a:pPr>
+            <a:r>
+              <a:rPr lang="ja-JP" altLang="en-US" sz="950" b="1" dirty="0">
+                <a:solidFill>
+                  <a:srgbClr val="00873C"/>
+                </a:solidFill>
+                <a:latin typeface="メイリオ" panose="020B0604030504040204" pitchFamily="50" charset="-128"/>
+                <a:ea typeface="メイリオ" panose="020B0604030504040204" pitchFamily="50" charset="-128"/>
+              </a:rPr>
+              <a:t>LINE追加</a:t>
+            </a:r>
+            <a:endParaRPr lang="ja-JP" altLang="en-US" sz="1200" dirty="0"/>
+          </a:p>
+        </p:txBody>
+      </p:sp>
+      <p:sp>
+        <p:nvSpPr>
+          <p:cNvPr id="10" name="凡例の色"/>
+          <p:cNvSpPr/>
+          <p:nvPr/>
+        </p:nvSpPr>
+        <p:spPr>
+          <a:xfrm>
+            <a:off x="6629400" y="1655064"/>
+            <a:ext cx="137160" cy="137160"/>
+          </a:xfrm>
+          <a:prstGeom prst="rect">
+            <a:avLst/>
+          </a:prstGeom>
+          <a:solidFill>
+            <a:srgbClr val="3467B2"/>
+          </a:solidFill>
+          <a:ln>
+            <a:noFill/>
+          </a:ln>
+        </p:spPr>
+        <p:txBody>
+          <a:bodyPr wrap="square" lIns="0" tIns="0" rIns="0" bIns="0" rtlCol="0" anchor="ctr">
+            <a:noAutofit/>
+          </a:bodyPr>
+          <a:lstStyle/>
+          <a:p>
+            <a:pPr algn="l">
+              <a:buNone/>
+            </a:pPr>
+            <a:endParaRPr lang="ja-JP" altLang="en-US" sz="1200" dirty="0"/>
+          </a:p>
+        </p:txBody>
+      </p:sp>
+      <p:sp>
+        <p:nvSpPr>
+          <p:cNvPr id="11" name="凡例"/>
+          <p:cNvSpPr/>
+          <p:nvPr/>
+        </p:nvSpPr>
+        <p:spPr>
+          <a:xfrm>
+            <a:off x="6812280" y="1600200"/>
+            <a:ext cx="2587752" cy="246888"/>
           </a:xfrm>
           <a:prstGeom prst="rect">
             <a:avLst/>
@@ -6357,748 +6825,239 @@
           </a:ln>
         </p:spPr>
         <p:txBody>
-          <a:bodyPr wrap="square" lIns="45720" tIns="0" rIns="45720" bIns="0" rtlCol="0" anchor="ctr">
+          <a:bodyPr wrap="square" lIns="0" tIns="0" rIns="0" bIns="0" rtlCol="0" anchor="ctr">
             <a:noAutofit/>
           </a:bodyPr>
           <a:lstStyle/>
           <a:p>
-            <a:pPr algn="ctr">
+            <a:pPr algn="l">
               <a:buNone/>
             </a:pPr>
             <a:r>
-              <a:rPr lang="ja-JP" altLang="en-US" sz="1300" b="1" dirty="0">
-                <a:solidFill>
-                  <a:srgbClr val="FFFFFF"/>
+              <a:rPr lang="ja-JP" altLang="en-US" sz="1100" b="0" dirty="0">
+                <a:solidFill>
+                  <a:srgbClr val="333333"/>
                 </a:solidFill>
                 <a:latin typeface="メイリオ" panose="020B0604030504040204" pitchFamily="50" charset="-128"/>
                 <a:ea typeface="メイリオ" panose="020B0604030504040204" pitchFamily="50" charset="-128"/>
               </a:rPr>
-              <a:t>勤務に必要な情報と次の募集が、同じLINEに届く</a:t>
-            </a:r>
-            <a:endParaRPr lang="ja-JP" altLang="en-US" sz="1300" dirty="0"/>
-          </a:p>
-        </p:txBody>
-      </p:sp>
-      <p:sp>
-        <p:nvSpPr>
-          <p:cNvPr id="22" name="Rounded Rectangle 21"/>
+              <a:t>求人サービスを比べる</a:t>
+            </a:r>
+            <a:endParaRPr lang="ja-JP" altLang="en-US" sz="1200" dirty="0"/>
+          </a:p>
+        </p:txBody>
+      </p:sp>
+      <p:sp>
+        <p:nvSpPr>
+          <p:cNvPr id="12" name="凡例の色"/>
           <p:cNvSpPr/>
           <p:nvPr/>
         </p:nvSpPr>
         <p:spPr>
           <a:xfrm>
-            <a:off x="429768" y="1371600"/>
-            <a:ext cx="2880360" cy="329184"/>
-          </a:xfrm>
-          <a:prstGeom prst="roundRect">
-            <a:avLst>
-              <a:gd name="adj" fmla="val 20000"/>
-            </a:avLst>
+            <a:off x="6629400" y="1901952"/>
+            <a:ext cx="137160" cy="137160"/>
+          </a:xfrm>
+          <a:prstGeom prst="rect">
+            <a:avLst/>
           </a:prstGeom>
           <a:solidFill>
-            <a:srgbClr val="1E2761"/>
+            <a:srgbClr val="8E4EC6"/>
           </a:solidFill>
           <a:ln>
             <a:noFill/>
           </a:ln>
         </p:spPr>
         <p:txBody>
-          <a:bodyPr wrap="square" lIns="36576" tIns="0" rIns="36576" bIns="0" rtlCol="0" anchor="ctr">
+          <a:bodyPr wrap="square" lIns="0" tIns="0" rIns="0" bIns="0" rtlCol="0" anchor="ctr">
             <a:noAutofit/>
           </a:bodyPr>
           <a:lstStyle/>
           <a:p>
-            <a:pPr algn="ctr">
+            <a:pPr algn="l">
               <a:buNone/>
             </a:pPr>
-            <a:r>
-              <a:rPr lang="ja-JP" altLang="en-US" sz="1150" b="1" dirty="0">
-                <a:solidFill>
-                  <a:srgbClr val="FFFFFF"/>
+            <a:endParaRPr lang="ja-JP" altLang="en-US" sz="1200" dirty="0"/>
+          </a:p>
+        </p:txBody>
+      </p:sp>
+      <p:sp>
+        <p:nvSpPr>
+          <p:cNvPr id="13" name="凡例"/>
+          <p:cNvSpPr/>
+          <p:nvPr/>
+        </p:nvSpPr>
+        <p:spPr>
+          <a:xfrm>
+            <a:off x="6812280" y="1847088"/>
+            <a:ext cx="2587752" cy="246888"/>
+          </a:xfrm>
+          <a:prstGeom prst="rect">
+            <a:avLst/>
+          </a:prstGeom>
+          <a:noFill/>
+          <a:ln>
+            <a:noFill/>
+          </a:ln>
+        </p:spPr>
+        <p:txBody>
+          <a:bodyPr wrap="square" lIns="0" tIns="0" rIns="0" bIns="0" rtlCol="0" anchor="ctr">
+            <a:noAutofit/>
+          </a:bodyPr>
+          <a:lstStyle/>
+          <a:p>
+            <a:pPr algn="l">
+              <a:buNone/>
+            </a:pPr>
+            <a:r>
+              <a:rPr lang="ja-JP" altLang="en-US" sz="1100" b="0" dirty="0">
+                <a:solidFill>
+                  <a:srgbClr val="333333"/>
                 </a:solidFill>
                 <a:latin typeface="メイリオ" panose="020B0604030504040204" pitchFamily="50" charset="-128"/>
                 <a:ea typeface="メイリオ" panose="020B0604030504040204" pitchFamily="50" charset="-128"/>
               </a:rPr>
-              <a:t>勤務前の案内（前日）</a:t>
-            </a:r>
-            <a:endParaRPr lang="ja-JP" altLang="en-US" sz="1150" dirty="0"/>
-          </a:p>
-        </p:txBody>
-      </p:sp>
-      <p:sp>
-        <p:nvSpPr>
-          <p:cNvPr id="23" name="Rectangle 22"/>
+              <a:t>応募・面接の準備</a:t>
+            </a:r>
+            <a:endParaRPr lang="ja-JP" altLang="en-US" sz="1200" dirty="0"/>
+          </a:p>
+        </p:txBody>
+      </p:sp>
+      <p:sp>
+        <p:nvSpPr>
+          <p:cNvPr id="14" name="凡例の色"/>
           <p:cNvSpPr/>
           <p:nvPr/>
         </p:nvSpPr>
         <p:spPr>
           <a:xfrm>
-            <a:off x="429768" y="1783080"/>
-            <a:ext cx="2880360" cy="3246120"/>
+            <a:off x="6629400" y="2148840"/>
+            <a:ext cx="137160" cy="137160"/>
           </a:xfrm>
           <a:prstGeom prst="rect">
             <a:avLst/>
           </a:prstGeom>
           <a:solidFill>
-            <a:srgbClr val="D8E2F1"/>
+            <a:srgbClr val="00897B"/>
           </a:solidFill>
           <a:ln>
             <a:noFill/>
           </a:ln>
         </p:spPr>
         <p:txBody>
+          <a:bodyPr wrap="square" lIns="0" tIns="0" rIns="0" bIns="0" rtlCol="0" anchor="ctr">
+            <a:noAutofit/>
+          </a:bodyPr>
+          <a:lstStyle/>
+          <a:p>
+            <a:pPr algn="l">
+              <a:buNone/>
+            </a:pPr>
+            <a:endParaRPr lang="ja-JP" altLang="en-US" sz="1200" dirty="0"/>
+          </a:p>
+        </p:txBody>
+      </p:sp>
+      <p:sp>
+        <p:nvSpPr>
+          <p:cNvPr id="15" name="凡例"/>
+          <p:cNvSpPr/>
+          <p:nvPr/>
+        </p:nvSpPr>
+        <p:spPr>
+          <a:xfrm>
+            <a:off x="6812280" y="2093976"/>
+            <a:ext cx="2587752" cy="246888"/>
+          </a:xfrm>
+          <a:prstGeom prst="rect">
+            <a:avLst/>
+          </a:prstGeom>
+          <a:noFill/>
+          <a:ln>
+            <a:noFill/>
+          </a:ln>
+        </p:spPr>
+        <p:txBody>
+          <a:bodyPr wrap="square" lIns="0" tIns="0" rIns="0" bIns="0" rtlCol="0" anchor="ctr">
+            <a:noAutofit/>
+          </a:bodyPr>
+          <a:lstStyle/>
+          <a:p>
+            <a:pPr algn="l">
+              <a:buNone/>
+            </a:pPr>
+            <a:r>
+              <a:rPr lang="ja-JP" altLang="en-US" sz="1100" b="0" dirty="0">
+                <a:solidFill>
+                  <a:srgbClr val="333333"/>
+                </a:solidFill>
+                <a:latin typeface="メイリオ" panose="020B0604030504040204" pitchFamily="50" charset="-128"/>
+                <a:ea typeface="メイリオ" panose="020B0604030504040204" pitchFamily="50" charset="-128"/>
+              </a:rPr>
+              <a:t>給与・働き方を調べる</a:t>
+            </a:r>
+            <a:endParaRPr lang="ja-JP" altLang="en-US" sz="1200" dirty="0"/>
+          </a:p>
+        </p:txBody>
+      </p:sp>
+      <p:sp>
+        <p:nvSpPr>
+          <p:cNvPr id="18" name="分析 当日"/>
+          <p:cNvSpPr/>
+          <p:nvPr/>
+        </p:nvSpPr>
+        <p:spPr>
+          <a:xfrm>
+            <a:off x="6629400" y="2404872"/>
+            <a:ext cx="2770632" cy="274320"/>
+          </a:xfrm>
+          <a:prstGeom prst="rect">
+            <a:avLst/>
+          </a:prstGeom>
+          <a:solidFill>
+            <a:srgbClr val="1F285A"/>
+          </a:solidFill>
+          <a:ln>
+            <a:noFill/>
+          </a:ln>
+        </p:spPr>
+        <p:txBody>
           <a:bodyPr wrap="square" lIns="73152" tIns="36576" rIns="73152" bIns="36576" rtlCol="0" anchor="ctr">
             <a:noAutofit/>
           </a:bodyPr>
           <a:lstStyle/>
           <a:p>
-            <a:pPr algn="l">
+            <a:pPr algn="ctr">
               <a:buNone/>
             </a:pPr>
-            <a:endParaRPr lang="ja-JP" altLang="en-US" sz="1200" dirty="0"/>
-          </a:p>
-        </p:txBody>
-      </p:sp>
-      <p:sp>
-        <p:nvSpPr>
-          <p:cNvPr id="24" name="Rounded Rectangle 23"/>
-          <p:cNvSpPr/>
-          <p:nvPr/>
-        </p:nvSpPr>
-        <p:spPr>
-          <a:xfrm>
-            <a:off x="594359" y="1920240"/>
-            <a:ext cx="2551176" cy="2926080"/>
-          </a:xfrm>
-          <a:prstGeom prst="roundRect">
-            <a:avLst>
-              <a:gd name="adj" fmla="val 5000"/>
-            </a:avLst>
-          </a:prstGeom>
-          <a:solidFill>
-            <a:srgbClr val="FFFFFF"/>
-          </a:solidFill>
-          <a:ln>
-            <a:noFill/>
-          </a:ln>
-        </p:spPr>
-        <p:txBody>
-          <a:bodyPr wrap="square" lIns="109728" tIns="73152" rIns="91440" bIns="54864" rtlCol="0" anchor="t">
-            <a:noAutofit/>
-          </a:bodyPr>
-          <a:lstStyle/>
-          <a:p>
-            <a:pPr algn="l">
-              <a:spcAft>
-                <a:spcPts val="200"/>
-              </a:spcAft>
-              <a:buNone/>
-            </a:pPr>
-            <a:r>
-              <a:rPr lang="ja-JP" altLang="en-US" sz="1050" b="1" dirty="0">
-                <a:solidFill>
-                  <a:srgbClr val="323366"/>
+            <a:r>
+              <a:rPr lang="ja-JP" altLang="en-US" sz="1150" b="1" dirty="0">
+                <a:solidFill>
+                  <a:srgbClr val="FFFFFF"/>
                 </a:solidFill>
                 <a:latin typeface="メイリオ" panose="020B0604030504040204" pitchFamily="50" charset="-128"/>
                 <a:ea typeface="メイリオ" panose="020B0604030504040204" pitchFamily="50" charset="-128"/>
               </a:rPr>
-              <a:t>【明日の勤務のご案内】</a:t>
-            </a:r>
-            <a:endParaRPr lang="ja-JP" altLang="en-US" sz="1050" dirty="0"/>
-          </a:p>
-          <a:p>
-            <a:pPr algn="l">
-              <a:spcAft>
-                <a:spcPts val="200"/>
-              </a:spcAft>
-              <a:buNone/>
-            </a:pPr>
-            <a:r>
-              <a:rPr lang="ja-JP" altLang="en-US" sz="1050" b="0" dirty="0">
-                <a:solidFill>
-                  <a:srgbClr val="333333"/>
-                </a:solidFill>
-                <a:latin typeface="メイリオ" panose="020B0604030504040204" pitchFamily="50" charset="-128"/>
-                <a:ea typeface="メイリオ" panose="020B0604030504040204" pitchFamily="50" charset="-128"/>
-              </a:rPr>
-              <a:t>〇月〇日（〇）〇〇スタジアム</a:t>
-            </a:r>
-            <a:endParaRPr lang="ja-JP" altLang="en-US" sz="1050" dirty="0"/>
-          </a:p>
-          <a:p>
-            <a:pPr algn="l">
-              <a:spcAft>
-                <a:spcPts val="200"/>
-              </a:spcAft>
-              <a:buNone/>
-            </a:pPr>
-            <a:r>
-              <a:rPr lang="ja-JP" altLang="en-US" sz="1050" b="0" dirty="0">
-                <a:solidFill>
-                  <a:srgbClr val="333333"/>
-                </a:solidFill>
-                <a:latin typeface="メイリオ" panose="020B0604030504040204" pitchFamily="50" charset="-128"/>
-                <a:ea typeface="メイリオ" panose="020B0604030504040204" pitchFamily="50" charset="-128"/>
-              </a:rPr>
-              <a:t>集合：〇〇:〇〇　〇〇ゲート前</a:t>
-            </a:r>
-            <a:endParaRPr lang="ja-JP" altLang="en-US" sz="1050" dirty="0"/>
-          </a:p>
-          <a:p>
-            <a:pPr algn="l">
-              <a:spcAft>
-                <a:spcPts val="200"/>
-              </a:spcAft>
-              <a:buNone/>
-            </a:pPr>
-            <a:r>
-              <a:rPr lang="ja-JP" altLang="en-US" sz="1050" b="0" dirty="0">
-                <a:solidFill>
-                  <a:srgbClr val="333333"/>
-                </a:solidFill>
-                <a:latin typeface="メイリオ" panose="020B0604030504040204" pitchFamily="50" charset="-128"/>
-                <a:ea typeface="メイリオ" panose="020B0604030504040204" pitchFamily="50" charset="-128"/>
-              </a:rPr>
-              <a:t>持ち物：〇〇・〇〇</a:t>
-            </a:r>
-            <a:endParaRPr lang="ja-JP" altLang="en-US" sz="1050" dirty="0"/>
-          </a:p>
-          <a:p>
-            <a:pPr algn="l">
-              <a:spcAft>
-                <a:spcPts val="200"/>
-              </a:spcAft>
-              <a:buNone/>
-            </a:pPr>
-            <a:r>
-              <a:rPr lang="ja-JP" altLang="en-US" sz="1050" b="0" dirty="0">
-                <a:solidFill>
-                  <a:srgbClr val="333333"/>
-                </a:solidFill>
-                <a:latin typeface="メイリオ" panose="020B0604030504040204" pitchFamily="50" charset="-128"/>
-                <a:ea typeface="メイリオ" panose="020B0604030504040204" pitchFamily="50" charset="-128"/>
-              </a:rPr>
-              <a:t>服装：〇〇</a:t>
-            </a:r>
-            <a:endParaRPr lang="ja-JP" altLang="en-US" sz="1050" dirty="0"/>
-          </a:p>
-          <a:p>
-            <a:pPr algn="l">
-              <a:spcAft>
-                <a:spcPts val="200"/>
-              </a:spcAft>
-              <a:buNone/>
-            </a:pPr>
-            <a:r>
-              <a:rPr lang="ja-JP" altLang="en-US" sz="1050" b="0" dirty="0">
-                <a:solidFill>
-                  <a:srgbClr val="333333"/>
-                </a:solidFill>
-                <a:latin typeface="メイリオ" panose="020B0604030504040204" pitchFamily="50" charset="-128"/>
-                <a:ea typeface="メイリオ" panose="020B0604030504040204" pitchFamily="50" charset="-128"/>
-              </a:rPr>
-              <a:t>遅れる場合・体調がすぐれないときは、このLINEでご連絡ください。</a:t>
-            </a:r>
-            <a:endParaRPr lang="ja-JP" altLang="en-US" sz="1050" dirty="0"/>
-          </a:p>
-        </p:txBody>
-      </p:sp>
-      <p:sp>
-        <p:nvSpPr>
-          <p:cNvPr id="25" name="Rectangle 24"/>
+              <a:t>検索前</a:t>
+            </a:r>
+            <a:endParaRPr lang="ja-JP" altLang="en-US" sz="1200" dirty="0"/>
+          </a:p>
+        </p:txBody>
+      </p:sp>
+      <p:sp>
+        <p:nvSpPr>
+          <p:cNvPr id="19" name="分析 当日 本文"/>
           <p:cNvSpPr/>
           <p:nvPr/>
         </p:nvSpPr>
         <p:spPr>
           <a:xfrm>
-            <a:off x="429768" y="5074920"/>
-            <a:ext cx="2880360" cy="365760"/>
+            <a:off x="6629400" y="2679191"/>
+            <a:ext cx="2770632" cy="713232"/>
           </a:xfrm>
           <a:prstGeom prst="rect">
             <a:avLst/>
           </a:prstGeom>
           <a:noFill/>
-          <a:ln>
-            <a:noFill/>
-          </a:ln>
-        </p:spPr>
-        <p:txBody>
-          <a:bodyPr wrap="square" lIns="18288" tIns="0" rIns="18288" bIns="0" rtlCol="0" anchor="ctr">
-            <a:noAutofit/>
-          </a:bodyPr>
-          <a:lstStyle/>
-          <a:p>
-            <a:pPr algn="l">
-              <a:buNone/>
-            </a:pPr>
-            <a:r>
-              <a:rPr lang="ja-JP" altLang="en-US" sz="1000" b="0" dirty="0">
-                <a:solidFill>
-                  <a:srgbClr val="595959"/>
-                </a:solidFill>
-                <a:latin typeface="メイリオ" panose="020B0604030504040204" pitchFamily="50" charset="-128"/>
-                <a:ea typeface="メイリオ" panose="020B0604030504040204" pitchFamily="50" charset="-128"/>
-              </a:rPr>
-              <a:t>対象：そのイベントに勤務する方（タグ）</a:t>
-            </a:r>
-            <a:endParaRPr lang="ja-JP" altLang="en-US" sz="1000" dirty="0"/>
-          </a:p>
-        </p:txBody>
-      </p:sp>
-      <p:sp>
-        <p:nvSpPr>
-          <p:cNvPr id="26" name="Rounded Rectangle 25"/>
-          <p:cNvSpPr/>
-          <p:nvPr/>
-        </p:nvSpPr>
-        <p:spPr>
-          <a:xfrm>
-            <a:off x="3511296" y="1371600"/>
-            <a:ext cx="2880360" cy="329184"/>
-          </a:xfrm>
-          <a:prstGeom prst="roundRect">
-            <a:avLst>
-              <a:gd name="adj" fmla="val 20000"/>
-            </a:avLst>
-          </a:prstGeom>
-          <a:solidFill>
-            <a:srgbClr val="1E2761"/>
-          </a:solidFill>
-          <a:ln>
-            <a:noFill/>
-          </a:ln>
-        </p:spPr>
-        <p:txBody>
-          <a:bodyPr wrap="square" lIns="36576" tIns="0" rIns="36576" bIns="0" rtlCol="0" anchor="ctr">
-            <a:noAutofit/>
-          </a:bodyPr>
-          <a:lstStyle/>
-          <a:p>
-            <a:pPr algn="ctr">
-              <a:buNone/>
-            </a:pPr>
-            <a:r>
-              <a:rPr lang="ja-JP" altLang="en-US" sz="1150" b="1" dirty="0">
-                <a:solidFill>
-                  <a:srgbClr val="FFFFFF"/>
-                </a:solidFill>
-                <a:latin typeface="メイリオ" panose="020B0604030504040204" pitchFamily="50" charset="-128"/>
-                <a:ea typeface="メイリオ" panose="020B0604030504040204" pitchFamily="50" charset="-128"/>
-              </a:rPr>
-              <a:t>次回イベントの募集</a:t>
-            </a:r>
-            <a:endParaRPr lang="ja-JP" altLang="en-US" sz="1150" dirty="0"/>
-          </a:p>
-        </p:txBody>
-      </p:sp>
-      <p:sp>
-        <p:nvSpPr>
-          <p:cNvPr id="27" name="Rectangle 26"/>
-          <p:cNvSpPr/>
-          <p:nvPr/>
-        </p:nvSpPr>
-        <p:spPr>
-          <a:xfrm>
-            <a:off x="3511296" y="1783080"/>
-            <a:ext cx="2880360" cy="3246120"/>
-          </a:xfrm>
-          <a:prstGeom prst="rect">
-            <a:avLst/>
-          </a:prstGeom>
-          <a:solidFill>
-            <a:srgbClr val="D8E2F1"/>
-          </a:solidFill>
-          <a:ln>
-            <a:noFill/>
-          </a:ln>
-        </p:spPr>
-        <p:txBody>
-          <a:bodyPr wrap="square" lIns="73152" tIns="36576" rIns="73152" bIns="36576" rtlCol="0" anchor="ctr">
-            <a:noAutofit/>
-          </a:bodyPr>
-          <a:lstStyle/>
-          <a:p>
-            <a:pPr algn="l">
-              <a:buNone/>
-            </a:pPr>
-            <a:endParaRPr lang="ja-JP" altLang="en-US" sz="1200" dirty="0"/>
-          </a:p>
-        </p:txBody>
-      </p:sp>
-      <p:sp>
-        <p:nvSpPr>
-          <p:cNvPr id="28" name="Rounded Rectangle 27"/>
-          <p:cNvSpPr/>
-          <p:nvPr/>
-        </p:nvSpPr>
-        <p:spPr>
-          <a:xfrm>
-            <a:off x="3675888" y="1920240"/>
-            <a:ext cx="2551176" cy="2331720"/>
-          </a:xfrm>
-          <a:prstGeom prst="roundRect">
-            <a:avLst>
-              <a:gd name="adj" fmla="val 5000"/>
-            </a:avLst>
-          </a:prstGeom>
-          <a:solidFill>
-            <a:srgbClr val="FFFFFF"/>
-          </a:solidFill>
-          <a:ln>
-            <a:noFill/>
-          </a:ln>
-        </p:spPr>
-        <p:txBody>
-          <a:bodyPr wrap="square" lIns="109728" tIns="73152" rIns="91440" bIns="54864" rtlCol="0" anchor="t">
-            <a:noAutofit/>
-          </a:bodyPr>
-          <a:lstStyle/>
-          <a:p>
-            <a:pPr algn="l">
-              <a:spcAft>
-                <a:spcPts val="200"/>
-              </a:spcAft>
-              <a:buNone/>
-            </a:pPr>
-            <a:r>
-              <a:rPr lang="ja-JP" altLang="en-US" sz="1050" b="1" dirty="0">
-                <a:solidFill>
-                  <a:srgbClr val="323366"/>
-                </a:solidFill>
-                <a:latin typeface="メイリオ" panose="020B0604030504040204" pitchFamily="50" charset="-128"/>
-                <a:ea typeface="メイリオ" panose="020B0604030504040204" pitchFamily="50" charset="-128"/>
-              </a:rPr>
-              <a:t>【勤務者募集｜横浜アリーナ】</a:t>
-            </a:r>
-            <a:endParaRPr lang="ja-JP" altLang="en-US" sz="1050" dirty="0"/>
-          </a:p>
-          <a:p>
-            <a:pPr algn="l">
-              <a:spcAft>
-                <a:spcPts val="200"/>
-              </a:spcAft>
-              <a:buNone/>
-            </a:pPr>
-            <a:r>
-              <a:rPr lang="ja-JP" altLang="en-US" sz="1050" b="0" dirty="0">
-                <a:solidFill>
-                  <a:srgbClr val="333333"/>
-                </a:solidFill>
-                <a:latin typeface="メイリオ" panose="020B0604030504040204" pitchFamily="50" charset="-128"/>
-                <a:ea typeface="メイリオ" panose="020B0604030504040204" pitchFamily="50" charset="-128"/>
-              </a:rPr>
-              <a:t>〇月〇日（〇）〇〇時〜〇〇時</a:t>
-            </a:r>
-            <a:endParaRPr lang="ja-JP" altLang="en-US" sz="1050" dirty="0"/>
-          </a:p>
-          <a:p>
-            <a:pPr algn="l">
-              <a:spcAft>
-                <a:spcPts val="200"/>
-              </a:spcAft>
-              <a:buNone/>
-            </a:pPr>
-            <a:r>
-              <a:rPr lang="ja-JP" altLang="en-US" sz="1050" b="0" dirty="0">
-                <a:solidFill>
-                  <a:srgbClr val="333333"/>
-                </a:solidFill>
-                <a:latin typeface="メイリオ" panose="020B0604030504040204" pitchFamily="50" charset="-128"/>
-                <a:ea typeface="メイリオ" panose="020B0604030504040204" pitchFamily="50" charset="-128"/>
-              </a:rPr>
-              <a:t>案内・誘導スタッフ　時給〇〇円〜</a:t>
-            </a:r>
-            <a:endParaRPr lang="ja-JP" altLang="en-US" sz="1050" dirty="0"/>
-          </a:p>
-          <a:p>
-            <a:pPr algn="l">
-              <a:spcAft>
-                <a:spcPts val="200"/>
-              </a:spcAft>
-              <a:buNone/>
-            </a:pPr>
-            <a:r>
-              <a:rPr lang="ja-JP" altLang="en-US" sz="1050" b="0" dirty="0">
-                <a:solidFill>
-                  <a:srgbClr val="333333"/>
-                </a:solidFill>
-                <a:latin typeface="メイリオ" panose="020B0604030504040204" pitchFamily="50" charset="-128"/>
-                <a:ea typeface="メイリオ" panose="020B0604030504040204" pitchFamily="50" charset="-128"/>
-              </a:rPr>
-              <a:t>前回のご勤務、ありがとうございました。次のイベントもお待ちしています。</a:t>
-            </a:r>
-            <a:endParaRPr lang="ja-JP" altLang="en-US" sz="1050" dirty="0"/>
-          </a:p>
-        </p:txBody>
-      </p:sp>
-      <p:sp>
-        <p:nvSpPr>
-          <p:cNvPr id="29" name="Rectangle 28"/>
-          <p:cNvSpPr/>
-          <p:nvPr/>
-        </p:nvSpPr>
-        <p:spPr>
-          <a:xfrm>
-            <a:off x="3831336" y="4343400"/>
-            <a:ext cx="2240280" cy="411480"/>
-          </a:xfrm>
-          <a:prstGeom prst="rect">
-            <a:avLst/>
-          </a:prstGeom>
-          <a:solidFill>
-            <a:srgbClr val="06C755"/>
-          </a:solidFill>
-          <a:ln>
-            <a:noFill/>
-          </a:ln>
-        </p:spPr>
-        <p:txBody>
-          <a:bodyPr wrap="square" lIns="0" tIns="0" rIns="0" bIns="0" rtlCol="0" anchor="ctr">
-            <a:noAutofit/>
-          </a:bodyPr>
-          <a:lstStyle/>
-          <a:p>
-            <a:pPr algn="ctr">
-              <a:buNone/>
-            </a:pPr>
-            <a:r>
-              <a:rPr lang="ja-JP" altLang="en-US" sz="1100" b="1" dirty="0">
-                <a:solidFill>
-                  <a:srgbClr val="FFFFFF"/>
-                </a:solidFill>
-                <a:latin typeface="メイリオ" panose="020B0604030504040204" pitchFamily="50" charset="-128"/>
-                <a:ea typeface="メイリオ" panose="020B0604030504040204" pitchFamily="50" charset="-128"/>
-              </a:rPr>
-              <a:t>勤務希望を出す</a:t>
-            </a:r>
-            <a:endParaRPr lang="ja-JP" altLang="en-US" sz="1100" dirty="0"/>
-          </a:p>
-        </p:txBody>
-      </p:sp>
-      <p:sp>
-        <p:nvSpPr>
-          <p:cNvPr id="30" name="Rectangle 29"/>
-          <p:cNvSpPr/>
-          <p:nvPr/>
-        </p:nvSpPr>
-        <p:spPr>
-          <a:xfrm>
-            <a:off x="3511296" y="5074920"/>
-            <a:ext cx="2880360" cy="365760"/>
-          </a:xfrm>
-          <a:prstGeom prst="rect">
-            <a:avLst/>
-          </a:prstGeom>
-          <a:noFill/>
-          <a:ln>
-            <a:noFill/>
-          </a:ln>
-        </p:spPr>
-        <p:txBody>
-          <a:bodyPr wrap="square" lIns="18288" tIns="0" rIns="18288" bIns="0" rtlCol="0" anchor="ctr">
-            <a:noAutofit/>
-          </a:bodyPr>
-          <a:lstStyle/>
-          <a:p>
-            <a:pPr algn="l">
-              <a:buNone/>
-            </a:pPr>
-            <a:r>
-              <a:rPr lang="ja-JP" altLang="en-US" sz="1000" b="0" dirty="0">
-                <a:solidFill>
-                  <a:srgbClr val="595959"/>
-                </a:solidFill>
-                <a:latin typeface="メイリオ" panose="020B0604030504040204" pitchFamily="50" charset="-128"/>
-                <a:ea typeface="メイリオ" panose="020B0604030504040204" pitchFamily="50" charset="-128"/>
-              </a:rPr>
-              <a:t>対象：横浜エリア・土日希望・勤務ありの方</a:t>
-            </a:r>
-            <a:endParaRPr lang="ja-JP" altLang="en-US" sz="1000" dirty="0"/>
-          </a:p>
-        </p:txBody>
-      </p:sp>
-      <p:sp>
-        <p:nvSpPr>
-          <p:cNvPr id="31" name="Rounded Rectangle 30"/>
-          <p:cNvSpPr/>
-          <p:nvPr/>
-        </p:nvSpPr>
-        <p:spPr>
-          <a:xfrm>
-            <a:off x="6592824" y="1371600"/>
-            <a:ext cx="2880360" cy="329184"/>
-          </a:xfrm>
-          <a:prstGeom prst="roundRect">
-            <a:avLst>
-              <a:gd name="adj" fmla="val 20000"/>
-            </a:avLst>
-          </a:prstGeom>
-          <a:solidFill>
-            <a:srgbClr val="1E2761"/>
-          </a:solidFill>
-          <a:ln>
-            <a:noFill/>
-          </a:ln>
-        </p:spPr>
-        <p:txBody>
-          <a:bodyPr wrap="square" lIns="36576" tIns="0" rIns="36576" bIns="0" rtlCol="0" anchor="ctr">
-            <a:noAutofit/>
-          </a:bodyPr>
-          <a:lstStyle/>
-          <a:p>
-            <a:pPr algn="ctr">
-              <a:buNone/>
-            </a:pPr>
-            <a:r>
-              <a:rPr lang="ja-JP" altLang="en-US" sz="1150" b="1" dirty="0">
-                <a:solidFill>
-                  <a:srgbClr val="FFFFFF"/>
-                </a:solidFill>
-                <a:latin typeface="メイリオ" panose="020B0604030504040204" pitchFamily="50" charset="-128"/>
-                <a:ea typeface="メイリオ" panose="020B0604030504040204" pitchFamily="50" charset="-128"/>
-              </a:rPr>
-              <a:t>リッチメニュー（構成案）</a:t>
-            </a:r>
-            <a:endParaRPr lang="ja-JP" altLang="en-US" sz="1150" dirty="0"/>
-          </a:p>
-        </p:txBody>
-      </p:sp>
-      <p:sp>
-        <p:nvSpPr>
-          <p:cNvPr id="32" name="Rectangle 31"/>
-          <p:cNvSpPr/>
-          <p:nvPr/>
-        </p:nvSpPr>
-        <p:spPr>
-          <a:xfrm>
-            <a:off x="6592824" y="1783080"/>
-            <a:ext cx="2880360" cy="3246120"/>
-          </a:xfrm>
-          <a:prstGeom prst="rect">
-            <a:avLst/>
-          </a:prstGeom>
-          <a:solidFill>
-            <a:srgbClr val="F2F2F2"/>
-          </a:solidFill>
-          <a:ln>
-            <a:noFill/>
-          </a:ln>
-        </p:spPr>
-        <p:txBody>
-          <a:bodyPr wrap="square" lIns="73152" tIns="36576" rIns="73152" bIns="36576" rtlCol="0" anchor="ctr">
-            <a:noAutofit/>
-          </a:bodyPr>
-          <a:lstStyle/>
-          <a:p>
-            <a:pPr algn="l">
-              <a:buNone/>
-            </a:pPr>
-            <a:endParaRPr lang="ja-JP" altLang="en-US" sz="1200" dirty="0"/>
-          </a:p>
-        </p:txBody>
-      </p:sp>
-      <p:sp>
-        <p:nvSpPr>
-          <p:cNvPr id="33" name="Rectangle 32"/>
-          <p:cNvSpPr/>
-          <p:nvPr/>
-        </p:nvSpPr>
-        <p:spPr>
-          <a:xfrm>
-            <a:off x="6647688" y="2240280"/>
-            <a:ext cx="893064" cy="914400"/>
-          </a:xfrm>
-          <a:prstGeom prst="rect">
-            <a:avLst/>
-          </a:prstGeom>
-          <a:solidFill>
-            <a:srgbClr val="1E2761"/>
-          </a:solidFill>
-          <a:ln>
-            <a:noFill/>
-          </a:ln>
-        </p:spPr>
-        <p:txBody>
-          <a:bodyPr wrap="square" lIns="18288" tIns="18288" rIns="18288" bIns="18288" rtlCol="0" anchor="ctr">
-            <a:noAutofit/>
-          </a:bodyPr>
-          <a:lstStyle/>
-          <a:p>
-            <a:pPr algn="ctr">
-              <a:spcAft>
-                <a:spcPts val="100"/>
-              </a:spcAft>
-              <a:buNone/>
-            </a:pPr>
-            <a:r>
-              <a:rPr lang="ja-JP" altLang="en-US" sz="1150" b="1" dirty="0">
-                <a:solidFill>
-                  <a:srgbClr val="FFFFFF"/>
-                </a:solidFill>
-                <a:latin typeface="メイリオ" panose="020B0604030504040204" pitchFamily="50" charset="-128"/>
-                <a:ea typeface="メイリオ" panose="020B0604030504040204" pitchFamily="50" charset="-128"/>
-              </a:rPr>
-              <a:t>仕事を探す</a:t>
-            </a:r>
-            <a:endParaRPr lang="ja-JP" altLang="en-US" sz="1100" dirty="0"/>
-          </a:p>
-          <a:p>
-            <a:pPr algn="ctr">
-              <a:spcAft>
-                <a:spcPts val="100"/>
-              </a:spcAft>
-              <a:buNone/>
-            </a:pPr>
-            <a:r>
-              <a:rPr lang="ja-JP" altLang="en-US" sz="950" b="0" dirty="0">
-                <a:solidFill>
-                  <a:srgbClr val="FFFFFF"/>
-                </a:solidFill>
-                <a:latin typeface="メイリオ" panose="020B0604030504040204" pitchFamily="50" charset="-128"/>
-                <a:ea typeface="メイリオ" panose="020B0604030504040204" pitchFamily="50" charset="-128"/>
-              </a:rPr>
-              <a:t>募集中の</a:t>
-            </a:r>
-            <a:br>
-              <a:rPr lang="ja-JP" altLang="en-US" sz="950" b="0" dirty="0">
-                <a:solidFill>
-                  <a:srgbClr val="FFFFFF"/>
-                </a:solidFill>
-                <a:latin typeface="メイリオ" panose="020B0604030504040204" pitchFamily="50" charset="-128"/>
-                <a:ea typeface="メイリオ" panose="020B0604030504040204" pitchFamily="50" charset="-128"/>
-              </a:rPr>
-            </a:br>
-            <a:r>
-              <a:rPr lang="ja-JP" altLang="en-US" sz="950" b="0" dirty="0">
-                <a:solidFill>
-                  <a:srgbClr val="FFFFFF"/>
-                </a:solidFill>
-                <a:latin typeface="メイリオ" panose="020B0604030504040204" pitchFamily="50" charset="-128"/>
-                <a:ea typeface="メイリオ" panose="020B0604030504040204" pitchFamily="50" charset="-128"/>
-              </a:rPr>
-              <a:t>イベント</a:t>
-            </a:r>
-            <a:endParaRPr lang="ja-JP" altLang="en-US" sz="1100" dirty="0"/>
-          </a:p>
-        </p:txBody>
-      </p:sp>
-      <p:sp>
-        <p:nvSpPr>
-          <p:cNvPr id="34" name="Rectangle 33"/>
-          <p:cNvSpPr/>
-          <p:nvPr/>
-        </p:nvSpPr>
-        <p:spPr>
-          <a:xfrm>
-            <a:off x="7586472" y="2240280"/>
-            <a:ext cx="893064" cy="914400"/>
-          </a:xfrm>
-          <a:prstGeom prst="rect">
-            <a:avLst/>
-          </a:prstGeom>
-          <a:solidFill>
-            <a:srgbClr val="FFFFFF"/>
-          </a:solidFill>
           <a:ln w="9525">
             <a:solidFill>
               <a:srgbClr val="D9D9D9"/>
@@ -7106,67 +7065,109 @@
           </a:ln>
         </p:spPr>
         <p:txBody>
-          <a:bodyPr wrap="square" lIns="18288" tIns="18288" rIns="18288" bIns="18288" rtlCol="0" anchor="ctr">
+          <a:bodyPr wrap="square" lIns="73152" tIns="36576" rIns="73152" bIns="27432" rtlCol="0" anchor="t">
             <a:noAutofit/>
           </a:bodyPr>
           <a:lstStyle/>
           <a:p>
-            <a:pPr algn="ctr">
-              <a:spcAft>
-                <a:spcPts val="100"/>
-              </a:spcAft>
+            <a:pPr algn="l">
+              <a:lnSpc>
+                <a:spcPct val="110000"/>
+              </a:lnSpc>
               <a:buNone/>
             </a:pPr>
             <a:r>
-              <a:rPr lang="ja-JP" altLang="en-US" sz="1150" b="1" dirty="0">
-                <a:solidFill>
-                  <a:srgbClr val="323366"/>
+              <a:rPr lang="ja-JP" altLang="en-US" sz="1200" b="1" dirty="0">
+                <a:solidFill>
+                  <a:srgbClr val="1F285A"/>
                 </a:solidFill>
                 <a:latin typeface="メイリオ" panose="020B0604030504040204" pitchFamily="50" charset="-128"/>
                 <a:ea typeface="メイリオ" panose="020B0604030504040204" pitchFamily="50" charset="-128"/>
               </a:rPr>
-              <a:t>勤務の案内</a:t>
-            </a:r>
-            <a:endParaRPr lang="ja-JP" altLang="en-US" sz="1100" dirty="0"/>
-          </a:p>
-          <a:p>
-            <a:pPr algn="ctr">
-              <a:spcAft>
-                <a:spcPts val="100"/>
-              </a:spcAft>
+              <a:t>求人サイトで探し始める</a:t>
+            </a:r>
+            <a:endParaRPr lang="ja-JP" altLang="en-US" sz="1200" dirty="0"/>
+          </a:p>
+          <a:p>
+            <a:pPr algn="l">
+              <a:lnSpc>
+                <a:spcPct val="110000"/>
+              </a:lnSpc>
               <a:buNone/>
             </a:pPr>
             <a:r>
-              <a:rPr lang="ja-JP" altLang="en-US" sz="950" b="0" dirty="0">
-                <a:solidFill>
-                  <a:srgbClr val="323366"/>
+              <a:rPr lang="ja-JP" altLang="en-US" sz="1100" b="0" dirty="0">
+                <a:solidFill>
+                  <a:srgbClr val="333333"/>
                 </a:solidFill>
                 <a:latin typeface="メイリオ" panose="020B0604030504040204" pitchFamily="50" charset="-128"/>
                 <a:ea typeface="メイリオ" panose="020B0604030504040204" pitchFamily="50" charset="-128"/>
               </a:rPr>
-              <a:t>集合・持ち物</a:t>
-            </a:r>
-            <a:endParaRPr lang="ja-JP" altLang="en-US" sz="1100" dirty="0"/>
-          </a:p>
-        </p:txBody>
-      </p:sp>
-      <p:sp>
-        <p:nvSpPr>
-          <p:cNvPr id="35" name="Rectangle 34"/>
+              <a:t>バイト 求人・タウンワークなど</a:t>
+            </a:r>
+            <a:endParaRPr lang="ja-JP" altLang="en-US" sz="1200" dirty="0"/>
+          </a:p>
+        </p:txBody>
+      </p:sp>
+      <p:sp>
+        <p:nvSpPr>
+          <p:cNvPr id="20" name="分析 1〜7日後"/>
           <p:cNvSpPr/>
           <p:nvPr/>
         </p:nvSpPr>
         <p:spPr>
           <a:xfrm>
-            <a:off x="8525256" y="2240280"/>
-            <a:ext cx="893064" cy="914400"/>
+            <a:off x="6629400" y="3447288"/>
+            <a:ext cx="2770632" cy="274320"/>
           </a:xfrm>
           <a:prstGeom prst="rect">
             <a:avLst/>
           </a:prstGeom>
           <a:solidFill>
-            <a:srgbClr val="FFFFFF"/>
+            <a:srgbClr val="1F285A"/>
           </a:solidFill>
+          <a:ln>
+            <a:noFill/>
+          </a:ln>
+        </p:spPr>
+        <p:txBody>
+          <a:bodyPr wrap="square" lIns="73152" tIns="36576" rIns="73152" bIns="36576" rtlCol="0" anchor="ctr">
+            <a:noAutofit/>
+          </a:bodyPr>
+          <a:lstStyle/>
+          <a:p>
+            <a:pPr algn="ctr">
+              <a:buNone/>
+            </a:pPr>
+            <a:r>
+              <a:rPr lang="ja-JP" altLang="en-US" sz="1150" b="1" dirty="0">
+                <a:solidFill>
+                  <a:srgbClr val="FFFFFF"/>
+                </a:solidFill>
+                <a:latin typeface="メイリオ" panose="020B0604030504040204" pitchFamily="50" charset="-128"/>
+                <a:ea typeface="メイリオ" panose="020B0604030504040204" pitchFamily="50" charset="-128"/>
+              </a:rPr>
+              <a:t>当日</a:t>
+            </a:r>
+            <a:endParaRPr lang="ja-JP" altLang="en-US" sz="1200" dirty="0"/>
+          </a:p>
+        </p:txBody>
+      </p:sp>
+      <p:sp>
+        <p:nvSpPr>
+          <p:cNvPr id="21" name="分析 1〜7日後 本文"/>
+          <p:cNvSpPr/>
+          <p:nvPr/>
+        </p:nvSpPr>
+        <p:spPr>
+          <a:xfrm>
+            <a:off x="6629400" y="3721608"/>
+            <a:ext cx="2770632" cy="713232"/>
+          </a:xfrm>
+          <a:prstGeom prst="rect">
+            <a:avLst/>
+          </a:prstGeom>
+          <a:noFill/>
           <a:ln w="9525">
             <a:solidFill>
               <a:srgbClr val="D9D9D9"/>
@@ -7174,86 +7175,109 @@
           </a:ln>
         </p:spPr>
         <p:txBody>
-          <a:bodyPr wrap="square" lIns="18288" tIns="18288" rIns="18288" bIns="18288" rtlCol="0" anchor="ctr">
+          <a:bodyPr wrap="square" lIns="73152" tIns="36576" rIns="73152" bIns="27432" rtlCol="0" anchor="t">
             <a:noAutofit/>
           </a:bodyPr>
           <a:lstStyle/>
           <a:p>
-            <a:pPr algn="ctr">
-              <a:spcAft>
-                <a:spcPts val="100"/>
-              </a:spcAft>
+            <a:pPr algn="l">
+              <a:lnSpc>
+                <a:spcPct val="110000"/>
+              </a:lnSpc>
               <a:buNone/>
             </a:pPr>
             <a:r>
-              <a:rPr lang="ja-JP" altLang="en-US" sz="1150" b="1" dirty="0">
-                <a:solidFill>
-                  <a:srgbClr val="323366"/>
+              <a:rPr lang="ja-JP" altLang="en-US" sz="1200" b="1" dirty="0">
+                <a:solidFill>
+                  <a:srgbClr val="1F285A"/>
                 </a:solidFill>
                 <a:latin typeface="メイリオ" panose="020B0604030504040204" pitchFamily="50" charset="-128"/>
                 <a:ea typeface="メイリオ" panose="020B0604030504040204" pitchFamily="50" charset="-128"/>
               </a:rPr>
-              <a:t>希望条件を</a:t>
-            </a:r>
-            <a:br>
-              <a:rPr lang="ja-JP" altLang="en-US" sz="1150" b="1" dirty="0">
-                <a:solidFill>
-                  <a:srgbClr val="323366"/>
+              <a:t>単発のサービスを比べる</a:t>
+            </a:r>
+            <a:endParaRPr lang="ja-JP" altLang="en-US" sz="1200" dirty="0"/>
+          </a:p>
+          <a:p>
+            <a:pPr algn="l">
+              <a:lnSpc>
+                <a:spcPct val="110000"/>
+              </a:lnSpc>
+              <a:buNone/>
+            </a:pPr>
+            <a:r>
+              <a:rPr lang="ja-JP" altLang="en-US" sz="1100" b="0" dirty="0">
+                <a:solidFill>
+                  <a:srgbClr val="333333"/>
                 </a:solidFill>
                 <a:latin typeface="メイリオ" panose="020B0604030504040204" pitchFamily="50" charset="-128"/>
                 <a:ea typeface="メイリオ" panose="020B0604030504040204" pitchFamily="50" charset="-128"/>
               </a:rPr>
-            </a:br>
+              <a:t>タイミー・バイトル・短期バイトなど。履歴書の書き方も</a:t>
+            </a:r>
+            <a:endParaRPr lang="ja-JP" altLang="en-US" sz="1200" dirty="0"/>
+          </a:p>
+        </p:txBody>
+      </p:sp>
+      <p:sp>
+        <p:nvSpPr>
+          <p:cNvPr id="22" name="分析 7〜15日後"/>
+          <p:cNvSpPr/>
+          <p:nvPr/>
+        </p:nvSpPr>
+        <p:spPr>
+          <a:xfrm>
+            <a:off x="6629400" y="4489704"/>
+            <a:ext cx="2770632" cy="274320"/>
+          </a:xfrm>
+          <a:prstGeom prst="rect">
+            <a:avLst/>
+          </a:prstGeom>
+          <a:solidFill>
+            <a:srgbClr val="1F285A"/>
+          </a:solidFill>
+          <a:ln>
+            <a:noFill/>
+          </a:ln>
+        </p:spPr>
+        <p:txBody>
+          <a:bodyPr wrap="square" lIns="73152" tIns="36576" rIns="73152" bIns="36576" rtlCol="0" anchor="ctr">
+            <a:noAutofit/>
+          </a:bodyPr>
+          <a:lstStyle/>
+          <a:p>
+            <a:pPr algn="ctr">
+              <a:buNone/>
+            </a:pPr>
             <a:r>
               <a:rPr lang="ja-JP" altLang="en-US" sz="1150" b="1" dirty="0">
                 <a:solidFill>
-                  <a:srgbClr val="323366"/>
+                  <a:srgbClr val="FFFFFF"/>
                 </a:solidFill>
                 <a:latin typeface="メイリオ" panose="020B0604030504040204" pitchFamily="50" charset="-128"/>
                 <a:ea typeface="メイリオ" panose="020B0604030504040204" pitchFamily="50" charset="-128"/>
               </a:rPr>
-              <a:t>変える</a:t>
-            </a:r>
-            <a:endParaRPr lang="ja-JP" altLang="en-US" sz="1100" dirty="0"/>
-          </a:p>
-          <a:p>
-            <a:pPr algn="ctr">
-              <a:spcAft>
-                <a:spcPts val="100"/>
-              </a:spcAft>
-              <a:buNone/>
-            </a:pPr>
-            <a:r>
-              <a:rPr lang="ja-JP" altLang="en-US" sz="950" b="0" dirty="0">
-                <a:solidFill>
-                  <a:srgbClr val="323366"/>
-                </a:solidFill>
-                <a:latin typeface="メイリオ" panose="020B0604030504040204" pitchFamily="50" charset="-128"/>
-                <a:ea typeface="メイリオ" panose="020B0604030504040204" pitchFamily="50" charset="-128"/>
-              </a:rPr>
-              <a:t>エリア・曜日</a:t>
-            </a:r>
-            <a:endParaRPr lang="ja-JP" altLang="en-US" sz="1100" dirty="0"/>
-          </a:p>
-        </p:txBody>
-      </p:sp>
-      <p:sp>
-        <p:nvSpPr>
-          <p:cNvPr id="36" name="Rectangle 35"/>
+              <a:t>1〜15日後</a:t>
+            </a:r>
+            <a:endParaRPr lang="ja-JP" altLang="en-US" sz="1200" dirty="0"/>
+          </a:p>
+        </p:txBody>
+      </p:sp>
+      <p:sp>
+        <p:nvSpPr>
+          <p:cNvPr id="23" name="分析 7〜15日後 本文"/>
           <p:cNvSpPr/>
           <p:nvPr/>
         </p:nvSpPr>
         <p:spPr>
           <a:xfrm>
-            <a:off x="6647688" y="3200400"/>
-            <a:ext cx="893064" cy="914400"/>
+            <a:off x="6629400" y="4764024"/>
+            <a:ext cx="2770632" cy="713232"/>
           </a:xfrm>
           <a:prstGeom prst="rect">
             <a:avLst/>
           </a:prstGeom>
-          <a:solidFill>
-            <a:srgbClr val="FFFFFF"/>
-          </a:solidFill>
+          <a:noFill/>
           <a:ln w="9525">
             <a:solidFill>
               <a:srgbClr val="D9D9D9"/>
@@ -7261,272 +7285,104 @@
           </a:ln>
         </p:spPr>
         <p:txBody>
-          <a:bodyPr wrap="square" lIns="18288" tIns="18288" rIns="18288" bIns="18288" rtlCol="0" anchor="ctr">
+          <a:bodyPr wrap="square" lIns="73152" tIns="36576" rIns="73152" bIns="27432" rtlCol="0" anchor="t">
             <a:noAutofit/>
           </a:bodyPr>
           <a:lstStyle/>
           <a:p>
-            <a:pPr algn="ctr">
-              <a:spcAft>
-                <a:spcPts val="100"/>
-              </a:spcAft>
+            <a:pPr algn="l">
+              <a:lnSpc>
+                <a:spcPct val="110000"/>
+              </a:lnSpc>
               <a:buNone/>
             </a:pPr>
             <a:r>
-              <a:rPr lang="ja-JP" altLang="en-US" sz="1150" b="1" dirty="0">
-                <a:solidFill>
-                  <a:srgbClr val="323366"/>
+              <a:rPr lang="ja-JP" altLang="en-US" sz="1200" b="1" dirty="0">
+                <a:solidFill>
+                  <a:srgbClr val="1F285A"/>
                 </a:solidFill>
                 <a:latin typeface="メイリオ" panose="020B0604030504040204" pitchFamily="50" charset="-128"/>
                 <a:ea typeface="メイリオ" panose="020B0604030504040204" pitchFamily="50" charset="-128"/>
               </a:rPr>
-              <a:t>よくある</a:t>
-            </a:r>
-            <a:br>
-              <a:rPr lang="ja-JP" altLang="en-US" sz="1150" b="1" dirty="0">
-                <a:solidFill>
-                  <a:srgbClr val="323366"/>
+              <a:t>給与・働き方を調べる</a:t>
+            </a:r>
+            <a:endParaRPr lang="ja-JP" altLang="en-US" sz="1200" dirty="0"/>
+          </a:p>
+          <a:p>
+            <a:pPr algn="l">
+              <a:lnSpc>
+                <a:spcPct val="110000"/>
+              </a:lnSpc>
+              <a:buNone/>
+            </a:pPr>
+            <a:r>
+              <a:rPr lang="ja-JP" altLang="en-US" sz="1100" b="0" dirty="0">
+                <a:solidFill>
+                  <a:srgbClr val="333333"/>
                 </a:solidFill>
                 <a:latin typeface="メイリオ" panose="020B0604030504040204" pitchFamily="50" charset="-128"/>
                 <a:ea typeface="メイリオ" panose="020B0604030504040204" pitchFamily="50" charset="-128"/>
               </a:rPr>
-            </a:br>
-            <a:r>
-              <a:rPr lang="ja-JP" altLang="en-US" sz="1150" b="1" dirty="0">
-                <a:solidFill>
-                  <a:srgbClr val="323366"/>
-                </a:solidFill>
-                <a:latin typeface="メイリオ" panose="020B0604030504040204" pitchFamily="50" charset="-128"/>
-                <a:ea typeface="メイリオ" panose="020B0604030504040204" pitchFamily="50" charset="-128"/>
-              </a:rPr>
-              <a:t>質問</a:t>
-            </a:r>
-            <a:endParaRPr lang="ja-JP" altLang="en-US" sz="1100" dirty="0"/>
-          </a:p>
-          <a:p>
-            <a:pPr algn="ctr">
-              <a:spcAft>
-                <a:spcPts val="100"/>
-              </a:spcAft>
-              <a:buNone/>
-            </a:pPr>
-            <a:r>
-              <a:rPr lang="ja-JP" altLang="en-US" sz="950" b="0" dirty="0">
-                <a:solidFill>
-                  <a:srgbClr val="323366"/>
-                </a:solidFill>
-                <a:latin typeface="メイリオ" panose="020B0604030504040204" pitchFamily="50" charset="-128"/>
-                <a:ea typeface="メイリオ" panose="020B0604030504040204" pitchFamily="50" charset="-128"/>
-              </a:rPr>
-              <a:t>給与・服装など</a:t>
-            </a:r>
-            <a:endParaRPr lang="ja-JP" altLang="en-US" sz="1100" dirty="0"/>
-          </a:p>
-        </p:txBody>
-      </p:sp>
-      <p:sp>
-        <p:nvSpPr>
-          <p:cNvPr id="37" name="Rectangle 36"/>
+              <a:t>日払い・確定申告・ダブルワークの扶養。面接の服装も</a:t>
+            </a:r>
+            <a:endParaRPr lang="ja-JP" altLang="en-US" sz="1200" dirty="0"/>
+          </a:p>
+        </p:txBody>
+      </p:sp>
+      <p:sp>
+        <p:nvSpPr>
+          <p:cNvPr id="24" name="示唆"/>
           <p:cNvSpPr/>
           <p:nvPr/>
         </p:nvSpPr>
         <p:spPr>
           <a:xfrm>
-            <a:off x="7586472" y="3200400"/>
-            <a:ext cx="893064" cy="914400"/>
+            <a:off x="502920" y="5779008"/>
+            <a:ext cx="8897112" cy="411480"/>
           </a:xfrm>
           <a:prstGeom prst="rect">
             <a:avLst/>
           </a:prstGeom>
           <a:solidFill>
-            <a:srgbClr val="FFFFFF"/>
+            <a:srgbClr val="F4F7FF"/>
           </a:solidFill>
-          <a:ln w="9525">
-            <a:solidFill>
-              <a:srgbClr val="D9D9D9"/>
-            </a:solidFill>
+          <a:ln>
+            <a:noFill/>
           </a:ln>
         </p:spPr>
         <p:txBody>
-          <a:bodyPr wrap="square" lIns="18288" tIns="18288" rIns="18288" bIns="18288" rtlCol="0" anchor="ctr">
+          <a:bodyPr wrap="square" lIns="73152" tIns="36576" rIns="73152" bIns="36576" rtlCol="0" anchor="ctr">
             <a:noAutofit/>
           </a:bodyPr>
           <a:lstStyle/>
           <a:p>
             <a:pPr algn="ctr">
-              <a:spcAft>
-                <a:spcPts val="100"/>
-              </a:spcAft>
               <a:buNone/>
             </a:pPr>
             <a:r>
-              <a:rPr lang="ja-JP" altLang="en-US" sz="1150" b="1" dirty="0">
-                <a:solidFill>
-                  <a:srgbClr val="323366"/>
+              <a:rPr lang="ja-JP" altLang="en-US" sz="1400" b="1" dirty="0">
+                <a:solidFill>
+                  <a:srgbClr val="1F285A"/>
                 </a:solidFill>
                 <a:latin typeface="メイリオ" panose="020B0604030504040204" pitchFamily="50" charset="-128"/>
                 <a:ea typeface="メイリオ" panose="020B0604030504040204" pitchFamily="50" charset="-128"/>
               </a:rPr>
-              <a:t>お問い</a:t>
-            </a:r>
-            <a:br>
-              <a:rPr lang="ja-JP" altLang="en-US" sz="1150" b="1" dirty="0">
-                <a:solidFill>
-                  <a:srgbClr val="323366"/>
-                </a:solidFill>
-                <a:latin typeface="メイリオ" panose="020B0604030504040204" pitchFamily="50" charset="-128"/>
-                <a:ea typeface="メイリオ" panose="020B0604030504040204" pitchFamily="50" charset="-128"/>
-              </a:rPr>
-            </a:br>
-            <a:r>
-              <a:rPr lang="ja-JP" altLang="en-US" sz="1150" b="1" dirty="0">
-                <a:solidFill>
-                  <a:srgbClr val="323366"/>
-                </a:solidFill>
-                <a:latin typeface="メイリオ" panose="020B0604030504040204" pitchFamily="50" charset="-128"/>
-                <a:ea typeface="メイリオ" panose="020B0604030504040204" pitchFamily="50" charset="-128"/>
-              </a:rPr>
-              <a:t>合わせ</a:t>
-            </a:r>
-            <a:endParaRPr lang="ja-JP" altLang="en-US" sz="1100" dirty="0"/>
-          </a:p>
-          <a:p>
-            <a:pPr algn="ctr">
-              <a:spcAft>
-                <a:spcPts val="100"/>
-              </a:spcAft>
-              <a:buNone/>
-            </a:pPr>
-            <a:r>
-              <a:rPr lang="ja-JP" altLang="en-US" sz="950" b="0" dirty="0">
-                <a:solidFill>
-                  <a:srgbClr val="323366"/>
-                </a:solidFill>
-                <a:latin typeface="メイリオ" panose="020B0604030504040204" pitchFamily="50" charset="-128"/>
-                <a:ea typeface="メイリオ" panose="020B0604030504040204" pitchFamily="50" charset="-128"/>
-              </a:rPr>
-              <a:t>チャットで相談</a:t>
-            </a:r>
-            <a:endParaRPr lang="ja-JP" altLang="en-US" sz="1100" dirty="0"/>
-          </a:p>
-        </p:txBody>
-      </p:sp>
-      <p:sp>
-        <p:nvSpPr>
-          <p:cNvPr id="38" name="Rectangle 37"/>
+              <a:t>求人サービスを比べる → 応募・面接の準備 → 給与・働き方 の順に調べている</a:t>
+            </a:r>
+            <a:endParaRPr lang="ja-JP" altLang="en-US" sz="1200" dirty="0"/>
+          </a:p>
+        </p:txBody>
+      </p:sp>
+      <p:sp>
+        <p:nvSpPr>
+          <p:cNvPr id="25" name="注記"/>
           <p:cNvSpPr/>
           <p:nvPr/>
         </p:nvSpPr>
         <p:spPr>
           <a:xfrm>
-            <a:off x="8525256" y="3200400"/>
-            <a:ext cx="893064" cy="914400"/>
-          </a:xfrm>
-          <a:prstGeom prst="rect">
-            <a:avLst/>
-          </a:prstGeom>
-          <a:solidFill>
-            <a:srgbClr val="FFFFFF"/>
-          </a:solidFill>
-          <a:ln w="9525">
-            <a:solidFill>
-              <a:srgbClr val="D9D9D9"/>
-            </a:solidFill>
-          </a:ln>
-        </p:spPr>
-        <p:txBody>
-          <a:bodyPr wrap="square" lIns="18288" tIns="18288" rIns="18288" bIns="18288" rtlCol="0" anchor="ctr">
-            <a:noAutofit/>
-          </a:bodyPr>
-          <a:lstStyle/>
-          <a:p>
-            <a:pPr algn="ctr">
-              <a:spcAft>
-                <a:spcPts val="100"/>
-              </a:spcAft>
-              <a:buNone/>
-            </a:pPr>
-            <a:r>
-              <a:rPr lang="ja-JP" altLang="en-US" sz="1150" b="1" dirty="0">
-                <a:solidFill>
-                  <a:srgbClr val="323366"/>
-                </a:solidFill>
-                <a:latin typeface="メイリオ" panose="020B0604030504040204" pitchFamily="50" charset="-128"/>
-                <a:ea typeface="メイリオ" panose="020B0604030504040204" pitchFamily="50" charset="-128"/>
-              </a:rPr>
-              <a:t>横浜シミズ</a:t>
-            </a:r>
-            <a:br>
-              <a:rPr lang="ja-JP" altLang="en-US" sz="1150" b="1" dirty="0">
-                <a:solidFill>
-                  <a:srgbClr val="323366"/>
-                </a:solidFill>
-                <a:latin typeface="メイリオ" panose="020B0604030504040204" pitchFamily="50" charset="-128"/>
-                <a:ea typeface="メイリオ" panose="020B0604030504040204" pitchFamily="50" charset="-128"/>
-              </a:rPr>
-            </a:br>
-            <a:r>
-              <a:rPr lang="ja-JP" altLang="en-US" sz="1150" b="1" dirty="0">
-                <a:solidFill>
-                  <a:srgbClr val="323366"/>
-                </a:solidFill>
-                <a:latin typeface="メイリオ" panose="020B0604030504040204" pitchFamily="50" charset="-128"/>
-                <a:ea typeface="メイリオ" panose="020B0604030504040204" pitchFamily="50" charset="-128"/>
-              </a:rPr>
-              <a:t>とは</a:t>
-            </a:r>
-            <a:endParaRPr lang="ja-JP" altLang="en-US" sz="1100" dirty="0"/>
-          </a:p>
-          <a:p>
-            <a:pPr algn="ctr">
-              <a:spcAft>
-                <a:spcPts val="100"/>
-              </a:spcAft>
-              <a:buNone/>
-            </a:pPr>
-            <a:r>
-              <a:rPr lang="ja-JP" altLang="en-US" sz="950" b="0" dirty="0">
-                <a:solidFill>
-                  <a:srgbClr val="323366"/>
-                </a:solidFill>
-                <a:latin typeface="メイリオ" panose="020B0604030504040204" pitchFamily="50" charset="-128"/>
-                <a:ea typeface="メイリオ" panose="020B0604030504040204" pitchFamily="50" charset="-128"/>
-              </a:rPr>
-              <a:t>会社・現場</a:t>
-            </a:r>
-            <a:br>
-              <a:rPr lang="ja-JP" altLang="en-US" sz="950" b="0" dirty="0">
-                <a:solidFill>
-                  <a:srgbClr val="323366"/>
-                </a:solidFill>
-                <a:latin typeface="メイリオ" panose="020B0604030504040204" pitchFamily="50" charset="-128"/>
-                <a:ea typeface="メイリオ" panose="020B0604030504040204" pitchFamily="50" charset="-128"/>
-              </a:rPr>
-            </a:br>
-            <a:r>
-              <a:rPr lang="ja-JP" altLang="en-US" sz="950" b="0" dirty="0">
-                <a:solidFill>
-                  <a:srgbClr val="323366"/>
-                </a:solidFill>
-                <a:latin typeface="メイリオ" panose="020B0604030504040204" pitchFamily="50" charset="-128"/>
-                <a:ea typeface="メイリオ" panose="020B0604030504040204" pitchFamily="50" charset="-128"/>
-              </a:rPr>
-              <a:t>の紹介</a:t>
-            </a:r>
-            <a:endParaRPr lang="ja-JP" altLang="en-US" sz="1100" dirty="0"/>
-          </a:p>
-        </p:txBody>
-      </p:sp>
-      <p:sp>
-        <p:nvSpPr>
-          <p:cNvPr id="39" name="Rectangle 38"/>
-          <p:cNvSpPr/>
-          <p:nvPr/>
-        </p:nvSpPr>
-        <p:spPr>
-          <a:xfrm>
-            <a:off x="6592824" y="5074920"/>
-            <a:ext cx="2880360" cy="365760"/>
+            <a:off x="502920" y="6236208"/>
+            <a:ext cx="8897112" cy="228600"/>
           </a:xfrm>
           <a:prstGeom prst="rect">
             <a:avLst/>
@@ -7537,25 +7393,28 @@
           </a:ln>
         </p:spPr>
         <p:txBody>
-          <a:bodyPr wrap="square" lIns="18288" tIns="0" rIns="18288" bIns="0" rtlCol="0" anchor="ctr">
+          <a:bodyPr wrap="square" lIns="0" tIns="0" rIns="0" bIns="0" rtlCol="0" anchor="t">
             <a:noAutofit/>
           </a:bodyPr>
           <a:lstStyle/>
           <a:p>
             <a:pPr algn="l">
+              <a:lnSpc>
+                <a:spcPct val="115000"/>
+              </a:lnSpc>
               <a:buNone/>
             </a:pPr>
             <a:r>
-              <a:rPr lang="ja-JP" altLang="en-US" sz="1000" b="0" dirty="0">
-                <a:solidFill>
-                  <a:srgbClr val="595959"/>
+              <a:rPr lang="ja-JP" altLang="en-US" sz="850" b="0" dirty="0">
+                <a:solidFill>
+                  <a:srgbClr val="7F7F7F"/>
                 </a:solidFill>
                 <a:latin typeface="メイリオ" panose="020B0604030504040204" pitchFamily="50" charset="-128"/>
                 <a:ea typeface="メイリオ" panose="020B0604030504040204" pitchFamily="50" charset="-128"/>
               </a:rPr>
-              <a:t>一番押してほしい「仕事を探す」を左上に</a:t>
-            </a:r>
-            <a:endParaRPr lang="ja-JP" altLang="en-US" sz="1000" dirty="0"/>
+              <a:t>※LINEヤフー社の前後検索データより。「単発バイト」を検索した方が、前後15日間に検索した言葉（縦軸＝検索した人数）。</a:t>
+            </a:r>
+            <a:endParaRPr lang="ja-JP" altLang="en-US" sz="1200" dirty="0"/>
           </a:p>
         </p:txBody>
       </p:sp>
@@ -7586,6 +7445,1398 @@
       </p:grpSpPr>
       <p:sp>
         <p:nvSpPr>
+          <p:cNvPr id="2" name="TextBox 1"/>
+          <p:cNvSpPr txBox="1"/>
+          <p:nvPr/>
+        </p:nvSpPr>
+        <p:spPr>
+          <a:xfrm>
+            <a:off x="547200" y="136800"/>
+            <a:ext cx="7920000" cy="338400"/>
+          </a:xfrm>
+          <a:prstGeom prst="rect">
+            <a:avLst/>
+          </a:prstGeom>
+          <a:noFill/>
+        </p:spPr>
+        <p:txBody>
+          <a:bodyPr wrap="square" lIns="28800" tIns="7200" rIns="28800" bIns="7200" anchor="ctr">
+            <a:spAutoFit/>
+          </a:bodyPr>
+          <a:lstStyle/>
+          <a:p>
+            <a:pPr algn="l">
+              <a:lnSpc>
+                <a:spcPct val="120000"/>
+              </a:lnSpc>
+            </a:pPr>
+            <a:r>
+              <a:rPr sz="1600" b="1">
+                <a:solidFill>
+                  <a:srgbClr val="323366"/>
+                </a:solidFill>
+                <a:latin typeface="メイリオ"/>
+                <a:ea typeface="メイリオ"/>
+                <a:cs typeface="メイリオ"/>
+              </a:rPr>
+              <a:t>配信イメージ｜勤務前の案内・次回の募集・リッチメニュー</a:t>
+            </a:r>
+          </a:p>
+        </p:txBody>
+      </p:sp>
+      <p:sp>
+        <p:nvSpPr>
+          <p:cNvPr id="3" name="TextBox 2"/>
+          <p:cNvSpPr txBox="1"/>
+          <p:nvPr/>
+        </p:nvSpPr>
+        <p:spPr>
+          <a:xfrm>
+            <a:off x="309600" y="687600"/>
+            <a:ext cx="9331200" cy="585216"/>
+          </a:xfrm>
+          <a:prstGeom prst="rect">
+            <a:avLst/>
+          </a:prstGeom>
+          <a:noFill/>
+        </p:spPr>
+        <p:txBody>
+          <a:bodyPr wrap="square" lIns="28800" tIns="7200" rIns="28800" bIns="7200" anchor="ctr">
+            <a:spAutoFit/>
+          </a:bodyPr>
+          <a:lstStyle/>
+          <a:p>
+            <a:pPr algn="l">
+              <a:lnSpc>
+                <a:spcPct val="120000"/>
+              </a:lnSpc>
+            </a:pPr>
+            <a:r>
+              <a:rPr sz="1400" b="1">
+                <a:solidFill>
+                  <a:srgbClr val="1E2761"/>
+                </a:solidFill>
+                <a:latin typeface="メイリオ"/>
+                <a:ea typeface="メイリオ"/>
+                <a:cs typeface="メイリオ"/>
+              </a:rPr>
+              <a:t>横浜シミズ向けの配信の文面と、リッチメニューの構成案です。</a:t>
+            </a:r>
+          </a:p>
+          <a:p>
+            <a:pPr algn="l">
+              <a:lnSpc>
+                <a:spcPct val="120000"/>
+              </a:lnSpc>
+            </a:pPr>
+            <a:r>
+              <a:rPr sz="1400" b="1">
+                <a:solidFill>
+                  <a:srgbClr val="FF0000"/>
+                </a:solidFill>
+                <a:latin typeface="メイリオ"/>
+                <a:ea typeface="メイリオ"/>
+                <a:cs typeface="メイリオ"/>
+              </a:rPr>
+              <a:t>文面・項目は例です。運用を始める前にすり合わせて確定します。</a:t>
+            </a:r>
+          </a:p>
+        </p:txBody>
+      </p:sp>
+      <p:sp>
+        <p:nvSpPr>
+          <p:cNvPr id="18" name="Rectangle 17"/>
+          <p:cNvSpPr/>
+          <p:nvPr/>
+        </p:nvSpPr>
+        <p:spPr>
+          <a:xfrm>
+            <a:off x="429768" y="5596128"/>
+            <a:ext cx="9043416" cy="374904"/>
+          </a:xfrm>
+          <a:prstGeom prst="rect">
+            <a:avLst/>
+          </a:prstGeom>
+          <a:solidFill>
+            <a:srgbClr val="002060"/>
+          </a:solidFill>
+          <a:ln>
+            <a:noFill/>
+          </a:ln>
+          <a:effectLst/>
+        </p:spPr>
+        <p:style>
+          <a:lnRef idx="1">
+            <a:schemeClr val="accent1"/>
+          </a:lnRef>
+          <a:fillRef idx="3">
+            <a:schemeClr val="accent1"/>
+          </a:fillRef>
+          <a:effectRef idx="2">
+            <a:schemeClr val="accent1"/>
+          </a:effectRef>
+          <a:fontRef idx="minor">
+            <a:schemeClr val="lt1"/>
+          </a:fontRef>
+        </p:style>
+        <p:txBody>
+          <a:bodyPr rtlCol="0" anchor="ctr"/>
+          <a:lstStyle/>
+          <a:p>
+            <a:pPr algn="ctr"/>
+            <a:endParaRPr/>
+          </a:p>
+        </p:txBody>
+      </p:sp>
+      <p:sp>
+        <p:nvSpPr>
+          <p:cNvPr id="21" name="Rectangle 20"/>
+          <p:cNvSpPr/>
+          <p:nvPr/>
+        </p:nvSpPr>
+        <p:spPr>
+          <a:xfrm>
+            <a:off x="429768" y="5596128"/>
+            <a:ext cx="9043416" cy="374904"/>
+          </a:xfrm>
+          <a:prstGeom prst="rect">
+            <a:avLst/>
+          </a:prstGeom>
+          <a:noFill/>
+          <a:ln>
+            <a:noFill/>
+          </a:ln>
+        </p:spPr>
+        <p:txBody>
+          <a:bodyPr wrap="square" lIns="45720" tIns="0" rIns="45720" bIns="0" rtlCol="0" anchor="ctr">
+            <a:noAutofit/>
+          </a:bodyPr>
+          <a:lstStyle/>
+          <a:p>
+            <a:pPr algn="ctr">
+              <a:buNone/>
+            </a:pPr>
+            <a:r>
+              <a:rPr lang="ja-JP" altLang="en-US" sz="1300" b="1" dirty="0">
+                <a:solidFill>
+                  <a:srgbClr val="FFFFFF"/>
+                </a:solidFill>
+                <a:latin typeface="メイリオ" panose="020B0604030504040204" pitchFamily="50" charset="-128"/>
+                <a:ea typeface="メイリオ" panose="020B0604030504040204" pitchFamily="50" charset="-128"/>
+              </a:rPr>
+              <a:t>勤務に必要な情報と次の募集が、同じLINEに届く</a:t>
+            </a:r>
+            <a:endParaRPr lang="ja-JP" altLang="en-US" sz="1300" dirty="0"/>
+          </a:p>
+        </p:txBody>
+      </p:sp>
+      <p:sp>
+        <p:nvSpPr>
+          <p:cNvPr id="22" name="Rounded Rectangle 21"/>
+          <p:cNvSpPr/>
+          <p:nvPr/>
+        </p:nvSpPr>
+        <p:spPr>
+          <a:xfrm>
+            <a:off x="429768" y="1371600"/>
+            <a:ext cx="2880360" cy="329184"/>
+          </a:xfrm>
+          <a:prstGeom prst="roundRect">
+            <a:avLst>
+              <a:gd name="adj" fmla="val 20000"/>
+            </a:avLst>
+          </a:prstGeom>
+          <a:solidFill>
+            <a:srgbClr val="1E2761"/>
+          </a:solidFill>
+          <a:ln>
+            <a:noFill/>
+          </a:ln>
+        </p:spPr>
+        <p:txBody>
+          <a:bodyPr wrap="square" lIns="36576" tIns="0" rIns="36576" bIns="0" rtlCol="0" anchor="ctr">
+            <a:noAutofit/>
+          </a:bodyPr>
+          <a:lstStyle/>
+          <a:p>
+            <a:pPr algn="ctr">
+              <a:buNone/>
+            </a:pPr>
+            <a:r>
+              <a:rPr lang="ja-JP" altLang="en-US" sz="1150" b="1" dirty="0">
+                <a:solidFill>
+                  <a:srgbClr val="FFFFFF"/>
+                </a:solidFill>
+                <a:latin typeface="メイリオ" panose="020B0604030504040204" pitchFamily="50" charset="-128"/>
+                <a:ea typeface="メイリオ" panose="020B0604030504040204" pitchFamily="50" charset="-128"/>
+              </a:rPr>
+              <a:t>勤務前の案内（前日）</a:t>
+            </a:r>
+            <a:endParaRPr lang="ja-JP" altLang="en-US" sz="1150" dirty="0"/>
+          </a:p>
+        </p:txBody>
+      </p:sp>
+      <p:sp>
+        <p:nvSpPr>
+          <p:cNvPr id="23" name="Rectangle 22"/>
+          <p:cNvSpPr/>
+          <p:nvPr/>
+        </p:nvSpPr>
+        <p:spPr>
+          <a:xfrm>
+            <a:off x="429768" y="1783080"/>
+            <a:ext cx="2880360" cy="3246120"/>
+          </a:xfrm>
+          <a:prstGeom prst="rect">
+            <a:avLst/>
+          </a:prstGeom>
+          <a:solidFill>
+            <a:srgbClr val="D8E2F1"/>
+          </a:solidFill>
+          <a:ln>
+            <a:noFill/>
+          </a:ln>
+        </p:spPr>
+        <p:txBody>
+          <a:bodyPr wrap="square" lIns="73152" tIns="36576" rIns="73152" bIns="36576" rtlCol="0" anchor="ctr">
+            <a:noAutofit/>
+          </a:bodyPr>
+          <a:lstStyle/>
+          <a:p>
+            <a:pPr algn="l">
+              <a:buNone/>
+            </a:pPr>
+            <a:endParaRPr lang="ja-JP" altLang="en-US" sz="1200" dirty="0"/>
+          </a:p>
+        </p:txBody>
+      </p:sp>
+      <p:sp>
+        <p:nvSpPr>
+          <p:cNvPr id="24" name="Rounded Rectangle 23"/>
+          <p:cNvSpPr/>
+          <p:nvPr/>
+        </p:nvSpPr>
+        <p:spPr>
+          <a:xfrm>
+            <a:off x="594359" y="1920240"/>
+            <a:ext cx="2551176" cy="2926080"/>
+          </a:xfrm>
+          <a:prstGeom prst="roundRect">
+            <a:avLst>
+              <a:gd name="adj" fmla="val 5000"/>
+            </a:avLst>
+          </a:prstGeom>
+          <a:solidFill>
+            <a:srgbClr val="FFFFFF"/>
+          </a:solidFill>
+          <a:ln>
+            <a:noFill/>
+          </a:ln>
+        </p:spPr>
+        <p:txBody>
+          <a:bodyPr wrap="square" lIns="109728" tIns="73152" rIns="91440" bIns="54864" rtlCol="0" anchor="t">
+            <a:noAutofit/>
+          </a:bodyPr>
+          <a:lstStyle/>
+          <a:p>
+            <a:pPr algn="l">
+              <a:spcAft>
+                <a:spcPts val="200"/>
+              </a:spcAft>
+              <a:buNone/>
+            </a:pPr>
+            <a:r>
+              <a:rPr lang="ja-JP" altLang="en-US" sz="1050" b="1" dirty="0">
+                <a:solidFill>
+                  <a:srgbClr val="323366"/>
+                </a:solidFill>
+                <a:latin typeface="メイリオ" panose="020B0604030504040204" pitchFamily="50" charset="-128"/>
+                <a:ea typeface="メイリオ" panose="020B0604030504040204" pitchFamily="50" charset="-128"/>
+              </a:rPr>
+              <a:t>【明日の勤務のご案内】</a:t>
+            </a:r>
+            <a:endParaRPr lang="ja-JP" altLang="en-US" sz="1050" dirty="0"/>
+          </a:p>
+          <a:p>
+            <a:pPr algn="l">
+              <a:spcAft>
+                <a:spcPts val="200"/>
+              </a:spcAft>
+              <a:buNone/>
+            </a:pPr>
+            <a:r>
+              <a:rPr lang="ja-JP" altLang="en-US" sz="1050" b="0" dirty="0">
+                <a:solidFill>
+                  <a:srgbClr val="333333"/>
+                </a:solidFill>
+                <a:latin typeface="メイリオ" panose="020B0604030504040204" pitchFamily="50" charset="-128"/>
+                <a:ea typeface="メイリオ" panose="020B0604030504040204" pitchFamily="50" charset="-128"/>
+              </a:rPr>
+              <a:t>〇月〇日（〇）〇〇スタジアム</a:t>
+            </a:r>
+            <a:endParaRPr lang="ja-JP" altLang="en-US" sz="1050" dirty="0"/>
+          </a:p>
+          <a:p>
+            <a:pPr algn="l">
+              <a:spcAft>
+                <a:spcPts val="200"/>
+              </a:spcAft>
+              <a:buNone/>
+            </a:pPr>
+            <a:r>
+              <a:rPr lang="ja-JP" altLang="en-US" sz="1050" b="0" dirty="0">
+                <a:solidFill>
+                  <a:srgbClr val="333333"/>
+                </a:solidFill>
+                <a:latin typeface="メイリオ" panose="020B0604030504040204" pitchFamily="50" charset="-128"/>
+                <a:ea typeface="メイリオ" panose="020B0604030504040204" pitchFamily="50" charset="-128"/>
+              </a:rPr>
+              <a:t>集合：〇〇:〇〇　〇〇ゲート前</a:t>
+            </a:r>
+            <a:endParaRPr lang="ja-JP" altLang="en-US" sz="1050" dirty="0"/>
+          </a:p>
+          <a:p>
+            <a:pPr algn="l">
+              <a:spcAft>
+                <a:spcPts val="200"/>
+              </a:spcAft>
+              <a:buNone/>
+            </a:pPr>
+            <a:r>
+              <a:rPr lang="ja-JP" altLang="en-US" sz="1050" b="0" dirty="0">
+                <a:solidFill>
+                  <a:srgbClr val="333333"/>
+                </a:solidFill>
+                <a:latin typeface="メイリオ" panose="020B0604030504040204" pitchFamily="50" charset="-128"/>
+                <a:ea typeface="メイリオ" panose="020B0604030504040204" pitchFamily="50" charset="-128"/>
+              </a:rPr>
+              <a:t>持ち物：〇〇・〇〇</a:t>
+            </a:r>
+            <a:endParaRPr lang="ja-JP" altLang="en-US" sz="1050" dirty="0"/>
+          </a:p>
+          <a:p>
+            <a:pPr algn="l">
+              <a:spcAft>
+                <a:spcPts val="200"/>
+              </a:spcAft>
+              <a:buNone/>
+            </a:pPr>
+            <a:r>
+              <a:rPr lang="ja-JP" altLang="en-US" sz="1050" b="0" dirty="0">
+                <a:solidFill>
+                  <a:srgbClr val="333333"/>
+                </a:solidFill>
+                <a:latin typeface="メイリオ" panose="020B0604030504040204" pitchFamily="50" charset="-128"/>
+                <a:ea typeface="メイリオ" panose="020B0604030504040204" pitchFamily="50" charset="-128"/>
+              </a:rPr>
+              <a:t>服装：〇〇</a:t>
+            </a:r>
+            <a:endParaRPr lang="ja-JP" altLang="en-US" sz="1050" dirty="0"/>
+          </a:p>
+          <a:p>
+            <a:pPr algn="l">
+              <a:spcAft>
+                <a:spcPts val="200"/>
+              </a:spcAft>
+              <a:buNone/>
+            </a:pPr>
+            <a:r>
+              <a:rPr lang="ja-JP" altLang="en-US" sz="1050" b="0" dirty="0">
+                <a:solidFill>
+                  <a:srgbClr val="333333"/>
+                </a:solidFill>
+                <a:latin typeface="メイリオ" panose="020B0604030504040204" pitchFamily="50" charset="-128"/>
+                <a:ea typeface="メイリオ" panose="020B0604030504040204" pitchFamily="50" charset="-128"/>
+              </a:rPr>
+              <a:t>遅れる場合・体調がすぐれないときは、このLINEでご連絡ください。</a:t>
+            </a:r>
+            <a:endParaRPr lang="ja-JP" altLang="en-US" sz="1050" dirty="0"/>
+          </a:p>
+        </p:txBody>
+      </p:sp>
+      <p:sp>
+        <p:nvSpPr>
+          <p:cNvPr id="25" name="Rectangle 24"/>
+          <p:cNvSpPr/>
+          <p:nvPr/>
+        </p:nvSpPr>
+        <p:spPr>
+          <a:xfrm>
+            <a:off x="429768" y="5074920"/>
+            <a:ext cx="2880360" cy="365760"/>
+          </a:xfrm>
+          <a:prstGeom prst="rect">
+            <a:avLst/>
+          </a:prstGeom>
+          <a:noFill/>
+          <a:ln>
+            <a:noFill/>
+          </a:ln>
+        </p:spPr>
+        <p:txBody>
+          <a:bodyPr wrap="square" lIns="18288" tIns="0" rIns="18288" bIns="0" rtlCol="0" anchor="ctr">
+            <a:noAutofit/>
+          </a:bodyPr>
+          <a:lstStyle/>
+          <a:p>
+            <a:pPr algn="l">
+              <a:buNone/>
+            </a:pPr>
+            <a:r>
+              <a:rPr lang="ja-JP" altLang="en-US" sz="1000" b="0" dirty="0">
+                <a:solidFill>
+                  <a:srgbClr val="595959"/>
+                </a:solidFill>
+                <a:latin typeface="メイリオ" panose="020B0604030504040204" pitchFamily="50" charset="-128"/>
+                <a:ea typeface="メイリオ" panose="020B0604030504040204" pitchFamily="50" charset="-128"/>
+              </a:rPr>
+              <a:t>対象：そのイベントに勤務する方（タグ）</a:t>
+            </a:r>
+            <a:endParaRPr lang="ja-JP" altLang="en-US" sz="1000" dirty="0"/>
+          </a:p>
+        </p:txBody>
+      </p:sp>
+      <p:sp>
+        <p:nvSpPr>
+          <p:cNvPr id="26" name="Rounded Rectangle 25"/>
+          <p:cNvSpPr/>
+          <p:nvPr/>
+        </p:nvSpPr>
+        <p:spPr>
+          <a:xfrm>
+            <a:off x="3511296" y="1371600"/>
+            <a:ext cx="2880360" cy="329184"/>
+          </a:xfrm>
+          <a:prstGeom prst="roundRect">
+            <a:avLst>
+              <a:gd name="adj" fmla="val 20000"/>
+            </a:avLst>
+          </a:prstGeom>
+          <a:solidFill>
+            <a:srgbClr val="1E2761"/>
+          </a:solidFill>
+          <a:ln>
+            <a:noFill/>
+          </a:ln>
+        </p:spPr>
+        <p:txBody>
+          <a:bodyPr wrap="square" lIns="36576" tIns="0" rIns="36576" bIns="0" rtlCol="0" anchor="ctr">
+            <a:noAutofit/>
+          </a:bodyPr>
+          <a:lstStyle/>
+          <a:p>
+            <a:pPr algn="ctr">
+              <a:buNone/>
+            </a:pPr>
+            <a:r>
+              <a:rPr lang="ja-JP" altLang="en-US" sz="1150" b="1" dirty="0">
+                <a:solidFill>
+                  <a:srgbClr val="FFFFFF"/>
+                </a:solidFill>
+                <a:latin typeface="メイリオ" panose="020B0604030504040204" pitchFamily="50" charset="-128"/>
+                <a:ea typeface="メイリオ" panose="020B0604030504040204" pitchFamily="50" charset="-128"/>
+              </a:rPr>
+              <a:t>次回イベントの募集</a:t>
+            </a:r>
+            <a:endParaRPr lang="ja-JP" altLang="en-US" sz="1150" dirty="0"/>
+          </a:p>
+        </p:txBody>
+      </p:sp>
+      <p:sp>
+        <p:nvSpPr>
+          <p:cNvPr id="27" name="Rectangle 26"/>
+          <p:cNvSpPr/>
+          <p:nvPr/>
+        </p:nvSpPr>
+        <p:spPr>
+          <a:xfrm>
+            <a:off x="3511296" y="1783080"/>
+            <a:ext cx="2880360" cy="3246120"/>
+          </a:xfrm>
+          <a:prstGeom prst="rect">
+            <a:avLst/>
+          </a:prstGeom>
+          <a:solidFill>
+            <a:srgbClr val="D8E2F1"/>
+          </a:solidFill>
+          <a:ln>
+            <a:noFill/>
+          </a:ln>
+        </p:spPr>
+        <p:txBody>
+          <a:bodyPr wrap="square" lIns="73152" tIns="36576" rIns="73152" bIns="36576" rtlCol="0" anchor="ctr">
+            <a:noAutofit/>
+          </a:bodyPr>
+          <a:lstStyle/>
+          <a:p>
+            <a:pPr algn="l">
+              <a:buNone/>
+            </a:pPr>
+            <a:endParaRPr lang="ja-JP" altLang="en-US" sz="1200" dirty="0"/>
+          </a:p>
+        </p:txBody>
+      </p:sp>
+      <p:sp>
+        <p:nvSpPr>
+          <p:cNvPr id="28" name="Rounded Rectangle 27"/>
+          <p:cNvSpPr/>
+          <p:nvPr/>
+        </p:nvSpPr>
+        <p:spPr>
+          <a:xfrm>
+            <a:off x="3675888" y="1920240"/>
+            <a:ext cx="2551176" cy="2331720"/>
+          </a:xfrm>
+          <a:prstGeom prst="roundRect">
+            <a:avLst>
+              <a:gd name="adj" fmla="val 5000"/>
+            </a:avLst>
+          </a:prstGeom>
+          <a:solidFill>
+            <a:srgbClr val="FFFFFF"/>
+          </a:solidFill>
+          <a:ln>
+            <a:noFill/>
+          </a:ln>
+        </p:spPr>
+        <p:txBody>
+          <a:bodyPr wrap="square" lIns="109728" tIns="73152" rIns="91440" bIns="54864" rtlCol="0" anchor="t">
+            <a:noAutofit/>
+          </a:bodyPr>
+          <a:lstStyle/>
+          <a:p>
+            <a:pPr algn="l">
+              <a:spcAft>
+                <a:spcPts val="200"/>
+              </a:spcAft>
+              <a:buNone/>
+            </a:pPr>
+            <a:r>
+              <a:rPr lang="ja-JP" altLang="en-US" sz="1050" b="1" dirty="0">
+                <a:solidFill>
+                  <a:srgbClr val="323366"/>
+                </a:solidFill>
+                <a:latin typeface="メイリオ" panose="020B0604030504040204" pitchFamily="50" charset="-128"/>
+                <a:ea typeface="メイリオ" panose="020B0604030504040204" pitchFamily="50" charset="-128"/>
+              </a:rPr>
+              <a:t>【勤務者募集｜横浜アリーナ】</a:t>
+            </a:r>
+            <a:endParaRPr lang="ja-JP" altLang="en-US" sz="1050" dirty="0"/>
+          </a:p>
+          <a:p>
+            <a:pPr algn="l">
+              <a:spcAft>
+                <a:spcPts val="200"/>
+              </a:spcAft>
+              <a:buNone/>
+            </a:pPr>
+            <a:r>
+              <a:rPr lang="ja-JP" altLang="en-US" sz="1050" b="0" dirty="0">
+                <a:solidFill>
+                  <a:srgbClr val="333333"/>
+                </a:solidFill>
+                <a:latin typeface="メイリオ" panose="020B0604030504040204" pitchFamily="50" charset="-128"/>
+                <a:ea typeface="メイリオ" panose="020B0604030504040204" pitchFamily="50" charset="-128"/>
+              </a:rPr>
+              <a:t>〇月〇日（〇）〇〇時〜〇〇時</a:t>
+            </a:r>
+            <a:endParaRPr lang="ja-JP" altLang="en-US" sz="1050" dirty="0"/>
+          </a:p>
+          <a:p>
+            <a:pPr algn="l">
+              <a:spcAft>
+                <a:spcPts val="200"/>
+              </a:spcAft>
+              <a:buNone/>
+            </a:pPr>
+            <a:r>
+              <a:rPr lang="ja-JP" altLang="en-US" sz="1050" b="0" dirty="0">
+                <a:solidFill>
+                  <a:srgbClr val="333333"/>
+                </a:solidFill>
+                <a:latin typeface="メイリオ" panose="020B0604030504040204" pitchFamily="50" charset="-128"/>
+                <a:ea typeface="メイリオ" panose="020B0604030504040204" pitchFamily="50" charset="-128"/>
+              </a:rPr>
+              <a:t>案内・誘導スタッフ　時給〇〇円〜</a:t>
+            </a:r>
+            <a:endParaRPr lang="ja-JP" altLang="en-US" sz="1050" dirty="0"/>
+          </a:p>
+          <a:p>
+            <a:pPr algn="l">
+              <a:spcAft>
+                <a:spcPts val="200"/>
+              </a:spcAft>
+              <a:buNone/>
+            </a:pPr>
+            <a:r>
+              <a:rPr lang="ja-JP" altLang="en-US" sz="1050" b="0" dirty="0">
+                <a:solidFill>
+                  <a:srgbClr val="333333"/>
+                </a:solidFill>
+                <a:latin typeface="メイリオ" panose="020B0604030504040204" pitchFamily="50" charset="-128"/>
+                <a:ea typeface="メイリオ" panose="020B0604030504040204" pitchFamily="50" charset="-128"/>
+              </a:rPr>
+              <a:t>前回のご勤務、ありがとうございました。次のイベントもお待ちしています。</a:t>
+            </a:r>
+            <a:endParaRPr lang="ja-JP" altLang="en-US" sz="1050" dirty="0"/>
+          </a:p>
+        </p:txBody>
+      </p:sp>
+      <p:sp>
+        <p:nvSpPr>
+          <p:cNvPr id="29" name="Rectangle 28"/>
+          <p:cNvSpPr/>
+          <p:nvPr/>
+        </p:nvSpPr>
+        <p:spPr>
+          <a:xfrm>
+            <a:off x="3831336" y="4343400"/>
+            <a:ext cx="2240280" cy="411480"/>
+          </a:xfrm>
+          <a:prstGeom prst="rect">
+            <a:avLst/>
+          </a:prstGeom>
+          <a:solidFill>
+            <a:srgbClr val="06C755"/>
+          </a:solidFill>
+          <a:ln>
+            <a:noFill/>
+          </a:ln>
+        </p:spPr>
+        <p:txBody>
+          <a:bodyPr wrap="square" lIns="0" tIns="0" rIns="0" bIns="0" rtlCol="0" anchor="ctr">
+            <a:noAutofit/>
+          </a:bodyPr>
+          <a:lstStyle/>
+          <a:p>
+            <a:pPr algn="ctr">
+              <a:buNone/>
+            </a:pPr>
+            <a:r>
+              <a:rPr lang="ja-JP" altLang="en-US" sz="1100" b="1" dirty="0">
+                <a:solidFill>
+                  <a:srgbClr val="FFFFFF"/>
+                </a:solidFill>
+                <a:latin typeface="メイリオ" panose="020B0604030504040204" pitchFamily="50" charset="-128"/>
+                <a:ea typeface="メイリオ" panose="020B0604030504040204" pitchFamily="50" charset="-128"/>
+              </a:rPr>
+              <a:t>勤務希望を出す</a:t>
+            </a:r>
+            <a:endParaRPr lang="ja-JP" altLang="en-US" sz="1100" dirty="0"/>
+          </a:p>
+        </p:txBody>
+      </p:sp>
+      <p:sp>
+        <p:nvSpPr>
+          <p:cNvPr id="30" name="Rectangle 29"/>
+          <p:cNvSpPr/>
+          <p:nvPr/>
+        </p:nvSpPr>
+        <p:spPr>
+          <a:xfrm>
+            <a:off x="3511296" y="5074920"/>
+            <a:ext cx="2880360" cy="365760"/>
+          </a:xfrm>
+          <a:prstGeom prst="rect">
+            <a:avLst/>
+          </a:prstGeom>
+          <a:noFill/>
+          <a:ln>
+            <a:noFill/>
+          </a:ln>
+        </p:spPr>
+        <p:txBody>
+          <a:bodyPr wrap="square" lIns="18288" tIns="0" rIns="18288" bIns="0" rtlCol="0" anchor="ctr">
+            <a:noAutofit/>
+          </a:bodyPr>
+          <a:lstStyle/>
+          <a:p>
+            <a:pPr algn="l">
+              <a:buNone/>
+            </a:pPr>
+            <a:r>
+              <a:rPr lang="ja-JP" altLang="en-US" sz="1000" b="0" dirty="0">
+                <a:solidFill>
+                  <a:srgbClr val="595959"/>
+                </a:solidFill>
+                <a:latin typeface="メイリオ" panose="020B0604030504040204" pitchFamily="50" charset="-128"/>
+                <a:ea typeface="メイリオ" panose="020B0604030504040204" pitchFamily="50" charset="-128"/>
+              </a:rPr>
+              <a:t>対象：横浜エリア・土日希望・勤務ありの方</a:t>
+            </a:r>
+            <a:endParaRPr lang="ja-JP" altLang="en-US" sz="1000" dirty="0"/>
+          </a:p>
+        </p:txBody>
+      </p:sp>
+      <p:sp>
+        <p:nvSpPr>
+          <p:cNvPr id="31" name="Rounded Rectangle 30"/>
+          <p:cNvSpPr/>
+          <p:nvPr/>
+        </p:nvSpPr>
+        <p:spPr>
+          <a:xfrm>
+            <a:off x="6592824" y="1371600"/>
+            <a:ext cx="2880360" cy="329184"/>
+          </a:xfrm>
+          <a:prstGeom prst="roundRect">
+            <a:avLst>
+              <a:gd name="adj" fmla="val 20000"/>
+            </a:avLst>
+          </a:prstGeom>
+          <a:solidFill>
+            <a:srgbClr val="1E2761"/>
+          </a:solidFill>
+          <a:ln>
+            <a:noFill/>
+          </a:ln>
+        </p:spPr>
+        <p:txBody>
+          <a:bodyPr wrap="square" lIns="36576" tIns="0" rIns="36576" bIns="0" rtlCol="0" anchor="ctr">
+            <a:noAutofit/>
+          </a:bodyPr>
+          <a:lstStyle/>
+          <a:p>
+            <a:pPr algn="ctr">
+              <a:buNone/>
+            </a:pPr>
+            <a:r>
+              <a:rPr lang="ja-JP" altLang="en-US" sz="1150" b="1" dirty="0">
+                <a:solidFill>
+                  <a:srgbClr val="FFFFFF"/>
+                </a:solidFill>
+                <a:latin typeface="メイリオ" panose="020B0604030504040204" pitchFamily="50" charset="-128"/>
+                <a:ea typeface="メイリオ" panose="020B0604030504040204" pitchFamily="50" charset="-128"/>
+              </a:rPr>
+              <a:t>リッチメニュー（構成案）</a:t>
+            </a:r>
+            <a:endParaRPr lang="ja-JP" altLang="en-US" sz="1150" dirty="0"/>
+          </a:p>
+        </p:txBody>
+      </p:sp>
+      <p:sp>
+        <p:nvSpPr>
+          <p:cNvPr id="32" name="Rectangle 31"/>
+          <p:cNvSpPr/>
+          <p:nvPr/>
+        </p:nvSpPr>
+        <p:spPr>
+          <a:xfrm>
+            <a:off x="6592824" y="1783080"/>
+            <a:ext cx="2880360" cy="3246120"/>
+          </a:xfrm>
+          <a:prstGeom prst="rect">
+            <a:avLst/>
+          </a:prstGeom>
+          <a:solidFill>
+            <a:srgbClr val="F2F2F2"/>
+          </a:solidFill>
+          <a:ln>
+            <a:noFill/>
+          </a:ln>
+        </p:spPr>
+        <p:txBody>
+          <a:bodyPr wrap="square" lIns="73152" tIns="36576" rIns="73152" bIns="36576" rtlCol="0" anchor="ctr">
+            <a:noAutofit/>
+          </a:bodyPr>
+          <a:lstStyle/>
+          <a:p>
+            <a:pPr algn="l">
+              <a:buNone/>
+            </a:pPr>
+            <a:endParaRPr lang="ja-JP" altLang="en-US" sz="1200" dirty="0"/>
+          </a:p>
+        </p:txBody>
+      </p:sp>
+      <p:sp>
+        <p:nvSpPr>
+          <p:cNvPr id="33" name="Rectangle 32"/>
+          <p:cNvSpPr/>
+          <p:nvPr/>
+        </p:nvSpPr>
+        <p:spPr>
+          <a:xfrm>
+            <a:off x="6647688" y="2240280"/>
+            <a:ext cx="893064" cy="914400"/>
+          </a:xfrm>
+          <a:prstGeom prst="rect">
+            <a:avLst/>
+          </a:prstGeom>
+          <a:solidFill>
+            <a:srgbClr val="1E2761"/>
+          </a:solidFill>
+          <a:ln>
+            <a:noFill/>
+          </a:ln>
+        </p:spPr>
+        <p:txBody>
+          <a:bodyPr wrap="square" lIns="18288" tIns="18288" rIns="18288" bIns="18288" rtlCol="0" anchor="ctr">
+            <a:noAutofit/>
+          </a:bodyPr>
+          <a:lstStyle/>
+          <a:p>
+            <a:pPr algn="ctr">
+              <a:spcAft>
+                <a:spcPts val="100"/>
+              </a:spcAft>
+              <a:buNone/>
+            </a:pPr>
+            <a:r>
+              <a:rPr lang="ja-JP" altLang="en-US" sz="1150" b="1" dirty="0">
+                <a:solidFill>
+                  <a:srgbClr val="FFFFFF"/>
+                </a:solidFill>
+                <a:latin typeface="メイリオ" panose="020B0604030504040204" pitchFamily="50" charset="-128"/>
+                <a:ea typeface="メイリオ" panose="020B0604030504040204" pitchFamily="50" charset="-128"/>
+              </a:rPr>
+              <a:t>仕事を探す</a:t>
+            </a:r>
+            <a:endParaRPr lang="ja-JP" altLang="en-US" sz="1100" dirty="0"/>
+          </a:p>
+          <a:p>
+            <a:pPr algn="ctr">
+              <a:spcAft>
+                <a:spcPts val="100"/>
+              </a:spcAft>
+              <a:buNone/>
+            </a:pPr>
+            <a:r>
+              <a:rPr lang="ja-JP" altLang="en-US" sz="950" b="0" dirty="0">
+                <a:solidFill>
+                  <a:srgbClr val="FFFFFF"/>
+                </a:solidFill>
+                <a:latin typeface="メイリオ" panose="020B0604030504040204" pitchFamily="50" charset="-128"/>
+                <a:ea typeface="メイリオ" panose="020B0604030504040204" pitchFamily="50" charset="-128"/>
+              </a:rPr>
+              <a:t>募集中の</a:t>
+            </a:r>
+            <a:br>
+              <a:rPr lang="ja-JP" altLang="en-US" sz="950" b="0" dirty="0">
+                <a:solidFill>
+                  <a:srgbClr val="FFFFFF"/>
+                </a:solidFill>
+                <a:latin typeface="メイリオ" panose="020B0604030504040204" pitchFamily="50" charset="-128"/>
+                <a:ea typeface="メイリオ" panose="020B0604030504040204" pitchFamily="50" charset="-128"/>
+              </a:rPr>
+            </a:br>
+            <a:r>
+              <a:rPr lang="ja-JP" altLang="en-US" sz="950" b="0" dirty="0">
+                <a:solidFill>
+                  <a:srgbClr val="FFFFFF"/>
+                </a:solidFill>
+                <a:latin typeface="メイリオ" panose="020B0604030504040204" pitchFamily="50" charset="-128"/>
+                <a:ea typeface="メイリオ" panose="020B0604030504040204" pitchFamily="50" charset="-128"/>
+              </a:rPr>
+              <a:t>イベント</a:t>
+            </a:r>
+            <a:endParaRPr lang="ja-JP" altLang="en-US" sz="1100" dirty="0"/>
+          </a:p>
+        </p:txBody>
+      </p:sp>
+      <p:sp>
+        <p:nvSpPr>
+          <p:cNvPr id="34" name="Rectangle 33"/>
+          <p:cNvSpPr/>
+          <p:nvPr/>
+        </p:nvSpPr>
+        <p:spPr>
+          <a:xfrm>
+            <a:off x="7586472" y="2240280"/>
+            <a:ext cx="893064" cy="914400"/>
+          </a:xfrm>
+          <a:prstGeom prst="rect">
+            <a:avLst/>
+          </a:prstGeom>
+          <a:solidFill>
+            <a:srgbClr val="FFFFFF"/>
+          </a:solidFill>
+          <a:ln w="9525">
+            <a:solidFill>
+              <a:srgbClr val="D9D9D9"/>
+            </a:solidFill>
+          </a:ln>
+        </p:spPr>
+        <p:txBody>
+          <a:bodyPr wrap="square" lIns="18288" tIns="18288" rIns="18288" bIns="18288" rtlCol="0" anchor="ctr">
+            <a:noAutofit/>
+          </a:bodyPr>
+          <a:lstStyle/>
+          <a:p>
+            <a:pPr algn="ctr">
+              <a:spcAft>
+                <a:spcPts val="100"/>
+              </a:spcAft>
+              <a:buNone/>
+            </a:pPr>
+            <a:r>
+              <a:rPr lang="ja-JP" altLang="en-US" sz="1150" b="1" dirty="0">
+                <a:solidFill>
+                  <a:srgbClr val="323366"/>
+                </a:solidFill>
+                <a:latin typeface="メイリオ" panose="020B0604030504040204" pitchFamily="50" charset="-128"/>
+                <a:ea typeface="メイリオ" panose="020B0604030504040204" pitchFamily="50" charset="-128"/>
+              </a:rPr>
+              <a:t>勤務の案内</a:t>
+            </a:r>
+            <a:endParaRPr lang="ja-JP" altLang="en-US" sz="1100" dirty="0"/>
+          </a:p>
+          <a:p>
+            <a:pPr algn="ctr">
+              <a:spcAft>
+                <a:spcPts val="100"/>
+              </a:spcAft>
+              <a:buNone/>
+            </a:pPr>
+            <a:r>
+              <a:rPr lang="ja-JP" altLang="en-US" sz="950" b="0" dirty="0">
+                <a:solidFill>
+                  <a:srgbClr val="323366"/>
+                </a:solidFill>
+                <a:latin typeface="メイリオ" panose="020B0604030504040204" pitchFamily="50" charset="-128"/>
+                <a:ea typeface="メイリオ" panose="020B0604030504040204" pitchFamily="50" charset="-128"/>
+              </a:rPr>
+              <a:t>集合・持ち物</a:t>
+            </a:r>
+            <a:endParaRPr lang="ja-JP" altLang="en-US" sz="1100" dirty="0"/>
+          </a:p>
+        </p:txBody>
+      </p:sp>
+      <p:sp>
+        <p:nvSpPr>
+          <p:cNvPr id="35" name="Rectangle 34"/>
+          <p:cNvSpPr/>
+          <p:nvPr/>
+        </p:nvSpPr>
+        <p:spPr>
+          <a:xfrm>
+            <a:off x="8525256" y="2240280"/>
+            <a:ext cx="893064" cy="914400"/>
+          </a:xfrm>
+          <a:prstGeom prst="rect">
+            <a:avLst/>
+          </a:prstGeom>
+          <a:solidFill>
+            <a:srgbClr val="FFFFFF"/>
+          </a:solidFill>
+          <a:ln w="9525">
+            <a:solidFill>
+              <a:srgbClr val="D9D9D9"/>
+            </a:solidFill>
+          </a:ln>
+        </p:spPr>
+        <p:txBody>
+          <a:bodyPr wrap="square" lIns="18288" tIns="18288" rIns="18288" bIns="18288" rtlCol="0" anchor="ctr">
+            <a:noAutofit/>
+          </a:bodyPr>
+          <a:lstStyle/>
+          <a:p>
+            <a:pPr algn="ctr">
+              <a:spcAft>
+                <a:spcPts val="100"/>
+              </a:spcAft>
+              <a:buNone/>
+            </a:pPr>
+            <a:r>
+              <a:rPr lang="ja-JP" altLang="en-US" sz="1150" b="1" dirty="0">
+                <a:solidFill>
+                  <a:srgbClr val="323366"/>
+                </a:solidFill>
+                <a:latin typeface="メイリオ" panose="020B0604030504040204" pitchFamily="50" charset="-128"/>
+                <a:ea typeface="メイリオ" panose="020B0604030504040204" pitchFamily="50" charset="-128"/>
+              </a:rPr>
+              <a:t>希望条件を</a:t>
+            </a:r>
+            <a:br>
+              <a:rPr lang="ja-JP" altLang="en-US" sz="1150" b="1" dirty="0">
+                <a:solidFill>
+                  <a:srgbClr val="323366"/>
+                </a:solidFill>
+                <a:latin typeface="メイリオ" panose="020B0604030504040204" pitchFamily="50" charset="-128"/>
+                <a:ea typeface="メイリオ" panose="020B0604030504040204" pitchFamily="50" charset="-128"/>
+              </a:rPr>
+            </a:br>
+            <a:r>
+              <a:rPr lang="ja-JP" altLang="en-US" sz="1150" b="1" dirty="0">
+                <a:solidFill>
+                  <a:srgbClr val="323366"/>
+                </a:solidFill>
+                <a:latin typeface="メイリオ" panose="020B0604030504040204" pitchFamily="50" charset="-128"/>
+                <a:ea typeface="メイリオ" panose="020B0604030504040204" pitchFamily="50" charset="-128"/>
+              </a:rPr>
+              <a:t>変える</a:t>
+            </a:r>
+            <a:endParaRPr lang="ja-JP" altLang="en-US" sz="1100" dirty="0"/>
+          </a:p>
+          <a:p>
+            <a:pPr algn="ctr">
+              <a:spcAft>
+                <a:spcPts val="100"/>
+              </a:spcAft>
+              <a:buNone/>
+            </a:pPr>
+            <a:r>
+              <a:rPr lang="ja-JP" altLang="en-US" sz="950" b="0" dirty="0">
+                <a:solidFill>
+                  <a:srgbClr val="323366"/>
+                </a:solidFill>
+                <a:latin typeface="メイリオ" panose="020B0604030504040204" pitchFamily="50" charset="-128"/>
+                <a:ea typeface="メイリオ" panose="020B0604030504040204" pitchFamily="50" charset="-128"/>
+              </a:rPr>
+              <a:t>エリア・曜日</a:t>
+            </a:r>
+            <a:endParaRPr lang="ja-JP" altLang="en-US" sz="1100" dirty="0"/>
+          </a:p>
+        </p:txBody>
+      </p:sp>
+      <p:sp>
+        <p:nvSpPr>
+          <p:cNvPr id="36" name="Rectangle 35"/>
+          <p:cNvSpPr/>
+          <p:nvPr/>
+        </p:nvSpPr>
+        <p:spPr>
+          <a:xfrm>
+            <a:off x="6647688" y="3200400"/>
+            <a:ext cx="893064" cy="914400"/>
+          </a:xfrm>
+          <a:prstGeom prst="rect">
+            <a:avLst/>
+          </a:prstGeom>
+          <a:solidFill>
+            <a:srgbClr val="FFFFFF"/>
+          </a:solidFill>
+          <a:ln w="9525">
+            <a:solidFill>
+              <a:srgbClr val="D9D9D9"/>
+            </a:solidFill>
+          </a:ln>
+        </p:spPr>
+        <p:txBody>
+          <a:bodyPr wrap="square" lIns="18288" tIns="18288" rIns="18288" bIns="18288" rtlCol="0" anchor="ctr">
+            <a:noAutofit/>
+          </a:bodyPr>
+          <a:lstStyle/>
+          <a:p>
+            <a:pPr algn="ctr">
+              <a:spcAft>
+                <a:spcPts val="100"/>
+              </a:spcAft>
+              <a:buNone/>
+            </a:pPr>
+            <a:r>
+              <a:rPr lang="ja-JP" altLang="en-US" sz="1150" b="1" dirty="0">
+                <a:solidFill>
+                  <a:srgbClr val="323366"/>
+                </a:solidFill>
+                <a:latin typeface="メイリオ" panose="020B0604030504040204" pitchFamily="50" charset="-128"/>
+                <a:ea typeface="メイリオ" panose="020B0604030504040204" pitchFamily="50" charset="-128"/>
+              </a:rPr>
+              <a:t>よくある</a:t>
+            </a:r>
+            <a:br>
+              <a:rPr lang="ja-JP" altLang="en-US" sz="1150" b="1" dirty="0">
+                <a:solidFill>
+                  <a:srgbClr val="323366"/>
+                </a:solidFill>
+                <a:latin typeface="メイリオ" panose="020B0604030504040204" pitchFamily="50" charset="-128"/>
+                <a:ea typeface="メイリオ" panose="020B0604030504040204" pitchFamily="50" charset="-128"/>
+              </a:rPr>
+            </a:br>
+            <a:r>
+              <a:rPr lang="ja-JP" altLang="en-US" sz="1150" b="1" dirty="0">
+                <a:solidFill>
+                  <a:srgbClr val="323366"/>
+                </a:solidFill>
+                <a:latin typeface="メイリオ" panose="020B0604030504040204" pitchFamily="50" charset="-128"/>
+                <a:ea typeface="メイリオ" panose="020B0604030504040204" pitchFamily="50" charset="-128"/>
+              </a:rPr>
+              <a:t>質問</a:t>
+            </a:r>
+            <a:endParaRPr lang="ja-JP" altLang="en-US" sz="1100" dirty="0"/>
+          </a:p>
+          <a:p>
+            <a:pPr algn="ctr">
+              <a:spcAft>
+                <a:spcPts val="100"/>
+              </a:spcAft>
+              <a:buNone/>
+            </a:pPr>
+            <a:r>
+              <a:rPr lang="ja-JP" altLang="en-US" sz="950" b="0" dirty="0">
+                <a:solidFill>
+                  <a:srgbClr val="323366"/>
+                </a:solidFill>
+                <a:latin typeface="メイリオ" panose="020B0604030504040204" pitchFamily="50" charset="-128"/>
+                <a:ea typeface="メイリオ" panose="020B0604030504040204" pitchFamily="50" charset="-128"/>
+              </a:rPr>
+              <a:t>給与・服装など</a:t>
+            </a:r>
+            <a:endParaRPr lang="ja-JP" altLang="en-US" sz="1100" dirty="0"/>
+          </a:p>
+        </p:txBody>
+      </p:sp>
+      <p:sp>
+        <p:nvSpPr>
+          <p:cNvPr id="37" name="Rectangle 36"/>
+          <p:cNvSpPr/>
+          <p:nvPr/>
+        </p:nvSpPr>
+        <p:spPr>
+          <a:xfrm>
+            <a:off x="7586472" y="3200400"/>
+            <a:ext cx="893064" cy="914400"/>
+          </a:xfrm>
+          <a:prstGeom prst="rect">
+            <a:avLst/>
+          </a:prstGeom>
+          <a:solidFill>
+            <a:srgbClr val="FFFFFF"/>
+          </a:solidFill>
+          <a:ln w="9525">
+            <a:solidFill>
+              <a:srgbClr val="D9D9D9"/>
+            </a:solidFill>
+          </a:ln>
+        </p:spPr>
+        <p:txBody>
+          <a:bodyPr wrap="square" lIns="18288" tIns="18288" rIns="18288" bIns="18288" rtlCol="0" anchor="ctr">
+            <a:noAutofit/>
+          </a:bodyPr>
+          <a:lstStyle/>
+          <a:p>
+            <a:pPr algn="ctr">
+              <a:spcAft>
+                <a:spcPts val="100"/>
+              </a:spcAft>
+              <a:buNone/>
+            </a:pPr>
+            <a:r>
+              <a:rPr lang="ja-JP" altLang="en-US" sz="1150" b="1" dirty="0">
+                <a:solidFill>
+                  <a:srgbClr val="323366"/>
+                </a:solidFill>
+                <a:latin typeface="メイリオ" panose="020B0604030504040204" pitchFamily="50" charset="-128"/>
+                <a:ea typeface="メイリオ" panose="020B0604030504040204" pitchFamily="50" charset="-128"/>
+              </a:rPr>
+              <a:t>お問い</a:t>
+            </a:r>
+            <a:br>
+              <a:rPr lang="ja-JP" altLang="en-US" sz="1150" b="1" dirty="0">
+                <a:solidFill>
+                  <a:srgbClr val="323366"/>
+                </a:solidFill>
+                <a:latin typeface="メイリオ" panose="020B0604030504040204" pitchFamily="50" charset="-128"/>
+                <a:ea typeface="メイリオ" panose="020B0604030504040204" pitchFamily="50" charset="-128"/>
+              </a:rPr>
+            </a:br>
+            <a:r>
+              <a:rPr lang="ja-JP" altLang="en-US" sz="1150" b="1" dirty="0">
+                <a:solidFill>
+                  <a:srgbClr val="323366"/>
+                </a:solidFill>
+                <a:latin typeface="メイリオ" panose="020B0604030504040204" pitchFamily="50" charset="-128"/>
+                <a:ea typeface="メイリオ" panose="020B0604030504040204" pitchFamily="50" charset="-128"/>
+              </a:rPr>
+              <a:t>合わせ</a:t>
+            </a:r>
+            <a:endParaRPr lang="ja-JP" altLang="en-US" sz="1100" dirty="0"/>
+          </a:p>
+          <a:p>
+            <a:pPr algn="ctr">
+              <a:spcAft>
+                <a:spcPts val="100"/>
+              </a:spcAft>
+              <a:buNone/>
+            </a:pPr>
+            <a:r>
+              <a:rPr lang="ja-JP" altLang="en-US" sz="950" b="0" dirty="0">
+                <a:solidFill>
+                  <a:srgbClr val="323366"/>
+                </a:solidFill>
+                <a:latin typeface="メイリオ" panose="020B0604030504040204" pitchFamily="50" charset="-128"/>
+                <a:ea typeface="メイリオ" panose="020B0604030504040204" pitchFamily="50" charset="-128"/>
+              </a:rPr>
+              <a:t>チャットで相談</a:t>
+            </a:r>
+            <a:endParaRPr lang="ja-JP" altLang="en-US" sz="1100" dirty="0"/>
+          </a:p>
+        </p:txBody>
+      </p:sp>
+      <p:sp>
+        <p:nvSpPr>
+          <p:cNvPr id="38" name="Rectangle 37"/>
+          <p:cNvSpPr/>
+          <p:nvPr/>
+        </p:nvSpPr>
+        <p:spPr>
+          <a:xfrm>
+            <a:off x="8525256" y="3200400"/>
+            <a:ext cx="893064" cy="914400"/>
+          </a:xfrm>
+          <a:prstGeom prst="rect">
+            <a:avLst/>
+          </a:prstGeom>
+          <a:solidFill>
+            <a:srgbClr val="FFFFFF"/>
+          </a:solidFill>
+          <a:ln w="9525">
+            <a:solidFill>
+              <a:srgbClr val="D9D9D9"/>
+            </a:solidFill>
+          </a:ln>
+        </p:spPr>
+        <p:txBody>
+          <a:bodyPr wrap="square" lIns="18288" tIns="18288" rIns="18288" bIns="18288" rtlCol="0" anchor="ctr">
+            <a:noAutofit/>
+          </a:bodyPr>
+          <a:lstStyle/>
+          <a:p>
+            <a:pPr algn="ctr">
+              <a:spcAft>
+                <a:spcPts val="100"/>
+              </a:spcAft>
+              <a:buNone/>
+            </a:pPr>
+            <a:r>
+              <a:rPr lang="ja-JP" altLang="en-US" sz="1150" b="1" dirty="0">
+                <a:solidFill>
+                  <a:srgbClr val="323366"/>
+                </a:solidFill>
+                <a:latin typeface="メイリオ" panose="020B0604030504040204" pitchFamily="50" charset="-128"/>
+                <a:ea typeface="メイリオ" panose="020B0604030504040204" pitchFamily="50" charset="-128"/>
+              </a:rPr>
+              <a:t>横浜シミズ</a:t>
+            </a:r>
+            <a:br>
+              <a:rPr lang="ja-JP" altLang="en-US" sz="1150" b="1" dirty="0">
+                <a:solidFill>
+                  <a:srgbClr val="323366"/>
+                </a:solidFill>
+                <a:latin typeface="メイリオ" panose="020B0604030504040204" pitchFamily="50" charset="-128"/>
+                <a:ea typeface="メイリオ" panose="020B0604030504040204" pitchFamily="50" charset="-128"/>
+              </a:rPr>
+            </a:br>
+            <a:r>
+              <a:rPr lang="ja-JP" altLang="en-US" sz="1150" b="1" dirty="0">
+                <a:solidFill>
+                  <a:srgbClr val="323366"/>
+                </a:solidFill>
+                <a:latin typeface="メイリオ" panose="020B0604030504040204" pitchFamily="50" charset="-128"/>
+                <a:ea typeface="メイリオ" panose="020B0604030504040204" pitchFamily="50" charset="-128"/>
+              </a:rPr>
+              <a:t>とは</a:t>
+            </a:r>
+            <a:endParaRPr lang="ja-JP" altLang="en-US" sz="1100" dirty="0"/>
+          </a:p>
+          <a:p>
+            <a:pPr algn="ctr">
+              <a:spcAft>
+                <a:spcPts val="100"/>
+              </a:spcAft>
+              <a:buNone/>
+            </a:pPr>
+            <a:r>
+              <a:rPr lang="ja-JP" altLang="en-US" sz="950" b="0" dirty="0">
+                <a:solidFill>
+                  <a:srgbClr val="323366"/>
+                </a:solidFill>
+                <a:latin typeface="メイリオ" panose="020B0604030504040204" pitchFamily="50" charset="-128"/>
+                <a:ea typeface="メイリオ" panose="020B0604030504040204" pitchFamily="50" charset="-128"/>
+              </a:rPr>
+              <a:t>会社・現場</a:t>
+            </a:r>
+            <a:br>
+              <a:rPr lang="ja-JP" altLang="en-US" sz="950" b="0" dirty="0">
+                <a:solidFill>
+                  <a:srgbClr val="323366"/>
+                </a:solidFill>
+                <a:latin typeface="メイリオ" panose="020B0604030504040204" pitchFamily="50" charset="-128"/>
+                <a:ea typeface="メイリオ" panose="020B0604030504040204" pitchFamily="50" charset="-128"/>
+              </a:rPr>
+            </a:br>
+            <a:r>
+              <a:rPr lang="ja-JP" altLang="en-US" sz="950" b="0" dirty="0">
+                <a:solidFill>
+                  <a:srgbClr val="323366"/>
+                </a:solidFill>
+                <a:latin typeface="メイリオ" panose="020B0604030504040204" pitchFamily="50" charset="-128"/>
+                <a:ea typeface="メイリオ" panose="020B0604030504040204" pitchFamily="50" charset="-128"/>
+              </a:rPr>
+              <a:t>の紹介</a:t>
+            </a:r>
+            <a:endParaRPr lang="ja-JP" altLang="en-US" sz="1100" dirty="0"/>
+          </a:p>
+        </p:txBody>
+      </p:sp>
+      <p:sp>
+        <p:nvSpPr>
+          <p:cNvPr id="39" name="Rectangle 38"/>
+          <p:cNvSpPr/>
+          <p:nvPr/>
+        </p:nvSpPr>
+        <p:spPr>
+          <a:xfrm>
+            <a:off x="6592824" y="5074920"/>
+            <a:ext cx="2880360" cy="365760"/>
+          </a:xfrm>
+          <a:prstGeom prst="rect">
+            <a:avLst/>
+          </a:prstGeom>
+          <a:noFill/>
+          <a:ln>
+            <a:noFill/>
+          </a:ln>
+        </p:spPr>
+        <p:txBody>
+          <a:bodyPr wrap="square" lIns="18288" tIns="0" rIns="18288" bIns="0" rtlCol="0" anchor="ctr">
+            <a:noAutofit/>
+          </a:bodyPr>
+          <a:lstStyle/>
+          <a:p>
+            <a:pPr algn="l">
+              <a:buNone/>
+            </a:pPr>
+            <a:r>
+              <a:rPr lang="ja-JP" altLang="en-US" sz="1000" b="0" dirty="0">
+                <a:solidFill>
+                  <a:srgbClr val="595959"/>
+                </a:solidFill>
+                <a:latin typeface="メイリオ" panose="020B0604030504040204" pitchFamily="50" charset="-128"/>
+                <a:ea typeface="メイリオ" panose="020B0604030504040204" pitchFamily="50" charset="-128"/>
+              </a:rPr>
+              <a:t>一番押してほしい「仕事を探す」を左上に</a:t>
+            </a:r>
+            <a:endParaRPr lang="ja-JP" altLang="en-US" sz="1000" dirty="0"/>
+          </a:p>
+        </p:txBody>
+      </p:sp>
+    </p:spTree>
+  </p:cSld>
+  <p:clrMapOvr>
+    <a:masterClrMapping/>
+  </p:clrMapOvr>
+</p:sld>
+</file>
+
+<file path=ppt/slides/slide14.xml><?xml version="1.0" encoding="utf-8"?>
+<p:sld xmlns:a="http://schemas.openxmlformats.org/drawingml/2006/main" xmlns:r="http://schemas.openxmlformats.org/officeDocument/2006/relationships" xmlns:p="http://schemas.openxmlformats.org/presentationml/2006/main">
+  <p:cSld>
+    <p:spTree>
+      <p:nvGrpSpPr>
+        <p:cNvPr id="1" name=""/>
+        <p:cNvGrpSpPr/>
+        <p:nvPr/>
+      </p:nvGrpSpPr>
+      <p:grpSpPr>
+        <a:xfrm>
+          <a:off x="0" y="0"/>
+          <a:ext cx="0" cy="0"/>
+          <a:chOff x="0" y="0"/>
+          <a:chExt cx="0" cy="0"/>
+        </a:xfrm>
+      </p:grpSpPr>
+      <p:sp>
+        <p:nvSpPr>
           <p:cNvPr id="337" name="正方形/長方形 2"/>
           <p:cNvSpPr/>
           <p:nvPr/>
@@ -10285,7 +11536,7 @@
 </p:sld>
 </file>
 
-<file path=ppt/slides/slide14.xml><?xml version="1.0" encoding="utf-8"?>
+<file path=ppt/slides/slide15.xml><?xml version="1.0" encoding="utf-8"?>
 <p:sld xmlns:a="http://schemas.openxmlformats.org/drawingml/2006/main" xmlns:r="http://schemas.openxmlformats.org/officeDocument/2006/relationships" xmlns:p="http://schemas.openxmlformats.org/presentationml/2006/main">
   <p:cSld>
     <p:spTree>
@@ -12076,7 +13327,7 @@
 </p:sld>
 </file>
 
-<file path=ppt/slides/slide15.xml><?xml version="1.0" encoding="utf-8"?>
+<file path=ppt/slides/slide16.xml><?xml version="1.0" encoding="utf-8"?>
 <p:sld xmlns:a="http://schemas.openxmlformats.org/drawingml/2006/main" xmlns:r="http://schemas.openxmlformats.org/officeDocument/2006/relationships" xmlns:p="http://schemas.openxmlformats.org/presentationml/2006/main">
   <p:cSld>
     <p:spTree>
@@ -14142,7 +15393,7 @@
 </p:sld>
 </file>
 
-<file path=ppt/slides/slide16.xml><?xml version="1.0" encoding="utf-8"?>
+<file path=ppt/slides/slide17.xml><?xml version="1.0" encoding="utf-8"?>
 <p:sld xmlns:a="http://schemas.openxmlformats.org/drawingml/2006/main" xmlns:r="http://schemas.openxmlformats.org/officeDocument/2006/relationships" xmlns:p="http://schemas.openxmlformats.org/presentationml/2006/main">
   <p:cSld>
     <p:spTree>
@@ -15010,7 +16261,7 @@
 </p:sld>
 </file>
 
-<file path=ppt/slides/slide17.xml><?xml version="1.0" encoding="utf-8"?>
+<file path=ppt/slides/slide18.xml><?xml version="1.0" encoding="utf-8"?>
 <p:sld xmlns:a="http://schemas.openxmlformats.org/drawingml/2006/main" xmlns:r="http://schemas.openxmlformats.org/officeDocument/2006/relationships" xmlns:p="http://schemas.openxmlformats.org/presentationml/2006/main">
   <p:cSld>
     <p:spTree>
@@ -15813,7 +17064,7 @@
 </p:sld>
 </file>
 
-<file path=ppt/slides/slide18.xml><?xml version="1.0" encoding="utf-8"?>
+<file path=ppt/slides/slide19.xml><?xml version="1.0" encoding="utf-8"?>
 <p:sld xmlns:a="http://schemas.openxmlformats.org/drawingml/2006/main" xmlns:p="http://schemas.openxmlformats.org/presentationml/2006/main" xmlns:r="http://schemas.openxmlformats.org/officeDocument/2006/relationships">
   <p:cSld>
     <p:spTree>
@@ -15825,14 +17076,14 @@
       <p:grpSpPr/>
       <p:sp>
         <p:nvSpPr>
-          <p:cNvPr id="2" name="Google Shape;752;p28"/>
+          <p:cNvPr id="635" name="Google Shape;752;p28"/>
           <p:cNvSpPr/>
           <p:nvPr/>
         </p:nvSpPr>
         <p:spPr>
           <a:xfrm>
             <a:off x="549000" y="138240"/>
-            <a:ext cx="7680960" cy="338040"/>
+            <a:ext cx="6275880" cy="338040"/>
           </a:xfrm>
           <a:prstGeom prst="rect">
             <a:avLst/>
@@ -15875,7 +17126,7 @@
                 <a:latin typeface="メイリオ"/>
                 <a:ea typeface="メイリオ"/>
               </a:rPr>
-              <a:t>前後検索「単発バイト」｜当日に何社も比べ、その後は給与・働き方を調べる</a:t>
+              <a:t>料金プラン（成果報酬）：月額を抑え、応募1件ごとにお支払い</a:t>
             </a:r>
             <a:endParaRPr lang="en-US" sz="1600" b="0" u="none" strike="noStrike">
               <a:solidFill>
@@ -15890,88 +17141,29 @@
       </p:sp>
       <p:sp>
         <p:nvSpPr>
-          <p:cNvPr id="3" name="正方形/長方形 2"/>
+          <p:cNvPr id="636" name="正方形/長方形 8"/>
           <p:cNvSpPr/>
           <p:nvPr/>
         </p:nvSpPr>
         <p:spPr>
           <a:xfrm>
-            <a:off x="0" y="577800"/>
-            <a:ext cx="9905760" cy="812520"/>
+            <a:off x="0" y="681480"/>
+            <a:ext cx="2914200" cy="502560"/>
           </a:xfrm>
           <a:prstGeom prst="rect">
             <a:avLst/>
           </a:prstGeom>
-          <a:noFill/>
+          <a:solidFill>
+            <a:srgbClr val="002060"/>
+          </a:solidFill>
           <a:ln>
             <a:noFill/>
           </a:ln>
-          <a:effectLst>
-            <a:outerShdw blurRad="39960" dist="23040" dir="5400000" rotWithShape="0">
-              <a:srgbClr val="000000">
-                <a:alpha val="35000"/>
-              </a:srgbClr>
-            </a:outerShdw>
-          </a:effectLst>
-        </p:spPr>
-        <p:style>
-          <a:lnRef idx="1">
-            <a:schemeClr val="accent1"/>
-          </a:lnRef>
-          <a:fillRef idx="3">
-            <a:schemeClr val="accent1"/>
-          </a:fillRef>
-          <a:effectRef idx="2">
-            <a:schemeClr val="accent1"/>
-          </a:effectRef>
-          <a:fontRef idx="minor"/>
-        </p:style>
-        <p:txBody>
-          <a:bodyPr lIns="90000" tIns="45000" rIns="90000" bIns="45000" anchor="ctr">
-            <a:noAutofit/>
-          </a:bodyPr>
-          <a:lstStyle/>
-          <a:p>
-            <a:pPr algn="ctr" defTabSz="914400">
-              <a:lnSpc>
-                <a:spcPct val="100000"/>
-              </a:lnSpc>
-            </a:pPr>
-            <a:endParaRPr lang="en-US" sz="1800" b="0" u="none" strike="noStrike">
-              <a:solidFill>
-                <a:schemeClr val="lt1"/>
-              </a:solidFill>
-              <a:effectLst/>
-              <a:uFillTx/>
-              <a:latin typeface="メイリオ"/>
-              <a:ea typeface="メイリオ"/>
-            </a:endParaRPr>
-          </a:p>
-        </p:txBody>
-      </p:sp>
-      <p:sp>
-        <p:nvSpPr>
-          <p:cNvPr id="4" name="正方形/長方形 3"/>
-          <p:cNvSpPr/>
-          <p:nvPr/>
-        </p:nvSpPr>
-        <p:spPr>
-          <a:xfrm>
-            <a:off x="379800" y="635040"/>
-            <a:ext cx="9160560" cy="698040"/>
-          </a:xfrm>
-          <a:prstGeom prst="rect">
-            <a:avLst/>
-          </a:prstGeom>
-          <a:noFill/>
-          <a:ln>
-            <a:noFill/>
-          </a:ln>
         </p:spPr>
         <p:style>
           <a:lnRef idx="2">
             <a:schemeClr val="accent1">
-              <a:shade val="50000"/>
+              <a:shade val="15000"/>
             </a:schemeClr>
           </a:lnRef>
           <a:fillRef idx="1">
@@ -15983,63 +17175,49 @@
           <a:fontRef idx="minor"/>
         </p:style>
         <p:txBody>
-          <a:bodyPr lIns="90000" tIns="90000" rIns="90000" bIns="45000" anchor="ctr">
+          <a:bodyPr lIns="90000" tIns="45000" rIns="90000" bIns="45000" anchor="ctr">
             <a:noAutofit/>
           </a:bodyPr>
           <a:lstStyle/>
           <a:p>
             <a:pPr algn="ctr" defTabSz="914400">
               <a:lnSpc>
-                <a:spcPts val="2455"/>
+                <a:spcPct val="100000"/>
               </a:lnSpc>
             </a:pPr>
-            <a:endParaRPr lang="en-US" sz="1400" b="0" u="none" strike="noStrike">
+            <a:r>
+              <a:rPr lang="ja-JP" sz="1400" b="0" u="none" strike="noStrike" dirty="0">
+                <a:solidFill>
+                  <a:schemeClr val="lt1"/>
+                </a:solidFill>
+                <a:effectLst/>
+                <a:uFillTx/>
+                <a:latin typeface="メイリオ"/>
+                <a:ea typeface="メイリオ"/>
+              </a:rPr>
+              <a:t>成果報酬プラン</a:t>
+            </a:r>
+            <a:endParaRPr lang="en-US" sz="1400" b="0" u="none" strike="noStrike" dirty="0">
               <a:solidFill>
-                <a:srgbClr val="343434"/>
+                <a:srgbClr val="FFFFFF"/>
               </a:solidFill>
               <a:effectLst/>
               <a:uFillTx/>
               <a:latin typeface="メイリオ"/>
-              <a:ea typeface="メイリオ"/>
             </a:endParaRPr>
           </a:p>
         </p:txBody>
       </p:sp>
-      <p:cxnSp>
-        <p:nvCxnSpPr>
-          <p:cNvPr id="5" name="直線コネクタ 1"/>
-          <p:cNvCxnSpPr/>
-          <p:nvPr/>
-        </p:nvCxnSpPr>
-        <p:spPr>
-          <a:xfrm>
-            <a:off x="0" y="1390320"/>
-            <a:ext cx="9906120" cy="360"/>
-          </a:xfrm>
-          <a:prstGeom prst="straightConnector1">
-            <a:avLst/>
-          </a:prstGeom>
-          <a:ln w="19050">
-            <a:solidFill>
-              <a:schemeClr val="lt1">
-                <a:lumMod val="85000"/>
-                <a:alpha val="60000"/>
-              </a:schemeClr>
-            </a:solidFill>
-            <a:round/>
-          </a:ln>
-        </p:spPr>
-      </p:cxnSp>
-      <p:sp>
-        <p:nvSpPr>
-          <p:cNvPr id="6" name="テキスト ボックス 30"/>
+      <p:sp>
+        <p:nvSpPr>
+          <p:cNvPr id="637" name="Google Shape;752;p28"/>
           <p:cNvSpPr/>
           <p:nvPr/>
         </p:nvSpPr>
         <p:spPr>
           <a:xfrm>
-            <a:off x="426240" y="635400"/>
-            <a:ext cx="9068760" cy="698400"/>
+            <a:off x="2983680" y="783000"/>
+            <a:ext cx="6619680" cy="338040"/>
           </a:xfrm>
           <a:prstGeom prst="rect">
             <a:avLst/>
@@ -16062,26 +17240,32 @@
           <a:fontRef idx="minor"/>
         </p:style>
         <p:txBody>
-          <a:bodyPr lIns="90000" tIns="45000" rIns="90000" bIns="45000" anchor="ctr">
-            <a:noAutofit/>
+          <a:bodyPr anchor="ctr">
+            <a:spAutoFit/>
           </a:bodyPr>
           <a:lstStyle/>
           <a:p>
-            <a:pPr algn="ctr" defTabSz="914400">
+            <a:pPr defTabSz="914400">
               <a:lnSpc>
                 <a:spcPct val="100000"/>
               </a:lnSpc>
             </a:pPr>
             <a:r>
-              <a:rPr lang="ja-JP" sz="1400" b="1" u="none" strike="noStrike" dirty="0">
+              <a:rPr lang="ja-JP" sz="1600" b="1" u="none" strike="noStrike" dirty="0">
+                <a:solidFill>
+                  <a:schemeClr val="dk1"/>
+                </a:solidFill>
                 <a:effectLst/>
                 <a:uFillTx/>
-                <a:latin typeface="メイリオ" panose="020B0604030504040204" pitchFamily="50" charset="-128"/>
-                <a:ea typeface="メイリオ" panose="020B0604030504040204" pitchFamily="50" charset="-128"/>
-              </a:rPr>
-              <a:t>応募の前後に調べていることを、LINEで先に届ける</a:t>
-            </a:r>
-            <a:endParaRPr lang="en-US" sz="1400" b="1" u="none" strike="noStrike" dirty="0">
+                <a:latin typeface="メイリオ"/>
+                <a:ea typeface="メイリオ"/>
+              </a:rPr>
+              <a:t>初期費用は同じ。月額運用費の代わりに、応募1件ごとの成果報酬</a:t>
+            </a:r>
+            <a:endParaRPr lang="en-US" sz="1600" b="0" u="none" strike="noStrike" dirty="0">
+              <a:solidFill>
+                <a:srgbClr val="000000"/>
+              </a:solidFill>
               <a:effectLst/>
               <a:uFillTx/>
               <a:latin typeface="メイリオ"/>
@@ -16089,164 +17273,1125 @@
           </a:p>
         </p:txBody>
       </p:sp>
-      <p:pic>
-        <p:nvPicPr>
-          <p:cNvPr id="7" name="前後検索 単発バイト（色分け）" descr="tanaka_zengo_chumon_color.png"/>
-          <p:cNvPicPr>
-            <a:picLocks noChangeAspect="1"/>
-          </p:cNvPicPr>
-          <p:nvPr/>
-        </p:nvPicPr>
-        <p:blipFill>
-          <a:blip r:embed="rId4"/>
-          <a:stretch>
-            <a:fillRect/>
-          </a:stretch>
-        </p:blipFill>
-        <p:spPr>
-          <a:xfrm>
-            <a:off x="502920" y="1600200"/>
-            <a:ext cx="5943600" cy="3468090"/>
-          </a:xfrm>
-          <a:prstGeom prst="rect">
-            <a:avLst/>
-          </a:prstGeom>
-        </p:spPr>
-      </p:pic>
-      <p:sp>
-        <p:nvSpPr>
-          <p:cNvPr id="8" name="LINE追加の時期"/>
+      <p:graphicFrame>
+        <p:nvGraphicFramePr>
+          <p:cNvPr id="639" name="料金プラン比較表 638"/>
+          <p:cNvGraphicFramePr>
+            <a:graphicFrameLocks noGrp="1"/>
+          </p:cNvGraphicFramePr>
+          <p:nvPr>
+            <p:extLst>
+              <p:ext uri="{D42A27DB-BD31-4B8C-83A1-F6EECF244321}">
+                <p14:modId xmlns:p14="http://schemas.microsoft.com/office/powerpoint/2010/main" val="4252399329"/>
+              </p:ext>
+            </p:extLst>
+          </p:nvPr>
+        </p:nvGraphicFramePr>
+        <p:xfrm>
+          <a:off x="384048" y="1490760"/>
+          <a:ext cx="9144000" cy="3749040"/>
+        </p:xfrm>
+        <a:graphic>
+          <a:graphicData uri="http://schemas.openxmlformats.org/drawingml/2006/table">
+            <a:tbl>
+              <a:tblPr/>
+              <a:tblGrid>
+                <a:gridCol w="2743200">
+                  <a:extLst>
+                    <a:ext uri="{9D8B030D-6E8A-4147-A177-3AD203B41FA5}">
+                      <a16:colId xmlns:a16="http://schemas.microsoft.com/office/drawing/2014/main" val="20000"/>
+                    </a:ext>
+                  </a:extLst>
+                </a:gridCol>
+                <a:gridCol w="3200400">
+                  <a:extLst>
+                    <a:ext uri="{9D8B030D-6E8A-4147-A177-3AD203B41FA5}">
+                      <a16:colId xmlns:a16="http://schemas.microsoft.com/office/drawing/2014/main" val="20002"/>
+                    </a:ext>
+                  </a:extLst>
+                </a:gridCol>
+                <a:gridCol w="3200400">
+                  <a:extLst>
+                    <a:ext uri="{9D8B030D-6E8A-4147-A177-3AD203B41FA5}">
+                      <a16:colId xmlns:a16="http://schemas.microsoft.com/office/drawing/2014/main" val="20003"/>
+                    </a:ext>
+                  </a:extLst>
+                </a:gridCol>
+              </a:tblGrid>
+              <a:tr h="777240">
+                <a:tc>
+                  <a:txBody>
+                    <a:bodyPr/>
+                    <a:lstStyle/>
+                    <a:p>
+                      <a:pPr algn="ctr">
+                        <a:buNone/>
+                      </a:pPr>
+                      <a:r>
+                        <a:rPr lang="ja-JP" altLang="en-US" sz="1400" b="1" dirty="0">
+                          <a:solidFill>
+                            <a:srgbClr val="FFFFFF"/>
+                          </a:solidFill>
+                          <a:latin typeface="メイリオ" panose="020B0604030504040204" pitchFamily="50" charset="-128"/>
+                          <a:ea typeface="メイリオ" panose="020B0604030504040204" pitchFamily="50" charset="-128"/>
+                        </a:rPr>
+                        <a:t>項目</a:t>
+                      </a:r>
+                      <a:endParaRPr lang="ja-JP" altLang="en-US" sz="1400" dirty="0"/>
+                    </a:p>
+                  </a:txBody>
+                  <a:tcPr marL="73152" marR="73152" marT="27432" marB="27432" anchor="ctr">
+                    <a:lnL w="9525" cap="flat" cmpd="sng" algn="ctr">
+                      <a:solidFill>
+                        <a:srgbClr val="FFFFFF"/>
+                      </a:solidFill>
+                      <a:prstDash val="solid"/>
+                      <a:round/>
+                      <a:headEnd type="none" w="med" len="med"/>
+                      <a:tailEnd type="none" w="med" len="med"/>
+                    </a:lnL>
+                    <a:lnR w="9525" cap="flat" cmpd="sng" algn="ctr">
+                      <a:solidFill>
+                        <a:srgbClr val="FFFFFF"/>
+                      </a:solidFill>
+                      <a:prstDash val="solid"/>
+                      <a:round/>
+                      <a:headEnd type="none" w="med" len="med"/>
+                      <a:tailEnd type="none" w="med" len="med"/>
+                    </a:lnR>
+                    <a:lnT w="9525" cap="flat" cmpd="sng" algn="ctr">
+                      <a:solidFill>
+                        <a:srgbClr val="FFFFFF"/>
+                      </a:solidFill>
+                      <a:prstDash val="solid"/>
+                      <a:round/>
+                      <a:headEnd type="none" w="med" len="med"/>
+                      <a:tailEnd type="none" w="med" len="med"/>
+                    </a:lnT>
+                    <a:lnB w="9525" cap="flat" cmpd="sng" algn="ctr">
+                      <a:solidFill>
+                        <a:srgbClr val="FFFFFF"/>
+                      </a:solidFill>
+                      <a:prstDash val="solid"/>
+                      <a:round/>
+                      <a:headEnd type="none" w="med" len="med"/>
+                      <a:tailEnd type="none" w="med" len="med"/>
+                    </a:lnB>
+                    <a:solidFill>
+                      <a:srgbClr val="1F285A"/>
+                    </a:solidFill>
+                  </a:tcPr>
+                </a:tc>
+                <a:tc>
+                  <a:txBody>
+                    <a:bodyPr/>
+                    <a:lstStyle/>
+                    <a:p>
+                      <a:pPr algn="ctr">
+                        <a:buNone/>
+                      </a:pPr>
+                      <a:r>
+                        <a:rPr lang="ja-JP" altLang="en-US" sz="1400" b="1" dirty="0">
+                          <a:solidFill>
+                            <a:srgbClr val="FFFFFF"/>
+                          </a:solidFill>
+                          <a:latin typeface="メイリオ" panose="020B0604030504040204" pitchFamily="50" charset="-128"/>
+                          <a:ea typeface="メイリオ" panose="020B0604030504040204" pitchFamily="50" charset="-128"/>
+                        </a:rPr>
+                        <a:t>プラン②</a:t>
+                      </a:r>
+                      <a:endParaRPr lang="ja-JP" altLang="en-US" sz="1300" dirty="0"/>
+                    </a:p>
+                    <a:p>
+                      <a:pPr algn="ctr">
+                        <a:buNone/>
+                      </a:pPr>
+                      <a:r>
+                        <a:rPr lang="ja-JP" altLang="en-US" sz="1400" b="1" dirty="0">
+                          <a:solidFill>
+                            <a:srgbClr val="FFFFFF"/>
+                          </a:solidFill>
+                          <a:latin typeface="メイリオ" panose="020B0604030504040204" pitchFamily="50" charset="-128"/>
+                          <a:ea typeface="メイリオ" panose="020B0604030504040204" pitchFamily="50" charset="-128"/>
+                        </a:rPr>
+                        <a:t>運用代行・効率改善</a:t>
+                      </a:r>
+                      <a:endParaRPr lang="ja-JP" altLang="en-US" sz="1300" dirty="0"/>
+                    </a:p>
+                  </a:txBody>
+                  <a:tcPr marL="73152" marR="73152" marT="27432" marB="27432" anchor="ctr">
+                    <a:lnL w="9525" cap="flat" cmpd="sng" algn="ctr">
+                      <a:solidFill>
+                        <a:srgbClr val="FFFFFF"/>
+                      </a:solidFill>
+                      <a:prstDash val="solid"/>
+                      <a:round/>
+                      <a:headEnd type="none" w="med" len="med"/>
+                      <a:tailEnd type="none" w="med" len="med"/>
+                    </a:lnL>
+                    <a:lnR w="9525" cap="flat" cmpd="sng" algn="ctr">
+                      <a:solidFill>
+                        <a:srgbClr val="FFFFFF"/>
+                      </a:solidFill>
+                      <a:prstDash val="solid"/>
+                      <a:round/>
+                      <a:headEnd type="none" w="med" len="med"/>
+                      <a:tailEnd type="none" w="med" len="med"/>
+                    </a:lnR>
+                    <a:lnT w="9525" cap="flat" cmpd="sng" algn="ctr">
+                      <a:solidFill>
+                        <a:srgbClr val="FFFFFF"/>
+                      </a:solidFill>
+                      <a:prstDash val="solid"/>
+                      <a:round/>
+                      <a:headEnd type="none" w="med" len="med"/>
+                      <a:tailEnd type="none" w="med" len="med"/>
+                    </a:lnT>
+                    <a:lnB w="9525" cap="flat" cmpd="sng" algn="ctr">
+                      <a:solidFill>
+                        <a:srgbClr val="FFFFFF"/>
+                      </a:solidFill>
+                      <a:prstDash val="solid"/>
+                      <a:round/>
+                      <a:headEnd type="none" w="med" len="med"/>
+                      <a:tailEnd type="none" w="med" len="med"/>
+                    </a:lnB>
+                    <a:solidFill>
+                      <a:srgbClr val="1F285A"/>
+                    </a:solidFill>
+                  </a:tcPr>
+                </a:tc>
+                <a:tc>
+                  <a:txBody>
+                    <a:bodyPr/>
+                    <a:lstStyle/>
+                    <a:p>
+                      <a:pPr algn="ctr">
+                        <a:buNone/>
+                      </a:pPr>
+                      <a:r>
+                        <a:rPr lang="ja-JP" altLang="en-US" sz="1400" b="1" dirty="0">
+                          <a:solidFill>
+                            <a:srgbClr val="FFFFFF"/>
+                          </a:solidFill>
+                          <a:latin typeface="メイリオ" panose="020B0604030504040204" pitchFamily="50" charset="-128"/>
+                          <a:ea typeface="メイリオ" panose="020B0604030504040204" pitchFamily="50" charset="-128"/>
+                        </a:rPr>
+                        <a:t>プラン③</a:t>
+                      </a:r>
+                      <a:endParaRPr lang="ja-JP" altLang="en-US" sz="1300" dirty="0"/>
+                    </a:p>
+                    <a:p>
+                      <a:pPr algn="ctr">
+                        <a:buNone/>
+                      </a:pPr>
+                      <a:r>
+                        <a:rPr lang="ja-JP" altLang="en-US" sz="1400" b="1" dirty="0">
+                          <a:solidFill>
+                            <a:srgbClr val="FFFFFF"/>
+                          </a:solidFill>
+                          <a:latin typeface="メイリオ" panose="020B0604030504040204" pitchFamily="50" charset="-128"/>
+                          <a:ea typeface="メイリオ" panose="020B0604030504040204" pitchFamily="50" charset="-128"/>
+                        </a:rPr>
+                        <a:t>運用代行フルサポート</a:t>
+                      </a:r>
+                      <a:endParaRPr lang="ja-JP" altLang="en-US" sz="1300" dirty="0"/>
+                    </a:p>
+                  </a:txBody>
+                  <a:tcPr marL="73152" marR="73152" marT="27432" marB="27432" anchor="ctr">
+                    <a:lnL w="9525" cap="flat" cmpd="sng" algn="ctr">
+                      <a:solidFill>
+                        <a:srgbClr val="FFFFFF"/>
+                      </a:solidFill>
+                      <a:prstDash val="solid"/>
+                      <a:round/>
+                      <a:headEnd type="none" w="med" len="med"/>
+                      <a:tailEnd type="none" w="med" len="med"/>
+                    </a:lnL>
+                    <a:lnR w="9525" cap="flat" cmpd="sng" algn="ctr">
+                      <a:solidFill>
+                        <a:srgbClr val="FFFFFF"/>
+                      </a:solidFill>
+                      <a:prstDash val="solid"/>
+                      <a:round/>
+                      <a:headEnd type="none" w="med" len="med"/>
+                      <a:tailEnd type="none" w="med" len="med"/>
+                    </a:lnR>
+                    <a:lnT w="9525" cap="flat" cmpd="sng" algn="ctr">
+                      <a:solidFill>
+                        <a:srgbClr val="FFFFFF"/>
+                      </a:solidFill>
+                      <a:prstDash val="solid"/>
+                      <a:round/>
+                      <a:headEnd type="none" w="med" len="med"/>
+                      <a:tailEnd type="none" w="med" len="med"/>
+                    </a:lnT>
+                    <a:lnB w="9525" cap="flat" cmpd="sng" algn="ctr">
+                      <a:solidFill>
+                        <a:srgbClr val="FFFFFF"/>
+                      </a:solidFill>
+                      <a:prstDash val="solid"/>
+                      <a:round/>
+                      <a:headEnd type="none" w="med" len="med"/>
+                      <a:tailEnd type="none" w="med" len="med"/>
+                    </a:lnB>
+                    <a:solidFill>
+                      <a:srgbClr val="1F285A"/>
+                    </a:solidFill>
+                  </a:tcPr>
+                </a:tc>
+                <a:extLst>
+                  <a:ext uri="{0D108BD9-81ED-4DB2-BD59-A6C34878D82A}">
+                    <a16:rowId xmlns:a16="http://schemas.microsoft.com/office/drawing/2014/main" val="10000"/>
+                  </a:ext>
+                </a:extLst>
+              </a:tr>
+              <a:tr h="640080">
+                <a:tc>
+                  <a:txBody>
+                    <a:bodyPr/>
+                    <a:lstStyle/>
+                    <a:p>
+                      <a:pPr algn="ctr">
+                        <a:buNone/>
+                      </a:pPr>
+                      <a:r>
+                        <a:rPr lang="ja-JP" altLang="en-US" sz="1400" b="1" dirty="0">
+                          <a:solidFill>
+                            <a:srgbClr val="1F285A"/>
+                          </a:solidFill>
+                          <a:latin typeface="メイリオ" panose="020B0604030504040204" pitchFamily="50" charset="-128"/>
+                          <a:ea typeface="メイリオ" panose="020B0604030504040204" pitchFamily="50" charset="-128"/>
+                        </a:rPr>
+                        <a:t>初期費用</a:t>
+                      </a:r>
+                      <a:endParaRPr lang="ja-JP" altLang="en-US" sz="1400" dirty="0"/>
+                    </a:p>
+                  </a:txBody>
+                  <a:tcPr marL="73152" marR="73152" marT="27432" marB="27432" anchor="ctr">
+                    <a:lnL w="9525" cap="flat" cmpd="sng" algn="ctr">
+                      <a:solidFill>
+                        <a:srgbClr val="BFC8DC"/>
+                      </a:solidFill>
+                      <a:prstDash val="solid"/>
+                      <a:round/>
+                      <a:headEnd type="none" w="med" len="med"/>
+                      <a:tailEnd type="none" w="med" len="med"/>
+                    </a:lnL>
+                    <a:lnR w="9525" cap="flat" cmpd="sng" algn="ctr">
+                      <a:solidFill>
+                        <a:srgbClr val="BFC8DC"/>
+                      </a:solidFill>
+                      <a:prstDash val="solid"/>
+                      <a:round/>
+                      <a:headEnd type="none" w="med" len="med"/>
+                      <a:tailEnd type="none" w="med" len="med"/>
+                    </a:lnR>
+                    <a:lnT w="9525" cap="flat" cmpd="sng" algn="ctr">
+                      <a:solidFill>
+                        <a:srgbClr val="FFFFFF"/>
+                      </a:solidFill>
+                      <a:prstDash val="solid"/>
+                      <a:round/>
+                      <a:headEnd type="none" w="med" len="med"/>
+                      <a:tailEnd type="none" w="med" len="med"/>
+                    </a:lnT>
+                    <a:lnB w="9525" cap="flat" cmpd="sng" algn="ctr">
+                      <a:solidFill>
+                        <a:srgbClr val="BFC8DC"/>
+                      </a:solidFill>
+                      <a:prstDash val="solid"/>
+                      <a:round/>
+                      <a:headEnd type="none" w="med" len="med"/>
+                      <a:tailEnd type="none" w="med" len="med"/>
+                    </a:lnB>
+                    <a:solidFill>
+                      <a:srgbClr val="E8ECF6"/>
+                    </a:solidFill>
+                  </a:tcPr>
+                </a:tc>
+                <a:tc>
+                  <a:txBody>
+                    <a:bodyPr/>
+                    <a:lstStyle/>
+                    <a:p>
+                      <a:pPr algn="ctr">
+                        <a:buNone/>
+                      </a:pPr>
+                      <a:r>
+                        <a:rPr lang="ja-JP" altLang="en-US" sz="1500" b="0" dirty="0">
+                          <a:solidFill>
+                            <a:srgbClr val="333333"/>
+                          </a:solidFill>
+                          <a:latin typeface="メイリオ" panose="020B0604030504040204" pitchFamily="50" charset="-128"/>
+                          <a:ea typeface="メイリオ" panose="020B0604030504040204" pitchFamily="50" charset="-128"/>
+                        </a:rPr>
+                        <a:t>295,000円〜</a:t>
+                      </a:r>
+                      <a:endParaRPr lang="ja-JP" altLang="en-US" sz="1500" dirty="0"/>
+                    </a:p>
+                  </a:txBody>
+                  <a:tcPr marL="73152" marR="73152" marT="27432" marB="27432" anchor="ctr">
+                    <a:lnL w="9525" cap="flat" cmpd="sng" algn="ctr">
+                      <a:solidFill>
+                        <a:srgbClr val="BFC8DC"/>
+                      </a:solidFill>
+                      <a:prstDash val="solid"/>
+                      <a:round/>
+                      <a:headEnd type="none" w="med" len="med"/>
+                      <a:tailEnd type="none" w="med" len="med"/>
+                    </a:lnL>
+                    <a:lnR w="9525" cap="flat" cmpd="sng" algn="ctr">
+                      <a:solidFill>
+                        <a:srgbClr val="BFC8DC"/>
+                      </a:solidFill>
+                      <a:prstDash val="solid"/>
+                      <a:round/>
+                      <a:headEnd type="none" w="med" len="med"/>
+                      <a:tailEnd type="none" w="med" len="med"/>
+                    </a:lnR>
+                    <a:lnT w="9525" cap="flat" cmpd="sng" algn="ctr">
+                      <a:solidFill>
+                        <a:srgbClr val="FFFFFF"/>
+                      </a:solidFill>
+                      <a:prstDash val="solid"/>
+                      <a:round/>
+                      <a:headEnd type="none" w="med" len="med"/>
+                      <a:tailEnd type="none" w="med" len="med"/>
+                    </a:lnT>
+                    <a:lnB w="9525" cap="flat" cmpd="sng" algn="ctr">
+                      <a:solidFill>
+                        <a:srgbClr val="BFC8DC"/>
+                      </a:solidFill>
+                      <a:prstDash val="solid"/>
+                      <a:round/>
+                      <a:headEnd type="none" w="med" len="med"/>
+                      <a:tailEnd type="none" w="med" len="med"/>
+                    </a:lnB>
+                    <a:solidFill>
+                      <a:srgbClr val="FFFFFF"/>
+                    </a:solidFill>
+                  </a:tcPr>
+                </a:tc>
+                <a:tc>
+                  <a:txBody>
+                    <a:bodyPr/>
+                    <a:lstStyle/>
+                    <a:p>
+                      <a:pPr algn="ctr">
+                        <a:buNone/>
+                      </a:pPr>
+                      <a:r>
+                        <a:rPr lang="ja-JP" altLang="en-US" sz="1500" b="0" dirty="0">
+                          <a:solidFill>
+                            <a:srgbClr val="333333"/>
+                          </a:solidFill>
+                          <a:latin typeface="メイリオ" panose="020B0604030504040204" pitchFamily="50" charset="-128"/>
+                          <a:ea typeface="メイリオ" panose="020B0604030504040204" pitchFamily="50" charset="-128"/>
+                        </a:rPr>
+                        <a:t>295,000円〜</a:t>
+                      </a:r>
+                      <a:endParaRPr lang="ja-JP" altLang="en-US" sz="1500" dirty="0"/>
+                    </a:p>
+                  </a:txBody>
+                  <a:tcPr marL="73152" marR="73152" marT="27432" marB="27432" anchor="ctr">
+                    <a:lnL w="9525" cap="flat" cmpd="sng" algn="ctr">
+                      <a:solidFill>
+                        <a:srgbClr val="BFC8DC"/>
+                      </a:solidFill>
+                      <a:prstDash val="solid"/>
+                      <a:round/>
+                      <a:headEnd type="none" w="med" len="med"/>
+                      <a:tailEnd type="none" w="med" len="med"/>
+                    </a:lnL>
+                    <a:lnR w="9525" cap="flat" cmpd="sng" algn="ctr">
+                      <a:solidFill>
+                        <a:srgbClr val="BFC8DC"/>
+                      </a:solidFill>
+                      <a:prstDash val="solid"/>
+                      <a:round/>
+                      <a:headEnd type="none" w="med" len="med"/>
+                      <a:tailEnd type="none" w="med" len="med"/>
+                    </a:lnR>
+                    <a:lnT w="9525" cap="flat" cmpd="sng" algn="ctr">
+                      <a:solidFill>
+                        <a:srgbClr val="FFFFFF"/>
+                      </a:solidFill>
+                      <a:prstDash val="solid"/>
+                      <a:round/>
+                      <a:headEnd type="none" w="med" len="med"/>
+                      <a:tailEnd type="none" w="med" len="med"/>
+                    </a:lnT>
+                    <a:lnB w="9525" cap="flat" cmpd="sng" algn="ctr">
+                      <a:solidFill>
+                        <a:srgbClr val="BFC8DC"/>
+                      </a:solidFill>
+                      <a:prstDash val="solid"/>
+                      <a:round/>
+                      <a:headEnd type="none" w="med" len="med"/>
+                      <a:tailEnd type="none" w="med" len="med"/>
+                    </a:lnB>
+                    <a:solidFill>
+                      <a:srgbClr val="FFFFFF"/>
+                    </a:solidFill>
+                  </a:tcPr>
+                </a:tc>
+                <a:extLst>
+                  <a:ext uri="{0D108BD9-81ED-4DB2-BD59-A6C34878D82A}">
+                    <a16:rowId xmlns:a16="http://schemas.microsoft.com/office/drawing/2014/main" val="10001"/>
+                  </a:ext>
+                </a:extLst>
+              </a:tr>
+              <a:tr h="640080">
+                <a:tc>
+                  <a:txBody>
+                    <a:bodyPr/>
+                    <a:lstStyle/>
+                    <a:p>
+                      <a:pPr algn="ctr">
+                        <a:buNone/>
+                      </a:pPr>
+                      <a:r>
+                        <a:rPr lang="ja-JP" altLang="en-US" sz="1400" b="1" dirty="0">
+                          <a:solidFill>
+                            <a:srgbClr val="1F285A"/>
+                          </a:solidFill>
+                          <a:latin typeface="メイリオ" panose="020B0604030504040204" pitchFamily="50" charset="-128"/>
+                          <a:ea typeface="メイリオ" panose="020B0604030504040204" pitchFamily="50" charset="-128"/>
+                        </a:rPr>
+                        <a:t>成果報酬</a:t>
+                      </a:r>
+                      <a:endParaRPr lang="ja-JP" altLang="en-US" sz="1400" dirty="0"/>
+                    </a:p>
+                    <a:p>
+                      <a:pPr algn="ctr">
+                        <a:buNone/>
+                      </a:pPr>
+                      <a:r>
+                        <a:rPr lang="ja-JP" altLang="en-US" sz="1400" b="1" dirty="0">
+                          <a:solidFill>
+                            <a:srgbClr val="1F285A"/>
+                          </a:solidFill>
+                          <a:latin typeface="メイリオ" panose="020B0604030504040204" pitchFamily="50" charset="-128"/>
+                          <a:ea typeface="メイリオ" panose="020B0604030504040204" pitchFamily="50" charset="-128"/>
+                        </a:rPr>
+                        <a:t>（応募1件）</a:t>
+                      </a:r>
+                      <a:endParaRPr lang="ja-JP" altLang="en-US" sz="1400" dirty="0"/>
+                    </a:p>
+                  </a:txBody>
+                  <a:tcPr marL="73152" marR="73152" marT="27432" marB="27432" anchor="ctr">
+                    <a:lnL w="9525" cap="flat" cmpd="sng" algn="ctr">
+                      <a:solidFill>
+                        <a:srgbClr val="BFC8DC"/>
+                      </a:solidFill>
+                      <a:prstDash val="solid"/>
+                      <a:round/>
+                      <a:headEnd type="none" w="med" len="med"/>
+                      <a:tailEnd type="none" w="med" len="med"/>
+                    </a:lnL>
+                    <a:lnR w="9525" cap="flat" cmpd="sng" algn="ctr">
+                      <a:solidFill>
+                        <a:srgbClr val="BFC8DC"/>
+                      </a:solidFill>
+                      <a:prstDash val="solid"/>
+                      <a:round/>
+                      <a:headEnd type="none" w="med" len="med"/>
+                      <a:tailEnd type="none" w="med" len="med"/>
+                    </a:lnR>
+                    <a:lnT w="9525" cap="flat" cmpd="sng" algn="ctr">
+                      <a:solidFill>
+                        <a:srgbClr val="BFC8DC"/>
+                      </a:solidFill>
+                      <a:prstDash val="solid"/>
+                      <a:round/>
+                      <a:headEnd type="none" w="med" len="med"/>
+                      <a:tailEnd type="none" w="med" len="med"/>
+                    </a:lnT>
+                    <a:lnB w="9525" cap="flat" cmpd="sng" algn="ctr">
+                      <a:solidFill>
+                        <a:srgbClr val="BFC8DC"/>
+                      </a:solidFill>
+                      <a:prstDash val="solid"/>
+                      <a:round/>
+                      <a:headEnd type="none" w="med" len="med"/>
+                      <a:tailEnd type="none" w="med" len="med"/>
+                    </a:lnB>
+                    <a:solidFill>
+                      <a:srgbClr val="E8ECF6"/>
+                    </a:solidFill>
+                  </a:tcPr>
+                </a:tc>
+                <a:tc>
+                  <a:txBody>
+                    <a:bodyPr/>
+                    <a:lstStyle/>
+                    <a:p>
+                      <a:pPr algn="ctr">
+                        <a:buNone/>
+                      </a:pPr>
+                      <a:r>
+                        <a:rPr lang="ja-JP" altLang="en-US" sz="1500" b="0" dirty="0">
+                          <a:solidFill>
+                            <a:srgbClr val="333333"/>
+                          </a:solidFill>
+                          <a:latin typeface="メイリオ" panose="020B0604030504040204" pitchFamily="50" charset="-128"/>
+                          <a:ea typeface="メイリオ" panose="020B0604030504040204" pitchFamily="50" charset="-128"/>
+                        </a:rPr>
+                        <a:t>6,000円</a:t>
+                      </a:r>
+                      <a:endParaRPr lang="ja-JP" altLang="en-US" sz="1500" dirty="0"/>
+                    </a:p>
+                  </a:txBody>
+                  <a:tcPr marL="73152" marR="73152" marT="27432" marB="27432" anchor="ctr">
+                    <a:lnL w="9525" cap="flat" cmpd="sng" algn="ctr">
+                      <a:solidFill>
+                        <a:srgbClr val="BFC8DC"/>
+                      </a:solidFill>
+                      <a:prstDash val="solid"/>
+                      <a:round/>
+                      <a:headEnd type="none" w="med" len="med"/>
+                      <a:tailEnd type="none" w="med" len="med"/>
+                    </a:lnL>
+                    <a:lnR w="9525" cap="flat" cmpd="sng" algn="ctr">
+                      <a:solidFill>
+                        <a:srgbClr val="BFC8DC"/>
+                      </a:solidFill>
+                      <a:prstDash val="solid"/>
+                      <a:round/>
+                      <a:headEnd type="none" w="med" len="med"/>
+                      <a:tailEnd type="none" w="med" len="med"/>
+                    </a:lnR>
+                    <a:lnT w="9525" cap="flat" cmpd="sng" algn="ctr">
+                      <a:solidFill>
+                        <a:srgbClr val="BFC8DC"/>
+                      </a:solidFill>
+                      <a:prstDash val="solid"/>
+                      <a:round/>
+                      <a:headEnd type="none" w="med" len="med"/>
+                      <a:tailEnd type="none" w="med" len="med"/>
+                    </a:lnT>
+                    <a:lnB w="9525" cap="flat" cmpd="sng" algn="ctr">
+                      <a:solidFill>
+                        <a:srgbClr val="BFC8DC"/>
+                      </a:solidFill>
+                      <a:prstDash val="solid"/>
+                      <a:round/>
+                      <a:headEnd type="none" w="med" len="med"/>
+                      <a:tailEnd type="none" w="med" len="med"/>
+                    </a:lnB>
+                    <a:solidFill>
+                      <a:srgbClr val="FFFFFF"/>
+                    </a:solidFill>
+                  </a:tcPr>
+                </a:tc>
+                <a:tc>
+                  <a:txBody>
+                    <a:bodyPr/>
+                    <a:lstStyle/>
+                    <a:p>
+                      <a:pPr algn="ctr">
+                        <a:buNone/>
+                      </a:pPr>
+                      <a:r>
+                        <a:rPr lang="ja-JP" altLang="en-US" sz="1500" b="0" dirty="0">
+                          <a:solidFill>
+                            <a:srgbClr val="333333"/>
+                          </a:solidFill>
+                          <a:latin typeface="メイリオ" panose="020B0604030504040204" pitchFamily="50" charset="-128"/>
+                          <a:ea typeface="メイリオ" panose="020B0604030504040204" pitchFamily="50" charset="-128"/>
+                        </a:rPr>
+                        <a:t>10,000円</a:t>
+                      </a:r>
+                      <a:endParaRPr lang="ja-JP" altLang="en-US" sz="1500" dirty="0"/>
+                    </a:p>
+                  </a:txBody>
+                  <a:tcPr marL="73152" marR="73152" marT="27432" marB="27432" anchor="ctr">
+                    <a:lnL w="9525" cap="flat" cmpd="sng" algn="ctr">
+                      <a:solidFill>
+                        <a:srgbClr val="BFC8DC"/>
+                      </a:solidFill>
+                      <a:prstDash val="solid"/>
+                      <a:round/>
+                      <a:headEnd type="none" w="med" len="med"/>
+                      <a:tailEnd type="none" w="med" len="med"/>
+                    </a:lnL>
+                    <a:lnR w="9525" cap="flat" cmpd="sng" algn="ctr">
+                      <a:solidFill>
+                        <a:srgbClr val="BFC8DC"/>
+                      </a:solidFill>
+                      <a:prstDash val="solid"/>
+                      <a:round/>
+                      <a:headEnd type="none" w="med" len="med"/>
+                      <a:tailEnd type="none" w="med" len="med"/>
+                    </a:lnR>
+                    <a:lnT w="9525" cap="flat" cmpd="sng" algn="ctr">
+                      <a:solidFill>
+                        <a:srgbClr val="BFC8DC"/>
+                      </a:solidFill>
+                      <a:prstDash val="solid"/>
+                      <a:round/>
+                      <a:headEnd type="none" w="med" len="med"/>
+                      <a:tailEnd type="none" w="med" len="med"/>
+                    </a:lnT>
+                    <a:lnB w="9525" cap="flat" cmpd="sng" algn="ctr">
+                      <a:solidFill>
+                        <a:srgbClr val="BFC8DC"/>
+                      </a:solidFill>
+                      <a:prstDash val="solid"/>
+                      <a:round/>
+                      <a:headEnd type="none" w="med" len="med"/>
+                      <a:tailEnd type="none" w="med" len="med"/>
+                    </a:lnB>
+                    <a:solidFill>
+                      <a:srgbClr val="FFFFFF"/>
+                    </a:solidFill>
+                  </a:tcPr>
+                </a:tc>
+                <a:extLst>
+                  <a:ext uri="{0D108BD9-81ED-4DB2-BD59-A6C34878D82A}">
+                    <a16:rowId xmlns:a16="http://schemas.microsoft.com/office/drawing/2014/main" val="10002"/>
+                  </a:ext>
+                </a:extLst>
+              </a:tr>
+              <a:tr h="777240">
+                <a:tc>
+                  <a:txBody>
+                    <a:bodyPr/>
+                    <a:lstStyle/>
+                    <a:p>
+                      <a:pPr algn="ctr">
+                        <a:buNone/>
+                      </a:pPr>
+                      <a:r>
+                        <a:rPr lang="ja-JP" altLang="en-US" sz="1400" b="1" dirty="0">
+                          <a:solidFill>
+                            <a:srgbClr val="1F285A"/>
+                          </a:solidFill>
+                          <a:latin typeface="メイリオ" panose="020B0604030504040204" pitchFamily="50" charset="-128"/>
+                          <a:ea typeface="メイリオ" panose="020B0604030504040204" pitchFamily="50" charset="-128"/>
+                        </a:rPr>
+                        <a:t>月額ツール・LINE関連費</a:t>
+                      </a:r>
+                      <a:endParaRPr lang="ja-JP" altLang="en-US" sz="1400" dirty="0"/>
+                    </a:p>
+                  </a:txBody>
+                  <a:tcPr marL="27432" marR="27432" marT="27432" marB="27432" anchor="ctr">
+                    <a:lnL w="9525" cap="flat" cmpd="sng" algn="ctr">
+                      <a:solidFill>
+                        <a:srgbClr val="BFC8DC"/>
+                      </a:solidFill>
+                      <a:prstDash val="solid"/>
+                      <a:round/>
+                      <a:headEnd type="none" w="med" len="med"/>
+                      <a:tailEnd type="none" w="med" len="med"/>
+                    </a:lnL>
+                    <a:lnR w="9525" cap="flat" cmpd="sng" algn="ctr">
+                      <a:solidFill>
+                        <a:srgbClr val="BFC8DC"/>
+                      </a:solidFill>
+                      <a:prstDash val="solid"/>
+                      <a:round/>
+                      <a:headEnd type="none" w="med" len="med"/>
+                      <a:tailEnd type="none" w="med" len="med"/>
+                    </a:lnR>
+                    <a:lnT w="9525" cap="flat" cmpd="sng" algn="ctr">
+                      <a:solidFill>
+                        <a:srgbClr val="BFC8DC"/>
+                      </a:solidFill>
+                      <a:prstDash val="solid"/>
+                      <a:round/>
+                      <a:headEnd type="none" w="med" len="med"/>
+                      <a:tailEnd type="none" w="med" len="med"/>
+                    </a:lnT>
+                    <a:lnB w="9525" cap="flat" cmpd="sng" algn="ctr">
+                      <a:solidFill>
+                        <a:srgbClr val="BFC8DC"/>
+                      </a:solidFill>
+                      <a:prstDash val="solid"/>
+                      <a:round/>
+                      <a:headEnd type="none" w="med" len="med"/>
+                      <a:tailEnd type="none" w="med" len="med"/>
+                    </a:lnB>
+                    <a:solidFill>
+                      <a:srgbClr val="E8ECF6"/>
+                    </a:solidFill>
+                  </a:tcPr>
+                </a:tc>
+                <a:tc>
+                  <a:txBody>
+                    <a:bodyPr/>
+                    <a:lstStyle/>
+                    <a:p>
+                      <a:pPr algn="ctr">
+                        <a:buNone/>
+                      </a:pPr>
+                      <a:r>
+                        <a:rPr lang="ja-JP" altLang="en-US" sz="1500" b="0" dirty="0">
+                          <a:solidFill>
+                            <a:srgbClr val="333333"/>
+                          </a:solidFill>
+                          <a:latin typeface="メイリオ" panose="020B0604030504040204" pitchFamily="50" charset="-128"/>
+                          <a:ea typeface="メイリオ" panose="020B0604030504040204" pitchFamily="50" charset="-128"/>
+                        </a:rPr>
+                        <a:t>65,000円〜</a:t>
+                      </a:r>
+                      <a:endParaRPr lang="ja-JP" altLang="en-US" sz="1500" dirty="0"/>
+                    </a:p>
+                  </a:txBody>
+                  <a:tcPr marL="73152" marR="73152" marT="27432" marB="27432" anchor="ctr">
+                    <a:lnL w="9525" cap="flat" cmpd="sng" algn="ctr">
+                      <a:solidFill>
+                        <a:srgbClr val="BFC8DC"/>
+                      </a:solidFill>
+                      <a:prstDash val="solid"/>
+                      <a:round/>
+                      <a:headEnd type="none" w="med" len="med"/>
+                      <a:tailEnd type="none" w="med" len="med"/>
+                    </a:lnL>
+                    <a:lnR w="9525" cap="flat" cmpd="sng" algn="ctr">
+                      <a:solidFill>
+                        <a:srgbClr val="BFC8DC"/>
+                      </a:solidFill>
+                      <a:prstDash val="solid"/>
+                      <a:round/>
+                      <a:headEnd type="none" w="med" len="med"/>
+                      <a:tailEnd type="none" w="med" len="med"/>
+                    </a:lnR>
+                    <a:lnT w="9525" cap="flat" cmpd="sng" algn="ctr">
+                      <a:solidFill>
+                        <a:srgbClr val="BFC8DC"/>
+                      </a:solidFill>
+                      <a:prstDash val="solid"/>
+                      <a:round/>
+                      <a:headEnd type="none" w="med" len="med"/>
+                      <a:tailEnd type="none" w="med" len="med"/>
+                    </a:lnT>
+                    <a:lnB w="9525" cap="flat" cmpd="sng" algn="ctr">
+                      <a:solidFill>
+                        <a:srgbClr val="BFC8DC"/>
+                      </a:solidFill>
+                      <a:prstDash val="solid"/>
+                      <a:round/>
+                      <a:headEnd type="none" w="med" len="med"/>
+                      <a:tailEnd type="none" w="med" len="med"/>
+                    </a:lnB>
+                    <a:solidFill>
+                      <a:srgbClr val="FFFFFF"/>
+                    </a:solidFill>
+                  </a:tcPr>
+                </a:tc>
+                <a:tc>
+                  <a:txBody>
+                    <a:bodyPr/>
+                    <a:lstStyle/>
+                    <a:p>
+                      <a:pPr algn="ctr">
+                        <a:buNone/>
+                      </a:pPr>
+                      <a:r>
+                        <a:rPr lang="ja-JP" altLang="en-US" sz="1500" b="0" dirty="0">
+                          <a:solidFill>
+                            <a:srgbClr val="333333"/>
+                          </a:solidFill>
+                          <a:latin typeface="メイリオ" panose="020B0604030504040204" pitchFamily="50" charset="-128"/>
+                          <a:ea typeface="メイリオ" panose="020B0604030504040204" pitchFamily="50" charset="-128"/>
+                        </a:rPr>
+                        <a:t>65,000円〜</a:t>
+                      </a:r>
+                      <a:endParaRPr lang="ja-JP" altLang="en-US" sz="1500" dirty="0"/>
+                    </a:p>
+                  </a:txBody>
+                  <a:tcPr marL="73152" marR="73152" marT="27432" marB="27432" anchor="ctr">
+                    <a:lnL w="9525" cap="flat" cmpd="sng" algn="ctr">
+                      <a:solidFill>
+                        <a:srgbClr val="BFC8DC"/>
+                      </a:solidFill>
+                      <a:prstDash val="solid"/>
+                      <a:round/>
+                      <a:headEnd type="none" w="med" len="med"/>
+                      <a:tailEnd type="none" w="med" len="med"/>
+                    </a:lnL>
+                    <a:lnR w="9525" cap="flat" cmpd="sng" algn="ctr">
+                      <a:solidFill>
+                        <a:srgbClr val="BFC8DC"/>
+                      </a:solidFill>
+                      <a:prstDash val="solid"/>
+                      <a:round/>
+                      <a:headEnd type="none" w="med" len="med"/>
+                      <a:tailEnd type="none" w="med" len="med"/>
+                    </a:lnR>
+                    <a:lnT w="9525" cap="flat" cmpd="sng" algn="ctr">
+                      <a:solidFill>
+                        <a:srgbClr val="BFC8DC"/>
+                      </a:solidFill>
+                      <a:prstDash val="solid"/>
+                      <a:round/>
+                      <a:headEnd type="none" w="med" len="med"/>
+                      <a:tailEnd type="none" w="med" len="med"/>
+                    </a:lnT>
+                    <a:lnB w="9525" cap="flat" cmpd="sng" algn="ctr">
+                      <a:solidFill>
+                        <a:srgbClr val="BFC8DC"/>
+                      </a:solidFill>
+                      <a:prstDash val="solid"/>
+                      <a:round/>
+                      <a:headEnd type="none" w="med" len="med"/>
+                      <a:tailEnd type="none" w="med" len="med"/>
+                    </a:lnB>
+                    <a:solidFill>
+                      <a:srgbClr val="FFFFFF"/>
+                    </a:solidFill>
+                  </a:tcPr>
+                </a:tc>
+                <a:extLst>
+                  <a:ext uri="{0D108BD9-81ED-4DB2-BD59-A6C34878D82A}">
+                    <a16:rowId xmlns:a16="http://schemas.microsoft.com/office/drawing/2014/main" val="10003"/>
+                  </a:ext>
+                </a:extLst>
+              </a:tr>
+              <a:tr h="914400">
+                <a:tc>
+                  <a:txBody>
+                    <a:bodyPr/>
+                    <a:lstStyle/>
+                    <a:p>
+                      <a:pPr algn="ctr">
+                        <a:buNone/>
+                      </a:pPr>
+                      <a:r>
+                        <a:rPr lang="ja-JP" altLang="en-US" sz="1400" b="1" dirty="0">
+                          <a:solidFill>
+                            <a:srgbClr val="FFFFFF"/>
+                          </a:solidFill>
+                          <a:latin typeface="メイリオ" panose="020B0604030504040204" pitchFamily="50" charset="-128"/>
+                          <a:ea typeface="メイリオ" panose="020B0604030504040204" pitchFamily="50" charset="-128"/>
+                        </a:rPr>
+                        <a:t>月額費用</a:t>
+                      </a:r>
+                      <a:endParaRPr lang="ja-JP" altLang="en-US" sz="1400" dirty="0"/>
+                    </a:p>
+                  </a:txBody>
+                  <a:tcPr marL="73152" marR="73152" marT="27432" marB="27432" anchor="ctr">
+                    <a:lnL w="9525" cap="flat" cmpd="sng" algn="ctr">
+                      <a:solidFill>
+                        <a:srgbClr val="BFC8DC"/>
+                      </a:solidFill>
+                      <a:prstDash val="solid"/>
+                      <a:round/>
+                      <a:headEnd type="none" w="med" len="med"/>
+                      <a:tailEnd type="none" w="med" len="med"/>
+                    </a:lnL>
+                    <a:lnR w="9525" cap="flat" cmpd="sng" algn="ctr">
+                      <a:solidFill>
+                        <a:srgbClr val="BFC8DC"/>
+                      </a:solidFill>
+                      <a:prstDash val="solid"/>
+                      <a:round/>
+                      <a:headEnd type="none" w="med" len="med"/>
+                      <a:tailEnd type="none" w="med" len="med"/>
+                    </a:lnR>
+                    <a:lnT w="9525" cap="flat" cmpd="sng" algn="ctr">
+                      <a:solidFill>
+                        <a:srgbClr val="BFC8DC"/>
+                      </a:solidFill>
+                      <a:prstDash val="solid"/>
+                      <a:round/>
+                      <a:headEnd type="none" w="med" len="med"/>
+                      <a:tailEnd type="none" w="med" len="med"/>
+                    </a:lnT>
+                    <a:lnB w="9525" cap="flat" cmpd="sng" algn="ctr">
+                      <a:solidFill>
+                        <a:srgbClr val="BFC8DC"/>
+                      </a:solidFill>
+                      <a:prstDash val="solid"/>
+                      <a:round/>
+                      <a:headEnd type="none" w="med" len="med"/>
+                      <a:tailEnd type="none" w="med" len="med"/>
+                    </a:lnB>
+                    <a:solidFill>
+                      <a:srgbClr val="1F285A"/>
+                    </a:solidFill>
+                  </a:tcPr>
+                </a:tc>
+                <a:tc>
+                  <a:txBody>
+                    <a:bodyPr/>
+                    <a:lstStyle/>
+                    <a:p>
+                      <a:pPr algn="ctr">
+                        <a:buNone/>
+                      </a:pPr>
+                      <a:r>
+                        <a:rPr lang="ja-JP" altLang="en-US" sz="2000" b="1" dirty="0">
+                          <a:solidFill>
+                            <a:srgbClr val="1F285A"/>
+                          </a:solidFill>
+                          <a:latin typeface="メイリオ" panose="020B0604030504040204" pitchFamily="50" charset="-128"/>
+                          <a:ea typeface="メイリオ" panose="020B0604030504040204" pitchFamily="50" charset="-128"/>
+                        </a:rPr>
+                        <a:t>65,000円〜</a:t>
+                      </a:r>
+                      <a:endParaRPr lang="ja-JP" altLang="en-US" sz="2000" dirty="0"/>
+                    </a:p>
+                    <a:p>
+                      <a:pPr algn="ctr">
+                        <a:buNone/>
+                      </a:pPr>
+                      <a:r>
+                        <a:rPr lang="ja-JP" altLang="en-US" sz="2000" b="1" dirty="0">
+                          <a:solidFill>
+                            <a:srgbClr val="1F285A"/>
+                          </a:solidFill>
+                          <a:latin typeface="メイリオ" panose="020B0604030504040204" pitchFamily="50" charset="-128"/>
+                          <a:ea typeface="メイリオ" panose="020B0604030504040204" pitchFamily="50" charset="-128"/>
+                        </a:rPr>
+                        <a:t>＋成果報酬</a:t>
+                      </a:r>
+                      <a:endParaRPr lang="ja-JP" altLang="en-US" sz="2000" dirty="0"/>
+                    </a:p>
+                  </a:txBody>
+                  <a:tcPr marL="73152" marR="73152" marT="27432" marB="27432" anchor="ctr">
+                    <a:lnL w="9525" cap="flat" cmpd="sng" algn="ctr">
+                      <a:solidFill>
+                        <a:srgbClr val="BFC8DC"/>
+                      </a:solidFill>
+                      <a:prstDash val="solid"/>
+                      <a:round/>
+                      <a:headEnd type="none" w="med" len="med"/>
+                      <a:tailEnd type="none" w="med" len="med"/>
+                    </a:lnL>
+                    <a:lnR w="9525" cap="flat" cmpd="sng" algn="ctr">
+                      <a:solidFill>
+                        <a:srgbClr val="BFC8DC"/>
+                      </a:solidFill>
+                      <a:prstDash val="solid"/>
+                      <a:round/>
+                      <a:headEnd type="none" w="med" len="med"/>
+                      <a:tailEnd type="none" w="med" len="med"/>
+                    </a:lnR>
+                    <a:lnT w="9525" cap="flat" cmpd="sng" algn="ctr">
+                      <a:solidFill>
+                        <a:srgbClr val="BFC8DC"/>
+                      </a:solidFill>
+                      <a:prstDash val="solid"/>
+                      <a:round/>
+                      <a:headEnd type="none" w="med" len="med"/>
+                      <a:tailEnd type="none" w="med" len="med"/>
+                    </a:lnT>
+                    <a:lnB w="9525" cap="flat" cmpd="sng" algn="ctr">
+                      <a:solidFill>
+                        <a:srgbClr val="BFC8DC"/>
+                      </a:solidFill>
+                      <a:prstDash val="solid"/>
+                      <a:round/>
+                      <a:headEnd type="none" w="med" len="med"/>
+                      <a:tailEnd type="none" w="med" len="med"/>
+                    </a:lnB>
+                    <a:solidFill>
+                      <a:srgbClr val="E8ECF6"/>
+                    </a:solidFill>
+                  </a:tcPr>
+                </a:tc>
+                <a:tc>
+                  <a:txBody>
+                    <a:bodyPr/>
+                    <a:lstStyle/>
+                    <a:p>
+                      <a:pPr algn="ctr">
+                        <a:buNone/>
+                      </a:pPr>
+                      <a:r>
+                        <a:rPr lang="ja-JP" altLang="en-US" sz="2000" b="1" dirty="0">
+                          <a:solidFill>
+                            <a:srgbClr val="1F285A"/>
+                          </a:solidFill>
+                          <a:latin typeface="メイリオ" panose="020B0604030504040204" pitchFamily="50" charset="-128"/>
+                          <a:ea typeface="メイリオ" panose="020B0604030504040204" pitchFamily="50" charset="-128"/>
+                        </a:rPr>
+                        <a:t>65,000円〜</a:t>
+                      </a:r>
+                      <a:endParaRPr lang="ja-JP" altLang="en-US" sz="2000" dirty="0"/>
+                    </a:p>
+                    <a:p>
+                      <a:pPr algn="ctr">
+                        <a:buNone/>
+                      </a:pPr>
+                      <a:r>
+                        <a:rPr lang="ja-JP" altLang="en-US" sz="2000" b="1" dirty="0">
+                          <a:solidFill>
+                            <a:srgbClr val="1F285A"/>
+                          </a:solidFill>
+                          <a:latin typeface="メイリオ" panose="020B0604030504040204" pitchFamily="50" charset="-128"/>
+                          <a:ea typeface="メイリオ" panose="020B0604030504040204" pitchFamily="50" charset="-128"/>
+                        </a:rPr>
+                        <a:t>＋成果報酬</a:t>
+                      </a:r>
+                      <a:endParaRPr lang="ja-JP" altLang="en-US" sz="2000" dirty="0"/>
+                    </a:p>
+                  </a:txBody>
+                  <a:tcPr marL="73152" marR="73152" marT="27432" marB="27432" anchor="ctr">
+                    <a:lnL w="9525" cap="flat" cmpd="sng" algn="ctr">
+                      <a:solidFill>
+                        <a:srgbClr val="BFC8DC"/>
+                      </a:solidFill>
+                      <a:prstDash val="solid"/>
+                      <a:round/>
+                      <a:headEnd type="none" w="med" len="med"/>
+                      <a:tailEnd type="none" w="med" len="med"/>
+                    </a:lnL>
+                    <a:lnR w="9525" cap="flat" cmpd="sng" algn="ctr">
+                      <a:solidFill>
+                        <a:srgbClr val="BFC8DC"/>
+                      </a:solidFill>
+                      <a:prstDash val="solid"/>
+                      <a:round/>
+                      <a:headEnd type="none" w="med" len="med"/>
+                      <a:tailEnd type="none" w="med" len="med"/>
+                    </a:lnR>
+                    <a:lnT w="9525" cap="flat" cmpd="sng" algn="ctr">
+                      <a:solidFill>
+                        <a:srgbClr val="BFC8DC"/>
+                      </a:solidFill>
+                      <a:prstDash val="solid"/>
+                      <a:round/>
+                      <a:headEnd type="none" w="med" len="med"/>
+                      <a:tailEnd type="none" w="med" len="med"/>
+                    </a:lnT>
+                    <a:lnB w="9525" cap="flat" cmpd="sng" algn="ctr">
+                      <a:solidFill>
+                        <a:srgbClr val="BFC8DC"/>
+                      </a:solidFill>
+                      <a:prstDash val="solid"/>
+                      <a:round/>
+                      <a:headEnd type="none" w="med" len="med"/>
+                      <a:tailEnd type="none" w="med" len="med"/>
+                    </a:lnB>
+                    <a:solidFill>
+                      <a:srgbClr val="E8ECF6"/>
+                    </a:solidFill>
+                  </a:tcPr>
+                </a:tc>
+                <a:extLst>
+                  <a:ext uri="{0D108BD9-81ED-4DB2-BD59-A6C34878D82A}">
+                    <a16:rowId xmlns:a16="http://schemas.microsoft.com/office/drawing/2014/main" val="10004"/>
+                  </a:ext>
+                </a:extLst>
+              </a:tr>
+            </a:tbl>
+          </a:graphicData>
+        </a:graphic>
+      </p:graphicFrame>
+      <p:sp>
+        <p:nvSpPr>
+          <p:cNvPr id="640" name="注記"/>
           <p:cNvSpPr/>
           <p:nvPr/>
         </p:nvSpPr>
         <p:spPr>
           <a:xfrm>
-            <a:off x="3584676" y="1644777"/>
-            <a:ext cx="692429" cy="3239261"/>
-          </a:xfrm>
-          <a:prstGeom prst="rect">
-            <a:avLst/>
-          </a:prstGeom>
-          <a:solidFill>
-            <a:srgbClr val="06C755">
-              <a:alpha val="16000"/>
-            </a:srgbClr>
-          </a:solidFill>
-          <a:ln>
-            <a:noFill/>
-          </a:ln>
-          <a:effectLst/>
-        </p:spPr>
-        <p:style>
-          <a:lnRef idx="1">
-            <a:schemeClr val="accent1"/>
-          </a:lnRef>
-          <a:fillRef idx="3">
-            <a:schemeClr val="accent1"/>
-          </a:fillRef>
-          <a:effectRef idx="2">
-            <a:schemeClr val="accent1"/>
-          </a:effectRef>
-          <a:fontRef idx="minor">
-            <a:schemeClr val="lt1"/>
-          </a:fontRef>
-        </p:style>
-        <p:txBody>
-          <a:bodyPr rtlCol="0" anchor="ctr"/>
-          <a:lstStyle/>
-          <a:p>
-            <a:pPr algn="ctr"/>
-          </a:p>
-        </p:txBody>
-      </p:sp>
-      <p:sp>
-        <p:nvSpPr>
-          <p:cNvPr id="9" name="LINE追加 札"/>
-          <p:cNvSpPr/>
-          <p:nvPr/>
-        </p:nvSpPr>
-        <p:spPr>
-          <a:xfrm>
-            <a:off x="3473690" y="5104866"/>
-            <a:ext cx="914400" cy="237744"/>
-          </a:xfrm>
-          <a:prstGeom prst="rect">
-            <a:avLst/>
-          </a:prstGeom>
-          <a:solidFill>
-            <a:srgbClr val="C6EFCE"/>
-          </a:solidFill>
-          <a:ln>
-            <a:noFill/>
-          </a:ln>
-        </p:spPr>
-        <p:txBody>
-          <a:bodyPr wrap="square" lIns="0" tIns="0" rIns="0" bIns="0" rtlCol="0" anchor="ctr">
-            <a:noAutofit/>
-          </a:bodyPr>
-          <a:lstStyle/>
-          <a:p>
-            <a:pPr algn="ctr">
-              <a:buNone/>
-            </a:pPr>
-            <a:r>
-              <a:rPr lang="ja-JP" altLang="en-US" sz="950" b="1" dirty="0">
-                <a:solidFill>
-                  <a:srgbClr val="00873C"/>
-                </a:solidFill>
-                <a:latin typeface="メイリオ" panose="020B0604030504040204" pitchFamily="50" charset="-128"/>
-                <a:ea typeface="メイリオ" panose="020B0604030504040204" pitchFamily="50" charset="-128"/>
-              </a:rPr>
-              <a:t>LINE追加</a:t>
-            </a:r>
-            <a:endParaRPr lang="ja-JP" altLang="en-US" sz="1200" dirty="0"/>
-          </a:p>
-        </p:txBody>
-      </p:sp>
-      <p:sp>
-        <p:nvSpPr>
-          <p:cNvPr id="10" name="凡例の色"/>
-          <p:cNvSpPr/>
-          <p:nvPr/>
-        </p:nvSpPr>
-        <p:spPr>
-          <a:xfrm>
-            <a:off x="6629400" y="1655064"/>
-            <a:ext cx="137160" cy="137160"/>
-          </a:xfrm>
-          <a:prstGeom prst="rect">
-            <a:avLst/>
-          </a:prstGeom>
-          <a:solidFill>
-            <a:srgbClr val="3467B2"/>
-          </a:solidFill>
-          <a:ln>
-            <a:noFill/>
-          </a:ln>
-        </p:spPr>
-        <p:txBody>
-          <a:bodyPr wrap="square" lIns="0" tIns="0" rIns="0" bIns="0" rtlCol="0" anchor="ctr">
-            <a:noAutofit/>
-          </a:bodyPr>
-          <a:lstStyle/>
-          <a:p>
-            <a:pPr algn="l">
-              <a:buNone/>
-            </a:pPr>
-            <a:endParaRPr lang="ja-JP" altLang="en-US" sz="1200" dirty="0"/>
-          </a:p>
-        </p:txBody>
-      </p:sp>
-      <p:sp>
-        <p:nvSpPr>
-          <p:cNvPr id="11" name="凡例"/>
-          <p:cNvSpPr/>
-          <p:nvPr/>
-        </p:nvSpPr>
-        <p:spPr>
-          <a:xfrm>
-            <a:off x="6812280" y="1600200"/>
-            <a:ext cx="2587752" cy="246888"/>
+            <a:off x="384048" y="5312412"/>
+            <a:ext cx="9144000" cy="246888"/>
           </a:xfrm>
           <a:prstGeom prst="rect">
             <a:avLst/>
@@ -16257,7 +18402,7 @@
           </a:ln>
         </p:spPr>
         <p:txBody>
-          <a:bodyPr wrap="square" lIns="0" tIns="0" rIns="0" bIns="0" rtlCol="0" anchor="ctr">
+          <a:bodyPr wrap="square" lIns="0" tIns="0" rIns="0" bIns="0" rtlCol="0" anchor="t">
             <a:noAutofit/>
           </a:bodyPr>
           <a:lstStyle/>
@@ -16266,14 +18411,14 @@
               <a:buNone/>
             </a:pPr>
             <a:r>
-              <a:rPr lang="ja-JP" altLang="en-US" sz="1100" b="0" dirty="0">
-                <a:solidFill>
-                  <a:srgbClr val="333333"/>
+              <a:rPr lang="ja-JP" altLang="en-US" sz="900" b="0" dirty="0">
+                <a:solidFill>
+                  <a:srgbClr val="7F7F7F"/>
                 </a:solidFill>
                 <a:latin typeface="メイリオ" panose="020B0604030504040204" pitchFamily="50" charset="-128"/>
                 <a:ea typeface="メイリオ" panose="020B0604030504040204" pitchFamily="50" charset="-128"/>
               </a:rPr>
-              <a:t>求人サービスを比べる</a:t>
+              <a:t>※初期費用＝運用設計・構築 100,000円〜＋離脱防止 15,000円＋サンクスLINE誘導 150,000円＋LINE公式アカウント開設 30,000円</a:t>
             </a:r>
             <a:endParaRPr lang="ja-JP" altLang="en-US" sz="1200" dirty="0"/>
           </a:p>
@@ -16281,48 +18426,14 @@
       </p:sp>
       <p:sp>
         <p:nvSpPr>
-          <p:cNvPr id="12" name="凡例の色"/>
+          <p:cNvPr id="641" name="注記"/>
           <p:cNvSpPr/>
           <p:nvPr/>
         </p:nvSpPr>
         <p:spPr>
           <a:xfrm>
-            <a:off x="6629400" y="1901952"/>
-            <a:ext cx="137160" cy="137160"/>
-          </a:xfrm>
-          <a:prstGeom prst="rect">
-            <a:avLst/>
-          </a:prstGeom>
-          <a:solidFill>
-            <a:srgbClr val="8E4EC6"/>
-          </a:solidFill>
-          <a:ln>
-            <a:noFill/>
-          </a:ln>
-        </p:spPr>
-        <p:txBody>
-          <a:bodyPr wrap="square" lIns="0" tIns="0" rIns="0" bIns="0" rtlCol="0" anchor="ctr">
-            <a:noAutofit/>
-          </a:bodyPr>
-          <a:lstStyle/>
-          <a:p>
-            <a:pPr algn="l">
-              <a:buNone/>
-            </a:pPr>
-            <a:endParaRPr lang="ja-JP" altLang="en-US" sz="1200" dirty="0"/>
-          </a:p>
-        </p:txBody>
-      </p:sp>
-      <p:sp>
-        <p:nvSpPr>
-          <p:cNvPr id="13" name="凡例"/>
-          <p:cNvSpPr/>
-          <p:nvPr/>
-        </p:nvSpPr>
-        <p:spPr>
-          <a:xfrm>
-            <a:off x="6812280" y="1847088"/>
-            <a:ext cx="2587752" cy="246888"/>
+            <a:off x="384048" y="5559300"/>
+            <a:ext cx="9144000" cy="246888"/>
           </a:xfrm>
           <a:prstGeom prst="rect">
             <a:avLst/>
@@ -16333,7 +18444,7 @@
           </a:ln>
         </p:spPr>
         <p:txBody>
-          <a:bodyPr wrap="square" lIns="0" tIns="0" rIns="0" bIns="0" rtlCol="0" anchor="ctr">
+          <a:bodyPr wrap="square" lIns="0" tIns="0" rIns="0" bIns="0" rtlCol="0" anchor="t">
             <a:noAutofit/>
           </a:bodyPr>
           <a:lstStyle/>
@@ -16342,14 +18453,14 @@
               <a:buNone/>
             </a:pPr>
             <a:r>
-              <a:rPr lang="ja-JP" altLang="en-US" sz="1100" b="0" dirty="0">
-                <a:solidFill>
-                  <a:srgbClr val="333333"/>
+              <a:rPr lang="ja-JP" altLang="en-US" sz="900" b="0" dirty="0">
+                <a:solidFill>
+                  <a:srgbClr val="7F7F7F"/>
                 </a:solidFill>
                 <a:latin typeface="メイリオ" panose="020B0604030504040204" pitchFamily="50" charset="-128"/>
                 <a:ea typeface="メイリオ" panose="020B0604030504040204" pitchFamily="50" charset="-128"/>
               </a:rPr>
-              <a:t>応募・面接の準備</a:t>
+              <a:t>※月額ツール・LINE関連費＝離脱防止 30,000円＋サンクスLINE誘導 30,000円〜＋LINE公式アカウント利用料 5,000円〜（ライトプラン想定）</a:t>
             </a:r>
             <a:endParaRPr lang="ja-JP" altLang="en-US" sz="1200" dirty="0"/>
           </a:p>
@@ -16357,48 +18468,14 @@
       </p:sp>
       <p:sp>
         <p:nvSpPr>
-          <p:cNvPr id="14" name="凡例の色"/>
+          <p:cNvPr id="642" name="注記"/>
           <p:cNvSpPr/>
           <p:nvPr/>
         </p:nvSpPr>
         <p:spPr>
           <a:xfrm>
-            <a:off x="6629400" y="2148840"/>
-            <a:ext cx="137160" cy="137160"/>
-          </a:xfrm>
-          <a:prstGeom prst="rect">
-            <a:avLst/>
-          </a:prstGeom>
-          <a:solidFill>
-            <a:srgbClr val="00897B"/>
-          </a:solidFill>
-          <a:ln>
-            <a:noFill/>
-          </a:ln>
-        </p:spPr>
-        <p:txBody>
-          <a:bodyPr wrap="square" lIns="0" tIns="0" rIns="0" bIns="0" rtlCol="0" anchor="ctr">
-            <a:noAutofit/>
-          </a:bodyPr>
-          <a:lstStyle/>
-          <a:p>
-            <a:pPr algn="l">
-              <a:buNone/>
-            </a:pPr>
-            <a:endParaRPr lang="ja-JP" altLang="en-US" sz="1200" dirty="0"/>
-          </a:p>
-        </p:txBody>
-      </p:sp>
-      <p:sp>
-        <p:nvSpPr>
-          <p:cNvPr id="15" name="凡例"/>
-          <p:cNvSpPr/>
-          <p:nvPr/>
-        </p:nvSpPr>
-        <p:spPr>
-          <a:xfrm>
-            <a:off x="6812280" y="2093976"/>
-            <a:ext cx="2587752" cy="246888"/>
+            <a:off x="384048" y="5806188"/>
+            <a:ext cx="9144000" cy="246888"/>
           </a:xfrm>
           <a:prstGeom prst="rect">
             <a:avLst/>
@@ -16409,7 +18486,7 @@
           </a:ln>
         </p:spPr>
         <p:txBody>
-          <a:bodyPr wrap="square" lIns="0" tIns="0" rIns="0" bIns="0" rtlCol="0" anchor="ctr">
+          <a:bodyPr wrap="square" lIns="0" tIns="0" rIns="0" bIns="0" rtlCol="0" anchor="t">
             <a:noAutofit/>
           </a:bodyPr>
           <a:lstStyle/>
@@ -16418,14 +18495,14 @@
               <a:buNone/>
             </a:pPr>
             <a:r>
-              <a:rPr lang="ja-JP" altLang="en-US" sz="1100" b="0" dirty="0">
-                <a:solidFill>
-                  <a:srgbClr val="333333"/>
+              <a:rPr lang="ja-JP" altLang="en-US" sz="900" b="0" dirty="0">
+                <a:solidFill>
+                  <a:srgbClr val="7F7F7F"/>
                 </a:solidFill>
                 <a:latin typeface="メイリオ" panose="020B0604030504040204" pitchFamily="50" charset="-128"/>
                 <a:ea typeface="メイリオ" panose="020B0604030504040204" pitchFamily="50" charset="-128"/>
               </a:rPr>
-              <a:t>給与・働き方を調べる</a:t>
+              <a:t>※成果報酬の対象＝LINEからの新規応募・再応募（再応募は、勤務希望をLINEで受け付ける場合）。契約期間は6か月〜</a:t>
             </a:r>
             <a:endParaRPr lang="ja-JP" altLang="en-US" sz="1200" dirty="0"/>
           </a:p>
@@ -16433,388 +18510,14 @@
       </p:sp>
       <p:sp>
         <p:nvSpPr>
-          <p:cNvPr id="18" name="分析 当日"/>
+          <p:cNvPr id="643" name="注記"/>
           <p:cNvSpPr/>
           <p:nvPr/>
         </p:nvSpPr>
         <p:spPr>
           <a:xfrm>
-            <a:off x="6629400" y="2404872"/>
-            <a:ext cx="2770632" cy="274320"/>
-          </a:xfrm>
-          <a:prstGeom prst="rect">
-            <a:avLst/>
-          </a:prstGeom>
-          <a:solidFill>
-            <a:srgbClr val="1F285A"/>
-          </a:solidFill>
-          <a:ln>
-            <a:noFill/>
-          </a:ln>
-        </p:spPr>
-        <p:txBody>
-          <a:bodyPr wrap="square" lIns="73152" tIns="36576" rIns="73152" bIns="36576" rtlCol="0" anchor="ctr">
-            <a:noAutofit/>
-          </a:bodyPr>
-          <a:lstStyle/>
-          <a:p>
-            <a:pPr algn="ctr">
-              <a:buNone/>
-            </a:pPr>
-            <a:r>
-              <a:rPr lang="ja-JP" altLang="en-US" sz="1150" b="1" dirty="0">
-                <a:solidFill>
-                  <a:srgbClr val="FFFFFF"/>
-                </a:solidFill>
-                <a:latin typeface="メイリオ" panose="020B0604030504040204" pitchFamily="50" charset="-128"/>
-                <a:ea typeface="メイリオ" panose="020B0604030504040204" pitchFamily="50" charset="-128"/>
-              </a:rPr>
-              <a:t>検索前</a:t>
-            </a:r>
-            <a:endParaRPr lang="ja-JP" altLang="en-US" sz="1200" dirty="0"/>
-          </a:p>
-        </p:txBody>
-      </p:sp>
-      <p:sp>
-        <p:nvSpPr>
-          <p:cNvPr id="19" name="分析 当日 本文"/>
-          <p:cNvSpPr/>
-          <p:nvPr/>
-        </p:nvSpPr>
-        <p:spPr>
-          <a:xfrm>
-            <a:off x="6629400" y="2679191"/>
-            <a:ext cx="2770632" cy="713232"/>
-          </a:xfrm>
-          <a:prstGeom prst="rect">
-            <a:avLst/>
-          </a:prstGeom>
-          <a:noFill/>
-          <a:ln w="9525">
-            <a:solidFill>
-              <a:srgbClr val="D9D9D9"/>
-            </a:solidFill>
-          </a:ln>
-        </p:spPr>
-        <p:txBody>
-          <a:bodyPr wrap="square" lIns="73152" tIns="36576" rIns="73152" bIns="27432" rtlCol="0" anchor="t">
-            <a:noAutofit/>
-          </a:bodyPr>
-          <a:lstStyle/>
-          <a:p>
-            <a:pPr algn="l">
-              <a:lnSpc>
-                <a:spcPct val="110000"/>
-              </a:lnSpc>
-              <a:buNone/>
-            </a:pPr>
-            <a:r>
-              <a:rPr lang="ja-JP" altLang="en-US" sz="1200" b="1" dirty="0">
-                <a:solidFill>
-                  <a:srgbClr val="1F285A"/>
-                </a:solidFill>
-                <a:latin typeface="メイリオ" panose="020B0604030504040204" pitchFamily="50" charset="-128"/>
-                <a:ea typeface="メイリオ" panose="020B0604030504040204" pitchFamily="50" charset="-128"/>
-              </a:rPr>
-              <a:t>求人サイトで探し始める</a:t>
-            </a:r>
-            <a:endParaRPr lang="ja-JP" altLang="en-US" sz="1200" dirty="0"/>
-          </a:p>
-          <a:p>
-            <a:pPr algn="l">
-              <a:lnSpc>
-                <a:spcPct val="110000"/>
-              </a:lnSpc>
-              <a:buNone/>
-            </a:pPr>
-            <a:r>
-              <a:rPr lang="ja-JP" altLang="en-US" sz="1100" b="0" dirty="0">
-                <a:solidFill>
-                  <a:srgbClr val="333333"/>
-                </a:solidFill>
-                <a:latin typeface="メイリオ" panose="020B0604030504040204" pitchFamily="50" charset="-128"/>
-                <a:ea typeface="メイリオ" panose="020B0604030504040204" pitchFamily="50" charset="-128"/>
-              </a:rPr>
-              <a:t>バイト 求人・タウンワークなど</a:t>
-            </a:r>
-            <a:endParaRPr lang="ja-JP" altLang="en-US" sz="1200" dirty="0"/>
-          </a:p>
-        </p:txBody>
-      </p:sp>
-      <p:sp>
-        <p:nvSpPr>
-          <p:cNvPr id="20" name="分析 1〜7日後"/>
-          <p:cNvSpPr/>
-          <p:nvPr/>
-        </p:nvSpPr>
-        <p:spPr>
-          <a:xfrm>
-            <a:off x="6629400" y="3447288"/>
-            <a:ext cx="2770632" cy="274320"/>
-          </a:xfrm>
-          <a:prstGeom prst="rect">
-            <a:avLst/>
-          </a:prstGeom>
-          <a:solidFill>
-            <a:srgbClr val="1F285A"/>
-          </a:solidFill>
-          <a:ln>
-            <a:noFill/>
-          </a:ln>
-        </p:spPr>
-        <p:txBody>
-          <a:bodyPr wrap="square" lIns="73152" tIns="36576" rIns="73152" bIns="36576" rtlCol="0" anchor="ctr">
-            <a:noAutofit/>
-          </a:bodyPr>
-          <a:lstStyle/>
-          <a:p>
-            <a:pPr algn="ctr">
-              <a:buNone/>
-            </a:pPr>
-            <a:r>
-              <a:rPr lang="ja-JP" altLang="en-US" sz="1150" b="1" dirty="0">
-                <a:solidFill>
-                  <a:srgbClr val="FFFFFF"/>
-                </a:solidFill>
-                <a:latin typeface="メイリオ" panose="020B0604030504040204" pitchFamily="50" charset="-128"/>
-                <a:ea typeface="メイリオ" panose="020B0604030504040204" pitchFamily="50" charset="-128"/>
-              </a:rPr>
-              <a:t>当日</a:t>
-            </a:r>
-            <a:endParaRPr lang="ja-JP" altLang="en-US" sz="1200" dirty="0"/>
-          </a:p>
-        </p:txBody>
-      </p:sp>
-      <p:sp>
-        <p:nvSpPr>
-          <p:cNvPr id="21" name="分析 1〜7日後 本文"/>
-          <p:cNvSpPr/>
-          <p:nvPr/>
-        </p:nvSpPr>
-        <p:spPr>
-          <a:xfrm>
-            <a:off x="6629400" y="3721608"/>
-            <a:ext cx="2770632" cy="713232"/>
-          </a:xfrm>
-          <a:prstGeom prst="rect">
-            <a:avLst/>
-          </a:prstGeom>
-          <a:noFill/>
-          <a:ln w="9525">
-            <a:solidFill>
-              <a:srgbClr val="D9D9D9"/>
-            </a:solidFill>
-          </a:ln>
-        </p:spPr>
-        <p:txBody>
-          <a:bodyPr wrap="square" lIns="73152" tIns="36576" rIns="73152" bIns="27432" rtlCol="0" anchor="t">
-            <a:noAutofit/>
-          </a:bodyPr>
-          <a:lstStyle/>
-          <a:p>
-            <a:pPr algn="l">
-              <a:lnSpc>
-                <a:spcPct val="110000"/>
-              </a:lnSpc>
-              <a:buNone/>
-            </a:pPr>
-            <a:r>
-              <a:rPr lang="ja-JP" altLang="en-US" sz="1200" b="1" dirty="0">
-                <a:solidFill>
-                  <a:srgbClr val="1F285A"/>
-                </a:solidFill>
-                <a:latin typeface="メイリオ" panose="020B0604030504040204" pitchFamily="50" charset="-128"/>
-                <a:ea typeface="メイリオ" panose="020B0604030504040204" pitchFamily="50" charset="-128"/>
-              </a:rPr>
-              <a:t>単発のサービスを比べる</a:t>
-            </a:r>
-            <a:endParaRPr lang="ja-JP" altLang="en-US" sz="1200" dirty="0"/>
-          </a:p>
-          <a:p>
-            <a:pPr algn="l">
-              <a:lnSpc>
-                <a:spcPct val="110000"/>
-              </a:lnSpc>
-              <a:buNone/>
-            </a:pPr>
-            <a:r>
-              <a:rPr lang="ja-JP" altLang="en-US" sz="1100" b="0" dirty="0">
-                <a:solidFill>
-                  <a:srgbClr val="333333"/>
-                </a:solidFill>
-                <a:latin typeface="メイリオ" panose="020B0604030504040204" pitchFamily="50" charset="-128"/>
-                <a:ea typeface="メイリオ" panose="020B0604030504040204" pitchFamily="50" charset="-128"/>
-              </a:rPr>
-              <a:t>タイミー・バイトル・短期バイトなど。履歴書の書き方も</a:t>
-            </a:r>
-            <a:endParaRPr lang="ja-JP" altLang="en-US" sz="1200" dirty="0"/>
-          </a:p>
-        </p:txBody>
-      </p:sp>
-      <p:sp>
-        <p:nvSpPr>
-          <p:cNvPr id="22" name="分析 7〜15日後"/>
-          <p:cNvSpPr/>
-          <p:nvPr/>
-        </p:nvSpPr>
-        <p:spPr>
-          <a:xfrm>
-            <a:off x="6629400" y="4489704"/>
-            <a:ext cx="2770632" cy="274320"/>
-          </a:xfrm>
-          <a:prstGeom prst="rect">
-            <a:avLst/>
-          </a:prstGeom>
-          <a:solidFill>
-            <a:srgbClr val="1F285A"/>
-          </a:solidFill>
-          <a:ln>
-            <a:noFill/>
-          </a:ln>
-        </p:spPr>
-        <p:txBody>
-          <a:bodyPr wrap="square" lIns="73152" tIns="36576" rIns="73152" bIns="36576" rtlCol="0" anchor="ctr">
-            <a:noAutofit/>
-          </a:bodyPr>
-          <a:lstStyle/>
-          <a:p>
-            <a:pPr algn="ctr">
-              <a:buNone/>
-            </a:pPr>
-            <a:r>
-              <a:rPr lang="ja-JP" altLang="en-US" sz="1150" b="1" dirty="0">
-                <a:solidFill>
-                  <a:srgbClr val="FFFFFF"/>
-                </a:solidFill>
-                <a:latin typeface="メイリオ" panose="020B0604030504040204" pitchFamily="50" charset="-128"/>
-                <a:ea typeface="メイリオ" panose="020B0604030504040204" pitchFamily="50" charset="-128"/>
-              </a:rPr>
-              <a:t>1〜15日後</a:t>
-            </a:r>
-            <a:endParaRPr lang="ja-JP" altLang="en-US" sz="1200" dirty="0"/>
-          </a:p>
-        </p:txBody>
-      </p:sp>
-      <p:sp>
-        <p:nvSpPr>
-          <p:cNvPr id="23" name="分析 7〜15日後 本文"/>
-          <p:cNvSpPr/>
-          <p:nvPr/>
-        </p:nvSpPr>
-        <p:spPr>
-          <a:xfrm>
-            <a:off x="6629400" y="4764024"/>
-            <a:ext cx="2770632" cy="713232"/>
-          </a:xfrm>
-          <a:prstGeom prst="rect">
-            <a:avLst/>
-          </a:prstGeom>
-          <a:noFill/>
-          <a:ln w="9525">
-            <a:solidFill>
-              <a:srgbClr val="D9D9D9"/>
-            </a:solidFill>
-          </a:ln>
-        </p:spPr>
-        <p:txBody>
-          <a:bodyPr wrap="square" lIns="73152" tIns="36576" rIns="73152" bIns="27432" rtlCol="0" anchor="t">
-            <a:noAutofit/>
-          </a:bodyPr>
-          <a:lstStyle/>
-          <a:p>
-            <a:pPr algn="l">
-              <a:lnSpc>
-                <a:spcPct val="110000"/>
-              </a:lnSpc>
-              <a:buNone/>
-            </a:pPr>
-            <a:r>
-              <a:rPr lang="ja-JP" altLang="en-US" sz="1200" b="1" dirty="0">
-                <a:solidFill>
-                  <a:srgbClr val="1F285A"/>
-                </a:solidFill>
-                <a:latin typeface="メイリオ" panose="020B0604030504040204" pitchFamily="50" charset="-128"/>
-                <a:ea typeface="メイリオ" panose="020B0604030504040204" pitchFamily="50" charset="-128"/>
-              </a:rPr>
-              <a:t>給与・働き方を調べる</a:t>
-            </a:r>
-            <a:endParaRPr lang="ja-JP" altLang="en-US" sz="1200" dirty="0"/>
-          </a:p>
-          <a:p>
-            <a:pPr algn="l">
-              <a:lnSpc>
-                <a:spcPct val="110000"/>
-              </a:lnSpc>
-              <a:buNone/>
-            </a:pPr>
-            <a:r>
-              <a:rPr lang="ja-JP" altLang="en-US" sz="1100" b="0" dirty="0">
-                <a:solidFill>
-                  <a:srgbClr val="333333"/>
-                </a:solidFill>
-                <a:latin typeface="メイリオ" panose="020B0604030504040204" pitchFamily="50" charset="-128"/>
-                <a:ea typeface="メイリオ" panose="020B0604030504040204" pitchFamily="50" charset="-128"/>
-              </a:rPr>
-              <a:t>日払い・確定申告・ダブルワークの扶養。面接の服装も</a:t>
-            </a:r>
-            <a:endParaRPr lang="ja-JP" altLang="en-US" sz="1200" dirty="0"/>
-          </a:p>
-        </p:txBody>
-      </p:sp>
-      <p:sp>
-        <p:nvSpPr>
-          <p:cNvPr id="24" name="示唆"/>
-          <p:cNvSpPr/>
-          <p:nvPr/>
-        </p:nvSpPr>
-        <p:spPr>
-          <a:xfrm>
-            <a:off x="502920" y="5779008"/>
-            <a:ext cx="8897112" cy="411480"/>
-          </a:xfrm>
-          <a:prstGeom prst="rect">
-            <a:avLst/>
-          </a:prstGeom>
-          <a:solidFill>
-            <a:srgbClr val="F4F7FF"/>
-          </a:solidFill>
-          <a:ln>
-            <a:noFill/>
-          </a:ln>
-        </p:spPr>
-        <p:txBody>
-          <a:bodyPr wrap="square" lIns="73152" tIns="36576" rIns="73152" bIns="36576" rtlCol="0" anchor="ctr">
-            <a:noAutofit/>
-          </a:bodyPr>
-          <a:lstStyle/>
-          <a:p>
-            <a:pPr algn="ctr">
-              <a:buNone/>
-            </a:pPr>
-            <a:r>
-              <a:rPr lang="ja-JP" altLang="en-US" sz="1400" b="1" dirty="0">
-                <a:solidFill>
-                  <a:srgbClr val="1F285A"/>
-                </a:solidFill>
-                <a:latin typeface="メイリオ" panose="020B0604030504040204" pitchFamily="50" charset="-128"/>
-                <a:ea typeface="メイリオ" panose="020B0604030504040204" pitchFamily="50" charset="-128"/>
-              </a:rPr>
-              <a:t>求人サービスを比べる → 応募・面接の準備 → 給与・働き方 の順に調べている</a:t>
-            </a:r>
-            <a:endParaRPr lang="ja-JP" altLang="en-US" sz="1200" dirty="0"/>
-          </a:p>
-        </p:txBody>
-      </p:sp>
-      <p:sp>
-        <p:nvSpPr>
-          <p:cNvPr id="25" name="注記"/>
-          <p:cNvSpPr/>
-          <p:nvPr/>
-        </p:nvSpPr>
-        <p:spPr>
-          <a:xfrm>
-            <a:off x="502920" y="6236208"/>
-            <a:ext cx="8897112" cy="228600"/>
+            <a:off x="384048" y="6053076"/>
+            <a:ext cx="9144000" cy="246888"/>
           </a:xfrm>
           <a:prstGeom prst="rect">
             <a:avLst/>
@@ -16831,20 +18534,17 @@
           <a:lstStyle/>
           <a:p>
             <a:pPr algn="l">
-              <a:lnSpc>
-                <a:spcPct val="115000"/>
-              </a:lnSpc>
               <a:buNone/>
             </a:pPr>
             <a:r>
-              <a:rPr lang="ja-JP" altLang="en-US" sz="850" b="0" dirty="0">
+              <a:rPr lang="ja-JP" altLang="en-US" sz="900" b="0" dirty="0">
                 <a:solidFill>
                   <a:srgbClr val="7F7F7F"/>
                 </a:solidFill>
                 <a:latin typeface="メイリオ" panose="020B0604030504040204" pitchFamily="50" charset="-128"/>
                 <a:ea typeface="メイリオ" panose="020B0604030504040204" pitchFamily="50" charset="-128"/>
               </a:rPr>
-              <a:t>※LINEヤフー社の前後検索データより。「単発バイト」を検索した方が、前後15日間に検索した言葉（縦軸＝検索した人数）。</a:t>
+              <a:t>※施策内容・配信本数・連携範囲等により、費用は個別にお見積もりいたします。</a:t>
             </a:r>
             <a:endParaRPr lang="ja-JP" altLang="en-US" sz="1200" dirty="0"/>
           </a:p>
@@ -17433,7 +19133,7 @@
         <p:spPr>
           <a:xfrm>
             <a:off x="5446127" y="1650519"/>
-            <a:ext cx="3758184" cy="1182189"/>
+            <a:ext cx="3758184" cy="1670651"/>
           </a:xfrm>
           <a:prstGeom prst="roundRect">
             <a:avLst>
@@ -17462,7 +19162,7 @@
               <a:buNone/>
             </a:pPr>
             <a:r>
-              <a:rPr lang="ja-JP" altLang="en-US" sz="1200" b="1" dirty="0">
+              <a:rPr lang="ja-JP" altLang="en-US" sz="1400" b="1" dirty="0">
                 <a:solidFill>
                   <a:srgbClr val="323366"/>
                 </a:solidFill>
@@ -17471,7 +19171,7 @@
               </a:rPr>
               <a:t>想定している課題（仮説）</a:t>
             </a:r>
-            <a:endParaRPr lang="ja-JP" altLang="en-US" sz="1200" dirty="0"/>
+            <a:endParaRPr lang="ja-JP" altLang="en-US" sz="1400" dirty="0"/>
           </a:p>
           <a:p>
             <a:pPr algn="l">
@@ -17481,7 +19181,7 @@
               <a:buNone/>
             </a:pPr>
             <a:r>
-              <a:rPr lang="ja-JP" altLang="en-US" sz="1200" b="0" dirty="0">
+              <a:rPr lang="ja-JP" altLang="en-US" sz="1400" b="0" dirty="0">
                 <a:solidFill>
                   <a:srgbClr val="333333"/>
                 </a:solidFill>
@@ -17490,7 +19190,7 @@
               </a:rPr>
               <a:t>イベントの勤務が終わると、スタッフの方との連絡が途切れやすい。</a:t>
             </a:r>
-            <a:endParaRPr lang="ja-JP" altLang="en-US" sz="1200" dirty="0"/>
+            <a:endParaRPr lang="ja-JP" altLang="en-US" sz="1400" dirty="0"/>
           </a:p>
           <a:p>
             <a:pPr algn="l">
@@ -17500,7 +19200,7 @@
               <a:buNone/>
             </a:pPr>
             <a:r>
-              <a:rPr lang="ja-JP" altLang="en-US" sz="1200" b="0" dirty="0">
+              <a:rPr lang="ja-JP" altLang="en-US" sz="1400" b="0" dirty="0">
                 <a:solidFill>
                   <a:srgbClr val="333333"/>
                 </a:solidFill>
@@ -17509,7 +19209,7 @@
               </a:rPr>
               <a:t>次のイベントでも働いていただける接点を残すことが、継続的な人員確保の鍵と考えます。</a:t>
             </a:r>
-            <a:endParaRPr lang="ja-JP" altLang="en-US" sz="1200" dirty="0"/>
+            <a:endParaRPr lang="ja-JP" altLang="en-US" sz="1400" dirty="0"/>
           </a:p>
         </p:txBody>
       </p:sp>
@@ -18089,7 +19789,7 @@
               <a:buNone/>
             </a:pPr>
             <a:r>
-              <a:rPr lang="ja-JP" altLang="en-US" sz="1000" b="1" dirty="0">
+              <a:rPr lang="ja-JP" altLang="en-US" sz="1050" b="1" dirty="0">
                 <a:solidFill>
                   <a:srgbClr val="FFFFFF"/>
                 </a:solidFill>
@@ -18098,7 +19798,7 @@
               </a:rPr>
               <a:t>-7〜-1日</a:t>
             </a:r>
-            <a:endParaRPr lang="ja-JP" altLang="en-US" sz="1000" dirty="0"/>
+            <a:endParaRPr lang="ja-JP" altLang="en-US" sz="1050" dirty="0"/>
           </a:p>
         </p:txBody>
       </p:sp>
@@ -18134,7 +19834,7 @@
               <a:buNone/>
             </a:pPr>
             <a:r>
-              <a:rPr lang="ja-JP" altLang="en-US" sz="1150" b="1" dirty="0">
+              <a:rPr lang="ja-JP" altLang="en-US" sz="1200" b="1" dirty="0">
                 <a:solidFill>
                   <a:srgbClr val="323366"/>
                 </a:solidFill>
@@ -18143,7 +19843,7 @@
               </a:rPr>
               <a:t>スキマ時間で、すぐ稼ぎたい</a:t>
             </a:r>
-            <a:endParaRPr lang="ja-JP" altLang="en-US" sz="1100" dirty="0"/>
+            <a:endParaRPr lang="ja-JP" altLang="en-US" sz="1200" dirty="0"/>
           </a:p>
           <a:p>
             <a:pPr algn="l">
@@ -18153,7 +19853,7 @@
               <a:buNone/>
             </a:pPr>
             <a:r>
-              <a:rPr lang="ja-JP" altLang="en-US" sz="1000" b="0" dirty="0">
+              <a:rPr lang="ja-JP" altLang="en-US" sz="1050" b="0" dirty="0">
                 <a:solidFill>
                   <a:srgbClr val="595959"/>
                 </a:solidFill>
@@ -18162,7 +19862,7 @@
               </a:rPr>
               <a:t>副業 在宅 スキマ時間／在宅ワーク 求人／バイト 求人</a:t>
             </a:r>
-            <a:endParaRPr lang="ja-JP" altLang="en-US" sz="1100" dirty="0"/>
+            <a:endParaRPr lang="ja-JP" altLang="en-US" sz="1200" dirty="0"/>
           </a:p>
         </p:txBody>
       </p:sp>
@@ -18199,7 +19899,7 @@
               <a:buNone/>
             </a:pPr>
             <a:r>
-              <a:rPr lang="ja-JP" altLang="en-US" sz="1000" b="1" dirty="0">
+              <a:rPr lang="ja-JP" altLang="en-US" sz="1050" b="1" dirty="0">
                 <a:solidFill>
                   <a:srgbClr val="FFFFFF"/>
                 </a:solidFill>
@@ -18208,7 +19908,7 @@
               </a:rPr>
               <a:t>0〜+2日</a:t>
             </a:r>
-            <a:endParaRPr lang="ja-JP" altLang="en-US" sz="1000" dirty="0"/>
+            <a:endParaRPr lang="ja-JP" altLang="en-US" sz="1050" dirty="0"/>
           </a:p>
         </p:txBody>
       </p:sp>
@@ -18244,7 +19944,7 @@
               <a:buNone/>
             </a:pPr>
             <a:r>
-              <a:rPr lang="ja-JP" altLang="en-US" sz="1150" b="1" dirty="0">
+              <a:rPr lang="ja-JP" altLang="en-US" sz="1200" b="1" dirty="0">
                 <a:solidFill>
                   <a:srgbClr val="323366"/>
                 </a:solidFill>
@@ -18253,7 +19953,7 @@
               </a:rPr>
               <a:t>同じ日に、複数のサービスを並べて比べる</a:t>
             </a:r>
-            <a:endParaRPr lang="ja-JP" altLang="en-US" sz="1100" dirty="0"/>
+            <a:endParaRPr lang="ja-JP" altLang="en-US" sz="1200" dirty="0"/>
           </a:p>
           <a:p>
             <a:pPr algn="l">
@@ -18263,7 +19963,7 @@
               <a:buNone/>
             </a:pPr>
             <a:r>
-              <a:rPr lang="ja-JP" altLang="en-US" sz="1000" b="0" dirty="0">
+              <a:rPr lang="ja-JP" altLang="en-US" sz="1050" b="0" dirty="0">
                 <a:solidFill>
                   <a:srgbClr val="595959"/>
                 </a:solidFill>
@@ -18272,7 +19972,7 @@
               </a:rPr>
               <a:t>タイミー／バイトル／短期バイト／単発バイト アプリ</a:t>
             </a:r>
-            <a:endParaRPr lang="ja-JP" altLang="en-US" sz="1100" dirty="0"/>
+            <a:endParaRPr lang="ja-JP" altLang="en-US" sz="1200" dirty="0"/>
           </a:p>
         </p:txBody>
       </p:sp>
@@ -18309,7 +20009,7 @@
               <a:buNone/>
             </a:pPr>
             <a:r>
-              <a:rPr lang="ja-JP" altLang="en-US" sz="1000" b="1" dirty="0">
+              <a:rPr lang="ja-JP" altLang="en-US" sz="1050" b="1" dirty="0">
                 <a:solidFill>
                   <a:srgbClr val="FFFFFF"/>
                 </a:solidFill>
@@ -18318,7 +20018,7 @@
               </a:rPr>
               <a:t>+1〜+15日</a:t>
             </a:r>
-            <a:endParaRPr lang="ja-JP" altLang="en-US" sz="1000" dirty="0"/>
+            <a:endParaRPr lang="ja-JP" altLang="en-US" sz="1050" dirty="0"/>
           </a:p>
         </p:txBody>
       </p:sp>
@@ -18354,7 +20054,7 @@
               <a:buNone/>
             </a:pPr>
             <a:r>
-              <a:rPr lang="ja-JP" altLang="en-US" sz="1150" b="1" dirty="0">
+              <a:rPr lang="ja-JP" altLang="en-US" sz="1200" b="1" dirty="0">
                 <a:solidFill>
                   <a:srgbClr val="323366"/>
                 </a:solidFill>
@@ -18363,7 +20063,7 @@
               </a:rPr>
               <a:t>続けられるか・扶養や税金は大丈夫か</a:t>
             </a:r>
-            <a:endParaRPr lang="ja-JP" altLang="en-US" sz="1100" dirty="0"/>
+            <a:endParaRPr lang="ja-JP" altLang="en-US" sz="1200" dirty="0"/>
           </a:p>
           <a:p>
             <a:pPr algn="l">
@@ -18373,7 +20073,7 @@
               <a:buNone/>
             </a:pPr>
             <a:r>
-              <a:rPr lang="ja-JP" altLang="en-US" sz="1000" b="0" dirty="0">
+              <a:rPr lang="ja-JP" altLang="en-US" sz="1050" b="0" dirty="0">
                 <a:solidFill>
                   <a:srgbClr val="595959"/>
                 </a:solidFill>
@@ -18382,7 +20082,7 @@
               </a:rPr>
               <a:t>副業 確定申告 20万円以下／ダブルワーク 扶養内 いくらまで</a:t>
             </a:r>
-            <a:endParaRPr lang="ja-JP" altLang="en-US" sz="1100" dirty="0"/>
+            <a:endParaRPr lang="ja-JP" altLang="en-US" sz="1200" dirty="0"/>
           </a:p>
         </p:txBody>
       </p:sp>
@@ -18694,7 +20394,7 @@
               <a:buNone/>
             </a:pPr>
             <a:r>
-              <a:rPr lang="ja-JP" altLang="en-US" sz="1200" b="1" dirty="0">
+              <a:rPr lang="ja-JP" altLang="en-US" sz="1400" b="1" dirty="0">
                 <a:solidFill>
                   <a:srgbClr val="FFFFFF"/>
                 </a:solidFill>
@@ -18703,7 +20403,7 @@
               </a:rPr>
               <a:t>応募のあと</a:t>
             </a:r>
-            <a:endParaRPr lang="ja-JP" altLang="en-US" sz="1200" dirty="0"/>
+            <a:endParaRPr lang="ja-JP" altLang="en-US" sz="1400" dirty="0"/>
           </a:p>
         </p:txBody>
       </p:sp>
@@ -18745,7 +20445,7 @@
               <a:buNone/>
             </a:pPr>
             <a:r>
-              <a:rPr lang="ja-JP" altLang="en-US" sz="1000" b="1" dirty="0">
+              <a:rPr lang="ja-JP" altLang="en-US" sz="1050" b="1" dirty="0">
                 <a:solidFill>
                   <a:srgbClr val="595959"/>
                 </a:solidFill>
@@ -18754,7 +20454,7 @@
               </a:rPr>
               <a:t>起きやすいこと（想定）</a:t>
             </a:r>
-            <a:endParaRPr lang="ja-JP" altLang="en-US" sz="1150" dirty="0"/>
+            <a:endParaRPr lang="ja-JP" altLang="en-US" sz="1200" dirty="0"/>
           </a:p>
           <a:p>
             <a:pPr algn="l">
@@ -18764,7 +20464,7 @@
               <a:buNone/>
             </a:pPr>
             <a:r>
-              <a:rPr lang="ja-JP" altLang="en-US" sz="1150" b="0" dirty="0">
+              <a:rPr lang="ja-JP" altLang="en-US" sz="1200" b="0" dirty="0">
                 <a:solidFill>
                   <a:srgbClr val="333333"/>
                 </a:solidFill>
@@ -18773,7 +20473,7 @@
               </a:rPr>
               <a:t>メールや電話がつながらず、面接・登録の案内が届きにくい</a:t>
             </a:r>
-            <a:endParaRPr lang="ja-JP" altLang="en-US" sz="1150" dirty="0"/>
+            <a:endParaRPr lang="ja-JP" altLang="en-US" sz="1200" dirty="0"/>
           </a:p>
         </p:txBody>
       </p:sp>
@@ -18806,7 +20506,7 @@
               <a:buNone/>
             </a:pPr>
             <a:r>
-              <a:rPr lang="ja-JP" altLang="en-US" sz="1400" b="0" dirty="0">
+              <a:rPr lang="ja-JP" altLang="en-US" sz="1600" b="0" dirty="0">
                 <a:solidFill>
                   <a:srgbClr val="1E2761"/>
                 </a:solidFill>
@@ -18815,7 +20515,7 @@
               </a:rPr>
               <a:t>▼</a:t>
             </a:r>
-            <a:endParaRPr lang="ja-JP" altLang="en-US" sz="1400" dirty="0"/>
+            <a:endParaRPr lang="ja-JP" altLang="en-US" sz="1600" dirty="0"/>
           </a:p>
         </p:txBody>
       </p:sp>
@@ -18857,7 +20557,7 @@
               <a:buNone/>
             </a:pPr>
             <a:r>
-              <a:rPr lang="ja-JP" altLang="en-US" sz="1000" b="1" dirty="0">
+              <a:rPr lang="ja-JP" altLang="en-US" sz="1050" b="1" dirty="0">
                 <a:solidFill>
                   <a:srgbClr val="323366"/>
                 </a:solidFill>
@@ -18866,7 +20566,7 @@
               </a:rPr>
               <a:t>LINEでできること</a:t>
             </a:r>
-            <a:endParaRPr lang="ja-JP" altLang="en-US" sz="1150" dirty="0"/>
+            <a:endParaRPr lang="ja-JP" altLang="en-US" sz="1200" dirty="0"/>
           </a:p>
           <a:p>
             <a:pPr algn="l">
@@ -18876,7 +20576,7 @@
               <a:buNone/>
             </a:pPr>
             <a:r>
-              <a:rPr lang="ja-JP" altLang="en-US" sz="1150" b="0" dirty="0">
+              <a:rPr lang="ja-JP" altLang="en-US" sz="1200" b="0" dirty="0">
                 <a:solidFill>
                   <a:srgbClr val="333333"/>
                 </a:solidFill>
@@ -18885,7 +20585,7 @@
               </a:rPr>
               <a:t>応募の直後に友だちになっていただき、面接・登録の案内をLINEで届ける</a:t>
             </a:r>
-            <a:endParaRPr lang="ja-JP" altLang="en-US" sz="1150" dirty="0"/>
+            <a:endParaRPr lang="ja-JP" altLang="en-US" sz="1200" dirty="0"/>
           </a:p>
         </p:txBody>
       </p:sp>
@@ -18922,7 +20622,7 @@
               <a:buNone/>
             </a:pPr>
             <a:r>
-              <a:rPr lang="ja-JP" altLang="en-US" sz="1200" b="1" dirty="0">
+              <a:rPr lang="ja-JP" altLang="en-US" sz="1400" b="1" dirty="0">
                 <a:solidFill>
                   <a:srgbClr val="FFFFFF"/>
                 </a:solidFill>
@@ -18931,7 +20631,7 @@
               </a:rPr>
               <a:t>勤務の前</a:t>
             </a:r>
-            <a:endParaRPr lang="ja-JP" altLang="en-US" sz="1200" dirty="0"/>
+            <a:endParaRPr lang="ja-JP" altLang="en-US" sz="1400" dirty="0"/>
           </a:p>
         </p:txBody>
       </p:sp>
@@ -18973,7 +20673,7 @@
               <a:buNone/>
             </a:pPr>
             <a:r>
-              <a:rPr lang="ja-JP" altLang="en-US" sz="1000" b="1" dirty="0">
+              <a:rPr lang="ja-JP" altLang="en-US" sz="1050" b="1" dirty="0">
                 <a:solidFill>
                   <a:srgbClr val="595959"/>
                 </a:solidFill>
@@ -18982,7 +20682,7 @@
               </a:rPr>
               <a:t>起きやすいこと（想定）</a:t>
             </a:r>
-            <a:endParaRPr lang="ja-JP" altLang="en-US" sz="1150" dirty="0"/>
+            <a:endParaRPr lang="ja-JP" altLang="en-US" sz="1200" dirty="0"/>
           </a:p>
           <a:p>
             <a:pPr algn="l">
@@ -18992,7 +20692,7 @@
               <a:buNone/>
             </a:pPr>
             <a:r>
-              <a:rPr lang="ja-JP" altLang="en-US" sz="1150" b="0" dirty="0">
+              <a:rPr lang="ja-JP" altLang="en-US" sz="1200" b="0" dirty="0">
                 <a:solidFill>
                   <a:srgbClr val="333333"/>
                 </a:solidFill>
@@ -19001,7 +20701,7 @@
               </a:rPr>
               <a:t>集合場所・時間・持ち物・服装の案内を、人数分くり返し送る</a:t>
             </a:r>
-            <a:endParaRPr lang="ja-JP" altLang="en-US" sz="1150" dirty="0"/>
+            <a:endParaRPr lang="ja-JP" altLang="en-US" sz="1200" dirty="0"/>
           </a:p>
         </p:txBody>
       </p:sp>
@@ -19034,7 +20734,7 @@
               <a:buNone/>
             </a:pPr>
             <a:r>
-              <a:rPr lang="ja-JP" altLang="en-US" sz="1400" b="0" dirty="0">
+              <a:rPr lang="ja-JP" altLang="en-US" sz="1600" b="0" dirty="0">
                 <a:solidFill>
                   <a:srgbClr val="1E2761"/>
                 </a:solidFill>
@@ -19043,7 +20743,7 @@
               </a:rPr>
               <a:t>▼</a:t>
             </a:r>
-            <a:endParaRPr lang="ja-JP" altLang="en-US" sz="1400" dirty="0"/>
+            <a:endParaRPr lang="ja-JP" altLang="en-US" sz="1600" dirty="0"/>
           </a:p>
         </p:txBody>
       </p:sp>
@@ -19085,7 +20785,7 @@
               <a:buNone/>
             </a:pPr>
             <a:r>
-              <a:rPr lang="ja-JP" altLang="en-US" sz="1000" b="1" dirty="0">
+              <a:rPr lang="ja-JP" altLang="en-US" sz="1050" b="1" dirty="0">
                 <a:solidFill>
                   <a:srgbClr val="323366"/>
                 </a:solidFill>
@@ -19094,7 +20794,7 @@
               </a:rPr>
               <a:t>LINEでできること</a:t>
             </a:r>
-            <a:endParaRPr lang="ja-JP" altLang="en-US" sz="1150" dirty="0"/>
+            <a:endParaRPr lang="ja-JP" altLang="en-US" sz="1200" dirty="0"/>
           </a:p>
           <a:p>
             <a:pPr algn="l">
@@ -19104,7 +20804,7 @@
               <a:buNone/>
             </a:pPr>
             <a:r>
-              <a:rPr lang="ja-JP" altLang="en-US" sz="1150" b="0" dirty="0">
+              <a:rPr lang="ja-JP" altLang="en-US" sz="1200" b="0" dirty="0">
                 <a:solidFill>
                   <a:srgbClr val="333333"/>
                 </a:solidFill>
@@ -19113,7 +20813,7 @@
               </a:rPr>
               <a:t>同じイベントの方へ一斉に、会場・業務ごとに絞って案内する</a:t>
             </a:r>
-            <a:endParaRPr lang="ja-JP" altLang="en-US" sz="1150" dirty="0"/>
+            <a:endParaRPr lang="ja-JP" altLang="en-US" sz="1200" dirty="0"/>
           </a:p>
         </p:txBody>
       </p:sp>
@@ -19150,7 +20850,7 @@
               <a:buNone/>
             </a:pPr>
             <a:r>
-              <a:rPr lang="ja-JP" altLang="en-US" sz="1200" b="1" dirty="0">
+              <a:rPr lang="ja-JP" altLang="en-US" sz="1400" b="1" dirty="0">
                 <a:solidFill>
                   <a:srgbClr val="FFFFFF"/>
                 </a:solidFill>
@@ -19159,7 +20859,7 @@
               </a:rPr>
               <a:t>勤務のあと</a:t>
             </a:r>
-            <a:endParaRPr lang="ja-JP" altLang="en-US" sz="1200" dirty="0"/>
+            <a:endParaRPr lang="ja-JP" altLang="en-US" sz="1400" dirty="0"/>
           </a:p>
         </p:txBody>
       </p:sp>
@@ -19201,7 +20901,7 @@
               <a:buNone/>
             </a:pPr>
             <a:r>
-              <a:rPr lang="ja-JP" altLang="en-US" sz="1000" b="1" dirty="0">
+              <a:rPr lang="ja-JP" altLang="en-US" sz="1050" b="1" dirty="0">
                 <a:solidFill>
                   <a:srgbClr val="595959"/>
                 </a:solidFill>
@@ -19210,7 +20910,7 @@
               </a:rPr>
               <a:t>起きやすいこと（想定）</a:t>
             </a:r>
-            <a:endParaRPr lang="ja-JP" altLang="en-US" sz="1150" dirty="0"/>
+            <a:endParaRPr lang="ja-JP" altLang="en-US" sz="1200" dirty="0"/>
           </a:p>
           <a:p>
             <a:pPr algn="l">
@@ -19220,7 +20920,7 @@
               <a:buNone/>
             </a:pPr>
             <a:r>
-              <a:rPr lang="ja-JP" altLang="en-US" sz="1150" b="0" dirty="0">
+              <a:rPr lang="ja-JP" altLang="en-US" sz="1200" b="0" dirty="0">
                 <a:solidFill>
                   <a:srgbClr val="333333"/>
                 </a:solidFill>
@@ -19229,7 +20929,7 @@
               </a:rPr>
               <a:t>次の募集を届ける手段が残らず、新規の募集に頼りがち</a:t>
             </a:r>
-            <a:endParaRPr lang="ja-JP" altLang="en-US" sz="1150" dirty="0"/>
+            <a:endParaRPr lang="ja-JP" altLang="en-US" sz="1200" dirty="0"/>
           </a:p>
         </p:txBody>
       </p:sp>
@@ -19262,7 +20962,7 @@
               <a:buNone/>
             </a:pPr>
             <a:r>
-              <a:rPr lang="ja-JP" altLang="en-US" sz="1400" b="0" dirty="0">
+              <a:rPr lang="ja-JP" altLang="en-US" sz="1600" b="0" dirty="0">
                 <a:solidFill>
                   <a:srgbClr val="1E2761"/>
                 </a:solidFill>
@@ -19271,7 +20971,7 @@
               </a:rPr>
               <a:t>▼</a:t>
             </a:r>
-            <a:endParaRPr lang="ja-JP" altLang="en-US" sz="1400" dirty="0"/>
+            <a:endParaRPr lang="ja-JP" altLang="en-US" sz="1600" dirty="0"/>
           </a:p>
         </p:txBody>
       </p:sp>
@@ -19313,7 +21013,7 @@
               <a:buNone/>
             </a:pPr>
             <a:r>
-              <a:rPr lang="ja-JP" altLang="en-US" sz="1000" b="1" dirty="0">
+              <a:rPr lang="ja-JP" altLang="en-US" sz="1050" b="1" dirty="0">
                 <a:solidFill>
                   <a:srgbClr val="323366"/>
                 </a:solidFill>
@@ -19322,7 +21022,7 @@
               </a:rPr>
               <a:t>LINEでできること</a:t>
             </a:r>
-            <a:endParaRPr lang="ja-JP" altLang="en-US" sz="1150" dirty="0"/>
+            <a:endParaRPr lang="ja-JP" altLang="en-US" sz="1200" dirty="0"/>
           </a:p>
           <a:p>
             <a:pPr algn="l">
@@ -19332,7 +21032,7 @@
               <a:buNone/>
             </a:pPr>
             <a:r>
-              <a:rPr lang="ja-JP" altLang="en-US" sz="1150" b="0" dirty="0">
+              <a:rPr lang="ja-JP" altLang="en-US" sz="1200" b="0" dirty="0">
                 <a:solidFill>
                   <a:srgbClr val="333333"/>
                 </a:solidFill>
@@ -19341,7 +21041,7 @@
               </a:rPr>
               <a:t>希望に合う次回イベントの募集を届け、再応募につなげる</a:t>
             </a:r>
-            <a:endParaRPr lang="ja-JP" altLang="en-US" sz="1150" dirty="0"/>
+            <a:endParaRPr lang="ja-JP" altLang="en-US" sz="1200" dirty="0"/>
           </a:p>
         </p:txBody>
       </p:sp>
@@ -19379,7 +21079,7 @@
             <a:pPr algn="l">
               <a:buNone/>
             </a:pPr>
-            <a:endParaRPr lang="ja-JP" altLang="en-US" sz="1100" dirty="0"/>
+            <a:endParaRPr lang="ja-JP" altLang="en-US" sz="1200" dirty="0"/>
           </a:p>
         </p:txBody>
       </p:sp>
@@ -19415,7 +21115,7 @@
               <a:buNone/>
             </a:pPr>
             <a:r>
-              <a:rPr lang="ja-JP" altLang="en-US" sz="1150" b="1" dirty="0">
+              <a:rPr lang="ja-JP" altLang="en-US" sz="1200" b="1" dirty="0">
                 <a:solidFill>
                   <a:srgbClr val="323366"/>
                 </a:solidFill>
@@ -19424,7 +21124,7 @@
               </a:rPr>
               <a:t>メッセージ開封率（当日中）</a:t>
             </a:r>
-            <a:endParaRPr lang="ja-JP" altLang="en-US" sz="1100" dirty="0"/>
+            <a:endParaRPr lang="ja-JP" altLang="en-US" sz="1200" dirty="0"/>
           </a:p>
           <a:p>
             <a:pPr algn="l">
@@ -19434,7 +21134,7 @@
               <a:buNone/>
             </a:pPr>
             <a:r>
-              <a:rPr lang="ja-JP" altLang="en-US" sz="1000" b="0" dirty="0">
+              <a:rPr lang="ja-JP" altLang="en-US" sz="1050" b="0" dirty="0">
                 <a:solidFill>
                   <a:srgbClr val="595959"/>
                 </a:solidFill>
@@ -19443,7 +21143,7 @@
               </a:rPr>
               <a:t>受信直後 約2割／3〜6時間で約5割</a:t>
             </a:r>
-            <a:endParaRPr lang="ja-JP" altLang="en-US" sz="1100" dirty="0"/>
+            <a:endParaRPr lang="ja-JP" altLang="en-US" sz="1200" dirty="0"/>
           </a:p>
         </p:txBody>
       </p:sp>
@@ -19476,7 +21176,7 @@
               <a:buNone/>
             </a:pPr>
             <a:r>
-              <a:rPr lang="ja-JP" altLang="en-US" sz="2400" b="1" dirty="0">
+              <a:rPr lang="ja-JP" altLang="en-US" sz="2800" b="1" dirty="0">
                 <a:solidFill>
                   <a:srgbClr val="323366"/>
                 </a:solidFill>
@@ -19485,7 +21185,7 @@
               </a:rPr>
               <a:t>約8割</a:t>
             </a:r>
-            <a:endParaRPr lang="ja-JP" altLang="en-US" sz="2400" dirty="0"/>
+            <a:endParaRPr lang="ja-JP" altLang="en-US" sz="2800" dirty="0"/>
           </a:p>
         </p:txBody>
       </p:sp>
@@ -19523,7 +21223,7 @@
             <a:pPr algn="l">
               <a:buNone/>
             </a:pPr>
-            <a:endParaRPr lang="ja-JP" altLang="en-US" sz="1100" dirty="0"/>
+            <a:endParaRPr lang="ja-JP" altLang="en-US" sz="1200" dirty="0"/>
           </a:p>
         </p:txBody>
       </p:sp>
@@ -19559,7 +21259,7 @@
               <a:buNone/>
             </a:pPr>
             <a:r>
-              <a:rPr lang="ja-JP" altLang="en-US" sz="1150" b="1" dirty="0">
+              <a:rPr lang="ja-JP" altLang="en-US" sz="1200" b="1" dirty="0">
                 <a:solidFill>
                   <a:srgbClr val="323366"/>
                 </a:solidFill>
@@ -19568,7 +21268,7 @@
               </a:rPr>
               <a:t>LINEの国内の月間利用者数</a:t>
             </a:r>
-            <a:endParaRPr lang="ja-JP" altLang="en-US" sz="1100" dirty="0"/>
+            <a:endParaRPr lang="ja-JP" altLang="en-US" sz="1200" dirty="0"/>
           </a:p>
           <a:p>
             <a:pPr algn="l">
@@ -19578,7 +21278,7 @@
               <a:buNone/>
             </a:pPr>
             <a:r>
-              <a:rPr lang="ja-JP" altLang="en-US" sz="1000" b="0" dirty="0">
+              <a:rPr lang="ja-JP" altLang="en-US" sz="1050" b="0" dirty="0">
                 <a:solidFill>
                   <a:srgbClr val="595959"/>
                 </a:solidFill>
@@ -19587,7 +21287,7 @@
               </a:rPr>
               <a:t>2025年12月末時点</a:t>
             </a:r>
-            <a:endParaRPr lang="ja-JP" altLang="en-US" sz="1100" dirty="0"/>
+            <a:endParaRPr lang="ja-JP" altLang="en-US" sz="1200" dirty="0"/>
           </a:p>
         </p:txBody>
       </p:sp>
@@ -19620,7 +21320,7 @@
               <a:buNone/>
             </a:pPr>
             <a:r>
-              <a:rPr lang="ja-JP" altLang="en-US" sz="2400" b="1" dirty="0">
+              <a:rPr lang="ja-JP" altLang="en-US" sz="2800" b="1" dirty="0">
                 <a:solidFill>
                   <a:srgbClr val="323366"/>
                 </a:solidFill>
@@ -19629,7 +21329,7 @@
               </a:rPr>
               <a:t>1億人突破</a:t>
             </a:r>
-            <a:endParaRPr lang="ja-JP" altLang="en-US" sz="2400" dirty="0"/>
+            <a:endParaRPr lang="ja-JP" altLang="en-US" sz="2800" dirty="0"/>
           </a:p>
         </p:txBody>
       </p:sp>

--- a/202610_株式会社横浜シミズ御中_LINE公式アカウント運用のご提案.pptx
+++ b/202610_株式会社横浜シミズ御中_LINE公式アカウント運用のご提案.pptx
@@ -13328,6 +13328,1500 @@
 </file>
 
 <file path=ppt/slides/slide16.xml><?xml version="1.0" encoding="utf-8"?>
+<p:sld xmlns:a="http://schemas.openxmlformats.org/drawingml/2006/main" xmlns:p="http://schemas.openxmlformats.org/presentationml/2006/main" xmlns:r="http://schemas.openxmlformats.org/officeDocument/2006/relationships">
+  <p:cSld>
+    <p:spTree>
+      <p:nvGrpSpPr>
+        <p:cNvPr id="1" name=""/>
+        <p:cNvGrpSpPr/>
+        <p:nvPr/>
+      </p:nvGrpSpPr>
+      <p:grpSpPr/>
+      <p:sp>
+        <p:nvSpPr>
+          <p:cNvPr id="635" name="Google Shape;752;p28"/>
+          <p:cNvSpPr/>
+          <p:nvPr/>
+        </p:nvSpPr>
+        <p:spPr>
+          <a:xfrm>
+            <a:off x="549000" y="138240"/>
+            <a:ext cx="6275880" cy="338040"/>
+          </a:xfrm>
+          <a:prstGeom prst="rect">
+            <a:avLst/>
+          </a:prstGeom>
+          <a:noFill/>
+          <a:ln w="0">
+            <a:noFill/>
+          </a:ln>
+        </p:spPr>
+        <p:style>
+          <a:lnRef idx="0">
+            <a:scrgbClr r="0" g="0" b="0"/>
+          </a:lnRef>
+          <a:fillRef idx="0">
+            <a:scrgbClr r="0" g="0" b="0"/>
+          </a:fillRef>
+          <a:effectRef idx="0">
+            <a:scrgbClr r="0" g="0" b="0"/>
+          </a:effectRef>
+          <a:fontRef idx="minor"/>
+        </p:style>
+        <p:txBody>
+          <a:bodyPr anchor="ctr">
+            <a:spAutoFit/>
+          </a:bodyPr>
+          <a:lstStyle/>
+          <a:p>
+            <a:pPr defTabSz="914400">
+              <a:lnSpc>
+                <a:spcPct val="100000"/>
+              </a:lnSpc>
+            </a:pPr>
+            <a:r>
+              <a:rPr lang="ja-JP" sz="1600" b="1" u="none" strike="noStrike">
+                <a:solidFill>
+                  <a:srgbClr val="323366"/>
+                </a:solidFill>
+                <a:effectLst/>
+                <a:uFillTx/>
+                <a:latin typeface="メイリオ"/>
+                <a:ea typeface="メイリオ"/>
+              </a:rPr>
+              <a:t>料金プラン（成果報酬）：月額を抑え、応募1件ごとにお支払い</a:t>
+            </a:r>
+            <a:endParaRPr lang="en-US" sz="1600" b="0" u="none" strike="noStrike">
+              <a:solidFill>
+                <a:srgbClr val="000000"/>
+              </a:solidFill>
+              <a:effectLst/>
+              <a:uFillTx/>
+              <a:latin typeface="メイリオ"/>
+            </a:endParaRPr>
+          </a:p>
+        </p:txBody>
+      </p:sp>
+      <p:sp>
+        <p:nvSpPr>
+          <p:cNvPr id="636" name="正方形/長方形 8"/>
+          <p:cNvSpPr/>
+          <p:nvPr/>
+        </p:nvSpPr>
+        <p:spPr>
+          <a:xfrm>
+            <a:off x="0" y="681480"/>
+            <a:ext cx="2914200" cy="502560"/>
+          </a:xfrm>
+          <a:prstGeom prst="rect">
+            <a:avLst/>
+          </a:prstGeom>
+          <a:solidFill>
+            <a:srgbClr val="002060"/>
+          </a:solidFill>
+          <a:ln>
+            <a:noFill/>
+          </a:ln>
+        </p:spPr>
+        <p:style>
+          <a:lnRef idx="2">
+            <a:schemeClr val="accent1">
+              <a:shade val="15000"/>
+            </a:schemeClr>
+          </a:lnRef>
+          <a:fillRef idx="1">
+            <a:schemeClr val="accent1"/>
+          </a:fillRef>
+          <a:effectRef idx="0">
+            <a:schemeClr val="accent1"/>
+          </a:effectRef>
+          <a:fontRef idx="minor"/>
+        </p:style>
+        <p:txBody>
+          <a:bodyPr lIns="90000" tIns="45000" rIns="90000" bIns="45000" anchor="ctr">
+            <a:noAutofit/>
+          </a:bodyPr>
+          <a:lstStyle/>
+          <a:p>
+            <a:pPr algn="ctr" defTabSz="914400">
+              <a:lnSpc>
+                <a:spcPct val="100000"/>
+              </a:lnSpc>
+            </a:pPr>
+            <a:r>
+              <a:rPr lang="ja-JP" sz="1400" b="0" u="none" strike="noStrike" dirty="0">
+                <a:solidFill>
+                  <a:schemeClr val="lt1"/>
+                </a:solidFill>
+                <a:effectLst/>
+                <a:uFillTx/>
+                <a:latin typeface="メイリオ"/>
+                <a:ea typeface="メイリオ"/>
+              </a:rPr>
+              <a:t>成果報酬プラン</a:t>
+            </a:r>
+            <a:endParaRPr lang="en-US" sz="1400" b="0" u="none" strike="noStrike" dirty="0">
+              <a:solidFill>
+                <a:srgbClr val="FFFFFF"/>
+              </a:solidFill>
+              <a:effectLst/>
+              <a:uFillTx/>
+              <a:latin typeface="メイリオ"/>
+            </a:endParaRPr>
+          </a:p>
+        </p:txBody>
+      </p:sp>
+      <p:sp>
+        <p:nvSpPr>
+          <p:cNvPr id="637" name="Google Shape;752;p28"/>
+          <p:cNvSpPr/>
+          <p:nvPr/>
+        </p:nvSpPr>
+        <p:spPr>
+          <a:xfrm>
+            <a:off x="2983680" y="783000"/>
+            <a:ext cx="6619680" cy="338040"/>
+          </a:xfrm>
+          <a:prstGeom prst="rect">
+            <a:avLst/>
+          </a:prstGeom>
+          <a:noFill/>
+          <a:ln w="0">
+            <a:noFill/>
+          </a:ln>
+        </p:spPr>
+        <p:style>
+          <a:lnRef idx="0">
+            <a:scrgbClr r="0" g="0" b="0"/>
+          </a:lnRef>
+          <a:fillRef idx="0">
+            <a:scrgbClr r="0" g="0" b="0"/>
+          </a:fillRef>
+          <a:effectRef idx="0">
+            <a:scrgbClr r="0" g="0" b="0"/>
+          </a:effectRef>
+          <a:fontRef idx="minor"/>
+        </p:style>
+        <p:txBody>
+          <a:bodyPr anchor="ctr">
+            <a:spAutoFit/>
+          </a:bodyPr>
+          <a:lstStyle/>
+          <a:p>
+            <a:pPr defTabSz="914400">
+              <a:lnSpc>
+                <a:spcPct val="100000"/>
+              </a:lnSpc>
+            </a:pPr>
+            <a:r>
+              <a:rPr lang="ja-JP" sz="1600" b="1" u="none" strike="noStrike" dirty="0">
+                <a:solidFill>
+                  <a:schemeClr val="dk1"/>
+                </a:solidFill>
+                <a:effectLst/>
+                <a:uFillTx/>
+                <a:latin typeface="メイリオ"/>
+                <a:ea typeface="メイリオ"/>
+              </a:rPr>
+              <a:t>初期費用は同じ。月額運用費の代わりに、応募1件ごとの成果報酬</a:t>
+            </a:r>
+            <a:endParaRPr lang="en-US" sz="1600" b="0" u="none" strike="noStrike" dirty="0">
+              <a:solidFill>
+                <a:srgbClr val="000000"/>
+              </a:solidFill>
+              <a:effectLst/>
+              <a:uFillTx/>
+              <a:latin typeface="メイリオ"/>
+            </a:endParaRPr>
+          </a:p>
+        </p:txBody>
+      </p:sp>
+      <p:graphicFrame>
+        <p:nvGraphicFramePr>
+          <p:cNvPr id="639" name="料金プラン比較表 638"/>
+          <p:cNvGraphicFramePr>
+            <a:graphicFrameLocks noGrp="1"/>
+          </p:cNvGraphicFramePr>
+          <p:nvPr>
+            <p:extLst>
+              <p:ext uri="{D42A27DB-BD31-4B8C-83A1-F6EECF244321}">
+                <p14:modId xmlns:p14="http://schemas.microsoft.com/office/powerpoint/2010/main" val="4252399329"/>
+              </p:ext>
+            </p:extLst>
+          </p:nvPr>
+        </p:nvGraphicFramePr>
+        <p:xfrm>
+          <a:off x="384048" y="1490760"/>
+          <a:ext cx="9144000" cy="3749040"/>
+        </p:xfrm>
+        <a:graphic>
+          <a:graphicData uri="http://schemas.openxmlformats.org/drawingml/2006/table">
+            <a:tbl>
+              <a:tblPr/>
+              <a:tblGrid>
+                <a:gridCol w="2743200">
+                  <a:extLst>
+                    <a:ext uri="{9D8B030D-6E8A-4147-A177-3AD203B41FA5}">
+                      <a16:colId xmlns:a16="http://schemas.microsoft.com/office/drawing/2014/main" val="20000"/>
+                    </a:ext>
+                  </a:extLst>
+                </a:gridCol>
+                <a:gridCol w="3200400">
+                  <a:extLst>
+                    <a:ext uri="{9D8B030D-6E8A-4147-A177-3AD203B41FA5}">
+                      <a16:colId xmlns:a16="http://schemas.microsoft.com/office/drawing/2014/main" val="20002"/>
+                    </a:ext>
+                  </a:extLst>
+                </a:gridCol>
+                <a:gridCol w="3200400">
+                  <a:extLst>
+                    <a:ext uri="{9D8B030D-6E8A-4147-A177-3AD203B41FA5}">
+                      <a16:colId xmlns:a16="http://schemas.microsoft.com/office/drawing/2014/main" val="20003"/>
+                    </a:ext>
+                  </a:extLst>
+                </a:gridCol>
+              </a:tblGrid>
+              <a:tr h="777240">
+                <a:tc>
+                  <a:txBody>
+                    <a:bodyPr/>
+                    <a:lstStyle/>
+                    <a:p>
+                      <a:pPr algn="ctr">
+                        <a:buNone/>
+                      </a:pPr>
+                      <a:r>
+                        <a:rPr lang="ja-JP" altLang="en-US" sz="1400" b="1" dirty="0">
+                          <a:solidFill>
+                            <a:srgbClr val="FFFFFF"/>
+                          </a:solidFill>
+                          <a:latin typeface="メイリオ" panose="020B0604030504040204" pitchFamily="50" charset="-128"/>
+                          <a:ea typeface="メイリオ" panose="020B0604030504040204" pitchFamily="50" charset="-128"/>
+                        </a:rPr>
+                        <a:t>項目</a:t>
+                      </a:r>
+                      <a:endParaRPr lang="ja-JP" altLang="en-US" sz="1400" dirty="0"/>
+                    </a:p>
+                  </a:txBody>
+                  <a:tcPr marL="73152" marR="73152" marT="27432" marB="27432" anchor="ctr">
+                    <a:lnL w="9525" cap="flat" cmpd="sng" algn="ctr">
+                      <a:solidFill>
+                        <a:srgbClr val="FFFFFF"/>
+                      </a:solidFill>
+                      <a:prstDash val="solid"/>
+                      <a:round/>
+                      <a:headEnd type="none" w="med" len="med"/>
+                      <a:tailEnd type="none" w="med" len="med"/>
+                    </a:lnL>
+                    <a:lnR w="9525" cap="flat" cmpd="sng" algn="ctr">
+                      <a:solidFill>
+                        <a:srgbClr val="FFFFFF"/>
+                      </a:solidFill>
+                      <a:prstDash val="solid"/>
+                      <a:round/>
+                      <a:headEnd type="none" w="med" len="med"/>
+                      <a:tailEnd type="none" w="med" len="med"/>
+                    </a:lnR>
+                    <a:lnT w="9525" cap="flat" cmpd="sng" algn="ctr">
+                      <a:solidFill>
+                        <a:srgbClr val="FFFFFF"/>
+                      </a:solidFill>
+                      <a:prstDash val="solid"/>
+                      <a:round/>
+                      <a:headEnd type="none" w="med" len="med"/>
+                      <a:tailEnd type="none" w="med" len="med"/>
+                    </a:lnT>
+                    <a:lnB w="9525" cap="flat" cmpd="sng" algn="ctr">
+                      <a:solidFill>
+                        <a:srgbClr val="FFFFFF"/>
+                      </a:solidFill>
+                      <a:prstDash val="solid"/>
+                      <a:round/>
+                      <a:headEnd type="none" w="med" len="med"/>
+                      <a:tailEnd type="none" w="med" len="med"/>
+                    </a:lnB>
+                    <a:solidFill>
+                      <a:srgbClr val="1F285A"/>
+                    </a:solidFill>
+                  </a:tcPr>
+                </a:tc>
+                <a:tc>
+                  <a:txBody>
+                    <a:bodyPr/>
+                    <a:lstStyle/>
+                    <a:p>
+                      <a:pPr algn="ctr">
+                        <a:buNone/>
+                      </a:pPr>
+                      <a:r>
+                        <a:rPr lang="ja-JP" altLang="en-US" sz="1400" b="1" dirty="0">
+                          <a:solidFill>
+                            <a:srgbClr val="FFFFFF"/>
+                          </a:solidFill>
+                          <a:latin typeface="メイリオ" panose="020B0604030504040204" pitchFamily="50" charset="-128"/>
+                          <a:ea typeface="メイリオ" panose="020B0604030504040204" pitchFamily="50" charset="-128"/>
+                        </a:rPr>
+                        <a:t>プラン②</a:t>
+                      </a:r>
+                      <a:endParaRPr lang="ja-JP" altLang="en-US" sz="1300" dirty="0"/>
+                    </a:p>
+                    <a:p>
+                      <a:pPr algn="ctr">
+                        <a:buNone/>
+                      </a:pPr>
+                      <a:r>
+                        <a:rPr lang="ja-JP" altLang="en-US" sz="1400" b="1" dirty="0">
+                          <a:solidFill>
+                            <a:srgbClr val="FFFFFF"/>
+                          </a:solidFill>
+                          <a:latin typeface="メイリオ" panose="020B0604030504040204" pitchFamily="50" charset="-128"/>
+                          <a:ea typeface="メイリオ" panose="020B0604030504040204" pitchFamily="50" charset="-128"/>
+                        </a:rPr>
+                        <a:t>運用代行・効率改善</a:t>
+                      </a:r>
+                      <a:endParaRPr lang="ja-JP" altLang="en-US" sz="1300" dirty="0"/>
+                    </a:p>
+                  </a:txBody>
+                  <a:tcPr marL="73152" marR="73152" marT="27432" marB="27432" anchor="ctr">
+                    <a:lnL w="9525" cap="flat" cmpd="sng" algn="ctr">
+                      <a:solidFill>
+                        <a:srgbClr val="FFFFFF"/>
+                      </a:solidFill>
+                      <a:prstDash val="solid"/>
+                      <a:round/>
+                      <a:headEnd type="none" w="med" len="med"/>
+                      <a:tailEnd type="none" w="med" len="med"/>
+                    </a:lnL>
+                    <a:lnR w="9525" cap="flat" cmpd="sng" algn="ctr">
+                      <a:solidFill>
+                        <a:srgbClr val="FFFFFF"/>
+                      </a:solidFill>
+                      <a:prstDash val="solid"/>
+                      <a:round/>
+                      <a:headEnd type="none" w="med" len="med"/>
+                      <a:tailEnd type="none" w="med" len="med"/>
+                    </a:lnR>
+                    <a:lnT w="9525" cap="flat" cmpd="sng" algn="ctr">
+                      <a:solidFill>
+                        <a:srgbClr val="FFFFFF"/>
+                      </a:solidFill>
+                      <a:prstDash val="solid"/>
+                      <a:round/>
+                      <a:headEnd type="none" w="med" len="med"/>
+                      <a:tailEnd type="none" w="med" len="med"/>
+                    </a:lnT>
+                    <a:lnB w="9525" cap="flat" cmpd="sng" algn="ctr">
+                      <a:solidFill>
+                        <a:srgbClr val="FFFFFF"/>
+                      </a:solidFill>
+                      <a:prstDash val="solid"/>
+                      <a:round/>
+                      <a:headEnd type="none" w="med" len="med"/>
+                      <a:tailEnd type="none" w="med" len="med"/>
+                    </a:lnB>
+                    <a:solidFill>
+                      <a:srgbClr val="1F285A"/>
+                    </a:solidFill>
+                  </a:tcPr>
+                </a:tc>
+                <a:tc>
+                  <a:txBody>
+                    <a:bodyPr/>
+                    <a:lstStyle/>
+                    <a:p>
+                      <a:pPr algn="ctr">
+                        <a:buNone/>
+                      </a:pPr>
+                      <a:r>
+                        <a:rPr lang="ja-JP" altLang="en-US" sz="1400" b="1" dirty="0">
+                          <a:solidFill>
+                            <a:srgbClr val="FFFFFF"/>
+                          </a:solidFill>
+                          <a:latin typeface="メイリオ" panose="020B0604030504040204" pitchFamily="50" charset="-128"/>
+                          <a:ea typeface="メイリオ" panose="020B0604030504040204" pitchFamily="50" charset="-128"/>
+                        </a:rPr>
+                        <a:t>プラン③</a:t>
+                      </a:r>
+                      <a:endParaRPr lang="ja-JP" altLang="en-US" sz="1300" dirty="0"/>
+                    </a:p>
+                    <a:p>
+                      <a:pPr algn="ctr">
+                        <a:buNone/>
+                      </a:pPr>
+                      <a:r>
+                        <a:rPr lang="ja-JP" altLang="en-US" sz="1400" b="1" dirty="0">
+                          <a:solidFill>
+                            <a:srgbClr val="FFFFFF"/>
+                          </a:solidFill>
+                          <a:latin typeface="メイリオ" panose="020B0604030504040204" pitchFamily="50" charset="-128"/>
+                          <a:ea typeface="メイリオ" panose="020B0604030504040204" pitchFamily="50" charset="-128"/>
+                        </a:rPr>
+                        <a:t>運用代行フルサポート</a:t>
+                      </a:r>
+                      <a:endParaRPr lang="ja-JP" altLang="en-US" sz="1300" dirty="0"/>
+                    </a:p>
+                  </a:txBody>
+                  <a:tcPr marL="73152" marR="73152" marT="27432" marB="27432" anchor="ctr">
+                    <a:lnL w="9525" cap="flat" cmpd="sng" algn="ctr">
+                      <a:solidFill>
+                        <a:srgbClr val="FFFFFF"/>
+                      </a:solidFill>
+                      <a:prstDash val="solid"/>
+                      <a:round/>
+                      <a:headEnd type="none" w="med" len="med"/>
+                      <a:tailEnd type="none" w="med" len="med"/>
+                    </a:lnL>
+                    <a:lnR w="9525" cap="flat" cmpd="sng" algn="ctr">
+                      <a:solidFill>
+                        <a:srgbClr val="FFFFFF"/>
+                      </a:solidFill>
+                      <a:prstDash val="solid"/>
+                      <a:round/>
+                      <a:headEnd type="none" w="med" len="med"/>
+                      <a:tailEnd type="none" w="med" len="med"/>
+                    </a:lnR>
+                    <a:lnT w="9525" cap="flat" cmpd="sng" algn="ctr">
+                      <a:solidFill>
+                        <a:srgbClr val="FFFFFF"/>
+                      </a:solidFill>
+                      <a:prstDash val="solid"/>
+                      <a:round/>
+                      <a:headEnd type="none" w="med" len="med"/>
+                      <a:tailEnd type="none" w="med" len="med"/>
+                    </a:lnT>
+                    <a:lnB w="9525" cap="flat" cmpd="sng" algn="ctr">
+                      <a:solidFill>
+                        <a:srgbClr val="FFFFFF"/>
+                      </a:solidFill>
+                      <a:prstDash val="solid"/>
+                      <a:round/>
+                      <a:headEnd type="none" w="med" len="med"/>
+                      <a:tailEnd type="none" w="med" len="med"/>
+                    </a:lnB>
+                    <a:solidFill>
+                      <a:srgbClr val="1F285A"/>
+                    </a:solidFill>
+                  </a:tcPr>
+                </a:tc>
+                <a:extLst>
+                  <a:ext uri="{0D108BD9-81ED-4DB2-BD59-A6C34878D82A}">
+                    <a16:rowId xmlns:a16="http://schemas.microsoft.com/office/drawing/2014/main" val="10000"/>
+                  </a:ext>
+                </a:extLst>
+              </a:tr>
+              <a:tr h="640080">
+                <a:tc>
+                  <a:txBody>
+                    <a:bodyPr/>
+                    <a:lstStyle/>
+                    <a:p>
+                      <a:pPr algn="ctr">
+                        <a:buNone/>
+                      </a:pPr>
+                      <a:r>
+                        <a:rPr lang="ja-JP" altLang="en-US" sz="1400" b="1" dirty="0">
+                          <a:solidFill>
+                            <a:srgbClr val="1F285A"/>
+                          </a:solidFill>
+                          <a:latin typeface="メイリオ" panose="020B0604030504040204" pitchFamily="50" charset="-128"/>
+                          <a:ea typeface="メイリオ" panose="020B0604030504040204" pitchFamily="50" charset="-128"/>
+                        </a:rPr>
+                        <a:t>初期費用</a:t>
+                      </a:r>
+                      <a:endParaRPr lang="ja-JP" altLang="en-US" sz="1400" dirty="0"/>
+                    </a:p>
+                  </a:txBody>
+                  <a:tcPr marL="73152" marR="73152" marT="27432" marB="27432" anchor="ctr">
+                    <a:lnL w="9525" cap="flat" cmpd="sng" algn="ctr">
+                      <a:solidFill>
+                        <a:srgbClr val="BFC8DC"/>
+                      </a:solidFill>
+                      <a:prstDash val="solid"/>
+                      <a:round/>
+                      <a:headEnd type="none" w="med" len="med"/>
+                      <a:tailEnd type="none" w="med" len="med"/>
+                    </a:lnL>
+                    <a:lnR w="9525" cap="flat" cmpd="sng" algn="ctr">
+                      <a:solidFill>
+                        <a:srgbClr val="BFC8DC"/>
+                      </a:solidFill>
+                      <a:prstDash val="solid"/>
+                      <a:round/>
+                      <a:headEnd type="none" w="med" len="med"/>
+                      <a:tailEnd type="none" w="med" len="med"/>
+                    </a:lnR>
+                    <a:lnT w="9525" cap="flat" cmpd="sng" algn="ctr">
+                      <a:solidFill>
+                        <a:srgbClr val="FFFFFF"/>
+                      </a:solidFill>
+                      <a:prstDash val="solid"/>
+                      <a:round/>
+                      <a:headEnd type="none" w="med" len="med"/>
+                      <a:tailEnd type="none" w="med" len="med"/>
+                    </a:lnT>
+                    <a:lnB w="9525" cap="flat" cmpd="sng" algn="ctr">
+                      <a:solidFill>
+                        <a:srgbClr val="BFC8DC"/>
+                      </a:solidFill>
+                      <a:prstDash val="solid"/>
+                      <a:round/>
+                      <a:headEnd type="none" w="med" len="med"/>
+                      <a:tailEnd type="none" w="med" len="med"/>
+                    </a:lnB>
+                    <a:solidFill>
+                      <a:srgbClr val="E8ECF6"/>
+                    </a:solidFill>
+                  </a:tcPr>
+                </a:tc>
+                <a:tc>
+                  <a:txBody>
+                    <a:bodyPr/>
+                    <a:lstStyle/>
+                    <a:p>
+                      <a:pPr algn="ctr">
+                        <a:buNone/>
+                      </a:pPr>
+                      <a:r>
+                        <a:rPr lang="ja-JP" altLang="en-US" sz="1500" b="0" dirty="0">
+                          <a:solidFill>
+                            <a:srgbClr val="333333"/>
+                          </a:solidFill>
+                          <a:latin typeface="メイリオ" panose="020B0604030504040204" pitchFamily="50" charset="-128"/>
+                          <a:ea typeface="メイリオ" panose="020B0604030504040204" pitchFamily="50" charset="-128"/>
+                        </a:rPr>
+                        <a:t>295,000円〜</a:t>
+                      </a:r>
+                      <a:endParaRPr lang="ja-JP" altLang="en-US" sz="1500" dirty="0"/>
+                    </a:p>
+                  </a:txBody>
+                  <a:tcPr marL="73152" marR="73152" marT="27432" marB="27432" anchor="ctr">
+                    <a:lnL w="9525" cap="flat" cmpd="sng" algn="ctr">
+                      <a:solidFill>
+                        <a:srgbClr val="BFC8DC"/>
+                      </a:solidFill>
+                      <a:prstDash val="solid"/>
+                      <a:round/>
+                      <a:headEnd type="none" w="med" len="med"/>
+                      <a:tailEnd type="none" w="med" len="med"/>
+                    </a:lnL>
+                    <a:lnR w="9525" cap="flat" cmpd="sng" algn="ctr">
+                      <a:solidFill>
+                        <a:srgbClr val="BFC8DC"/>
+                      </a:solidFill>
+                      <a:prstDash val="solid"/>
+                      <a:round/>
+                      <a:headEnd type="none" w="med" len="med"/>
+                      <a:tailEnd type="none" w="med" len="med"/>
+                    </a:lnR>
+                    <a:lnT w="9525" cap="flat" cmpd="sng" algn="ctr">
+                      <a:solidFill>
+                        <a:srgbClr val="FFFFFF"/>
+                      </a:solidFill>
+                      <a:prstDash val="solid"/>
+                      <a:round/>
+                      <a:headEnd type="none" w="med" len="med"/>
+                      <a:tailEnd type="none" w="med" len="med"/>
+                    </a:lnT>
+                    <a:lnB w="9525" cap="flat" cmpd="sng" algn="ctr">
+                      <a:solidFill>
+                        <a:srgbClr val="BFC8DC"/>
+                      </a:solidFill>
+                      <a:prstDash val="solid"/>
+                      <a:round/>
+                      <a:headEnd type="none" w="med" len="med"/>
+                      <a:tailEnd type="none" w="med" len="med"/>
+                    </a:lnB>
+                    <a:solidFill>
+                      <a:srgbClr val="FFFFFF"/>
+                    </a:solidFill>
+                  </a:tcPr>
+                </a:tc>
+                <a:tc>
+                  <a:txBody>
+                    <a:bodyPr/>
+                    <a:lstStyle/>
+                    <a:p>
+                      <a:pPr algn="ctr">
+                        <a:buNone/>
+                      </a:pPr>
+                      <a:r>
+                        <a:rPr lang="ja-JP" altLang="en-US" sz="1500" b="0" dirty="0">
+                          <a:solidFill>
+                            <a:srgbClr val="333333"/>
+                          </a:solidFill>
+                          <a:latin typeface="メイリオ" panose="020B0604030504040204" pitchFamily="50" charset="-128"/>
+                          <a:ea typeface="メイリオ" panose="020B0604030504040204" pitchFamily="50" charset="-128"/>
+                        </a:rPr>
+                        <a:t>295,000円〜</a:t>
+                      </a:r>
+                      <a:endParaRPr lang="ja-JP" altLang="en-US" sz="1500" dirty="0"/>
+                    </a:p>
+                  </a:txBody>
+                  <a:tcPr marL="73152" marR="73152" marT="27432" marB="27432" anchor="ctr">
+                    <a:lnL w="9525" cap="flat" cmpd="sng" algn="ctr">
+                      <a:solidFill>
+                        <a:srgbClr val="BFC8DC"/>
+                      </a:solidFill>
+                      <a:prstDash val="solid"/>
+                      <a:round/>
+                      <a:headEnd type="none" w="med" len="med"/>
+                      <a:tailEnd type="none" w="med" len="med"/>
+                    </a:lnL>
+                    <a:lnR w="9525" cap="flat" cmpd="sng" algn="ctr">
+                      <a:solidFill>
+                        <a:srgbClr val="BFC8DC"/>
+                      </a:solidFill>
+                      <a:prstDash val="solid"/>
+                      <a:round/>
+                      <a:headEnd type="none" w="med" len="med"/>
+                      <a:tailEnd type="none" w="med" len="med"/>
+                    </a:lnR>
+                    <a:lnT w="9525" cap="flat" cmpd="sng" algn="ctr">
+                      <a:solidFill>
+                        <a:srgbClr val="FFFFFF"/>
+                      </a:solidFill>
+                      <a:prstDash val="solid"/>
+                      <a:round/>
+                      <a:headEnd type="none" w="med" len="med"/>
+                      <a:tailEnd type="none" w="med" len="med"/>
+                    </a:lnT>
+                    <a:lnB w="9525" cap="flat" cmpd="sng" algn="ctr">
+                      <a:solidFill>
+                        <a:srgbClr val="BFC8DC"/>
+                      </a:solidFill>
+                      <a:prstDash val="solid"/>
+                      <a:round/>
+                      <a:headEnd type="none" w="med" len="med"/>
+                      <a:tailEnd type="none" w="med" len="med"/>
+                    </a:lnB>
+                    <a:solidFill>
+                      <a:srgbClr val="FFFFFF"/>
+                    </a:solidFill>
+                  </a:tcPr>
+                </a:tc>
+                <a:extLst>
+                  <a:ext uri="{0D108BD9-81ED-4DB2-BD59-A6C34878D82A}">
+                    <a16:rowId xmlns:a16="http://schemas.microsoft.com/office/drawing/2014/main" val="10001"/>
+                  </a:ext>
+                </a:extLst>
+              </a:tr>
+              <a:tr h="640080">
+                <a:tc>
+                  <a:txBody>
+                    <a:bodyPr/>
+                    <a:lstStyle/>
+                    <a:p>
+                      <a:pPr algn="ctr">
+                        <a:buNone/>
+                      </a:pPr>
+                      <a:r>
+                        <a:rPr lang="ja-JP" altLang="en-US" sz="1400" b="1" dirty="0">
+                          <a:solidFill>
+                            <a:srgbClr val="1F285A"/>
+                          </a:solidFill>
+                          <a:latin typeface="メイリオ" panose="020B0604030504040204" pitchFamily="50" charset="-128"/>
+                          <a:ea typeface="メイリオ" panose="020B0604030504040204" pitchFamily="50" charset="-128"/>
+                        </a:rPr>
+                        <a:t>成果報酬</a:t>
+                      </a:r>
+                      <a:endParaRPr lang="ja-JP" altLang="en-US" sz="1400" dirty="0"/>
+                    </a:p>
+                    <a:p>
+                      <a:pPr algn="ctr">
+                        <a:buNone/>
+                      </a:pPr>
+                      <a:r>
+                        <a:rPr lang="ja-JP" altLang="en-US" sz="1400" b="1" dirty="0">
+                          <a:solidFill>
+                            <a:srgbClr val="1F285A"/>
+                          </a:solidFill>
+                          <a:latin typeface="メイリオ" panose="020B0604030504040204" pitchFamily="50" charset="-128"/>
+                          <a:ea typeface="メイリオ" panose="020B0604030504040204" pitchFamily="50" charset="-128"/>
+                        </a:rPr>
+                        <a:t>（応募1件）</a:t>
+                      </a:r>
+                      <a:endParaRPr lang="ja-JP" altLang="en-US" sz="1400" dirty="0"/>
+                    </a:p>
+                  </a:txBody>
+                  <a:tcPr marL="73152" marR="73152" marT="27432" marB="27432" anchor="ctr">
+                    <a:lnL w="9525" cap="flat" cmpd="sng" algn="ctr">
+                      <a:solidFill>
+                        <a:srgbClr val="BFC8DC"/>
+                      </a:solidFill>
+                      <a:prstDash val="solid"/>
+                      <a:round/>
+                      <a:headEnd type="none" w="med" len="med"/>
+                      <a:tailEnd type="none" w="med" len="med"/>
+                    </a:lnL>
+                    <a:lnR w="9525" cap="flat" cmpd="sng" algn="ctr">
+                      <a:solidFill>
+                        <a:srgbClr val="BFC8DC"/>
+                      </a:solidFill>
+                      <a:prstDash val="solid"/>
+                      <a:round/>
+                      <a:headEnd type="none" w="med" len="med"/>
+                      <a:tailEnd type="none" w="med" len="med"/>
+                    </a:lnR>
+                    <a:lnT w="9525" cap="flat" cmpd="sng" algn="ctr">
+                      <a:solidFill>
+                        <a:srgbClr val="BFC8DC"/>
+                      </a:solidFill>
+                      <a:prstDash val="solid"/>
+                      <a:round/>
+                      <a:headEnd type="none" w="med" len="med"/>
+                      <a:tailEnd type="none" w="med" len="med"/>
+                    </a:lnT>
+                    <a:lnB w="9525" cap="flat" cmpd="sng" algn="ctr">
+                      <a:solidFill>
+                        <a:srgbClr val="BFC8DC"/>
+                      </a:solidFill>
+                      <a:prstDash val="solid"/>
+                      <a:round/>
+                      <a:headEnd type="none" w="med" len="med"/>
+                      <a:tailEnd type="none" w="med" len="med"/>
+                    </a:lnB>
+                    <a:solidFill>
+                      <a:srgbClr val="E8ECF6"/>
+                    </a:solidFill>
+                  </a:tcPr>
+                </a:tc>
+                <a:tc>
+                  <a:txBody>
+                    <a:bodyPr/>
+                    <a:lstStyle/>
+                    <a:p>
+                      <a:pPr algn="ctr">
+                        <a:buNone/>
+                      </a:pPr>
+                      <a:r>
+                        <a:rPr lang="ja-JP" altLang="en-US" sz="1500" b="0" dirty="0">
+                          <a:solidFill>
+                            <a:srgbClr val="333333"/>
+                          </a:solidFill>
+                          <a:latin typeface="メイリオ" panose="020B0604030504040204" pitchFamily="50" charset="-128"/>
+                          <a:ea typeface="メイリオ" panose="020B0604030504040204" pitchFamily="50" charset="-128"/>
+                        </a:rPr>
+                        <a:t>6,000円</a:t>
+                      </a:r>
+                      <a:endParaRPr lang="ja-JP" altLang="en-US" sz="1500" dirty="0"/>
+                    </a:p>
+                  </a:txBody>
+                  <a:tcPr marL="73152" marR="73152" marT="27432" marB="27432" anchor="ctr">
+                    <a:lnL w="9525" cap="flat" cmpd="sng" algn="ctr">
+                      <a:solidFill>
+                        <a:srgbClr val="BFC8DC"/>
+                      </a:solidFill>
+                      <a:prstDash val="solid"/>
+                      <a:round/>
+                      <a:headEnd type="none" w="med" len="med"/>
+                      <a:tailEnd type="none" w="med" len="med"/>
+                    </a:lnL>
+                    <a:lnR w="9525" cap="flat" cmpd="sng" algn="ctr">
+                      <a:solidFill>
+                        <a:srgbClr val="BFC8DC"/>
+                      </a:solidFill>
+                      <a:prstDash val="solid"/>
+                      <a:round/>
+                      <a:headEnd type="none" w="med" len="med"/>
+                      <a:tailEnd type="none" w="med" len="med"/>
+                    </a:lnR>
+                    <a:lnT w="9525" cap="flat" cmpd="sng" algn="ctr">
+                      <a:solidFill>
+                        <a:srgbClr val="BFC8DC"/>
+                      </a:solidFill>
+                      <a:prstDash val="solid"/>
+                      <a:round/>
+                      <a:headEnd type="none" w="med" len="med"/>
+                      <a:tailEnd type="none" w="med" len="med"/>
+                    </a:lnT>
+                    <a:lnB w="9525" cap="flat" cmpd="sng" algn="ctr">
+                      <a:solidFill>
+                        <a:srgbClr val="BFC8DC"/>
+                      </a:solidFill>
+                      <a:prstDash val="solid"/>
+                      <a:round/>
+                      <a:headEnd type="none" w="med" len="med"/>
+                      <a:tailEnd type="none" w="med" len="med"/>
+                    </a:lnB>
+                    <a:solidFill>
+                      <a:srgbClr val="FFFFFF"/>
+                    </a:solidFill>
+                  </a:tcPr>
+                </a:tc>
+                <a:tc>
+                  <a:txBody>
+                    <a:bodyPr/>
+                    <a:lstStyle/>
+                    <a:p>
+                      <a:pPr algn="ctr">
+                        <a:buNone/>
+                      </a:pPr>
+                      <a:r>
+                        <a:rPr lang="ja-JP" altLang="en-US" sz="1500" b="0" dirty="0">
+                          <a:solidFill>
+                            <a:srgbClr val="333333"/>
+                          </a:solidFill>
+                          <a:latin typeface="メイリオ" panose="020B0604030504040204" pitchFamily="50" charset="-128"/>
+                          <a:ea typeface="メイリオ" panose="020B0604030504040204" pitchFamily="50" charset="-128"/>
+                        </a:rPr>
+                        <a:t>10,000円</a:t>
+                      </a:r>
+                      <a:endParaRPr lang="ja-JP" altLang="en-US" sz="1500" dirty="0"/>
+                    </a:p>
+                  </a:txBody>
+                  <a:tcPr marL="73152" marR="73152" marT="27432" marB="27432" anchor="ctr">
+                    <a:lnL w="9525" cap="flat" cmpd="sng" algn="ctr">
+                      <a:solidFill>
+                        <a:srgbClr val="BFC8DC"/>
+                      </a:solidFill>
+                      <a:prstDash val="solid"/>
+                      <a:round/>
+                      <a:headEnd type="none" w="med" len="med"/>
+                      <a:tailEnd type="none" w="med" len="med"/>
+                    </a:lnL>
+                    <a:lnR w="9525" cap="flat" cmpd="sng" algn="ctr">
+                      <a:solidFill>
+                        <a:srgbClr val="BFC8DC"/>
+                      </a:solidFill>
+                      <a:prstDash val="solid"/>
+                      <a:round/>
+                      <a:headEnd type="none" w="med" len="med"/>
+                      <a:tailEnd type="none" w="med" len="med"/>
+                    </a:lnR>
+                    <a:lnT w="9525" cap="flat" cmpd="sng" algn="ctr">
+                      <a:solidFill>
+                        <a:srgbClr val="BFC8DC"/>
+                      </a:solidFill>
+                      <a:prstDash val="solid"/>
+                      <a:round/>
+                      <a:headEnd type="none" w="med" len="med"/>
+                      <a:tailEnd type="none" w="med" len="med"/>
+                    </a:lnT>
+                    <a:lnB w="9525" cap="flat" cmpd="sng" algn="ctr">
+                      <a:solidFill>
+                        <a:srgbClr val="BFC8DC"/>
+                      </a:solidFill>
+                      <a:prstDash val="solid"/>
+                      <a:round/>
+                      <a:headEnd type="none" w="med" len="med"/>
+                      <a:tailEnd type="none" w="med" len="med"/>
+                    </a:lnB>
+                    <a:solidFill>
+                      <a:srgbClr val="FFFFFF"/>
+                    </a:solidFill>
+                  </a:tcPr>
+                </a:tc>
+                <a:extLst>
+                  <a:ext uri="{0D108BD9-81ED-4DB2-BD59-A6C34878D82A}">
+                    <a16:rowId xmlns:a16="http://schemas.microsoft.com/office/drawing/2014/main" val="10002"/>
+                  </a:ext>
+                </a:extLst>
+              </a:tr>
+              <a:tr h="777240">
+                <a:tc>
+                  <a:txBody>
+                    <a:bodyPr/>
+                    <a:lstStyle/>
+                    <a:p>
+                      <a:pPr algn="ctr">
+                        <a:buNone/>
+                      </a:pPr>
+                      <a:r>
+                        <a:rPr lang="ja-JP" altLang="en-US" sz="1400" b="1" dirty="0">
+                          <a:solidFill>
+                            <a:srgbClr val="1F285A"/>
+                          </a:solidFill>
+                          <a:latin typeface="メイリオ" panose="020B0604030504040204" pitchFamily="50" charset="-128"/>
+                          <a:ea typeface="メイリオ" panose="020B0604030504040204" pitchFamily="50" charset="-128"/>
+                        </a:rPr>
+                        <a:t>月額ツール・LINE関連費</a:t>
+                      </a:r>
+                      <a:endParaRPr lang="ja-JP" altLang="en-US" sz="1400" dirty="0"/>
+                    </a:p>
+                  </a:txBody>
+                  <a:tcPr marL="27432" marR="27432" marT="27432" marB="27432" anchor="ctr">
+                    <a:lnL w="9525" cap="flat" cmpd="sng" algn="ctr">
+                      <a:solidFill>
+                        <a:srgbClr val="BFC8DC"/>
+                      </a:solidFill>
+                      <a:prstDash val="solid"/>
+                      <a:round/>
+                      <a:headEnd type="none" w="med" len="med"/>
+                      <a:tailEnd type="none" w="med" len="med"/>
+                    </a:lnL>
+                    <a:lnR w="9525" cap="flat" cmpd="sng" algn="ctr">
+                      <a:solidFill>
+                        <a:srgbClr val="BFC8DC"/>
+                      </a:solidFill>
+                      <a:prstDash val="solid"/>
+                      <a:round/>
+                      <a:headEnd type="none" w="med" len="med"/>
+                      <a:tailEnd type="none" w="med" len="med"/>
+                    </a:lnR>
+                    <a:lnT w="9525" cap="flat" cmpd="sng" algn="ctr">
+                      <a:solidFill>
+                        <a:srgbClr val="BFC8DC"/>
+                      </a:solidFill>
+                      <a:prstDash val="solid"/>
+                      <a:round/>
+                      <a:headEnd type="none" w="med" len="med"/>
+                      <a:tailEnd type="none" w="med" len="med"/>
+                    </a:lnT>
+                    <a:lnB w="9525" cap="flat" cmpd="sng" algn="ctr">
+                      <a:solidFill>
+                        <a:srgbClr val="BFC8DC"/>
+                      </a:solidFill>
+                      <a:prstDash val="solid"/>
+                      <a:round/>
+                      <a:headEnd type="none" w="med" len="med"/>
+                      <a:tailEnd type="none" w="med" len="med"/>
+                    </a:lnB>
+                    <a:solidFill>
+                      <a:srgbClr val="E8ECF6"/>
+                    </a:solidFill>
+                  </a:tcPr>
+                </a:tc>
+                <a:tc>
+                  <a:txBody>
+                    <a:bodyPr/>
+                    <a:lstStyle/>
+                    <a:p>
+                      <a:pPr algn="ctr">
+                        <a:buNone/>
+                      </a:pPr>
+                      <a:r>
+                        <a:rPr lang="ja-JP" altLang="en-US" sz="1500" b="0" dirty="0">
+                          <a:solidFill>
+                            <a:srgbClr val="333333"/>
+                          </a:solidFill>
+                          <a:latin typeface="メイリオ" panose="020B0604030504040204" pitchFamily="50" charset="-128"/>
+                          <a:ea typeface="メイリオ" panose="020B0604030504040204" pitchFamily="50" charset="-128"/>
+                        </a:rPr>
+                        <a:t>65,000円〜</a:t>
+                      </a:r>
+                      <a:endParaRPr lang="ja-JP" altLang="en-US" sz="1500" dirty="0"/>
+                    </a:p>
+                  </a:txBody>
+                  <a:tcPr marL="73152" marR="73152" marT="27432" marB="27432" anchor="ctr">
+                    <a:lnL w="9525" cap="flat" cmpd="sng" algn="ctr">
+                      <a:solidFill>
+                        <a:srgbClr val="BFC8DC"/>
+                      </a:solidFill>
+                      <a:prstDash val="solid"/>
+                      <a:round/>
+                      <a:headEnd type="none" w="med" len="med"/>
+                      <a:tailEnd type="none" w="med" len="med"/>
+                    </a:lnL>
+                    <a:lnR w="9525" cap="flat" cmpd="sng" algn="ctr">
+                      <a:solidFill>
+                        <a:srgbClr val="BFC8DC"/>
+                      </a:solidFill>
+                      <a:prstDash val="solid"/>
+                      <a:round/>
+                      <a:headEnd type="none" w="med" len="med"/>
+                      <a:tailEnd type="none" w="med" len="med"/>
+                    </a:lnR>
+                    <a:lnT w="9525" cap="flat" cmpd="sng" algn="ctr">
+                      <a:solidFill>
+                        <a:srgbClr val="BFC8DC"/>
+                      </a:solidFill>
+                      <a:prstDash val="solid"/>
+                      <a:round/>
+                      <a:headEnd type="none" w="med" len="med"/>
+                      <a:tailEnd type="none" w="med" len="med"/>
+                    </a:lnT>
+                    <a:lnB w="9525" cap="flat" cmpd="sng" algn="ctr">
+                      <a:solidFill>
+                        <a:srgbClr val="BFC8DC"/>
+                      </a:solidFill>
+                      <a:prstDash val="solid"/>
+                      <a:round/>
+                      <a:headEnd type="none" w="med" len="med"/>
+                      <a:tailEnd type="none" w="med" len="med"/>
+                    </a:lnB>
+                    <a:solidFill>
+                      <a:srgbClr val="FFFFFF"/>
+                    </a:solidFill>
+                  </a:tcPr>
+                </a:tc>
+                <a:tc>
+                  <a:txBody>
+                    <a:bodyPr/>
+                    <a:lstStyle/>
+                    <a:p>
+                      <a:pPr algn="ctr">
+                        <a:buNone/>
+                      </a:pPr>
+                      <a:r>
+                        <a:rPr lang="ja-JP" altLang="en-US" sz="1500" b="0" dirty="0">
+                          <a:solidFill>
+                            <a:srgbClr val="333333"/>
+                          </a:solidFill>
+                          <a:latin typeface="メイリオ" panose="020B0604030504040204" pitchFamily="50" charset="-128"/>
+                          <a:ea typeface="メイリオ" panose="020B0604030504040204" pitchFamily="50" charset="-128"/>
+                        </a:rPr>
+                        <a:t>65,000円〜</a:t>
+                      </a:r>
+                      <a:endParaRPr lang="ja-JP" altLang="en-US" sz="1500" dirty="0"/>
+                    </a:p>
+                  </a:txBody>
+                  <a:tcPr marL="73152" marR="73152" marT="27432" marB="27432" anchor="ctr">
+                    <a:lnL w="9525" cap="flat" cmpd="sng" algn="ctr">
+                      <a:solidFill>
+                        <a:srgbClr val="BFC8DC"/>
+                      </a:solidFill>
+                      <a:prstDash val="solid"/>
+                      <a:round/>
+                      <a:headEnd type="none" w="med" len="med"/>
+                      <a:tailEnd type="none" w="med" len="med"/>
+                    </a:lnL>
+                    <a:lnR w="9525" cap="flat" cmpd="sng" algn="ctr">
+                      <a:solidFill>
+                        <a:srgbClr val="BFC8DC"/>
+                      </a:solidFill>
+                      <a:prstDash val="solid"/>
+                      <a:round/>
+                      <a:headEnd type="none" w="med" len="med"/>
+                      <a:tailEnd type="none" w="med" len="med"/>
+                    </a:lnR>
+                    <a:lnT w="9525" cap="flat" cmpd="sng" algn="ctr">
+                      <a:solidFill>
+                        <a:srgbClr val="BFC8DC"/>
+                      </a:solidFill>
+                      <a:prstDash val="solid"/>
+                      <a:round/>
+                      <a:headEnd type="none" w="med" len="med"/>
+                      <a:tailEnd type="none" w="med" len="med"/>
+                    </a:lnT>
+                    <a:lnB w="9525" cap="flat" cmpd="sng" algn="ctr">
+                      <a:solidFill>
+                        <a:srgbClr val="BFC8DC"/>
+                      </a:solidFill>
+                      <a:prstDash val="solid"/>
+                      <a:round/>
+                      <a:headEnd type="none" w="med" len="med"/>
+                      <a:tailEnd type="none" w="med" len="med"/>
+                    </a:lnB>
+                    <a:solidFill>
+                      <a:srgbClr val="FFFFFF"/>
+                    </a:solidFill>
+                  </a:tcPr>
+                </a:tc>
+                <a:extLst>
+                  <a:ext uri="{0D108BD9-81ED-4DB2-BD59-A6C34878D82A}">
+                    <a16:rowId xmlns:a16="http://schemas.microsoft.com/office/drawing/2014/main" val="10003"/>
+                  </a:ext>
+                </a:extLst>
+              </a:tr>
+              <a:tr h="914400">
+                <a:tc>
+                  <a:txBody>
+                    <a:bodyPr/>
+                    <a:lstStyle/>
+                    <a:p>
+                      <a:pPr algn="ctr">
+                        <a:buNone/>
+                      </a:pPr>
+                      <a:r>
+                        <a:rPr lang="ja-JP" altLang="en-US" sz="1400" b="1" dirty="0">
+                          <a:solidFill>
+                            <a:srgbClr val="FFFFFF"/>
+                          </a:solidFill>
+                          <a:latin typeface="メイリオ" panose="020B0604030504040204" pitchFamily="50" charset="-128"/>
+                          <a:ea typeface="メイリオ" panose="020B0604030504040204" pitchFamily="50" charset="-128"/>
+                        </a:rPr>
+                        <a:t>月額費用</a:t>
+                      </a:r>
+                      <a:endParaRPr lang="ja-JP" altLang="en-US" sz="1400" dirty="0"/>
+                    </a:p>
+                  </a:txBody>
+                  <a:tcPr marL="73152" marR="73152" marT="27432" marB="27432" anchor="ctr">
+                    <a:lnL w="9525" cap="flat" cmpd="sng" algn="ctr">
+                      <a:solidFill>
+                        <a:srgbClr val="BFC8DC"/>
+                      </a:solidFill>
+                      <a:prstDash val="solid"/>
+                      <a:round/>
+                      <a:headEnd type="none" w="med" len="med"/>
+                      <a:tailEnd type="none" w="med" len="med"/>
+                    </a:lnL>
+                    <a:lnR w="9525" cap="flat" cmpd="sng" algn="ctr">
+                      <a:solidFill>
+                        <a:srgbClr val="BFC8DC"/>
+                      </a:solidFill>
+                      <a:prstDash val="solid"/>
+                      <a:round/>
+                      <a:headEnd type="none" w="med" len="med"/>
+                      <a:tailEnd type="none" w="med" len="med"/>
+                    </a:lnR>
+                    <a:lnT w="9525" cap="flat" cmpd="sng" algn="ctr">
+                      <a:solidFill>
+                        <a:srgbClr val="BFC8DC"/>
+                      </a:solidFill>
+                      <a:prstDash val="solid"/>
+                      <a:round/>
+                      <a:headEnd type="none" w="med" len="med"/>
+                      <a:tailEnd type="none" w="med" len="med"/>
+                    </a:lnT>
+                    <a:lnB w="9525" cap="flat" cmpd="sng" algn="ctr">
+                      <a:solidFill>
+                        <a:srgbClr val="BFC8DC"/>
+                      </a:solidFill>
+                      <a:prstDash val="solid"/>
+                      <a:round/>
+                      <a:headEnd type="none" w="med" len="med"/>
+                      <a:tailEnd type="none" w="med" len="med"/>
+                    </a:lnB>
+                    <a:solidFill>
+                      <a:srgbClr val="1F285A"/>
+                    </a:solidFill>
+                  </a:tcPr>
+                </a:tc>
+                <a:tc>
+                  <a:txBody>
+                    <a:bodyPr/>
+                    <a:lstStyle/>
+                    <a:p>
+                      <a:pPr algn="ctr">
+                        <a:buNone/>
+                      </a:pPr>
+                      <a:r>
+                        <a:rPr lang="ja-JP" altLang="en-US" sz="2000" b="1" dirty="0">
+                          <a:solidFill>
+                            <a:srgbClr val="1F285A"/>
+                          </a:solidFill>
+                          <a:latin typeface="メイリオ" panose="020B0604030504040204" pitchFamily="50" charset="-128"/>
+                          <a:ea typeface="メイリオ" panose="020B0604030504040204" pitchFamily="50" charset="-128"/>
+                        </a:rPr>
+                        <a:t>65,000円〜</a:t>
+                      </a:r>
+                      <a:endParaRPr lang="ja-JP" altLang="en-US" sz="2000" dirty="0"/>
+                    </a:p>
+                    <a:p>
+                      <a:pPr algn="ctr">
+                        <a:buNone/>
+                      </a:pPr>
+                      <a:r>
+                        <a:rPr lang="ja-JP" altLang="en-US" sz="2000" b="1" dirty="0">
+                          <a:solidFill>
+                            <a:srgbClr val="1F285A"/>
+                          </a:solidFill>
+                          <a:latin typeface="メイリオ" panose="020B0604030504040204" pitchFamily="50" charset="-128"/>
+                          <a:ea typeface="メイリオ" panose="020B0604030504040204" pitchFamily="50" charset="-128"/>
+                        </a:rPr>
+                        <a:t>＋成果報酬</a:t>
+                      </a:r>
+                      <a:endParaRPr lang="ja-JP" altLang="en-US" sz="2000" dirty="0"/>
+                    </a:p>
+                  </a:txBody>
+                  <a:tcPr marL="73152" marR="73152" marT="27432" marB="27432" anchor="ctr">
+                    <a:lnL w="9525" cap="flat" cmpd="sng" algn="ctr">
+                      <a:solidFill>
+                        <a:srgbClr val="BFC8DC"/>
+                      </a:solidFill>
+                      <a:prstDash val="solid"/>
+                      <a:round/>
+                      <a:headEnd type="none" w="med" len="med"/>
+                      <a:tailEnd type="none" w="med" len="med"/>
+                    </a:lnL>
+                    <a:lnR w="9525" cap="flat" cmpd="sng" algn="ctr">
+                      <a:solidFill>
+                        <a:srgbClr val="BFC8DC"/>
+                      </a:solidFill>
+                      <a:prstDash val="solid"/>
+                      <a:round/>
+                      <a:headEnd type="none" w="med" len="med"/>
+                      <a:tailEnd type="none" w="med" len="med"/>
+                    </a:lnR>
+                    <a:lnT w="9525" cap="flat" cmpd="sng" algn="ctr">
+                      <a:solidFill>
+                        <a:srgbClr val="BFC8DC"/>
+                      </a:solidFill>
+                      <a:prstDash val="solid"/>
+                      <a:round/>
+                      <a:headEnd type="none" w="med" len="med"/>
+                      <a:tailEnd type="none" w="med" len="med"/>
+                    </a:lnT>
+                    <a:lnB w="9525" cap="flat" cmpd="sng" algn="ctr">
+                      <a:solidFill>
+                        <a:srgbClr val="BFC8DC"/>
+                      </a:solidFill>
+                      <a:prstDash val="solid"/>
+                      <a:round/>
+                      <a:headEnd type="none" w="med" len="med"/>
+                      <a:tailEnd type="none" w="med" len="med"/>
+                    </a:lnB>
+                    <a:solidFill>
+                      <a:srgbClr val="E8ECF6"/>
+                    </a:solidFill>
+                  </a:tcPr>
+                </a:tc>
+                <a:tc>
+                  <a:txBody>
+                    <a:bodyPr/>
+                    <a:lstStyle/>
+                    <a:p>
+                      <a:pPr algn="ctr">
+                        <a:buNone/>
+                      </a:pPr>
+                      <a:r>
+                        <a:rPr lang="ja-JP" altLang="en-US" sz="2000" b="1" dirty="0">
+                          <a:solidFill>
+                            <a:srgbClr val="1F285A"/>
+                          </a:solidFill>
+                          <a:latin typeface="メイリオ" panose="020B0604030504040204" pitchFamily="50" charset="-128"/>
+                          <a:ea typeface="メイリオ" panose="020B0604030504040204" pitchFamily="50" charset="-128"/>
+                        </a:rPr>
+                        <a:t>65,000円〜</a:t>
+                      </a:r>
+                      <a:endParaRPr lang="ja-JP" altLang="en-US" sz="2000" dirty="0"/>
+                    </a:p>
+                    <a:p>
+                      <a:pPr algn="ctr">
+                        <a:buNone/>
+                      </a:pPr>
+                      <a:r>
+                        <a:rPr lang="ja-JP" altLang="en-US" sz="2000" b="1" dirty="0">
+                          <a:solidFill>
+                            <a:srgbClr val="1F285A"/>
+                          </a:solidFill>
+                          <a:latin typeface="メイリオ" panose="020B0604030504040204" pitchFamily="50" charset="-128"/>
+                          <a:ea typeface="メイリオ" panose="020B0604030504040204" pitchFamily="50" charset="-128"/>
+                        </a:rPr>
+                        <a:t>＋成果報酬</a:t>
+                      </a:r>
+                      <a:endParaRPr lang="ja-JP" altLang="en-US" sz="2000" dirty="0"/>
+                    </a:p>
+                  </a:txBody>
+                  <a:tcPr marL="73152" marR="73152" marT="27432" marB="27432" anchor="ctr">
+                    <a:lnL w="9525" cap="flat" cmpd="sng" algn="ctr">
+                      <a:solidFill>
+                        <a:srgbClr val="BFC8DC"/>
+                      </a:solidFill>
+                      <a:prstDash val="solid"/>
+                      <a:round/>
+                      <a:headEnd type="none" w="med" len="med"/>
+                      <a:tailEnd type="none" w="med" len="med"/>
+                    </a:lnL>
+                    <a:lnR w="9525" cap="flat" cmpd="sng" algn="ctr">
+                      <a:solidFill>
+                        <a:srgbClr val="BFC8DC"/>
+                      </a:solidFill>
+                      <a:prstDash val="solid"/>
+                      <a:round/>
+                      <a:headEnd type="none" w="med" len="med"/>
+                      <a:tailEnd type="none" w="med" len="med"/>
+                    </a:lnR>
+                    <a:lnT w="9525" cap="flat" cmpd="sng" algn="ctr">
+                      <a:solidFill>
+                        <a:srgbClr val="BFC8DC"/>
+                      </a:solidFill>
+                      <a:prstDash val="solid"/>
+                      <a:round/>
+                      <a:headEnd type="none" w="med" len="med"/>
+                      <a:tailEnd type="none" w="med" len="med"/>
+                    </a:lnT>
+                    <a:lnB w="9525" cap="flat" cmpd="sng" algn="ctr">
+                      <a:solidFill>
+                        <a:srgbClr val="BFC8DC"/>
+                      </a:solidFill>
+                      <a:prstDash val="solid"/>
+                      <a:round/>
+                      <a:headEnd type="none" w="med" len="med"/>
+                      <a:tailEnd type="none" w="med" len="med"/>
+                    </a:lnB>
+                    <a:solidFill>
+                      <a:srgbClr val="E8ECF6"/>
+                    </a:solidFill>
+                  </a:tcPr>
+                </a:tc>
+                <a:extLst>
+                  <a:ext uri="{0D108BD9-81ED-4DB2-BD59-A6C34878D82A}">
+                    <a16:rowId xmlns:a16="http://schemas.microsoft.com/office/drawing/2014/main" val="10004"/>
+                  </a:ext>
+                </a:extLst>
+              </a:tr>
+            </a:tbl>
+          </a:graphicData>
+        </a:graphic>
+      </p:graphicFrame>
+      <p:sp>
+        <p:nvSpPr>
+          <p:cNvPr id="640" name="注記"/>
+          <p:cNvSpPr/>
+          <p:nvPr/>
+        </p:nvSpPr>
+        <p:spPr>
+          <a:xfrm>
+            <a:off x="384048" y="5312412"/>
+            <a:ext cx="9144000" cy="246888"/>
+          </a:xfrm>
+          <a:prstGeom prst="rect">
+            <a:avLst/>
+          </a:prstGeom>
+          <a:noFill/>
+          <a:ln>
+            <a:noFill/>
+          </a:ln>
+        </p:spPr>
+        <p:txBody>
+          <a:bodyPr wrap="square" lIns="0" tIns="0" rIns="0" bIns="0" rtlCol="0" anchor="t">
+            <a:noAutofit/>
+          </a:bodyPr>
+          <a:lstStyle/>
+          <a:p>
+            <a:pPr algn="l">
+              <a:buNone/>
+            </a:pPr>
+            <a:r>
+              <a:rPr lang="ja-JP" altLang="en-US" sz="900" b="0" dirty="0">
+                <a:solidFill>
+                  <a:srgbClr val="7F7F7F"/>
+                </a:solidFill>
+                <a:latin typeface="メイリオ" panose="020B0604030504040204" pitchFamily="50" charset="-128"/>
+                <a:ea typeface="メイリオ" panose="020B0604030504040204" pitchFamily="50" charset="-128"/>
+              </a:rPr>
+              <a:t>※初期費用＝運用設計・構築 100,000円〜＋離脱防止 15,000円＋サンクスLINE誘導 150,000円＋LINE公式アカウント開設 30,000円</a:t>
+            </a:r>
+            <a:endParaRPr lang="ja-JP" altLang="en-US" sz="1200" dirty="0"/>
+          </a:p>
+        </p:txBody>
+      </p:sp>
+      <p:sp>
+        <p:nvSpPr>
+          <p:cNvPr id="641" name="注記"/>
+          <p:cNvSpPr/>
+          <p:nvPr/>
+        </p:nvSpPr>
+        <p:spPr>
+          <a:xfrm>
+            <a:off x="384048" y="5559300"/>
+            <a:ext cx="9144000" cy="246888"/>
+          </a:xfrm>
+          <a:prstGeom prst="rect">
+            <a:avLst/>
+          </a:prstGeom>
+          <a:noFill/>
+          <a:ln>
+            <a:noFill/>
+          </a:ln>
+        </p:spPr>
+        <p:txBody>
+          <a:bodyPr wrap="square" lIns="0" tIns="0" rIns="0" bIns="0" rtlCol="0" anchor="t">
+            <a:noAutofit/>
+          </a:bodyPr>
+          <a:lstStyle/>
+          <a:p>
+            <a:pPr algn="l">
+              <a:buNone/>
+            </a:pPr>
+            <a:r>
+              <a:rPr lang="ja-JP" altLang="en-US" sz="900" b="0" dirty="0">
+                <a:solidFill>
+                  <a:srgbClr val="7F7F7F"/>
+                </a:solidFill>
+                <a:latin typeface="メイリオ" panose="020B0604030504040204" pitchFamily="50" charset="-128"/>
+                <a:ea typeface="メイリオ" panose="020B0604030504040204" pitchFamily="50" charset="-128"/>
+              </a:rPr>
+              <a:t>※月額ツール・LINE関連費＝離脱防止 30,000円＋サンクスLINE誘導 30,000円〜＋LINE公式アカウント利用料 5,000円〜（ライトプラン想定）</a:t>
+            </a:r>
+            <a:endParaRPr lang="ja-JP" altLang="en-US" sz="1200" dirty="0"/>
+          </a:p>
+        </p:txBody>
+      </p:sp>
+      <p:sp>
+        <p:nvSpPr>
+          <p:cNvPr id="642" name="注記"/>
+          <p:cNvSpPr/>
+          <p:nvPr/>
+        </p:nvSpPr>
+        <p:spPr>
+          <a:xfrm>
+            <a:off x="384048" y="5806188"/>
+            <a:ext cx="9144000" cy="246888"/>
+          </a:xfrm>
+          <a:prstGeom prst="rect">
+            <a:avLst/>
+          </a:prstGeom>
+          <a:noFill/>
+          <a:ln>
+            <a:noFill/>
+          </a:ln>
+        </p:spPr>
+        <p:txBody>
+          <a:bodyPr wrap="square" lIns="0" tIns="0" rIns="0" bIns="0" rtlCol="0" anchor="t">
+            <a:noAutofit/>
+          </a:bodyPr>
+          <a:lstStyle/>
+          <a:p>
+            <a:pPr algn="l">
+              <a:buNone/>
+            </a:pPr>
+            <a:r>
+              <a:rPr lang="ja-JP" altLang="en-US" sz="900" b="0" dirty="0">
+                <a:solidFill>
+                  <a:srgbClr val="7F7F7F"/>
+                </a:solidFill>
+                <a:latin typeface="メイリオ" panose="020B0604030504040204" pitchFamily="50" charset="-128"/>
+                <a:ea typeface="メイリオ" panose="020B0604030504040204" pitchFamily="50" charset="-128"/>
+              </a:rPr>
+              <a:t>※成果報酬の対象＝LINEからの新規応募・再応募（再応募は、勤務希望をLINEで受け付ける場合）。契約期間は6か月〜</a:t>
+            </a:r>
+            <a:endParaRPr lang="ja-JP" altLang="en-US" sz="1200" dirty="0"/>
+          </a:p>
+        </p:txBody>
+      </p:sp>
+      <p:sp>
+        <p:nvSpPr>
+          <p:cNvPr id="643" name="注記"/>
+          <p:cNvSpPr/>
+          <p:nvPr/>
+        </p:nvSpPr>
+        <p:spPr>
+          <a:xfrm>
+            <a:off x="384048" y="6053076"/>
+            <a:ext cx="9144000" cy="246888"/>
+          </a:xfrm>
+          <a:prstGeom prst="rect">
+            <a:avLst/>
+          </a:prstGeom>
+          <a:noFill/>
+          <a:ln>
+            <a:noFill/>
+          </a:ln>
+        </p:spPr>
+        <p:txBody>
+          <a:bodyPr wrap="square" lIns="0" tIns="0" rIns="0" bIns="0" rtlCol="0" anchor="t">
+            <a:noAutofit/>
+          </a:bodyPr>
+          <a:lstStyle/>
+          <a:p>
+            <a:pPr algn="l">
+              <a:buNone/>
+            </a:pPr>
+            <a:r>
+              <a:rPr lang="ja-JP" altLang="en-US" sz="900" b="0" dirty="0">
+                <a:solidFill>
+                  <a:srgbClr val="7F7F7F"/>
+                </a:solidFill>
+                <a:latin typeface="メイリオ" panose="020B0604030504040204" pitchFamily="50" charset="-128"/>
+                <a:ea typeface="メイリオ" panose="020B0604030504040204" pitchFamily="50" charset="-128"/>
+              </a:rPr>
+              <a:t>※施策内容・配信本数・連携範囲等により、費用は個別にお見積もりいたします。</a:t>
+            </a:r>
+            <a:endParaRPr lang="ja-JP" altLang="en-US" sz="1200" dirty="0"/>
+          </a:p>
+        </p:txBody>
+      </p:sp>
+    </p:spTree>
+  </p:cSld>
+  <p:clrMapOvr>
+    <a:masterClrMapping/>
+  </p:clrMapOvr>
+</p:sld>
+</file>
+
+<file path=ppt/slides/slide17.xml><?xml version="1.0" encoding="utf-8"?>
 <p:sld xmlns:a="http://schemas.openxmlformats.org/drawingml/2006/main" xmlns:r="http://schemas.openxmlformats.org/officeDocument/2006/relationships" xmlns:p="http://schemas.openxmlformats.org/presentationml/2006/main">
   <p:cSld>
     <p:spTree>
@@ -15393,7 +16887,7 @@
 </p:sld>
 </file>
 
-<file path=ppt/slides/slide17.xml><?xml version="1.0" encoding="utf-8"?>
+<file path=ppt/slides/slide18.xml><?xml version="1.0" encoding="utf-8"?>
 <p:sld xmlns:a="http://schemas.openxmlformats.org/drawingml/2006/main" xmlns:r="http://schemas.openxmlformats.org/officeDocument/2006/relationships" xmlns:p="http://schemas.openxmlformats.org/presentationml/2006/main">
   <p:cSld>
     <p:spTree>
@@ -16158,7 +17652,7 @@
                 <a:latin typeface="メイリオ" panose="020B0604030504040204" pitchFamily="50" charset="-128"/>
                 <a:ea typeface="メイリオ" panose="020B0604030504040204" pitchFamily="50" charset="-128"/>
               </a:rPr>
-              <a:t>月額215,000円〜（ツール費込み）で始め、成果を見て調整します。</a:t>
+              <a:t>コンサル・成果報酬のどちらのプランも、成果を見て調整します。</a:t>
             </a:r>
             <a:endParaRPr lang="ja-JP" altLang="en-US" sz="1100" dirty="0"/>
           </a:p>
@@ -16261,7 +17755,7 @@
 </p:sld>
 </file>
 
-<file path=ppt/slides/slide18.xml><?xml version="1.0" encoding="utf-8"?>
+<file path=ppt/slides/slide19.xml><?xml version="1.0" encoding="utf-8"?>
 <p:sld xmlns:a="http://schemas.openxmlformats.org/drawingml/2006/main" xmlns:r="http://schemas.openxmlformats.org/officeDocument/2006/relationships" xmlns:p="http://schemas.openxmlformats.org/presentationml/2006/main">
   <p:cSld>
     <p:spTree>
@@ -17061,1500 +18555,6 @@
     <a:masterClrMapping/>
   </p:clrMapOvr>
   <p:transition spd="slow"/>
-</p:sld>
-</file>
-
-<file path=ppt/slides/slide19.xml><?xml version="1.0" encoding="utf-8"?>
-<p:sld xmlns:a="http://schemas.openxmlformats.org/drawingml/2006/main" xmlns:p="http://schemas.openxmlformats.org/presentationml/2006/main" xmlns:r="http://schemas.openxmlformats.org/officeDocument/2006/relationships">
-  <p:cSld>
-    <p:spTree>
-      <p:nvGrpSpPr>
-        <p:cNvPr id="1" name=""/>
-        <p:cNvGrpSpPr/>
-        <p:nvPr/>
-      </p:nvGrpSpPr>
-      <p:grpSpPr/>
-      <p:sp>
-        <p:nvSpPr>
-          <p:cNvPr id="635" name="Google Shape;752;p28"/>
-          <p:cNvSpPr/>
-          <p:nvPr/>
-        </p:nvSpPr>
-        <p:spPr>
-          <a:xfrm>
-            <a:off x="549000" y="138240"/>
-            <a:ext cx="6275880" cy="338040"/>
-          </a:xfrm>
-          <a:prstGeom prst="rect">
-            <a:avLst/>
-          </a:prstGeom>
-          <a:noFill/>
-          <a:ln w="0">
-            <a:noFill/>
-          </a:ln>
-        </p:spPr>
-        <p:style>
-          <a:lnRef idx="0">
-            <a:scrgbClr r="0" g="0" b="0"/>
-          </a:lnRef>
-          <a:fillRef idx="0">
-            <a:scrgbClr r="0" g="0" b="0"/>
-          </a:fillRef>
-          <a:effectRef idx="0">
-            <a:scrgbClr r="0" g="0" b="0"/>
-          </a:effectRef>
-          <a:fontRef idx="minor"/>
-        </p:style>
-        <p:txBody>
-          <a:bodyPr anchor="ctr">
-            <a:spAutoFit/>
-          </a:bodyPr>
-          <a:lstStyle/>
-          <a:p>
-            <a:pPr defTabSz="914400">
-              <a:lnSpc>
-                <a:spcPct val="100000"/>
-              </a:lnSpc>
-            </a:pPr>
-            <a:r>
-              <a:rPr lang="ja-JP" sz="1600" b="1" u="none" strike="noStrike">
-                <a:solidFill>
-                  <a:srgbClr val="323366"/>
-                </a:solidFill>
-                <a:effectLst/>
-                <a:uFillTx/>
-                <a:latin typeface="メイリオ"/>
-                <a:ea typeface="メイリオ"/>
-              </a:rPr>
-              <a:t>料金プラン（成果報酬）：月額を抑え、応募1件ごとにお支払い</a:t>
-            </a:r>
-            <a:endParaRPr lang="en-US" sz="1600" b="0" u="none" strike="noStrike">
-              <a:solidFill>
-                <a:srgbClr val="000000"/>
-              </a:solidFill>
-              <a:effectLst/>
-              <a:uFillTx/>
-              <a:latin typeface="メイリオ"/>
-            </a:endParaRPr>
-          </a:p>
-        </p:txBody>
-      </p:sp>
-      <p:sp>
-        <p:nvSpPr>
-          <p:cNvPr id="636" name="正方形/長方形 8"/>
-          <p:cNvSpPr/>
-          <p:nvPr/>
-        </p:nvSpPr>
-        <p:spPr>
-          <a:xfrm>
-            <a:off x="0" y="681480"/>
-            <a:ext cx="2914200" cy="502560"/>
-          </a:xfrm>
-          <a:prstGeom prst="rect">
-            <a:avLst/>
-          </a:prstGeom>
-          <a:solidFill>
-            <a:srgbClr val="002060"/>
-          </a:solidFill>
-          <a:ln>
-            <a:noFill/>
-          </a:ln>
-        </p:spPr>
-        <p:style>
-          <a:lnRef idx="2">
-            <a:schemeClr val="accent1">
-              <a:shade val="15000"/>
-            </a:schemeClr>
-          </a:lnRef>
-          <a:fillRef idx="1">
-            <a:schemeClr val="accent1"/>
-          </a:fillRef>
-          <a:effectRef idx="0">
-            <a:schemeClr val="accent1"/>
-          </a:effectRef>
-          <a:fontRef idx="minor"/>
-        </p:style>
-        <p:txBody>
-          <a:bodyPr lIns="90000" tIns="45000" rIns="90000" bIns="45000" anchor="ctr">
-            <a:noAutofit/>
-          </a:bodyPr>
-          <a:lstStyle/>
-          <a:p>
-            <a:pPr algn="ctr" defTabSz="914400">
-              <a:lnSpc>
-                <a:spcPct val="100000"/>
-              </a:lnSpc>
-            </a:pPr>
-            <a:r>
-              <a:rPr lang="ja-JP" sz="1400" b="0" u="none" strike="noStrike" dirty="0">
-                <a:solidFill>
-                  <a:schemeClr val="lt1"/>
-                </a:solidFill>
-                <a:effectLst/>
-                <a:uFillTx/>
-                <a:latin typeface="メイリオ"/>
-                <a:ea typeface="メイリオ"/>
-              </a:rPr>
-              <a:t>成果報酬プラン</a:t>
-            </a:r>
-            <a:endParaRPr lang="en-US" sz="1400" b="0" u="none" strike="noStrike" dirty="0">
-              <a:solidFill>
-                <a:srgbClr val="FFFFFF"/>
-              </a:solidFill>
-              <a:effectLst/>
-              <a:uFillTx/>
-              <a:latin typeface="メイリオ"/>
-            </a:endParaRPr>
-          </a:p>
-        </p:txBody>
-      </p:sp>
-      <p:sp>
-        <p:nvSpPr>
-          <p:cNvPr id="637" name="Google Shape;752;p28"/>
-          <p:cNvSpPr/>
-          <p:nvPr/>
-        </p:nvSpPr>
-        <p:spPr>
-          <a:xfrm>
-            <a:off x="2983680" y="783000"/>
-            <a:ext cx="6619680" cy="338040"/>
-          </a:xfrm>
-          <a:prstGeom prst="rect">
-            <a:avLst/>
-          </a:prstGeom>
-          <a:noFill/>
-          <a:ln w="0">
-            <a:noFill/>
-          </a:ln>
-        </p:spPr>
-        <p:style>
-          <a:lnRef idx="0">
-            <a:scrgbClr r="0" g="0" b="0"/>
-          </a:lnRef>
-          <a:fillRef idx="0">
-            <a:scrgbClr r="0" g="0" b="0"/>
-          </a:fillRef>
-          <a:effectRef idx="0">
-            <a:scrgbClr r="0" g="0" b="0"/>
-          </a:effectRef>
-          <a:fontRef idx="minor"/>
-        </p:style>
-        <p:txBody>
-          <a:bodyPr anchor="ctr">
-            <a:spAutoFit/>
-          </a:bodyPr>
-          <a:lstStyle/>
-          <a:p>
-            <a:pPr defTabSz="914400">
-              <a:lnSpc>
-                <a:spcPct val="100000"/>
-              </a:lnSpc>
-            </a:pPr>
-            <a:r>
-              <a:rPr lang="ja-JP" sz="1600" b="1" u="none" strike="noStrike" dirty="0">
-                <a:solidFill>
-                  <a:schemeClr val="dk1"/>
-                </a:solidFill>
-                <a:effectLst/>
-                <a:uFillTx/>
-                <a:latin typeface="メイリオ"/>
-                <a:ea typeface="メイリオ"/>
-              </a:rPr>
-              <a:t>初期費用は同じ。月額運用費の代わりに、応募1件ごとの成果報酬</a:t>
-            </a:r>
-            <a:endParaRPr lang="en-US" sz="1600" b="0" u="none" strike="noStrike" dirty="0">
-              <a:solidFill>
-                <a:srgbClr val="000000"/>
-              </a:solidFill>
-              <a:effectLst/>
-              <a:uFillTx/>
-              <a:latin typeface="メイリオ"/>
-            </a:endParaRPr>
-          </a:p>
-        </p:txBody>
-      </p:sp>
-      <p:graphicFrame>
-        <p:nvGraphicFramePr>
-          <p:cNvPr id="639" name="料金プラン比較表 638"/>
-          <p:cNvGraphicFramePr>
-            <a:graphicFrameLocks noGrp="1"/>
-          </p:cNvGraphicFramePr>
-          <p:nvPr>
-            <p:extLst>
-              <p:ext uri="{D42A27DB-BD31-4B8C-83A1-F6EECF244321}">
-                <p14:modId xmlns:p14="http://schemas.microsoft.com/office/powerpoint/2010/main" val="4252399329"/>
-              </p:ext>
-            </p:extLst>
-          </p:nvPr>
-        </p:nvGraphicFramePr>
-        <p:xfrm>
-          <a:off x="384048" y="1490760"/>
-          <a:ext cx="9144000" cy="3749040"/>
-        </p:xfrm>
-        <a:graphic>
-          <a:graphicData uri="http://schemas.openxmlformats.org/drawingml/2006/table">
-            <a:tbl>
-              <a:tblPr/>
-              <a:tblGrid>
-                <a:gridCol w="2743200">
-                  <a:extLst>
-                    <a:ext uri="{9D8B030D-6E8A-4147-A177-3AD203B41FA5}">
-                      <a16:colId xmlns:a16="http://schemas.microsoft.com/office/drawing/2014/main" val="20000"/>
-                    </a:ext>
-                  </a:extLst>
-                </a:gridCol>
-                <a:gridCol w="3200400">
-                  <a:extLst>
-                    <a:ext uri="{9D8B030D-6E8A-4147-A177-3AD203B41FA5}">
-                      <a16:colId xmlns:a16="http://schemas.microsoft.com/office/drawing/2014/main" val="20002"/>
-                    </a:ext>
-                  </a:extLst>
-                </a:gridCol>
-                <a:gridCol w="3200400">
-                  <a:extLst>
-                    <a:ext uri="{9D8B030D-6E8A-4147-A177-3AD203B41FA5}">
-                      <a16:colId xmlns:a16="http://schemas.microsoft.com/office/drawing/2014/main" val="20003"/>
-                    </a:ext>
-                  </a:extLst>
-                </a:gridCol>
-              </a:tblGrid>
-              <a:tr h="777240">
-                <a:tc>
-                  <a:txBody>
-                    <a:bodyPr/>
-                    <a:lstStyle/>
-                    <a:p>
-                      <a:pPr algn="ctr">
-                        <a:buNone/>
-                      </a:pPr>
-                      <a:r>
-                        <a:rPr lang="ja-JP" altLang="en-US" sz="1400" b="1" dirty="0">
-                          <a:solidFill>
-                            <a:srgbClr val="FFFFFF"/>
-                          </a:solidFill>
-                          <a:latin typeface="メイリオ" panose="020B0604030504040204" pitchFamily="50" charset="-128"/>
-                          <a:ea typeface="メイリオ" panose="020B0604030504040204" pitchFamily="50" charset="-128"/>
-                        </a:rPr>
-                        <a:t>項目</a:t>
-                      </a:r>
-                      <a:endParaRPr lang="ja-JP" altLang="en-US" sz="1400" dirty="0"/>
-                    </a:p>
-                  </a:txBody>
-                  <a:tcPr marL="73152" marR="73152" marT="27432" marB="27432" anchor="ctr">
-                    <a:lnL w="9525" cap="flat" cmpd="sng" algn="ctr">
-                      <a:solidFill>
-                        <a:srgbClr val="FFFFFF"/>
-                      </a:solidFill>
-                      <a:prstDash val="solid"/>
-                      <a:round/>
-                      <a:headEnd type="none" w="med" len="med"/>
-                      <a:tailEnd type="none" w="med" len="med"/>
-                    </a:lnL>
-                    <a:lnR w="9525" cap="flat" cmpd="sng" algn="ctr">
-                      <a:solidFill>
-                        <a:srgbClr val="FFFFFF"/>
-                      </a:solidFill>
-                      <a:prstDash val="solid"/>
-                      <a:round/>
-                      <a:headEnd type="none" w="med" len="med"/>
-                      <a:tailEnd type="none" w="med" len="med"/>
-                    </a:lnR>
-                    <a:lnT w="9525" cap="flat" cmpd="sng" algn="ctr">
-                      <a:solidFill>
-                        <a:srgbClr val="FFFFFF"/>
-                      </a:solidFill>
-                      <a:prstDash val="solid"/>
-                      <a:round/>
-                      <a:headEnd type="none" w="med" len="med"/>
-                      <a:tailEnd type="none" w="med" len="med"/>
-                    </a:lnT>
-                    <a:lnB w="9525" cap="flat" cmpd="sng" algn="ctr">
-                      <a:solidFill>
-                        <a:srgbClr val="FFFFFF"/>
-                      </a:solidFill>
-                      <a:prstDash val="solid"/>
-                      <a:round/>
-                      <a:headEnd type="none" w="med" len="med"/>
-                      <a:tailEnd type="none" w="med" len="med"/>
-                    </a:lnB>
-                    <a:solidFill>
-                      <a:srgbClr val="1F285A"/>
-                    </a:solidFill>
-                  </a:tcPr>
-                </a:tc>
-                <a:tc>
-                  <a:txBody>
-                    <a:bodyPr/>
-                    <a:lstStyle/>
-                    <a:p>
-                      <a:pPr algn="ctr">
-                        <a:buNone/>
-                      </a:pPr>
-                      <a:r>
-                        <a:rPr lang="ja-JP" altLang="en-US" sz="1400" b="1" dirty="0">
-                          <a:solidFill>
-                            <a:srgbClr val="FFFFFF"/>
-                          </a:solidFill>
-                          <a:latin typeface="メイリオ" panose="020B0604030504040204" pitchFamily="50" charset="-128"/>
-                          <a:ea typeface="メイリオ" panose="020B0604030504040204" pitchFamily="50" charset="-128"/>
-                        </a:rPr>
-                        <a:t>プラン②</a:t>
-                      </a:r>
-                      <a:endParaRPr lang="ja-JP" altLang="en-US" sz="1300" dirty="0"/>
-                    </a:p>
-                    <a:p>
-                      <a:pPr algn="ctr">
-                        <a:buNone/>
-                      </a:pPr>
-                      <a:r>
-                        <a:rPr lang="ja-JP" altLang="en-US" sz="1400" b="1" dirty="0">
-                          <a:solidFill>
-                            <a:srgbClr val="FFFFFF"/>
-                          </a:solidFill>
-                          <a:latin typeface="メイリオ" panose="020B0604030504040204" pitchFamily="50" charset="-128"/>
-                          <a:ea typeface="メイリオ" panose="020B0604030504040204" pitchFamily="50" charset="-128"/>
-                        </a:rPr>
-                        <a:t>運用代行・効率改善</a:t>
-                      </a:r>
-                      <a:endParaRPr lang="ja-JP" altLang="en-US" sz="1300" dirty="0"/>
-                    </a:p>
-                  </a:txBody>
-                  <a:tcPr marL="73152" marR="73152" marT="27432" marB="27432" anchor="ctr">
-                    <a:lnL w="9525" cap="flat" cmpd="sng" algn="ctr">
-                      <a:solidFill>
-                        <a:srgbClr val="FFFFFF"/>
-                      </a:solidFill>
-                      <a:prstDash val="solid"/>
-                      <a:round/>
-                      <a:headEnd type="none" w="med" len="med"/>
-                      <a:tailEnd type="none" w="med" len="med"/>
-                    </a:lnL>
-                    <a:lnR w="9525" cap="flat" cmpd="sng" algn="ctr">
-                      <a:solidFill>
-                        <a:srgbClr val="FFFFFF"/>
-                      </a:solidFill>
-                      <a:prstDash val="solid"/>
-                      <a:round/>
-                      <a:headEnd type="none" w="med" len="med"/>
-                      <a:tailEnd type="none" w="med" len="med"/>
-                    </a:lnR>
-                    <a:lnT w="9525" cap="flat" cmpd="sng" algn="ctr">
-                      <a:solidFill>
-                        <a:srgbClr val="FFFFFF"/>
-                      </a:solidFill>
-                      <a:prstDash val="solid"/>
-                      <a:round/>
-                      <a:headEnd type="none" w="med" len="med"/>
-                      <a:tailEnd type="none" w="med" len="med"/>
-                    </a:lnT>
-                    <a:lnB w="9525" cap="flat" cmpd="sng" algn="ctr">
-                      <a:solidFill>
-                        <a:srgbClr val="FFFFFF"/>
-                      </a:solidFill>
-                      <a:prstDash val="solid"/>
-                      <a:round/>
-                      <a:headEnd type="none" w="med" len="med"/>
-                      <a:tailEnd type="none" w="med" len="med"/>
-                    </a:lnB>
-                    <a:solidFill>
-                      <a:srgbClr val="1F285A"/>
-                    </a:solidFill>
-                  </a:tcPr>
-                </a:tc>
-                <a:tc>
-                  <a:txBody>
-                    <a:bodyPr/>
-                    <a:lstStyle/>
-                    <a:p>
-                      <a:pPr algn="ctr">
-                        <a:buNone/>
-                      </a:pPr>
-                      <a:r>
-                        <a:rPr lang="ja-JP" altLang="en-US" sz="1400" b="1" dirty="0">
-                          <a:solidFill>
-                            <a:srgbClr val="FFFFFF"/>
-                          </a:solidFill>
-                          <a:latin typeface="メイリオ" panose="020B0604030504040204" pitchFamily="50" charset="-128"/>
-                          <a:ea typeface="メイリオ" panose="020B0604030504040204" pitchFamily="50" charset="-128"/>
-                        </a:rPr>
-                        <a:t>プラン③</a:t>
-                      </a:r>
-                      <a:endParaRPr lang="ja-JP" altLang="en-US" sz="1300" dirty="0"/>
-                    </a:p>
-                    <a:p>
-                      <a:pPr algn="ctr">
-                        <a:buNone/>
-                      </a:pPr>
-                      <a:r>
-                        <a:rPr lang="ja-JP" altLang="en-US" sz="1400" b="1" dirty="0">
-                          <a:solidFill>
-                            <a:srgbClr val="FFFFFF"/>
-                          </a:solidFill>
-                          <a:latin typeface="メイリオ" panose="020B0604030504040204" pitchFamily="50" charset="-128"/>
-                          <a:ea typeface="メイリオ" panose="020B0604030504040204" pitchFamily="50" charset="-128"/>
-                        </a:rPr>
-                        <a:t>運用代行フルサポート</a:t>
-                      </a:r>
-                      <a:endParaRPr lang="ja-JP" altLang="en-US" sz="1300" dirty="0"/>
-                    </a:p>
-                  </a:txBody>
-                  <a:tcPr marL="73152" marR="73152" marT="27432" marB="27432" anchor="ctr">
-                    <a:lnL w="9525" cap="flat" cmpd="sng" algn="ctr">
-                      <a:solidFill>
-                        <a:srgbClr val="FFFFFF"/>
-                      </a:solidFill>
-                      <a:prstDash val="solid"/>
-                      <a:round/>
-                      <a:headEnd type="none" w="med" len="med"/>
-                      <a:tailEnd type="none" w="med" len="med"/>
-                    </a:lnL>
-                    <a:lnR w="9525" cap="flat" cmpd="sng" algn="ctr">
-                      <a:solidFill>
-                        <a:srgbClr val="FFFFFF"/>
-                      </a:solidFill>
-                      <a:prstDash val="solid"/>
-                      <a:round/>
-                      <a:headEnd type="none" w="med" len="med"/>
-                      <a:tailEnd type="none" w="med" len="med"/>
-                    </a:lnR>
-                    <a:lnT w="9525" cap="flat" cmpd="sng" algn="ctr">
-                      <a:solidFill>
-                        <a:srgbClr val="FFFFFF"/>
-                      </a:solidFill>
-                      <a:prstDash val="solid"/>
-                      <a:round/>
-                      <a:headEnd type="none" w="med" len="med"/>
-                      <a:tailEnd type="none" w="med" len="med"/>
-                    </a:lnT>
-                    <a:lnB w="9525" cap="flat" cmpd="sng" algn="ctr">
-                      <a:solidFill>
-                        <a:srgbClr val="FFFFFF"/>
-                      </a:solidFill>
-                      <a:prstDash val="solid"/>
-                      <a:round/>
-                      <a:headEnd type="none" w="med" len="med"/>
-                      <a:tailEnd type="none" w="med" len="med"/>
-                    </a:lnB>
-                    <a:solidFill>
-                      <a:srgbClr val="1F285A"/>
-                    </a:solidFill>
-                  </a:tcPr>
-                </a:tc>
-                <a:extLst>
-                  <a:ext uri="{0D108BD9-81ED-4DB2-BD59-A6C34878D82A}">
-                    <a16:rowId xmlns:a16="http://schemas.microsoft.com/office/drawing/2014/main" val="10000"/>
-                  </a:ext>
-                </a:extLst>
-              </a:tr>
-              <a:tr h="640080">
-                <a:tc>
-                  <a:txBody>
-                    <a:bodyPr/>
-                    <a:lstStyle/>
-                    <a:p>
-                      <a:pPr algn="ctr">
-                        <a:buNone/>
-                      </a:pPr>
-                      <a:r>
-                        <a:rPr lang="ja-JP" altLang="en-US" sz="1400" b="1" dirty="0">
-                          <a:solidFill>
-                            <a:srgbClr val="1F285A"/>
-                          </a:solidFill>
-                          <a:latin typeface="メイリオ" panose="020B0604030504040204" pitchFamily="50" charset="-128"/>
-                          <a:ea typeface="メイリオ" panose="020B0604030504040204" pitchFamily="50" charset="-128"/>
-                        </a:rPr>
-                        <a:t>初期費用</a:t>
-                      </a:r>
-                      <a:endParaRPr lang="ja-JP" altLang="en-US" sz="1400" dirty="0"/>
-                    </a:p>
-                  </a:txBody>
-                  <a:tcPr marL="73152" marR="73152" marT="27432" marB="27432" anchor="ctr">
-                    <a:lnL w="9525" cap="flat" cmpd="sng" algn="ctr">
-                      <a:solidFill>
-                        <a:srgbClr val="BFC8DC"/>
-                      </a:solidFill>
-                      <a:prstDash val="solid"/>
-                      <a:round/>
-                      <a:headEnd type="none" w="med" len="med"/>
-                      <a:tailEnd type="none" w="med" len="med"/>
-                    </a:lnL>
-                    <a:lnR w="9525" cap="flat" cmpd="sng" algn="ctr">
-                      <a:solidFill>
-                        <a:srgbClr val="BFC8DC"/>
-                      </a:solidFill>
-                      <a:prstDash val="solid"/>
-                      <a:round/>
-                      <a:headEnd type="none" w="med" len="med"/>
-                      <a:tailEnd type="none" w="med" len="med"/>
-                    </a:lnR>
-                    <a:lnT w="9525" cap="flat" cmpd="sng" algn="ctr">
-                      <a:solidFill>
-                        <a:srgbClr val="FFFFFF"/>
-                      </a:solidFill>
-                      <a:prstDash val="solid"/>
-                      <a:round/>
-                      <a:headEnd type="none" w="med" len="med"/>
-                      <a:tailEnd type="none" w="med" len="med"/>
-                    </a:lnT>
-                    <a:lnB w="9525" cap="flat" cmpd="sng" algn="ctr">
-                      <a:solidFill>
-                        <a:srgbClr val="BFC8DC"/>
-                      </a:solidFill>
-                      <a:prstDash val="solid"/>
-                      <a:round/>
-                      <a:headEnd type="none" w="med" len="med"/>
-                      <a:tailEnd type="none" w="med" len="med"/>
-                    </a:lnB>
-                    <a:solidFill>
-                      <a:srgbClr val="E8ECF6"/>
-                    </a:solidFill>
-                  </a:tcPr>
-                </a:tc>
-                <a:tc>
-                  <a:txBody>
-                    <a:bodyPr/>
-                    <a:lstStyle/>
-                    <a:p>
-                      <a:pPr algn="ctr">
-                        <a:buNone/>
-                      </a:pPr>
-                      <a:r>
-                        <a:rPr lang="ja-JP" altLang="en-US" sz="1500" b="0" dirty="0">
-                          <a:solidFill>
-                            <a:srgbClr val="333333"/>
-                          </a:solidFill>
-                          <a:latin typeface="メイリオ" panose="020B0604030504040204" pitchFamily="50" charset="-128"/>
-                          <a:ea typeface="メイリオ" panose="020B0604030504040204" pitchFamily="50" charset="-128"/>
-                        </a:rPr>
-                        <a:t>295,000円〜</a:t>
-                      </a:r>
-                      <a:endParaRPr lang="ja-JP" altLang="en-US" sz="1500" dirty="0"/>
-                    </a:p>
-                  </a:txBody>
-                  <a:tcPr marL="73152" marR="73152" marT="27432" marB="27432" anchor="ctr">
-                    <a:lnL w="9525" cap="flat" cmpd="sng" algn="ctr">
-                      <a:solidFill>
-                        <a:srgbClr val="BFC8DC"/>
-                      </a:solidFill>
-                      <a:prstDash val="solid"/>
-                      <a:round/>
-                      <a:headEnd type="none" w="med" len="med"/>
-                      <a:tailEnd type="none" w="med" len="med"/>
-                    </a:lnL>
-                    <a:lnR w="9525" cap="flat" cmpd="sng" algn="ctr">
-                      <a:solidFill>
-                        <a:srgbClr val="BFC8DC"/>
-                      </a:solidFill>
-                      <a:prstDash val="solid"/>
-                      <a:round/>
-                      <a:headEnd type="none" w="med" len="med"/>
-                      <a:tailEnd type="none" w="med" len="med"/>
-                    </a:lnR>
-                    <a:lnT w="9525" cap="flat" cmpd="sng" algn="ctr">
-                      <a:solidFill>
-                        <a:srgbClr val="FFFFFF"/>
-                      </a:solidFill>
-                      <a:prstDash val="solid"/>
-                      <a:round/>
-                      <a:headEnd type="none" w="med" len="med"/>
-                      <a:tailEnd type="none" w="med" len="med"/>
-                    </a:lnT>
-                    <a:lnB w="9525" cap="flat" cmpd="sng" algn="ctr">
-                      <a:solidFill>
-                        <a:srgbClr val="BFC8DC"/>
-                      </a:solidFill>
-                      <a:prstDash val="solid"/>
-                      <a:round/>
-                      <a:headEnd type="none" w="med" len="med"/>
-                      <a:tailEnd type="none" w="med" len="med"/>
-                    </a:lnB>
-                    <a:solidFill>
-                      <a:srgbClr val="FFFFFF"/>
-                    </a:solidFill>
-                  </a:tcPr>
-                </a:tc>
-                <a:tc>
-                  <a:txBody>
-                    <a:bodyPr/>
-                    <a:lstStyle/>
-                    <a:p>
-                      <a:pPr algn="ctr">
-                        <a:buNone/>
-                      </a:pPr>
-                      <a:r>
-                        <a:rPr lang="ja-JP" altLang="en-US" sz="1500" b="0" dirty="0">
-                          <a:solidFill>
-                            <a:srgbClr val="333333"/>
-                          </a:solidFill>
-                          <a:latin typeface="メイリオ" panose="020B0604030504040204" pitchFamily="50" charset="-128"/>
-                          <a:ea typeface="メイリオ" panose="020B0604030504040204" pitchFamily="50" charset="-128"/>
-                        </a:rPr>
-                        <a:t>295,000円〜</a:t>
-                      </a:r>
-                      <a:endParaRPr lang="ja-JP" altLang="en-US" sz="1500" dirty="0"/>
-                    </a:p>
-                  </a:txBody>
-                  <a:tcPr marL="73152" marR="73152" marT="27432" marB="27432" anchor="ctr">
-                    <a:lnL w="9525" cap="flat" cmpd="sng" algn="ctr">
-                      <a:solidFill>
-                        <a:srgbClr val="BFC8DC"/>
-                      </a:solidFill>
-                      <a:prstDash val="solid"/>
-                      <a:round/>
-                      <a:headEnd type="none" w="med" len="med"/>
-                      <a:tailEnd type="none" w="med" len="med"/>
-                    </a:lnL>
-                    <a:lnR w="9525" cap="flat" cmpd="sng" algn="ctr">
-                      <a:solidFill>
-                        <a:srgbClr val="BFC8DC"/>
-                      </a:solidFill>
-                      <a:prstDash val="solid"/>
-                      <a:round/>
-                      <a:headEnd type="none" w="med" len="med"/>
-                      <a:tailEnd type="none" w="med" len="med"/>
-                    </a:lnR>
-                    <a:lnT w="9525" cap="flat" cmpd="sng" algn="ctr">
-                      <a:solidFill>
-                        <a:srgbClr val="FFFFFF"/>
-                      </a:solidFill>
-                      <a:prstDash val="solid"/>
-                      <a:round/>
-                      <a:headEnd type="none" w="med" len="med"/>
-                      <a:tailEnd type="none" w="med" len="med"/>
-                    </a:lnT>
-                    <a:lnB w="9525" cap="flat" cmpd="sng" algn="ctr">
-                      <a:solidFill>
-                        <a:srgbClr val="BFC8DC"/>
-                      </a:solidFill>
-                      <a:prstDash val="solid"/>
-                      <a:round/>
-                      <a:headEnd type="none" w="med" len="med"/>
-                      <a:tailEnd type="none" w="med" len="med"/>
-                    </a:lnB>
-                    <a:solidFill>
-                      <a:srgbClr val="FFFFFF"/>
-                    </a:solidFill>
-                  </a:tcPr>
-                </a:tc>
-                <a:extLst>
-                  <a:ext uri="{0D108BD9-81ED-4DB2-BD59-A6C34878D82A}">
-                    <a16:rowId xmlns:a16="http://schemas.microsoft.com/office/drawing/2014/main" val="10001"/>
-                  </a:ext>
-                </a:extLst>
-              </a:tr>
-              <a:tr h="640080">
-                <a:tc>
-                  <a:txBody>
-                    <a:bodyPr/>
-                    <a:lstStyle/>
-                    <a:p>
-                      <a:pPr algn="ctr">
-                        <a:buNone/>
-                      </a:pPr>
-                      <a:r>
-                        <a:rPr lang="ja-JP" altLang="en-US" sz="1400" b="1" dirty="0">
-                          <a:solidFill>
-                            <a:srgbClr val="1F285A"/>
-                          </a:solidFill>
-                          <a:latin typeface="メイリオ" panose="020B0604030504040204" pitchFamily="50" charset="-128"/>
-                          <a:ea typeface="メイリオ" panose="020B0604030504040204" pitchFamily="50" charset="-128"/>
-                        </a:rPr>
-                        <a:t>成果報酬</a:t>
-                      </a:r>
-                      <a:endParaRPr lang="ja-JP" altLang="en-US" sz="1400" dirty="0"/>
-                    </a:p>
-                    <a:p>
-                      <a:pPr algn="ctr">
-                        <a:buNone/>
-                      </a:pPr>
-                      <a:r>
-                        <a:rPr lang="ja-JP" altLang="en-US" sz="1400" b="1" dirty="0">
-                          <a:solidFill>
-                            <a:srgbClr val="1F285A"/>
-                          </a:solidFill>
-                          <a:latin typeface="メイリオ" panose="020B0604030504040204" pitchFamily="50" charset="-128"/>
-                          <a:ea typeface="メイリオ" panose="020B0604030504040204" pitchFamily="50" charset="-128"/>
-                        </a:rPr>
-                        <a:t>（応募1件）</a:t>
-                      </a:r>
-                      <a:endParaRPr lang="ja-JP" altLang="en-US" sz="1400" dirty="0"/>
-                    </a:p>
-                  </a:txBody>
-                  <a:tcPr marL="73152" marR="73152" marT="27432" marB="27432" anchor="ctr">
-                    <a:lnL w="9525" cap="flat" cmpd="sng" algn="ctr">
-                      <a:solidFill>
-                        <a:srgbClr val="BFC8DC"/>
-                      </a:solidFill>
-                      <a:prstDash val="solid"/>
-                      <a:round/>
-                      <a:headEnd type="none" w="med" len="med"/>
-                      <a:tailEnd type="none" w="med" len="med"/>
-                    </a:lnL>
-                    <a:lnR w="9525" cap="flat" cmpd="sng" algn="ctr">
-                      <a:solidFill>
-                        <a:srgbClr val="BFC8DC"/>
-                      </a:solidFill>
-                      <a:prstDash val="solid"/>
-                      <a:round/>
-                      <a:headEnd type="none" w="med" len="med"/>
-                      <a:tailEnd type="none" w="med" len="med"/>
-                    </a:lnR>
-                    <a:lnT w="9525" cap="flat" cmpd="sng" algn="ctr">
-                      <a:solidFill>
-                        <a:srgbClr val="BFC8DC"/>
-                      </a:solidFill>
-                      <a:prstDash val="solid"/>
-                      <a:round/>
-                      <a:headEnd type="none" w="med" len="med"/>
-                      <a:tailEnd type="none" w="med" len="med"/>
-                    </a:lnT>
-                    <a:lnB w="9525" cap="flat" cmpd="sng" algn="ctr">
-                      <a:solidFill>
-                        <a:srgbClr val="BFC8DC"/>
-                      </a:solidFill>
-                      <a:prstDash val="solid"/>
-                      <a:round/>
-                      <a:headEnd type="none" w="med" len="med"/>
-                      <a:tailEnd type="none" w="med" len="med"/>
-                    </a:lnB>
-                    <a:solidFill>
-                      <a:srgbClr val="E8ECF6"/>
-                    </a:solidFill>
-                  </a:tcPr>
-                </a:tc>
-                <a:tc>
-                  <a:txBody>
-                    <a:bodyPr/>
-                    <a:lstStyle/>
-                    <a:p>
-                      <a:pPr algn="ctr">
-                        <a:buNone/>
-                      </a:pPr>
-                      <a:r>
-                        <a:rPr lang="ja-JP" altLang="en-US" sz="1500" b="0" dirty="0">
-                          <a:solidFill>
-                            <a:srgbClr val="333333"/>
-                          </a:solidFill>
-                          <a:latin typeface="メイリオ" panose="020B0604030504040204" pitchFamily="50" charset="-128"/>
-                          <a:ea typeface="メイリオ" panose="020B0604030504040204" pitchFamily="50" charset="-128"/>
-                        </a:rPr>
-                        <a:t>6,000円</a:t>
-                      </a:r>
-                      <a:endParaRPr lang="ja-JP" altLang="en-US" sz="1500" dirty="0"/>
-                    </a:p>
-                  </a:txBody>
-                  <a:tcPr marL="73152" marR="73152" marT="27432" marB="27432" anchor="ctr">
-                    <a:lnL w="9525" cap="flat" cmpd="sng" algn="ctr">
-                      <a:solidFill>
-                        <a:srgbClr val="BFC8DC"/>
-                      </a:solidFill>
-                      <a:prstDash val="solid"/>
-                      <a:round/>
-                      <a:headEnd type="none" w="med" len="med"/>
-                      <a:tailEnd type="none" w="med" len="med"/>
-                    </a:lnL>
-                    <a:lnR w="9525" cap="flat" cmpd="sng" algn="ctr">
-                      <a:solidFill>
-                        <a:srgbClr val="BFC8DC"/>
-                      </a:solidFill>
-                      <a:prstDash val="solid"/>
-                      <a:round/>
-                      <a:headEnd type="none" w="med" len="med"/>
-                      <a:tailEnd type="none" w="med" len="med"/>
-                    </a:lnR>
-                    <a:lnT w="9525" cap="flat" cmpd="sng" algn="ctr">
-                      <a:solidFill>
-                        <a:srgbClr val="BFC8DC"/>
-                      </a:solidFill>
-                      <a:prstDash val="solid"/>
-                      <a:round/>
-                      <a:headEnd type="none" w="med" len="med"/>
-                      <a:tailEnd type="none" w="med" len="med"/>
-                    </a:lnT>
-                    <a:lnB w="9525" cap="flat" cmpd="sng" algn="ctr">
-                      <a:solidFill>
-                        <a:srgbClr val="BFC8DC"/>
-                      </a:solidFill>
-                      <a:prstDash val="solid"/>
-                      <a:round/>
-                      <a:headEnd type="none" w="med" len="med"/>
-                      <a:tailEnd type="none" w="med" len="med"/>
-                    </a:lnB>
-                    <a:solidFill>
-                      <a:srgbClr val="FFFFFF"/>
-                    </a:solidFill>
-                  </a:tcPr>
-                </a:tc>
-                <a:tc>
-                  <a:txBody>
-                    <a:bodyPr/>
-                    <a:lstStyle/>
-                    <a:p>
-                      <a:pPr algn="ctr">
-                        <a:buNone/>
-                      </a:pPr>
-                      <a:r>
-                        <a:rPr lang="ja-JP" altLang="en-US" sz="1500" b="0" dirty="0">
-                          <a:solidFill>
-                            <a:srgbClr val="333333"/>
-                          </a:solidFill>
-                          <a:latin typeface="メイリオ" panose="020B0604030504040204" pitchFamily="50" charset="-128"/>
-                          <a:ea typeface="メイリオ" panose="020B0604030504040204" pitchFamily="50" charset="-128"/>
-                        </a:rPr>
-                        <a:t>10,000円</a:t>
-                      </a:r>
-                      <a:endParaRPr lang="ja-JP" altLang="en-US" sz="1500" dirty="0"/>
-                    </a:p>
-                  </a:txBody>
-                  <a:tcPr marL="73152" marR="73152" marT="27432" marB="27432" anchor="ctr">
-                    <a:lnL w="9525" cap="flat" cmpd="sng" algn="ctr">
-                      <a:solidFill>
-                        <a:srgbClr val="BFC8DC"/>
-                      </a:solidFill>
-                      <a:prstDash val="solid"/>
-                      <a:round/>
-                      <a:headEnd type="none" w="med" len="med"/>
-                      <a:tailEnd type="none" w="med" len="med"/>
-                    </a:lnL>
-                    <a:lnR w="9525" cap="flat" cmpd="sng" algn="ctr">
-                      <a:solidFill>
-                        <a:srgbClr val="BFC8DC"/>
-                      </a:solidFill>
-                      <a:prstDash val="solid"/>
-                      <a:round/>
-                      <a:headEnd type="none" w="med" len="med"/>
-                      <a:tailEnd type="none" w="med" len="med"/>
-                    </a:lnR>
-                    <a:lnT w="9525" cap="flat" cmpd="sng" algn="ctr">
-                      <a:solidFill>
-                        <a:srgbClr val="BFC8DC"/>
-                      </a:solidFill>
-                      <a:prstDash val="solid"/>
-                      <a:round/>
-                      <a:headEnd type="none" w="med" len="med"/>
-                      <a:tailEnd type="none" w="med" len="med"/>
-                    </a:lnT>
-                    <a:lnB w="9525" cap="flat" cmpd="sng" algn="ctr">
-                      <a:solidFill>
-                        <a:srgbClr val="BFC8DC"/>
-                      </a:solidFill>
-                      <a:prstDash val="solid"/>
-                      <a:round/>
-                      <a:headEnd type="none" w="med" len="med"/>
-                      <a:tailEnd type="none" w="med" len="med"/>
-                    </a:lnB>
-                    <a:solidFill>
-                      <a:srgbClr val="FFFFFF"/>
-                    </a:solidFill>
-                  </a:tcPr>
-                </a:tc>
-                <a:extLst>
-                  <a:ext uri="{0D108BD9-81ED-4DB2-BD59-A6C34878D82A}">
-                    <a16:rowId xmlns:a16="http://schemas.microsoft.com/office/drawing/2014/main" val="10002"/>
-                  </a:ext>
-                </a:extLst>
-              </a:tr>
-              <a:tr h="777240">
-                <a:tc>
-                  <a:txBody>
-                    <a:bodyPr/>
-                    <a:lstStyle/>
-                    <a:p>
-                      <a:pPr algn="ctr">
-                        <a:buNone/>
-                      </a:pPr>
-                      <a:r>
-                        <a:rPr lang="ja-JP" altLang="en-US" sz="1400" b="1" dirty="0">
-                          <a:solidFill>
-                            <a:srgbClr val="1F285A"/>
-                          </a:solidFill>
-                          <a:latin typeface="メイリオ" panose="020B0604030504040204" pitchFamily="50" charset="-128"/>
-                          <a:ea typeface="メイリオ" panose="020B0604030504040204" pitchFamily="50" charset="-128"/>
-                        </a:rPr>
-                        <a:t>月額ツール・LINE関連費</a:t>
-                      </a:r>
-                      <a:endParaRPr lang="ja-JP" altLang="en-US" sz="1400" dirty="0"/>
-                    </a:p>
-                  </a:txBody>
-                  <a:tcPr marL="27432" marR="27432" marT="27432" marB="27432" anchor="ctr">
-                    <a:lnL w="9525" cap="flat" cmpd="sng" algn="ctr">
-                      <a:solidFill>
-                        <a:srgbClr val="BFC8DC"/>
-                      </a:solidFill>
-                      <a:prstDash val="solid"/>
-                      <a:round/>
-                      <a:headEnd type="none" w="med" len="med"/>
-                      <a:tailEnd type="none" w="med" len="med"/>
-                    </a:lnL>
-                    <a:lnR w="9525" cap="flat" cmpd="sng" algn="ctr">
-                      <a:solidFill>
-                        <a:srgbClr val="BFC8DC"/>
-                      </a:solidFill>
-                      <a:prstDash val="solid"/>
-                      <a:round/>
-                      <a:headEnd type="none" w="med" len="med"/>
-                      <a:tailEnd type="none" w="med" len="med"/>
-                    </a:lnR>
-                    <a:lnT w="9525" cap="flat" cmpd="sng" algn="ctr">
-                      <a:solidFill>
-                        <a:srgbClr val="BFC8DC"/>
-                      </a:solidFill>
-                      <a:prstDash val="solid"/>
-                      <a:round/>
-                      <a:headEnd type="none" w="med" len="med"/>
-                      <a:tailEnd type="none" w="med" len="med"/>
-                    </a:lnT>
-                    <a:lnB w="9525" cap="flat" cmpd="sng" algn="ctr">
-                      <a:solidFill>
-                        <a:srgbClr val="BFC8DC"/>
-                      </a:solidFill>
-                      <a:prstDash val="solid"/>
-                      <a:round/>
-                      <a:headEnd type="none" w="med" len="med"/>
-                      <a:tailEnd type="none" w="med" len="med"/>
-                    </a:lnB>
-                    <a:solidFill>
-                      <a:srgbClr val="E8ECF6"/>
-                    </a:solidFill>
-                  </a:tcPr>
-                </a:tc>
-                <a:tc>
-                  <a:txBody>
-                    <a:bodyPr/>
-                    <a:lstStyle/>
-                    <a:p>
-                      <a:pPr algn="ctr">
-                        <a:buNone/>
-                      </a:pPr>
-                      <a:r>
-                        <a:rPr lang="ja-JP" altLang="en-US" sz="1500" b="0" dirty="0">
-                          <a:solidFill>
-                            <a:srgbClr val="333333"/>
-                          </a:solidFill>
-                          <a:latin typeface="メイリオ" panose="020B0604030504040204" pitchFamily="50" charset="-128"/>
-                          <a:ea typeface="メイリオ" panose="020B0604030504040204" pitchFamily="50" charset="-128"/>
-                        </a:rPr>
-                        <a:t>65,000円〜</a:t>
-                      </a:r>
-                      <a:endParaRPr lang="ja-JP" altLang="en-US" sz="1500" dirty="0"/>
-                    </a:p>
-                  </a:txBody>
-                  <a:tcPr marL="73152" marR="73152" marT="27432" marB="27432" anchor="ctr">
-                    <a:lnL w="9525" cap="flat" cmpd="sng" algn="ctr">
-                      <a:solidFill>
-                        <a:srgbClr val="BFC8DC"/>
-                      </a:solidFill>
-                      <a:prstDash val="solid"/>
-                      <a:round/>
-                      <a:headEnd type="none" w="med" len="med"/>
-                      <a:tailEnd type="none" w="med" len="med"/>
-                    </a:lnL>
-                    <a:lnR w="9525" cap="flat" cmpd="sng" algn="ctr">
-                      <a:solidFill>
-                        <a:srgbClr val="BFC8DC"/>
-                      </a:solidFill>
-                      <a:prstDash val="solid"/>
-                      <a:round/>
-                      <a:headEnd type="none" w="med" len="med"/>
-                      <a:tailEnd type="none" w="med" len="med"/>
-                    </a:lnR>
-                    <a:lnT w="9525" cap="flat" cmpd="sng" algn="ctr">
-                      <a:solidFill>
-                        <a:srgbClr val="BFC8DC"/>
-                      </a:solidFill>
-                      <a:prstDash val="solid"/>
-                      <a:round/>
-                      <a:headEnd type="none" w="med" len="med"/>
-                      <a:tailEnd type="none" w="med" len="med"/>
-                    </a:lnT>
-                    <a:lnB w="9525" cap="flat" cmpd="sng" algn="ctr">
-                      <a:solidFill>
-                        <a:srgbClr val="BFC8DC"/>
-                      </a:solidFill>
-                      <a:prstDash val="solid"/>
-                      <a:round/>
-                      <a:headEnd type="none" w="med" len="med"/>
-                      <a:tailEnd type="none" w="med" len="med"/>
-                    </a:lnB>
-                    <a:solidFill>
-                      <a:srgbClr val="FFFFFF"/>
-                    </a:solidFill>
-                  </a:tcPr>
-                </a:tc>
-                <a:tc>
-                  <a:txBody>
-                    <a:bodyPr/>
-                    <a:lstStyle/>
-                    <a:p>
-                      <a:pPr algn="ctr">
-                        <a:buNone/>
-                      </a:pPr>
-                      <a:r>
-                        <a:rPr lang="ja-JP" altLang="en-US" sz="1500" b="0" dirty="0">
-                          <a:solidFill>
-                            <a:srgbClr val="333333"/>
-                          </a:solidFill>
-                          <a:latin typeface="メイリオ" panose="020B0604030504040204" pitchFamily="50" charset="-128"/>
-                          <a:ea typeface="メイリオ" panose="020B0604030504040204" pitchFamily="50" charset="-128"/>
-                        </a:rPr>
-                        <a:t>65,000円〜</a:t>
-                      </a:r>
-                      <a:endParaRPr lang="ja-JP" altLang="en-US" sz="1500" dirty="0"/>
-                    </a:p>
-                  </a:txBody>
-                  <a:tcPr marL="73152" marR="73152" marT="27432" marB="27432" anchor="ctr">
-                    <a:lnL w="9525" cap="flat" cmpd="sng" algn="ctr">
-                      <a:solidFill>
-                        <a:srgbClr val="BFC8DC"/>
-                      </a:solidFill>
-                      <a:prstDash val="solid"/>
-                      <a:round/>
-                      <a:headEnd type="none" w="med" len="med"/>
-                      <a:tailEnd type="none" w="med" len="med"/>
-                    </a:lnL>
-                    <a:lnR w="9525" cap="flat" cmpd="sng" algn="ctr">
-                      <a:solidFill>
-                        <a:srgbClr val="BFC8DC"/>
-                      </a:solidFill>
-                      <a:prstDash val="solid"/>
-                      <a:round/>
-                      <a:headEnd type="none" w="med" len="med"/>
-                      <a:tailEnd type="none" w="med" len="med"/>
-                    </a:lnR>
-                    <a:lnT w="9525" cap="flat" cmpd="sng" algn="ctr">
-                      <a:solidFill>
-                        <a:srgbClr val="BFC8DC"/>
-                      </a:solidFill>
-                      <a:prstDash val="solid"/>
-                      <a:round/>
-                      <a:headEnd type="none" w="med" len="med"/>
-                      <a:tailEnd type="none" w="med" len="med"/>
-                    </a:lnT>
-                    <a:lnB w="9525" cap="flat" cmpd="sng" algn="ctr">
-                      <a:solidFill>
-                        <a:srgbClr val="BFC8DC"/>
-                      </a:solidFill>
-                      <a:prstDash val="solid"/>
-                      <a:round/>
-                      <a:headEnd type="none" w="med" len="med"/>
-                      <a:tailEnd type="none" w="med" len="med"/>
-                    </a:lnB>
-                    <a:solidFill>
-                      <a:srgbClr val="FFFFFF"/>
-                    </a:solidFill>
-                  </a:tcPr>
-                </a:tc>
-                <a:extLst>
-                  <a:ext uri="{0D108BD9-81ED-4DB2-BD59-A6C34878D82A}">
-                    <a16:rowId xmlns:a16="http://schemas.microsoft.com/office/drawing/2014/main" val="10003"/>
-                  </a:ext>
-                </a:extLst>
-              </a:tr>
-              <a:tr h="914400">
-                <a:tc>
-                  <a:txBody>
-                    <a:bodyPr/>
-                    <a:lstStyle/>
-                    <a:p>
-                      <a:pPr algn="ctr">
-                        <a:buNone/>
-                      </a:pPr>
-                      <a:r>
-                        <a:rPr lang="ja-JP" altLang="en-US" sz="1400" b="1" dirty="0">
-                          <a:solidFill>
-                            <a:srgbClr val="FFFFFF"/>
-                          </a:solidFill>
-                          <a:latin typeface="メイリオ" panose="020B0604030504040204" pitchFamily="50" charset="-128"/>
-                          <a:ea typeface="メイリオ" panose="020B0604030504040204" pitchFamily="50" charset="-128"/>
-                        </a:rPr>
-                        <a:t>月額費用</a:t>
-                      </a:r>
-                      <a:endParaRPr lang="ja-JP" altLang="en-US" sz="1400" dirty="0"/>
-                    </a:p>
-                  </a:txBody>
-                  <a:tcPr marL="73152" marR="73152" marT="27432" marB="27432" anchor="ctr">
-                    <a:lnL w="9525" cap="flat" cmpd="sng" algn="ctr">
-                      <a:solidFill>
-                        <a:srgbClr val="BFC8DC"/>
-                      </a:solidFill>
-                      <a:prstDash val="solid"/>
-                      <a:round/>
-                      <a:headEnd type="none" w="med" len="med"/>
-                      <a:tailEnd type="none" w="med" len="med"/>
-                    </a:lnL>
-                    <a:lnR w="9525" cap="flat" cmpd="sng" algn="ctr">
-                      <a:solidFill>
-                        <a:srgbClr val="BFC8DC"/>
-                      </a:solidFill>
-                      <a:prstDash val="solid"/>
-                      <a:round/>
-                      <a:headEnd type="none" w="med" len="med"/>
-                      <a:tailEnd type="none" w="med" len="med"/>
-                    </a:lnR>
-                    <a:lnT w="9525" cap="flat" cmpd="sng" algn="ctr">
-                      <a:solidFill>
-                        <a:srgbClr val="BFC8DC"/>
-                      </a:solidFill>
-                      <a:prstDash val="solid"/>
-                      <a:round/>
-                      <a:headEnd type="none" w="med" len="med"/>
-                      <a:tailEnd type="none" w="med" len="med"/>
-                    </a:lnT>
-                    <a:lnB w="9525" cap="flat" cmpd="sng" algn="ctr">
-                      <a:solidFill>
-                        <a:srgbClr val="BFC8DC"/>
-                      </a:solidFill>
-                      <a:prstDash val="solid"/>
-                      <a:round/>
-                      <a:headEnd type="none" w="med" len="med"/>
-                      <a:tailEnd type="none" w="med" len="med"/>
-                    </a:lnB>
-                    <a:solidFill>
-                      <a:srgbClr val="1F285A"/>
-                    </a:solidFill>
-                  </a:tcPr>
-                </a:tc>
-                <a:tc>
-                  <a:txBody>
-                    <a:bodyPr/>
-                    <a:lstStyle/>
-                    <a:p>
-                      <a:pPr algn="ctr">
-                        <a:buNone/>
-                      </a:pPr>
-                      <a:r>
-                        <a:rPr lang="ja-JP" altLang="en-US" sz="2000" b="1" dirty="0">
-                          <a:solidFill>
-                            <a:srgbClr val="1F285A"/>
-                          </a:solidFill>
-                          <a:latin typeface="メイリオ" panose="020B0604030504040204" pitchFamily="50" charset="-128"/>
-                          <a:ea typeface="メイリオ" panose="020B0604030504040204" pitchFamily="50" charset="-128"/>
-                        </a:rPr>
-                        <a:t>65,000円〜</a:t>
-                      </a:r>
-                      <a:endParaRPr lang="ja-JP" altLang="en-US" sz="2000" dirty="0"/>
-                    </a:p>
-                    <a:p>
-                      <a:pPr algn="ctr">
-                        <a:buNone/>
-                      </a:pPr>
-                      <a:r>
-                        <a:rPr lang="ja-JP" altLang="en-US" sz="2000" b="1" dirty="0">
-                          <a:solidFill>
-                            <a:srgbClr val="1F285A"/>
-                          </a:solidFill>
-                          <a:latin typeface="メイリオ" panose="020B0604030504040204" pitchFamily="50" charset="-128"/>
-                          <a:ea typeface="メイリオ" panose="020B0604030504040204" pitchFamily="50" charset="-128"/>
-                        </a:rPr>
-                        <a:t>＋成果報酬</a:t>
-                      </a:r>
-                      <a:endParaRPr lang="ja-JP" altLang="en-US" sz="2000" dirty="0"/>
-                    </a:p>
-                  </a:txBody>
-                  <a:tcPr marL="73152" marR="73152" marT="27432" marB="27432" anchor="ctr">
-                    <a:lnL w="9525" cap="flat" cmpd="sng" algn="ctr">
-                      <a:solidFill>
-                        <a:srgbClr val="BFC8DC"/>
-                      </a:solidFill>
-                      <a:prstDash val="solid"/>
-                      <a:round/>
-                      <a:headEnd type="none" w="med" len="med"/>
-                      <a:tailEnd type="none" w="med" len="med"/>
-                    </a:lnL>
-                    <a:lnR w="9525" cap="flat" cmpd="sng" algn="ctr">
-                      <a:solidFill>
-                        <a:srgbClr val="BFC8DC"/>
-                      </a:solidFill>
-                      <a:prstDash val="solid"/>
-                      <a:round/>
-                      <a:headEnd type="none" w="med" len="med"/>
-                      <a:tailEnd type="none" w="med" len="med"/>
-                    </a:lnR>
-                    <a:lnT w="9525" cap="flat" cmpd="sng" algn="ctr">
-                      <a:solidFill>
-                        <a:srgbClr val="BFC8DC"/>
-                      </a:solidFill>
-                      <a:prstDash val="solid"/>
-                      <a:round/>
-                      <a:headEnd type="none" w="med" len="med"/>
-                      <a:tailEnd type="none" w="med" len="med"/>
-                    </a:lnT>
-                    <a:lnB w="9525" cap="flat" cmpd="sng" algn="ctr">
-                      <a:solidFill>
-                        <a:srgbClr val="BFC8DC"/>
-                      </a:solidFill>
-                      <a:prstDash val="solid"/>
-                      <a:round/>
-                      <a:headEnd type="none" w="med" len="med"/>
-                      <a:tailEnd type="none" w="med" len="med"/>
-                    </a:lnB>
-                    <a:solidFill>
-                      <a:srgbClr val="E8ECF6"/>
-                    </a:solidFill>
-                  </a:tcPr>
-                </a:tc>
-                <a:tc>
-                  <a:txBody>
-                    <a:bodyPr/>
-                    <a:lstStyle/>
-                    <a:p>
-                      <a:pPr algn="ctr">
-                        <a:buNone/>
-                      </a:pPr>
-                      <a:r>
-                        <a:rPr lang="ja-JP" altLang="en-US" sz="2000" b="1" dirty="0">
-                          <a:solidFill>
-                            <a:srgbClr val="1F285A"/>
-                          </a:solidFill>
-                          <a:latin typeface="メイリオ" panose="020B0604030504040204" pitchFamily="50" charset="-128"/>
-                          <a:ea typeface="メイリオ" panose="020B0604030504040204" pitchFamily="50" charset="-128"/>
-                        </a:rPr>
-                        <a:t>65,000円〜</a:t>
-                      </a:r>
-                      <a:endParaRPr lang="ja-JP" altLang="en-US" sz="2000" dirty="0"/>
-                    </a:p>
-                    <a:p>
-                      <a:pPr algn="ctr">
-                        <a:buNone/>
-                      </a:pPr>
-                      <a:r>
-                        <a:rPr lang="ja-JP" altLang="en-US" sz="2000" b="1" dirty="0">
-                          <a:solidFill>
-                            <a:srgbClr val="1F285A"/>
-                          </a:solidFill>
-                          <a:latin typeface="メイリオ" panose="020B0604030504040204" pitchFamily="50" charset="-128"/>
-                          <a:ea typeface="メイリオ" panose="020B0604030504040204" pitchFamily="50" charset="-128"/>
-                        </a:rPr>
-                        <a:t>＋成果報酬</a:t>
-                      </a:r>
-                      <a:endParaRPr lang="ja-JP" altLang="en-US" sz="2000" dirty="0"/>
-                    </a:p>
-                  </a:txBody>
-                  <a:tcPr marL="73152" marR="73152" marT="27432" marB="27432" anchor="ctr">
-                    <a:lnL w="9525" cap="flat" cmpd="sng" algn="ctr">
-                      <a:solidFill>
-                        <a:srgbClr val="BFC8DC"/>
-                      </a:solidFill>
-                      <a:prstDash val="solid"/>
-                      <a:round/>
-                      <a:headEnd type="none" w="med" len="med"/>
-                      <a:tailEnd type="none" w="med" len="med"/>
-                    </a:lnL>
-                    <a:lnR w="9525" cap="flat" cmpd="sng" algn="ctr">
-                      <a:solidFill>
-                        <a:srgbClr val="BFC8DC"/>
-                      </a:solidFill>
-                      <a:prstDash val="solid"/>
-                      <a:round/>
-                      <a:headEnd type="none" w="med" len="med"/>
-                      <a:tailEnd type="none" w="med" len="med"/>
-                    </a:lnR>
-                    <a:lnT w="9525" cap="flat" cmpd="sng" algn="ctr">
-                      <a:solidFill>
-                        <a:srgbClr val="BFC8DC"/>
-                      </a:solidFill>
-                      <a:prstDash val="solid"/>
-                      <a:round/>
-                      <a:headEnd type="none" w="med" len="med"/>
-                      <a:tailEnd type="none" w="med" len="med"/>
-                    </a:lnT>
-                    <a:lnB w="9525" cap="flat" cmpd="sng" algn="ctr">
-                      <a:solidFill>
-                        <a:srgbClr val="BFC8DC"/>
-                      </a:solidFill>
-                      <a:prstDash val="solid"/>
-                      <a:round/>
-                      <a:headEnd type="none" w="med" len="med"/>
-                      <a:tailEnd type="none" w="med" len="med"/>
-                    </a:lnB>
-                    <a:solidFill>
-                      <a:srgbClr val="E8ECF6"/>
-                    </a:solidFill>
-                  </a:tcPr>
-                </a:tc>
-                <a:extLst>
-                  <a:ext uri="{0D108BD9-81ED-4DB2-BD59-A6C34878D82A}">
-                    <a16:rowId xmlns:a16="http://schemas.microsoft.com/office/drawing/2014/main" val="10004"/>
-                  </a:ext>
-                </a:extLst>
-              </a:tr>
-            </a:tbl>
-          </a:graphicData>
-        </a:graphic>
-      </p:graphicFrame>
-      <p:sp>
-        <p:nvSpPr>
-          <p:cNvPr id="640" name="注記"/>
-          <p:cNvSpPr/>
-          <p:nvPr/>
-        </p:nvSpPr>
-        <p:spPr>
-          <a:xfrm>
-            <a:off x="384048" y="5312412"/>
-            <a:ext cx="9144000" cy="246888"/>
-          </a:xfrm>
-          <a:prstGeom prst="rect">
-            <a:avLst/>
-          </a:prstGeom>
-          <a:noFill/>
-          <a:ln>
-            <a:noFill/>
-          </a:ln>
-        </p:spPr>
-        <p:txBody>
-          <a:bodyPr wrap="square" lIns="0" tIns="0" rIns="0" bIns="0" rtlCol="0" anchor="t">
-            <a:noAutofit/>
-          </a:bodyPr>
-          <a:lstStyle/>
-          <a:p>
-            <a:pPr algn="l">
-              <a:buNone/>
-            </a:pPr>
-            <a:r>
-              <a:rPr lang="ja-JP" altLang="en-US" sz="900" b="0" dirty="0">
-                <a:solidFill>
-                  <a:srgbClr val="7F7F7F"/>
-                </a:solidFill>
-                <a:latin typeface="メイリオ" panose="020B0604030504040204" pitchFamily="50" charset="-128"/>
-                <a:ea typeface="メイリオ" panose="020B0604030504040204" pitchFamily="50" charset="-128"/>
-              </a:rPr>
-              <a:t>※初期費用＝運用設計・構築 100,000円〜＋離脱防止 15,000円＋サンクスLINE誘導 150,000円＋LINE公式アカウント開設 30,000円</a:t>
-            </a:r>
-            <a:endParaRPr lang="ja-JP" altLang="en-US" sz="1200" dirty="0"/>
-          </a:p>
-        </p:txBody>
-      </p:sp>
-      <p:sp>
-        <p:nvSpPr>
-          <p:cNvPr id="641" name="注記"/>
-          <p:cNvSpPr/>
-          <p:nvPr/>
-        </p:nvSpPr>
-        <p:spPr>
-          <a:xfrm>
-            <a:off x="384048" y="5559300"/>
-            <a:ext cx="9144000" cy="246888"/>
-          </a:xfrm>
-          <a:prstGeom prst="rect">
-            <a:avLst/>
-          </a:prstGeom>
-          <a:noFill/>
-          <a:ln>
-            <a:noFill/>
-          </a:ln>
-        </p:spPr>
-        <p:txBody>
-          <a:bodyPr wrap="square" lIns="0" tIns="0" rIns="0" bIns="0" rtlCol="0" anchor="t">
-            <a:noAutofit/>
-          </a:bodyPr>
-          <a:lstStyle/>
-          <a:p>
-            <a:pPr algn="l">
-              <a:buNone/>
-            </a:pPr>
-            <a:r>
-              <a:rPr lang="ja-JP" altLang="en-US" sz="900" b="0" dirty="0">
-                <a:solidFill>
-                  <a:srgbClr val="7F7F7F"/>
-                </a:solidFill>
-                <a:latin typeface="メイリオ" panose="020B0604030504040204" pitchFamily="50" charset="-128"/>
-                <a:ea typeface="メイリオ" panose="020B0604030504040204" pitchFamily="50" charset="-128"/>
-              </a:rPr>
-              <a:t>※月額ツール・LINE関連費＝離脱防止 30,000円＋サンクスLINE誘導 30,000円〜＋LINE公式アカウント利用料 5,000円〜（ライトプラン想定）</a:t>
-            </a:r>
-            <a:endParaRPr lang="ja-JP" altLang="en-US" sz="1200" dirty="0"/>
-          </a:p>
-        </p:txBody>
-      </p:sp>
-      <p:sp>
-        <p:nvSpPr>
-          <p:cNvPr id="642" name="注記"/>
-          <p:cNvSpPr/>
-          <p:nvPr/>
-        </p:nvSpPr>
-        <p:spPr>
-          <a:xfrm>
-            <a:off x="384048" y="5806188"/>
-            <a:ext cx="9144000" cy="246888"/>
-          </a:xfrm>
-          <a:prstGeom prst="rect">
-            <a:avLst/>
-          </a:prstGeom>
-          <a:noFill/>
-          <a:ln>
-            <a:noFill/>
-          </a:ln>
-        </p:spPr>
-        <p:txBody>
-          <a:bodyPr wrap="square" lIns="0" tIns="0" rIns="0" bIns="0" rtlCol="0" anchor="t">
-            <a:noAutofit/>
-          </a:bodyPr>
-          <a:lstStyle/>
-          <a:p>
-            <a:pPr algn="l">
-              <a:buNone/>
-            </a:pPr>
-            <a:r>
-              <a:rPr lang="ja-JP" altLang="en-US" sz="900" b="0" dirty="0">
-                <a:solidFill>
-                  <a:srgbClr val="7F7F7F"/>
-                </a:solidFill>
-                <a:latin typeface="メイリオ" panose="020B0604030504040204" pitchFamily="50" charset="-128"/>
-                <a:ea typeface="メイリオ" panose="020B0604030504040204" pitchFamily="50" charset="-128"/>
-              </a:rPr>
-              <a:t>※成果報酬の対象＝LINEからの新規応募・再応募（再応募は、勤務希望をLINEで受け付ける場合）。契約期間は6か月〜</a:t>
-            </a:r>
-            <a:endParaRPr lang="ja-JP" altLang="en-US" sz="1200" dirty="0"/>
-          </a:p>
-        </p:txBody>
-      </p:sp>
-      <p:sp>
-        <p:nvSpPr>
-          <p:cNvPr id="643" name="注記"/>
-          <p:cNvSpPr/>
-          <p:nvPr/>
-        </p:nvSpPr>
-        <p:spPr>
-          <a:xfrm>
-            <a:off x="384048" y="6053076"/>
-            <a:ext cx="9144000" cy="246888"/>
-          </a:xfrm>
-          <a:prstGeom prst="rect">
-            <a:avLst/>
-          </a:prstGeom>
-          <a:noFill/>
-          <a:ln>
-            <a:noFill/>
-          </a:ln>
-        </p:spPr>
-        <p:txBody>
-          <a:bodyPr wrap="square" lIns="0" tIns="0" rIns="0" bIns="0" rtlCol="0" anchor="t">
-            <a:noAutofit/>
-          </a:bodyPr>
-          <a:lstStyle/>
-          <a:p>
-            <a:pPr algn="l">
-              <a:buNone/>
-            </a:pPr>
-            <a:r>
-              <a:rPr lang="ja-JP" altLang="en-US" sz="900" b="0" dirty="0">
-                <a:solidFill>
-                  <a:srgbClr val="7F7F7F"/>
-                </a:solidFill>
-                <a:latin typeface="メイリオ" panose="020B0604030504040204" pitchFamily="50" charset="-128"/>
-                <a:ea typeface="メイリオ" panose="020B0604030504040204" pitchFamily="50" charset="-128"/>
-              </a:rPr>
-              <a:t>※施策内容・配信本数・連携範囲等により、費用は個別にお見積もりいたします。</a:t>
-            </a:r>
-            <a:endParaRPr lang="ja-JP" altLang="en-US" sz="1200" dirty="0"/>
-          </a:p>
-        </p:txBody>
-      </p:sp>
-    </p:spTree>
-  </p:cSld>
-  <p:clrMapOvr>
-    <a:masterClrMapping/>
-  </p:clrMapOvr>
 </p:sld>
 </file>
 

--- a/202610_株式会社横浜シミズ御中_LINE公式アカウント運用のご提案.pptx
+++ b/202610_株式会社横浜シミズ御中_LINE公式アカウント運用のご提案.pptx
@@ -13559,21 +13559,28 @@
             <a:tbl>
               <a:tblPr/>
               <a:tblGrid>
-                <a:gridCol w="2743200">
+                <a:gridCol w="2286000">
                   <a:extLst>
                     <a:ext uri="{9D8B030D-6E8A-4147-A177-3AD203B41FA5}">
                       <a16:colId xmlns:a16="http://schemas.microsoft.com/office/drawing/2014/main" val="20000"/>
                     </a:ext>
                   </a:extLst>
                 </a:gridCol>
-                <a:gridCol w="3200400">
+                <a:gridCol w="2286000">
+                  <a:extLst>
+                    <a:ext uri="{9D8B030D-6E8A-4147-A177-3AD203B41FA5}">
+                      <a16:colId xmlns:a16="http://schemas.microsoft.com/office/drawing/2014/main" val="20001"/>
+                    </a:ext>
+                  </a:extLst>
+                </a:gridCol>
+                <a:gridCol w="2286000">
                   <a:extLst>
                     <a:ext uri="{9D8B030D-6E8A-4147-A177-3AD203B41FA5}">
                       <a16:colId xmlns:a16="http://schemas.microsoft.com/office/drawing/2014/main" val="20002"/>
                     </a:ext>
                   </a:extLst>
                 </a:gridCol>
-                <a:gridCol w="3200400">
+                <a:gridCol w="2286000">
                   <a:extLst>
                     <a:ext uri="{9D8B030D-6E8A-4147-A177-3AD203B41FA5}">
                       <a16:colId xmlns:a16="http://schemas.microsoft.com/office/drawing/2014/main" val="20003"/>
@@ -13601,6 +13608,85 @@
                         <a:t>項目</a:t>
                       </a:r>
                       <a:endParaRPr lang="ja-JP" altLang="en-US" sz="1400" dirty="0"/>
+                    </a:p>
+                  </a:txBody>
+                  <a:tcPr marL="73152" marR="73152" marT="27432" marB="27432" anchor="ctr">
+                    <a:lnL w="9525" cap="flat" cmpd="sng" algn="ctr">
+                      <a:solidFill>
+                        <a:srgbClr val="FFFFFF"/>
+                      </a:solidFill>
+                      <a:prstDash val="solid"/>
+                      <a:round/>
+                      <a:headEnd type="none" w="med" len="med"/>
+                      <a:tailEnd type="none" w="med" len="med"/>
+                    </a:lnL>
+                    <a:lnR w="9525" cap="flat" cmpd="sng" algn="ctr">
+                      <a:solidFill>
+                        <a:srgbClr val="FFFFFF"/>
+                      </a:solidFill>
+                      <a:prstDash val="solid"/>
+                      <a:round/>
+                      <a:headEnd type="none" w="med" len="med"/>
+                      <a:tailEnd type="none" w="med" len="med"/>
+                    </a:lnR>
+                    <a:lnT w="9525" cap="flat" cmpd="sng" algn="ctr">
+                      <a:solidFill>
+                        <a:srgbClr val="FFFFFF"/>
+                      </a:solidFill>
+                      <a:prstDash val="solid"/>
+                      <a:round/>
+                      <a:headEnd type="none" w="med" len="med"/>
+                      <a:tailEnd type="none" w="med" len="med"/>
+                    </a:lnT>
+                    <a:lnB w="9525" cap="flat" cmpd="sng" algn="ctr">
+                      <a:solidFill>
+                        <a:srgbClr val="FFFFFF"/>
+                      </a:solidFill>
+                      <a:prstDash val="solid"/>
+                      <a:round/>
+                      <a:headEnd type="none" w="med" len="med"/>
+                      <a:tailEnd type="none" w="med" len="med"/>
+                    </a:lnB>
+                    <a:solidFill>
+                      <a:srgbClr val="1F285A"/>
+                    </a:solidFill>
+                  </a:tcPr>
+                </a:tc>
+                <a:tc>
+                  <a:txBody>
+                    <a:bodyPr/>
+                    <a:lstStyle/>
+                    <a:p>
+                      <a:pPr algn="ctr">
+                        <a:buNone/>
+                      </a:pPr>
+                      <a:r>
+                        <a:rPr lang="ja-JP" altLang="en-US" sz="1400" b="1" dirty="0">
+                          <a:solidFill>
+                            <a:srgbClr val="FFFFFF"/>
+                          </a:solidFill>
+                          <a:latin typeface="メイリオ" panose="020B0604030504040204" pitchFamily="50" charset="-128"/>
+                          <a:ea typeface="メイリオ" panose="020B0604030504040204" pitchFamily="50" charset="-128"/>
+                        </a:rPr>
+                        <a:t>プラン①</a:t>
+                      </a:r>
+                      <a:endParaRPr lang="ja-JP" altLang="en-US" sz="1300" dirty="0"/>
+                    </a:p>
+                    <a:p>
+                      <a:pPr algn="ctr">
+                        <a:buNone/>
+                      </a:pPr>
+                      <a:r>
+                        <a:rPr lang="ja-JP" altLang="en-US" sz="1400" b="1" dirty="0">
+                          <a:solidFill>
+                            <a:srgbClr val="FFFFFF"/>
+                          </a:solidFill>
+                          <a:latin typeface="メイリオ" panose="020B0604030504040204" pitchFamily="50" charset="-128"/>
+                          <a:ea typeface="メイリオ" panose="020B0604030504040204" pitchFamily="50" charset="-128"/>
+                        </a:rPr>
+                        <a:t>初期設計・構築のみ</a:t>
+                      </a:r>
+                      <a:endParaRPr lang="ja-JP" altLang="en-US" sz="1300" dirty="0"/>
                     </a:p>
                   </a:txBody>
                   <a:tcPr marL="73152" marR="73152" marT="27432" marB="27432" anchor="ctr">
@@ -13870,6 +13956,69 @@
                     </a:lnB>
                     <a:solidFill>
                       <a:srgbClr val="E8ECF6"/>
+                    </a:solidFill>
+                  </a:tcPr>
+                </a:tc>
+                <a:tc>
+                  <a:txBody>
+                    <a:bodyPr/>
+                    <a:lstStyle/>
+                    <a:p>
+                      <a:pPr algn="ctr">
+                        <a:buNone/>
+                      </a:pPr>
+                      <a:r>
+                        <a:rPr lang="ja-JP" altLang="en-US" sz="1500" b="0" dirty="0">
+                          <a:solidFill>
+                            <a:srgbClr val="333333"/>
+                          </a:solidFill>
+                          <a:latin typeface="メイリオ" panose="020B0604030504040204" pitchFamily="50" charset="-128"/>
+                          <a:ea typeface="メイリオ" panose="020B0604030504040204" pitchFamily="50" charset="-128"/>
+                        </a:rPr>
+                        <a:t>295,000円〜</a:t>
+                      </a:r>
+                      <a:endParaRPr lang="ja-JP" altLang="en-US" sz="1500" dirty="0"/>
+                    </a:p>
+                  </a:txBody>
+                  <a:tcPr marL="73152" marR="73152" marT="27432" marB="27432" anchor="ctr">
+                    <a:lnL w="9525" cap="flat" cmpd="sng" algn="ctr">
+                      <a:solidFill>
+                        <a:srgbClr val="BFC8DC"/>
+                      </a:solidFill>
+                      <a:prstDash val="solid"/>
+                      <a:round/>
+                      <a:headEnd type="none" w="med" len="med"/>
+                      <a:tailEnd type="none" w="med" len="med"/>
+                    </a:lnL>
+                    <a:lnR w="9525" cap="flat" cmpd="sng" algn="ctr">
+                      <a:solidFill>
+                        <a:srgbClr val="BFC8DC"/>
+                      </a:solidFill>
+                      <a:prstDash val="solid"/>
+                      <a:round/>
+                      <a:headEnd type="none" w="med" len="med"/>
+                      <a:tailEnd type="none" w="med" len="med"/>
+                    </a:lnR>
+                    <a:lnT w="9525" cap="flat" cmpd="sng" algn="ctr">
+                      <a:solidFill>
+                        <a:srgbClr val="FFFFFF"/>
+                      </a:solidFill>
+                      <a:prstDash val="solid"/>
+                      <a:round/>
+                      <a:headEnd type="none" w="med" len="med"/>
+                      <a:tailEnd type="none" w="med" len="med"/>
+                    </a:lnT>
+                    <a:lnB w="9525" cap="flat" cmpd="sng" algn="ctr">
+                      <a:solidFill>
+                        <a:srgbClr val="BFC8DC"/>
+                      </a:solidFill>
+                      <a:prstDash val="solid"/>
+                      <a:round/>
+                      <a:headEnd type="none" w="med" len="med"/>
+                      <a:tailEnd type="none" w="med" len="med"/>
+                    </a:lnB>
+                    <a:solidFill>
+                      <a:srgbClr val="FFFFFF"/>
                     </a:solidFill>
                   </a:tcPr>
                 </a:tc>
@@ -14101,6 +14250,69 @@
                           <a:latin typeface="メイリオ" panose="020B0604030504040204" pitchFamily="50" charset="-128"/>
                           <a:ea typeface="メイリオ" panose="020B0604030504040204" pitchFamily="50" charset="-128"/>
                         </a:rPr>
+                        <a:t>なし</a:t>
+                      </a:r>
+                      <a:endParaRPr lang="ja-JP" altLang="en-US" sz="1500" dirty="0"/>
+                    </a:p>
+                  </a:txBody>
+                  <a:tcPr marL="73152" marR="73152" marT="27432" marB="27432" anchor="ctr">
+                    <a:lnL w="9525" cap="flat" cmpd="sng" algn="ctr">
+                      <a:solidFill>
+                        <a:srgbClr val="BFC8DC"/>
+                      </a:solidFill>
+                      <a:prstDash val="solid"/>
+                      <a:round/>
+                      <a:headEnd type="none" w="med" len="med"/>
+                      <a:tailEnd type="none" w="med" len="med"/>
+                    </a:lnL>
+                    <a:lnR w="9525" cap="flat" cmpd="sng" algn="ctr">
+                      <a:solidFill>
+                        <a:srgbClr val="BFC8DC"/>
+                      </a:solidFill>
+                      <a:prstDash val="solid"/>
+                      <a:round/>
+                      <a:headEnd type="none" w="med" len="med"/>
+                      <a:tailEnd type="none" w="med" len="med"/>
+                    </a:lnR>
+                    <a:lnT w="9525" cap="flat" cmpd="sng" algn="ctr">
+                      <a:solidFill>
+                        <a:srgbClr val="BFC8DC"/>
+                      </a:solidFill>
+                      <a:prstDash val="solid"/>
+                      <a:round/>
+                      <a:headEnd type="none" w="med" len="med"/>
+                      <a:tailEnd type="none" w="med" len="med"/>
+                    </a:lnT>
+                    <a:lnB w="9525" cap="flat" cmpd="sng" algn="ctr">
+                      <a:solidFill>
+                        <a:srgbClr val="BFC8DC"/>
+                      </a:solidFill>
+                      <a:prstDash val="solid"/>
+                      <a:round/>
+                      <a:headEnd type="none" w="med" len="med"/>
+                      <a:tailEnd type="none" w="med" len="med"/>
+                    </a:lnB>
+                    <a:solidFill>
+                      <a:srgbClr val="FFFFFF"/>
+                    </a:solidFill>
+                  </a:tcPr>
+                </a:tc>
+                <a:tc>
+                  <a:txBody>
+                    <a:bodyPr/>
+                    <a:lstStyle/>
+                    <a:p>
+                      <a:pPr algn="ctr">
+                        <a:buNone/>
+                      </a:pPr>
+                      <a:r>
+                        <a:rPr lang="ja-JP" altLang="en-US" sz="1500" b="0" dirty="0">
+                          <a:solidFill>
+                            <a:srgbClr val="333333"/>
+                          </a:solidFill>
+                          <a:latin typeface="メイリオ" panose="020B0604030504040204" pitchFamily="50" charset="-128"/>
+                          <a:ea typeface="メイリオ" panose="020B0604030504040204" pitchFamily="50" charset="-128"/>
+                        </a:rPr>
                         <a:t>6,000円</a:t>
                       </a:r>
                       <a:endParaRPr lang="ja-JP" altLang="en-US" sz="1500" dirty="0"/>
@@ -14407,6 +14619,69 @@
                     </a:solidFill>
                   </a:tcPr>
                 </a:tc>
+                <a:tc>
+                  <a:txBody>
+                    <a:bodyPr/>
+                    <a:lstStyle/>
+                    <a:p>
+                      <a:pPr algn="ctr">
+                        <a:buNone/>
+                      </a:pPr>
+                      <a:r>
+                        <a:rPr lang="ja-JP" altLang="en-US" sz="1500" b="0" dirty="0">
+                          <a:solidFill>
+                            <a:srgbClr val="333333"/>
+                          </a:solidFill>
+                          <a:latin typeface="メイリオ" panose="020B0604030504040204" pitchFamily="50" charset="-128"/>
+                          <a:ea typeface="メイリオ" panose="020B0604030504040204" pitchFamily="50" charset="-128"/>
+                        </a:rPr>
+                        <a:t>65,000円〜</a:t>
+                      </a:r>
+                      <a:endParaRPr lang="ja-JP" altLang="en-US" sz="1500" dirty="0"/>
+                    </a:p>
+                  </a:txBody>
+                  <a:tcPr marL="73152" marR="73152" marT="27432" marB="27432" anchor="ctr">
+                    <a:lnL w="9525" cap="flat" cmpd="sng" algn="ctr">
+                      <a:solidFill>
+                        <a:srgbClr val="BFC8DC"/>
+                      </a:solidFill>
+                      <a:prstDash val="solid"/>
+                      <a:round/>
+                      <a:headEnd type="none" w="med" len="med"/>
+                      <a:tailEnd type="none" w="med" len="med"/>
+                    </a:lnL>
+                    <a:lnR w="9525" cap="flat" cmpd="sng" algn="ctr">
+                      <a:solidFill>
+                        <a:srgbClr val="BFC8DC"/>
+                      </a:solidFill>
+                      <a:prstDash val="solid"/>
+                      <a:round/>
+                      <a:headEnd type="none" w="med" len="med"/>
+                      <a:tailEnd type="none" w="med" len="med"/>
+                    </a:lnR>
+                    <a:lnT w="9525" cap="flat" cmpd="sng" algn="ctr">
+                      <a:solidFill>
+                        <a:srgbClr val="BFC8DC"/>
+                      </a:solidFill>
+                      <a:prstDash val="solid"/>
+                      <a:round/>
+                      <a:headEnd type="none" w="med" len="med"/>
+                      <a:tailEnd type="none" w="med" len="med"/>
+                    </a:lnT>
+                    <a:lnB w="9525" cap="flat" cmpd="sng" algn="ctr">
+                      <a:solidFill>
+                        <a:srgbClr val="BFC8DC"/>
+                      </a:solidFill>
+                      <a:prstDash val="solid"/>
+                      <a:round/>
+                      <a:headEnd type="none" w="med" len="med"/>
+                      <a:tailEnd type="none" w="med" len="med"/>
+                    </a:lnB>
+                    <a:solidFill>
+                      <a:srgbClr val="FFFFFF"/>
+                    </a:solidFill>
+                  </a:tcPr>
+                </a:tc>
                 <a:extLst>
                   <a:ext uri="{0D108BD9-81ED-4DB2-BD59-A6C34878D82A}">
                     <a16:rowId xmlns:a16="http://schemas.microsoft.com/office/drawing/2014/main" val="10003"/>
@@ -14474,6 +14749,69 @@
                     </a:lnB>
                     <a:solidFill>
                       <a:srgbClr val="1F285A"/>
+                    </a:solidFill>
+                  </a:tcPr>
+                </a:tc>
+                <a:tc>
+                  <a:txBody>
+                    <a:bodyPr/>
+                    <a:lstStyle/>
+                    <a:p>
+                      <a:pPr algn="ctr">
+                        <a:buNone/>
+                      </a:pPr>
+                      <a:r>
+                        <a:rPr lang="ja-JP" altLang="en-US" sz="2000" b="1" dirty="0">
+                          <a:solidFill>
+                            <a:srgbClr val="1F285A"/>
+                          </a:solidFill>
+                          <a:latin typeface="メイリオ" panose="020B0604030504040204" pitchFamily="50" charset="-128"/>
+                          <a:ea typeface="メイリオ" panose="020B0604030504040204" pitchFamily="50" charset="-128"/>
+                        </a:rPr>
+                        <a:t>65,000円〜</a:t>
+                      </a:r>
+                      <a:endParaRPr lang="ja-JP" altLang="en-US" sz="2000" dirty="0"/>
+                    </a:p>
+                  </a:txBody>
+                  <a:tcPr marL="73152" marR="73152" marT="27432" marB="27432" anchor="ctr">
+                    <a:lnL w="9525" cap="flat" cmpd="sng" algn="ctr">
+                      <a:solidFill>
+                        <a:srgbClr val="BFC8DC"/>
+                      </a:solidFill>
+                      <a:prstDash val="solid"/>
+                      <a:round/>
+                      <a:headEnd type="none" w="med" len="med"/>
+                      <a:tailEnd type="none" w="med" len="med"/>
+                    </a:lnL>
+                    <a:lnR w="9525" cap="flat" cmpd="sng" algn="ctr">
+                      <a:solidFill>
+                        <a:srgbClr val="BFC8DC"/>
+                      </a:solidFill>
+                      <a:prstDash val="solid"/>
+                      <a:round/>
+                      <a:headEnd type="none" w="med" len="med"/>
+                      <a:tailEnd type="none" w="med" len="med"/>
+                    </a:lnR>
+                    <a:lnT w="9525" cap="flat" cmpd="sng" algn="ctr">
+                      <a:solidFill>
+                        <a:srgbClr val="BFC8DC"/>
+                      </a:solidFill>
+                      <a:prstDash val="solid"/>
+                      <a:round/>
+                      <a:headEnd type="none" w="med" len="med"/>
+                      <a:tailEnd type="none" w="med" len="med"/>
+                    </a:lnT>
+                    <a:lnB w="9525" cap="flat" cmpd="sng" algn="ctr">
+                      <a:solidFill>
+                        <a:srgbClr val="BFC8DC"/>
+                      </a:solidFill>
+                      <a:prstDash val="solid"/>
+                      <a:round/>
+                      <a:headEnd type="none" w="med" len="med"/>
+                      <a:tailEnd type="none" w="med" len="med"/>
+                    </a:lnB>
+                    <a:solidFill>
+                      <a:srgbClr val="E8ECF6"/>
                     </a:solidFill>
                   </a:tcPr>
                 </a:tc>

--- a/202610_株式会社横浜シミズ御中_LINE公式アカウント運用のご提案.pptx
+++ b/202610_株式会社横浜シミズ御中_LINE公式アカウント運用のご提案.pptx
@@ -14313,7 +14313,7 @@
                           <a:latin typeface="メイリオ" panose="020B0604030504040204" pitchFamily="50" charset="-128"/>
                           <a:ea typeface="メイリオ" panose="020B0604030504040204" pitchFamily="50" charset="-128"/>
                         </a:rPr>
-                        <a:t>6,000円</a:t>
+                        <a:t>20,000円</a:t>
                       </a:r>
                       <a:endParaRPr lang="ja-JP" altLang="en-US" sz="1500" dirty="0"/>
                     </a:p>
@@ -14376,7 +14376,7 @@
                           <a:latin typeface="メイリオ" panose="020B0604030504040204" pitchFamily="50" charset="-128"/>
                           <a:ea typeface="メイリオ" panose="020B0604030504040204" pitchFamily="50" charset="-128"/>
                         </a:rPr>
-                        <a:t>10,000円</a:t>
+                        <a:t>30,000円</a:t>
                       </a:r>
                       <a:endParaRPr lang="ja-JP" altLang="en-US" sz="1500" dirty="0"/>
                     </a:p>

--- a/202610_株式会社横浜シミズ御中_LINE公式アカウント運用のご提案.pptx
+++ b/202610_株式会社横浜シミズ御中_LINE公式アカウント運用のご提案.pptx
@@ -6,10 +6,10 @@
     <p:sldMasterId id="2147483687" r:id="rId2"/>
   </p:sldMasterIdLst>
   <p:notesMasterIdLst>
-    <p:notesMasterId r:id="rId21"/>
+    <p:notesMasterId r:id="rId22"/>
   </p:notesMasterIdLst>
   <p:handoutMasterIdLst>
-    <p:handoutMasterId r:id="rId22"/>
+    <p:handoutMasterId r:id="rId23"/>
   </p:handoutMasterIdLst>
   <p:sldIdLst>
     <p:sldId id="2363" r:id="rId3"/>
@@ -27,10 +27,10 @@
     <p:sldId id="2374" r:id="rId15"/>
     <p:sldId id="2378" r:id="rId16"/>
     <p:sldId id="2379" r:id="rId17"/>
-    <p:sldId id="2382" r:id="rId27"/>
-    <p:sldId id="2380" r:id="rId18"/>
-    <p:sldId id="2377" r:id="rId19"/>
-    <p:sldId id="1169" r:id="rId20"/>
+    <p:sldId id="2382" r:id="rId18"/>
+    <p:sldId id="2380" r:id="rId19"/>
+    <p:sldId id="2377" r:id="rId20"/>
+    <p:sldId id="1169" r:id="rId21"/>
   </p:sldIdLst>
   <p:sldSz cx="9906000" cy="6858000" type="A4"/>
   <p:notesSz cx="6807200" cy="9939338"/>
@@ -332,7 +332,7 @@
           <a:p>
             <a:fld id="{6AF8158D-F6B1-45E0-9831-E70689DC8490}" type="datetimeFigureOut">
               <a:rPr kumimoji="1" lang="ja-JP" altLang="en-US" smtClean="0"/>
-              <a:t>2026/10/21</a:t>
+              <a:t>2026/10/27</a:t>
             </a:fld>
             <a:endParaRPr kumimoji="1" lang="ja-JP" altLang="en-US"/>
           </a:p>
@@ -736,7 +736,7 @@
               <a:pPr defTabSz="956886">
                 <a:defRPr/>
               </a:pPr>
-              <a:t>18</a:t>
+              <a:t>19</a:t>
             </a:fld>
             <a:endParaRPr lang="ja-JP" altLang="en-US">
               <a:solidFill>
@@ -13328,7 +13328,7 @@
 </file>
 
 <file path=ppt/slides/slide16.xml><?xml version="1.0" encoding="utf-8"?>
-<p:sld xmlns:a="http://schemas.openxmlformats.org/drawingml/2006/main" xmlns:p="http://schemas.openxmlformats.org/presentationml/2006/main" xmlns:r="http://schemas.openxmlformats.org/officeDocument/2006/relationships">
+<p:sld xmlns:a="http://schemas.openxmlformats.org/drawingml/2006/main" xmlns:r="http://schemas.openxmlformats.org/officeDocument/2006/relationships" xmlns:p="http://schemas.openxmlformats.org/presentationml/2006/main">
   <p:cSld>
     <p:spTree>
       <p:nvGrpSpPr>
@@ -13336,7 +13336,14 @@
         <p:cNvGrpSpPr/>
         <p:nvPr/>
       </p:nvGrpSpPr>
-      <p:grpSpPr/>
+      <p:grpSpPr>
+        <a:xfrm>
+          <a:off x="0" y="0"/>
+          <a:ext cx="0" cy="0"/>
+          <a:chOff x="0" y="0"/>
+          <a:chExt cx="0" cy="0"/>
+        </a:xfrm>
+      </p:grpSpPr>
       <p:sp>
         <p:nvSpPr>
           <p:cNvPr id="635" name="Google Shape;752;p28"/>
@@ -13545,42 +13552,42 @@
           <p:nvPr>
             <p:extLst>
               <p:ext uri="{D42A27DB-BD31-4B8C-83A1-F6EECF244321}">
-                <p14:modId xmlns:p14="http://schemas.microsoft.com/office/powerpoint/2010/main" val="4252399329"/>
+                <p14:modId xmlns:p14="http://schemas.microsoft.com/office/powerpoint/2010/main" val="2705869607"/>
               </p:ext>
             </p:extLst>
           </p:nvPr>
         </p:nvGraphicFramePr>
         <p:xfrm>
           <a:off x="384048" y="1490760"/>
-          <a:ext cx="9144000" cy="3749040"/>
+          <a:ext cx="9144001" cy="3749040"/>
         </p:xfrm>
         <a:graphic>
           <a:graphicData uri="http://schemas.openxmlformats.org/drawingml/2006/table">
             <a:tbl>
               <a:tblPr/>
               <a:tblGrid>
-                <a:gridCol w="2286000">
+                <a:gridCol w="2032000">
                   <a:extLst>
                     <a:ext uri="{9D8B030D-6E8A-4147-A177-3AD203B41FA5}">
                       <a16:colId xmlns:a16="http://schemas.microsoft.com/office/drawing/2014/main" val="20000"/>
                     </a:ext>
                   </a:extLst>
                 </a:gridCol>
-                <a:gridCol w="2286000">
+                <a:gridCol w="2370667">
                   <a:extLst>
                     <a:ext uri="{9D8B030D-6E8A-4147-A177-3AD203B41FA5}">
-                      <a16:colId xmlns:a16="http://schemas.microsoft.com/office/drawing/2014/main" val="20001"/>
+                      <a16:colId xmlns:a16="http://schemas.microsoft.com/office/drawing/2014/main" val="2596778832"/>
                     </a:ext>
                   </a:extLst>
                 </a:gridCol>
-                <a:gridCol w="2286000">
+                <a:gridCol w="2370667">
                   <a:extLst>
                     <a:ext uri="{9D8B030D-6E8A-4147-A177-3AD203B41FA5}">
                       <a16:colId xmlns:a16="http://schemas.microsoft.com/office/drawing/2014/main" val="20002"/>
                     </a:ext>
                   </a:extLst>
                 </a:gridCol>
-                <a:gridCol w="2286000">
+                <a:gridCol w="2370667">
                   <a:extLst>
                     <a:ext uri="{9D8B030D-6E8A-4147-A177-3AD203B41FA5}">
                       <a16:colId xmlns:a16="http://schemas.microsoft.com/office/drawing/2014/main" val="20003"/>
@@ -14306,6 +14313,16 @@
                         <a:buNone/>
                       </a:pPr>
                       <a:r>
+                        <a:rPr lang="en-US" altLang="ja-JP" sz="1500" b="0" dirty="0">
+                          <a:solidFill>
+                            <a:srgbClr val="333333"/>
+                          </a:solidFill>
+                          <a:latin typeface="メイリオ" panose="020B0604030504040204" pitchFamily="50" charset="-128"/>
+                          <a:ea typeface="メイリオ" panose="020B0604030504040204" pitchFamily="50" charset="-128"/>
+                        </a:rPr>
+                        <a:t>20</a:t>
+                      </a:r>
+                      <a:r>
                         <a:rPr lang="ja-JP" altLang="en-US" sz="1500" b="0" dirty="0">
                           <a:solidFill>
                             <a:srgbClr val="333333"/>
@@ -14313,7 +14330,7 @@
                           <a:latin typeface="メイリオ" panose="020B0604030504040204" pitchFamily="50" charset="-128"/>
                           <a:ea typeface="メイリオ" panose="020B0604030504040204" pitchFamily="50" charset="-128"/>
                         </a:rPr>
-                        <a:t>20,000円</a:t>
+                        <a:t>,000円</a:t>
                       </a:r>
                       <a:endParaRPr lang="ja-JP" altLang="en-US" sz="1500" dirty="0"/>
                     </a:p>
@@ -14369,6 +14386,16 @@
                         <a:buNone/>
                       </a:pPr>
                       <a:r>
+                        <a:rPr lang="en-US" altLang="ja-JP" sz="1500" b="0" dirty="0">
+                          <a:solidFill>
+                            <a:srgbClr val="333333"/>
+                          </a:solidFill>
+                          <a:latin typeface="メイリオ" panose="020B0604030504040204" pitchFamily="50" charset="-128"/>
+                          <a:ea typeface="メイリオ" panose="020B0604030504040204" pitchFamily="50" charset="-128"/>
+                        </a:rPr>
+                        <a:t>3</a:t>
+                      </a:r>
+                      <a:r>
                         <a:rPr lang="ja-JP" altLang="en-US" sz="1500" b="0" dirty="0">
                           <a:solidFill>
                             <a:srgbClr val="333333"/>
@@ -14376,7 +14403,7 @@
                           <a:latin typeface="メイリオ" panose="020B0604030504040204" pitchFamily="50" charset="-128"/>
                           <a:ea typeface="メイリオ" panose="020B0604030504040204" pitchFamily="50" charset="-128"/>
                         </a:rPr>
-                        <a:t>30,000円</a:t>
+                        <a:t>0,000円</a:t>
                       </a:r>
                       <a:endParaRPr lang="ja-JP" altLang="en-US" sz="1500" dirty="0"/>
                     </a:p>

--- a/202610_株式会社横浜シミズ御中_LINE公式アカウント運用のご提案.pptx
+++ b/202610_株式会社横浜シミズ御中_LINE公式アカウント運用のご提案.pptx
@@ -27,7 +27,6 @@
     <p:sldId id="2374" r:id="rId15"/>
     <p:sldId id="2378" r:id="rId16"/>
     <p:sldId id="2379" r:id="rId17"/>
-    <p:sldId id="2382" r:id="rId18"/>
     <p:sldId id="2380" r:id="rId19"/>
     <p:sldId id="2377" r:id="rId20"/>
     <p:sldId id="1169" r:id="rId21"/>
@@ -9004,7 +9003,7 @@
                 <a:latin typeface="メイリオ"/>
                 <a:ea typeface="メイリオ"/>
               </a:rPr>
-              <a:t>概算お見積り：月215,000円で、6か月目に新規応募 月6件・再応募 月3件</a:t>
+              <a:t>概算お見積り：月215,000円で、6か月目に新規応募 月7件・再応募 月3件</a:t>
             </a:r>
           </a:p>
         </p:txBody>
@@ -10680,20 +10679,20 @@
       </p:sp>
       <p:sp>
         <p:nvSpPr>
-          <p:cNvPr id="365" name="正方形/長方形 11"/>
+          <p:cNvPr id="382" name="正方形/長方形 85"/>
           <p:cNvSpPr/>
           <p:nvPr/>
         </p:nvSpPr>
         <p:spPr>
           <a:xfrm>
-            <a:off x="307080" y="3090600"/>
-            <a:ext cx="1425960" cy="447840"/>
+            <a:off x="6812280" y="3383424"/>
+            <a:ext cx="1425960" cy="402120"/>
           </a:xfrm>
           <a:prstGeom prst="rect">
             <a:avLst/>
           </a:prstGeom>
           <a:solidFill>
-            <a:srgbClr val="00B050"/>
+            <a:srgbClr val="04FA0A"/>
           </a:solidFill>
           <a:ln>
             <a:noFill/>
@@ -10714,7 +10713,7 @@
           <a:fontRef idx="minor"/>
         </p:style>
         <p:txBody>
-          <a:bodyPr lIns="45720" tIns="18360" rIns="45720" bIns="18360" anchor="ctr">
+          <a:bodyPr lIns="45720" tIns="45000" rIns="45720" bIns="45000" anchor="ctr">
             <a:noAutofit/>
           </a:bodyPr>
           <a:lstStyle/>
@@ -10725,7 +10724,7 @@
               </a:lnSpc>
             </a:pPr>
             <a:r>
-              <a:rPr lang="ja-JP" sz="1300" b="0" u="none" strike="noStrike">
+              <a:rPr lang="zh-CN" sz="1400" b="1" u="none" strike="noStrike">
                 <a:solidFill>
                   <a:schemeClr val="lt1"/>
                 </a:solidFill>
@@ -10734,11 +10733,11 @@
                 <a:latin typeface="メイリオ"/>
                 <a:ea typeface="メイリオ"/>
               </a:rPr>
-              <a:t>離脱防止</a:t>
-            </a:r>
-            <a:endParaRPr lang="en-US" sz="1300" b="0" u="none" strike="noStrike">
+              <a:t>会員登録</a:t>
+            </a:r>
+            <a:endParaRPr lang="en-US" sz="1400" b="0" u="none" strike="noStrike">
               <a:solidFill>
-                <a:srgbClr val="FFFFFF"/>
+                <a:srgbClr val="000000"/>
               </a:solidFill>
               <a:effectLst/>
               <a:uFillTx/>
@@ -10749,22 +10748,20 @@
       </p:sp>
       <p:sp>
         <p:nvSpPr>
-          <p:cNvPr id="366" name="正方形/長方形 13"/>
+          <p:cNvPr id="365" name="正方形/長方形 11"/>
           <p:cNvSpPr/>
           <p:nvPr/>
         </p:nvSpPr>
         <p:spPr>
           <a:xfrm>
-            <a:off x="1770120" y="3090600"/>
-            <a:ext cx="1343880" cy="447840"/>
+            <a:off x="307080" y="3090600"/>
+            <a:ext cx="1425960" cy="447840"/>
           </a:xfrm>
           <a:prstGeom prst="rect">
             <a:avLst/>
           </a:prstGeom>
           <a:solidFill>
-            <a:schemeClr val="bg1">
-              <a:lumMod val="95000"/>
-            </a:schemeClr>
+            <a:srgbClr val="00B050"/>
           </a:solidFill>
           <a:ln>
             <a:noFill/>
@@ -10796,20 +10793,20 @@
               </a:lnSpc>
             </a:pPr>
             <a:r>
-              <a:rPr lang="zh-CN" sz="1300" b="0" u="none" strike="noStrike">
-                <a:solidFill>
-                  <a:schemeClr val="dk1"/>
+              <a:rPr lang="ja-JP" sz="1300" b="0" u="none" strike="noStrike">
+                <a:solidFill>
+                  <a:schemeClr val="lt1"/>
                 </a:solidFill>
                 <a:effectLst/>
                 <a:uFillTx/>
                 <a:latin typeface="メイリオ"/>
                 <a:ea typeface="メイリオ"/>
               </a:rPr>
-              <a:t>導入</a:t>
+              <a:t>離脱防止</a:t>
             </a:r>
             <a:endParaRPr lang="en-US" sz="1300" b="0" u="none" strike="noStrike">
               <a:solidFill>
-                <a:srgbClr val="000000"/>
+                <a:srgbClr val="FFFFFF"/>
               </a:solidFill>
               <a:effectLst/>
               <a:uFillTx/>
@@ -10820,20 +10817,22 @@
       </p:sp>
       <p:sp>
         <p:nvSpPr>
-          <p:cNvPr id="367" name="正方形/長方形 17"/>
+          <p:cNvPr id="366" name="正方形/長方形 13"/>
           <p:cNvSpPr/>
           <p:nvPr/>
         </p:nvSpPr>
         <p:spPr>
           <a:xfrm>
-            <a:off x="307080" y="3579840"/>
-            <a:ext cx="1425960" cy="447840"/>
+            <a:off x="1770120" y="3090600"/>
+            <a:ext cx="1343880" cy="447840"/>
           </a:xfrm>
           <a:prstGeom prst="rect">
             <a:avLst/>
           </a:prstGeom>
           <a:solidFill>
-            <a:srgbClr val="00B050"/>
+            <a:schemeClr val="bg1">
+              <a:lumMod val="95000"/>
+            </a:schemeClr>
           </a:solidFill>
           <a:ln>
             <a:noFill/>
@@ -10865,73 +10864,44 @@
               </a:lnSpc>
             </a:pPr>
             <a:r>
-              <a:rPr lang="ja-JP" sz="1300" b="0" u="none" strike="noStrike">
-                <a:solidFill>
-                  <a:schemeClr val="lt1"/>
+              <a:rPr lang="zh-CN" sz="1300" b="0" u="none" strike="noStrike">
+                <a:solidFill>
+                  <a:schemeClr val="dk1"/>
                 </a:solidFill>
                 <a:effectLst/>
                 <a:uFillTx/>
                 <a:latin typeface="メイリオ"/>
                 <a:ea typeface="メイリオ"/>
               </a:rPr>
-              <a:t>サンクス</a:t>
+              <a:t>導入</a:t>
             </a:r>
             <a:endParaRPr lang="en-US" sz="1300" b="0" u="none" strike="noStrike">
               <a:solidFill>
-                <a:srgbClr val="FFFFFF"/>
+                <a:srgbClr val="000000"/>
               </a:solidFill>
               <a:effectLst/>
               <a:uFillTx/>
               <a:latin typeface="メイリオ"/>
             </a:endParaRPr>
           </a:p>
-          <a:p>
-            <a:pPr algn="ctr" defTabSz="914400">
-              <a:lnSpc>
-                <a:spcPct val="100000"/>
-              </a:lnSpc>
-            </a:pPr>
-            <a:r>
-              <a:rPr lang="ja-JP" sz="1300" b="0" u="none" strike="noStrike">
-                <a:solidFill>
-                  <a:schemeClr val="lt1"/>
-                </a:solidFill>
-                <a:effectLst/>
-                <a:uFillTx/>
-                <a:latin typeface="メイリオ"/>
-                <a:ea typeface="メイリオ"/>
-              </a:rPr>
-              <a:t>LINE誘導</a:t>
-            </a:r>
-            <a:endParaRPr lang="en-US" sz="1300" b="0" u="none" strike="noStrike">
-              <a:solidFill>
-                <a:srgbClr val="FFFFFF"/>
-              </a:solidFill>
-              <a:effectLst/>
-              <a:uFillTx/>
-              <a:latin typeface="メイリオ"/>
-            </a:endParaRPr>
-          </a:p>
-        </p:txBody>
-      </p:sp>
-      <p:sp>
-        <p:nvSpPr>
-          <p:cNvPr id="368" name="正方形/長方形 21"/>
+        </p:txBody>
+      </p:sp>
+      <p:sp>
+        <p:nvSpPr>
+          <p:cNvPr id="367" name="正方形/長方形 17"/>
           <p:cNvSpPr/>
           <p:nvPr/>
         </p:nvSpPr>
         <p:spPr>
           <a:xfrm>
-            <a:off x="1770120" y="3579840"/>
-            <a:ext cx="1343880" cy="447840"/>
+            <a:off x="307080" y="3579840"/>
+            <a:ext cx="1425960" cy="447840"/>
           </a:xfrm>
           <a:prstGeom prst="rect">
             <a:avLst/>
           </a:prstGeom>
           <a:solidFill>
-            <a:schemeClr val="bg1">
-              <a:lumMod val="95000"/>
-            </a:schemeClr>
+            <a:srgbClr val="00B050"/>
           </a:solidFill>
           <a:ln>
             <a:noFill/>
@@ -10965,42 +10935,71 @@
             <a:r>
               <a:rPr lang="ja-JP" sz="1300" b="0" u="none" strike="noStrike">
                 <a:solidFill>
-                  <a:schemeClr val="dk1"/>
+                  <a:schemeClr val="lt1"/>
                 </a:solidFill>
                 <a:effectLst/>
                 <a:uFillTx/>
                 <a:latin typeface="メイリオ"/>
                 <a:ea typeface="メイリオ"/>
               </a:rPr>
-              <a:t>導入</a:t>
+              <a:t>サンクス</a:t>
             </a:r>
             <a:endParaRPr lang="en-US" sz="1300" b="0" u="none" strike="noStrike">
               <a:solidFill>
-                <a:srgbClr val="000000"/>
+                <a:srgbClr val="FFFFFF"/>
               </a:solidFill>
               <a:effectLst/>
               <a:uFillTx/>
               <a:latin typeface="メイリオ"/>
             </a:endParaRPr>
           </a:p>
-        </p:txBody>
-      </p:sp>
-      <p:sp>
-        <p:nvSpPr>
-          <p:cNvPr id="371" name="正方形/長方形 33"/>
+          <a:p>
+            <a:pPr algn="ctr" defTabSz="914400">
+              <a:lnSpc>
+                <a:spcPct val="100000"/>
+              </a:lnSpc>
+            </a:pPr>
+            <a:r>
+              <a:rPr lang="ja-JP" sz="1300" b="0" u="none" strike="noStrike">
+                <a:solidFill>
+                  <a:schemeClr val="lt1"/>
+                </a:solidFill>
+                <a:effectLst/>
+                <a:uFillTx/>
+                <a:latin typeface="メイリオ"/>
+                <a:ea typeface="メイリオ"/>
+              </a:rPr>
+              <a:t>LINE誘導</a:t>
+            </a:r>
+            <a:endParaRPr lang="en-US" sz="1300" b="0" u="none" strike="noStrike">
+              <a:solidFill>
+                <a:srgbClr val="FFFFFF"/>
+              </a:solidFill>
+              <a:effectLst/>
+              <a:uFillTx/>
+              <a:latin typeface="メイリオ"/>
+            </a:endParaRPr>
+          </a:p>
+        </p:txBody>
+      </p:sp>
+      <p:sp>
+        <p:nvSpPr>
+          <p:cNvPr id="368" name="正方形/長方形 21"/>
           <p:cNvSpPr/>
           <p:nvPr/>
         </p:nvSpPr>
         <p:spPr>
           <a:xfrm>
-            <a:off x="307080" y="4069080"/>
-            <a:ext cx="1425960" cy="447840"/>
+            <a:off x="1770120" y="3579840"/>
+            <a:ext cx="1343880" cy="447840"/>
           </a:xfrm>
           <a:prstGeom prst="rect">
             <a:avLst/>
           </a:prstGeom>
           <a:solidFill>
-            <a:srgbClr val="00B050"/>
+            <a:schemeClr val="bg1">
+              <a:lumMod val="95000"/>
+            </a:schemeClr>
           </a:solidFill>
           <a:ln>
             <a:noFill/>
@@ -11034,18 +11033,18 @@
             <a:r>
               <a:rPr lang="ja-JP" sz="1300" b="0" u="none" strike="noStrike">
                 <a:solidFill>
-                  <a:schemeClr val="lt1"/>
+                  <a:schemeClr val="dk1"/>
                 </a:solidFill>
                 <a:effectLst/>
                 <a:uFillTx/>
                 <a:latin typeface="メイリオ"/>
                 <a:ea typeface="メイリオ"/>
               </a:rPr>
-              <a:t>ステップ配信</a:t>
+              <a:t>導入</a:t>
             </a:r>
             <a:endParaRPr lang="en-US" sz="1300" b="0" u="none" strike="noStrike">
               <a:solidFill>
-                <a:srgbClr val="FFFFFF"/>
+                <a:srgbClr val="000000"/>
               </a:solidFill>
               <a:effectLst/>
               <a:uFillTx/>
@@ -11056,22 +11055,20 @@
       </p:sp>
       <p:sp>
         <p:nvSpPr>
-          <p:cNvPr id="372" name="正方形/長方形 37"/>
+          <p:cNvPr id="371" name="正方形/長方形 33"/>
           <p:cNvSpPr/>
           <p:nvPr/>
         </p:nvSpPr>
         <p:spPr>
           <a:xfrm>
-            <a:off x="1770120" y="4069080"/>
-            <a:ext cx="1343880" cy="447840"/>
+            <a:off x="307080" y="4069080"/>
+            <a:ext cx="1425960" cy="447840"/>
           </a:xfrm>
           <a:prstGeom prst="rect">
             <a:avLst/>
           </a:prstGeom>
           <a:solidFill>
-            <a:schemeClr val="bg1">
-              <a:lumMod val="95000"/>
-            </a:schemeClr>
+            <a:srgbClr val="00B050"/>
           </a:solidFill>
           <a:ln>
             <a:noFill/>
@@ -11105,18 +11102,18 @@
             <a:r>
               <a:rPr lang="ja-JP" sz="1300" b="0" u="none" strike="noStrike">
                 <a:solidFill>
-                  <a:schemeClr val="dk1"/>
+                  <a:schemeClr val="lt1"/>
                 </a:solidFill>
                 <a:effectLst/>
                 <a:uFillTx/>
                 <a:latin typeface="メイリオ"/>
                 <a:ea typeface="メイリオ"/>
               </a:rPr>
-              <a:t>4通を構築</a:t>
+              <a:t>ステップ配信</a:t>
             </a:r>
             <a:endParaRPr lang="en-US" sz="1300" b="0" u="none" strike="noStrike">
               <a:solidFill>
-                <a:srgbClr val="000000"/>
+                <a:srgbClr val="FFFFFF"/>
               </a:solidFill>
               <a:effectLst/>
               <a:uFillTx/>
@@ -11127,20 +11124,22 @@
       </p:sp>
       <p:sp>
         <p:nvSpPr>
-          <p:cNvPr id="373" name="正方形/長方形 41"/>
+          <p:cNvPr id="372" name="正方形/長方形 37"/>
           <p:cNvSpPr/>
           <p:nvPr/>
         </p:nvSpPr>
         <p:spPr>
           <a:xfrm>
-            <a:off x="307080" y="4558320"/>
-            <a:ext cx="1425960" cy="447840"/>
+            <a:off x="1770120" y="4069080"/>
+            <a:ext cx="1343880" cy="447840"/>
           </a:xfrm>
           <a:prstGeom prst="rect">
             <a:avLst/>
           </a:prstGeom>
           <a:solidFill>
-            <a:srgbClr val="00B050"/>
+            <a:schemeClr val="bg1">
+              <a:lumMod val="95000"/>
+            </a:schemeClr>
           </a:solidFill>
           <a:ln>
             <a:noFill/>
@@ -11174,18 +11173,18 @@
             <a:r>
               <a:rPr lang="ja-JP" sz="1300" b="0" u="none" strike="noStrike">
                 <a:solidFill>
-                  <a:schemeClr val="lt1"/>
+                  <a:schemeClr val="dk1"/>
                 </a:solidFill>
                 <a:effectLst/>
                 <a:uFillTx/>
                 <a:latin typeface="メイリオ"/>
                 <a:ea typeface="メイリオ"/>
               </a:rPr>
-              <a:t>勤務前の案内</a:t>
+              <a:t>4通を構築</a:t>
             </a:r>
             <a:endParaRPr lang="en-US" sz="1300" b="0" u="none" strike="noStrike">
               <a:solidFill>
-                <a:srgbClr val="FFFFFF"/>
+                <a:srgbClr val="000000"/>
               </a:solidFill>
               <a:effectLst/>
               <a:uFillTx/>
@@ -11196,22 +11195,20 @@
       </p:sp>
       <p:sp>
         <p:nvSpPr>
-          <p:cNvPr id="374" name="正方形/長方形 46"/>
+          <p:cNvPr id="373" name="正方形/長方形 41"/>
           <p:cNvSpPr/>
           <p:nvPr/>
         </p:nvSpPr>
         <p:spPr>
           <a:xfrm>
-            <a:off x="1770120" y="4558320"/>
-            <a:ext cx="1343880" cy="447840"/>
+            <a:off x="307080" y="4558320"/>
+            <a:ext cx="1425960" cy="447840"/>
           </a:xfrm>
           <a:prstGeom prst="rect">
             <a:avLst/>
           </a:prstGeom>
           <a:solidFill>
-            <a:schemeClr val="bg1">
-              <a:lumMod val="95000"/>
-            </a:schemeClr>
+            <a:srgbClr val="00B050"/>
           </a:solidFill>
           <a:ln>
             <a:noFill/>
@@ -11245,6 +11242,77 @@
             <a:r>
               <a:rPr lang="ja-JP" sz="1300" b="0" u="none" strike="noStrike">
                 <a:solidFill>
+                  <a:schemeClr val="lt1"/>
+                </a:solidFill>
+                <a:effectLst/>
+                <a:uFillTx/>
+                <a:latin typeface="メイリオ"/>
+                <a:ea typeface="メイリオ"/>
+              </a:rPr>
+              <a:t>勤務前の案内</a:t>
+            </a:r>
+            <a:endParaRPr lang="en-US" sz="1300" b="0" u="none" strike="noStrike">
+              <a:solidFill>
+                <a:srgbClr val="FFFFFF"/>
+              </a:solidFill>
+              <a:effectLst/>
+              <a:uFillTx/>
+              <a:latin typeface="メイリオ"/>
+            </a:endParaRPr>
+          </a:p>
+        </p:txBody>
+      </p:sp>
+      <p:sp>
+        <p:nvSpPr>
+          <p:cNvPr id="374" name="正方形/長方形 46"/>
+          <p:cNvSpPr/>
+          <p:nvPr/>
+        </p:nvSpPr>
+        <p:spPr>
+          <a:xfrm>
+            <a:off x="1770120" y="4558320"/>
+            <a:ext cx="1343880" cy="447840"/>
+          </a:xfrm>
+          <a:prstGeom prst="rect">
+            <a:avLst/>
+          </a:prstGeom>
+          <a:solidFill>
+            <a:schemeClr val="bg1">
+              <a:lumMod val="95000"/>
+            </a:schemeClr>
+          </a:solidFill>
+          <a:ln>
+            <a:noFill/>
+          </a:ln>
+        </p:spPr>
+        <p:style>
+          <a:lnRef idx="2">
+            <a:schemeClr val="accent1">
+              <a:shade val="15000"/>
+            </a:schemeClr>
+          </a:lnRef>
+          <a:fillRef idx="1">
+            <a:schemeClr val="accent1"/>
+          </a:fillRef>
+          <a:effectRef idx="0">
+            <a:schemeClr val="accent1"/>
+          </a:effectRef>
+          <a:fontRef idx="minor"/>
+        </p:style>
+        <p:txBody>
+          <a:bodyPr lIns="45720" tIns="18360" rIns="45720" bIns="18360" anchor="ctr">
+            <a:noAutofit/>
+          </a:bodyPr>
+          <a:lstStyle/>
+          <a:p>
+            <a:pPr algn="ctr" defTabSz="914400">
+              <a:lnSpc>
+                <a:spcPct val="100000"/>
+              </a:lnSpc>
+            </a:pPr>
+            <a:r>
+              <a:rPr lang="ja-JP" sz="1300" b="0" u="none" strike="noStrike">
+                <a:solidFill>
                   <a:schemeClr val="dk1"/>
                 </a:solidFill>
                 <a:effectLst/>
@@ -11317,7 +11385,7 @@
                 <a:latin typeface="メイリオ"/>
                 <a:ea typeface="メイリオ"/>
               </a:rPr>
-              <a:t>984人</a:t>
+              <a:t>1,102人</a:t>
             </a:r>
             <a:endParaRPr lang="en-US" sz="1400" b="0" u="none" strike="noStrike">
               <a:solidFill>
@@ -11382,7 +11450,7 @@
                 <a:latin typeface="メイリオ"/>
                 <a:ea typeface="メイリオ"/>
               </a:rPr>
-              <a:t>6件/月</a:t>
+              <a:t>7件/月</a:t>
             </a:r>
             <a:endParaRPr lang="en-US" sz="1400" b="0" u="none" strike="noStrike">
               <a:solidFill>
@@ -11448,6 +11516,71 @@
                 <a:ea typeface="メイリオ"/>
               </a:rPr>
               <a:t>3件/月</a:t>
+            </a:r>
+            <a:endParaRPr lang="en-US" sz="1400" b="0" u="none" strike="noStrike">
+              <a:solidFill>
+                <a:srgbClr val="000000"/>
+              </a:solidFill>
+              <a:effectLst/>
+              <a:uFillTx/>
+              <a:latin typeface="メイリオ"/>
+            </a:endParaRPr>
+          </a:p>
+        </p:txBody>
+      </p:sp>
+      <p:sp>
+        <p:nvSpPr>
+          <p:cNvPr id="383" name="テキスト ボックス 26"/>
+          <p:cNvSpPr/>
+          <p:nvPr/>
+        </p:nvSpPr>
+        <p:spPr>
+          <a:xfrm>
+            <a:off x="8256960" y="3383424"/>
+            <a:ext cx="1325520" cy="402120"/>
+          </a:xfrm>
+          <a:prstGeom prst="rect">
+            <a:avLst/>
+          </a:prstGeom>
+          <a:noFill/>
+          <a:ln w="0">
+            <a:noFill/>
+          </a:ln>
+        </p:spPr>
+        <p:style>
+          <a:lnRef idx="0">
+            <a:scrgbClr r="0" g="0" b="0"/>
+          </a:lnRef>
+          <a:fillRef idx="0">
+            <a:scrgbClr r="0" g="0" b="0"/>
+          </a:fillRef>
+          <a:effectRef idx="0">
+            <a:scrgbClr r="0" g="0" b="0"/>
+          </a:effectRef>
+          <a:fontRef idx="minor"/>
+        </p:style>
+        <p:txBody>
+          <a:bodyPr lIns="90000" tIns="45000" rIns="90000" bIns="45000" anchor="ctr">
+            <a:noAutofit/>
+          </a:bodyPr>
+          <a:lstStyle/>
+          <a:p>
+            <a:pPr algn="ctr" defTabSz="914400">
+              <a:lnSpc>
+                <a:spcPct val="100000"/>
+              </a:lnSpc>
+            </a:pPr>
+            <a:r>
+              <a:rPr lang="en-US" sz="1400" b="1" u="none" strike="noStrike">
+                <a:solidFill>
+                  <a:srgbClr val="1F285A"/>
+                </a:solidFill>
+                <a:effectLst/>
+                <a:uFillTx/>
+                <a:latin typeface="メイリオ"/>
+                <a:ea typeface="メイリオ"/>
+              </a:rPr>
+              <a:t>10件/月</a:t>
             </a:r>
             <a:endParaRPr lang="en-US" sz="1400" b="0" u="none" strike="noStrike">
               <a:solidFill>
@@ -11605,7 +11738,7 @@
                 <a:latin typeface="メイリオ"/>
                 <a:ea typeface="メイリオ"/>
               </a:rPr>
-              <a:t>料金プラン：3つのプランの費用</a:t>
+              <a:t>料金プラン：4つのプランの費用</a:t>
             </a:r>
             <a:endParaRPr lang="en-US" sz="1600" b="0" u="none" strike="noStrike">
               <a:solidFill>
@@ -11739,7 +11872,7 @@
                 <a:latin typeface="メイリオ"/>
                 <a:ea typeface="メイリオ"/>
               </a:rPr>
-              <a:t>運用範囲に合わせて、3つのプランをご用意</a:t>
+              <a:t>運用範囲と料金の形に合わせて、4つのプランをご用意</a:t>
             </a:r>
             <a:endParaRPr lang="en-US" sz="1600" b="0" u="none" strike="noStrike" dirty="0">
               <a:solidFill>
@@ -11775,31 +11908,38 @@
             <a:tbl>
               <a:tblPr/>
               <a:tblGrid>
-                <a:gridCol w="2286000">
+                <a:gridCol w="1645920">
                   <a:extLst>
                     <a:ext uri="{9D8B030D-6E8A-4147-A177-3AD203B41FA5}">
                       <a16:colId xmlns:a16="http://schemas.microsoft.com/office/drawing/2014/main" val="20000"/>
                     </a:ext>
                   </a:extLst>
                 </a:gridCol>
-                <a:gridCol w="2286000">
+                <a:gridCol w="1874519">
                   <a:extLst>
                     <a:ext uri="{9D8B030D-6E8A-4147-A177-3AD203B41FA5}">
                       <a16:colId xmlns:a16="http://schemas.microsoft.com/office/drawing/2014/main" val="20001"/>
                     </a:ext>
                   </a:extLst>
                 </a:gridCol>
-                <a:gridCol w="2286000">
+                <a:gridCol w="1874519">
                   <a:extLst>
                     <a:ext uri="{9D8B030D-6E8A-4147-A177-3AD203B41FA5}">
                       <a16:colId xmlns:a16="http://schemas.microsoft.com/office/drawing/2014/main" val="20002"/>
                     </a:ext>
                   </a:extLst>
                 </a:gridCol>
-                <a:gridCol w="2286000">
+                <a:gridCol w="1874519">
                   <a:extLst>
                     <a:ext uri="{9D8B030D-6E8A-4147-A177-3AD203B41FA5}">
                       <a16:colId xmlns:a16="http://schemas.microsoft.com/office/drawing/2014/main" val="20003"/>
+                    </a:ext>
+                  </a:extLst>
+                </a:gridCol>
+                <a:gridCol w="1874519">
+                  <a:extLst>
+                    <a:ext uri="{9D8B030D-6E8A-4147-A177-3AD203B41FA5}">
+                      <a16:colId xmlns:a16="http://schemas.microsoft.com/office/drawing/2014/main" val="20004"/>
                     </a:ext>
                   </a:extLst>
                 </a:gridCol>
@@ -12058,7 +12198,102 @@
                           <a:latin typeface="メイリオ" panose="020B0604030504040204" pitchFamily="50" charset="-128"/>
                           <a:ea typeface="メイリオ" panose="020B0604030504040204" pitchFamily="50" charset="-128"/>
                         </a:rPr>
-                        <a:t>運用代行フルサポート</a:t>
+                        <a:t>運用代行</a:t>
+                      </a:r>
+                      <a:endParaRPr lang="ja-JP" altLang="en-US" sz="1300" dirty="0"/>
+                    </a:p>
+                    <a:p>
+                      <a:pPr algn="ctr">
+                        <a:buNone/>
+                      </a:pPr>
+                      <a:r>
+                        <a:rPr lang="ja-JP" altLang="en-US" sz="1400" b="1" dirty="0">
+                          <a:solidFill>
+                            <a:srgbClr val="FFFFFF"/>
+                          </a:solidFill>
+                          <a:latin typeface="メイリオ" panose="020B0604030504040204" pitchFamily="50" charset="-128"/>
+                          <a:ea typeface="メイリオ" panose="020B0604030504040204" pitchFamily="50" charset="-128"/>
+                        </a:rPr>
+                        <a:t>フルサポート</a:t>
+                      </a:r>
+                      <a:endParaRPr lang="ja-JP" altLang="en-US" sz="1300" dirty="0"/>
+                    </a:p>
+                  </a:txBody>
+                  <a:tcPr marL="73152" marR="73152" marT="27432" marB="27432" anchor="ctr">
+                    <a:lnL w="9525" cap="flat" cmpd="sng" algn="ctr">
+                      <a:solidFill>
+                        <a:srgbClr val="FFFFFF"/>
+                      </a:solidFill>
+                      <a:prstDash val="solid"/>
+                      <a:round/>
+                      <a:headEnd type="none" w="med" len="med"/>
+                      <a:tailEnd type="none" w="med" len="med"/>
+                    </a:lnL>
+                    <a:lnR w="9525" cap="flat" cmpd="sng" algn="ctr">
+                      <a:solidFill>
+                        <a:srgbClr val="FFFFFF"/>
+                      </a:solidFill>
+                      <a:prstDash val="solid"/>
+                      <a:round/>
+                      <a:headEnd type="none" w="med" len="med"/>
+                      <a:tailEnd type="none" w="med" len="med"/>
+                    </a:lnR>
+                    <a:lnT w="9525" cap="flat" cmpd="sng" algn="ctr">
+                      <a:solidFill>
+                        <a:srgbClr val="FFFFFF"/>
+                      </a:solidFill>
+                      <a:prstDash val="solid"/>
+                      <a:round/>
+                      <a:headEnd type="none" w="med" len="med"/>
+                      <a:tailEnd type="none" w="med" len="med"/>
+                    </a:lnT>
+                    <a:lnB w="9525" cap="flat" cmpd="sng" algn="ctr">
+                      <a:solidFill>
+                        <a:srgbClr val="FFFFFF"/>
+                      </a:solidFill>
+                      <a:prstDash val="solid"/>
+                      <a:round/>
+                      <a:headEnd type="none" w="med" len="med"/>
+                      <a:tailEnd type="none" w="med" len="med"/>
+                    </a:lnB>
+                    <a:solidFill>
+                      <a:srgbClr val="1F285A"/>
+                    </a:solidFill>
+                  </a:tcPr>
+                </a:tc>
+                <a:tc>
+                  <a:txBody>
+                    <a:bodyPr/>
+                    <a:lstStyle/>
+                    <a:p>
+                      <a:pPr algn="ctr">
+                        <a:buNone/>
+                      </a:pPr>
+                      <a:r>
+                        <a:rPr lang="ja-JP" altLang="en-US" sz="1400" b="1" dirty="0">
+                          <a:solidFill>
+                            <a:srgbClr val="FFFFFF"/>
+                          </a:solidFill>
+                          <a:latin typeface="メイリオ" panose="020B0604030504040204" pitchFamily="50" charset="-128"/>
+                          <a:ea typeface="メイリオ" panose="020B0604030504040204" pitchFamily="50" charset="-128"/>
+                        </a:rPr>
+                        <a:t>プラン④</a:t>
+                      </a:r>
+                      <a:endParaRPr lang="ja-JP" altLang="en-US" sz="1300" dirty="0"/>
+                    </a:p>
+                    <a:p>
+                      <a:pPr algn="ctr">
+                        <a:buNone/>
+                      </a:pPr>
+                      <a:r>
+                        <a:rPr lang="ja-JP" altLang="en-US" sz="1400" b="1" dirty="0">
+                          <a:solidFill>
+                            <a:srgbClr val="FFFFFF"/>
+                          </a:solidFill>
+                          <a:latin typeface="メイリオ" panose="020B0604030504040204" pitchFamily="50" charset="-128"/>
+                          <a:ea typeface="メイリオ" panose="020B0604030504040204" pitchFamily="50" charset="-128"/>
+                        </a:rPr>
+                        <a:t>成果報酬</a:t>
                       </a:r>
                       <a:endParaRPr lang="ja-JP" altLang="en-US" sz="1300" dirty="0"/>
                     </a:p>
@@ -12364,6 +12599,69 @@
                     </a:solidFill>
                   </a:tcPr>
                 </a:tc>
+                <a:tc>
+                  <a:txBody>
+                    <a:bodyPr/>
+                    <a:lstStyle/>
+                    <a:p>
+                      <a:pPr algn="ctr">
+                        <a:buNone/>
+                      </a:pPr>
+                      <a:r>
+                        <a:rPr lang="ja-JP" altLang="en-US" sz="1500" b="0" dirty="0">
+                          <a:solidFill>
+                            <a:srgbClr val="333333"/>
+                          </a:solidFill>
+                          <a:latin typeface="メイリオ" panose="020B0604030504040204" pitchFamily="50" charset="-128"/>
+                          <a:ea typeface="メイリオ" panose="020B0604030504040204" pitchFamily="50" charset="-128"/>
+                        </a:rPr>
+                        <a:t>295,000円〜</a:t>
+                      </a:r>
+                      <a:endParaRPr lang="ja-JP" altLang="en-US" sz="1500" dirty="0"/>
+                    </a:p>
+                  </a:txBody>
+                  <a:tcPr marL="73152" marR="73152" marT="27432" marB="27432" anchor="ctr">
+                    <a:lnL w="9525" cap="flat" cmpd="sng" algn="ctr">
+                      <a:solidFill>
+                        <a:srgbClr val="BFC8DC"/>
+                      </a:solidFill>
+                      <a:prstDash val="solid"/>
+                      <a:round/>
+                      <a:headEnd type="none" w="med" len="med"/>
+                      <a:tailEnd type="none" w="med" len="med"/>
+                    </a:lnL>
+                    <a:lnR w="9525" cap="flat" cmpd="sng" algn="ctr">
+                      <a:solidFill>
+                        <a:srgbClr val="BFC8DC"/>
+                      </a:solidFill>
+                      <a:prstDash val="solid"/>
+                      <a:round/>
+                      <a:headEnd type="none" w="med" len="med"/>
+                      <a:tailEnd type="none" w="med" len="med"/>
+                    </a:lnR>
+                    <a:lnT w="9525" cap="flat" cmpd="sng" algn="ctr">
+                      <a:solidFill>
+                        <a:srgbClr val="FFFFFF"/>
+                      </a:solidFill>
+                      <a:prstDash val="solid"/>
+                      <a:round/>
+                      <a:headEnd type="none" w="med" len="med"/>
+                      <a:tailEnd type="none" w="med" len="med"/>
+                    </a:lnT>
+                    <a:lnB w="9525" cap="flat" cmpd="sng" algn="ctr">
+                      <a:solidFill>
+                        <a:srgbClr val="BFC8DC"/>
+                      </a:solidFill>
+                      <a:prstDash val="solid"/>
+                      <a:round/>
+                      <a:headEnd type="none" w="med" len="med"/>
+                      <a:tailEnd type="none" w="med" len="med"/>
+                    </a:lnB>
+                    <a:solidFill>
+                      <a:srgbClr val="FFFFFF"/>
+                    </a:solidFill>
+                  </a:tcPr>
+                </a:tc>
                 <a:extLst>
                   <a:ext uri="{0D108BD9-81ED-4DB2-BD59-A6C34878D82A}">
                     <a16:rowId xmlns:a16="http://schemas.microsoft.com/office/drawing/2014/main" val="10001"/>
@@ -12623,6 +12921,101 @@
                     </a:solidFill>
                   </a:tcPr>
                 </a:tc>
+                <a:tc>
+                  <a:txBody>
+                    <a:bodyPr/>
+                    <a:lstStyle/>
+                    <a:p>
+                      <a:pPr algn="ctr">
+                        <a:buNone/>
+                      </a:pPr>
+                      <a:r>
+                        <a:rPr lang="ja-JP" altLang="en-US" sz="1300" b="0" dirty="0">
+                          <a:solidFill>
+                            <a:srgbClr val="333333"/>
+                          </a:solidFill>
+                          <a:latin typeface="メイリオ" panose="020B0604030504040204" pitchFamily="50" charset="-128"/>
+                          <a:ea typeface="メイリオ" panose="020B0604030504040204" pitchFamily="50" charset="-128"/>
+                        </a:rPr>
+                        <a:t>成果報酬</a:t>
+                      </a:r>
+                      <a:endParaRPr lang="ja-JP" altLang="en-US" sz="1500" dirty="0"/>
+                    </a:p>
+                    <a:p>
+                      <a:pPr algn="ctr">
+                        <a:buNone/>
+                      </a:pPr>
+                      <a:r>
+                        <a:rPr lang="ja-JP" altLang="en-US" sz="1300" b="0" dirty="0">
+                          <a:solidFill>
+                            <a:srgbClr val="333333"/>
+                          </a:solidFill>
+                          <a:latin typeface="メイリオ" panose="020B0604030504040204" pitchFamily="50" charset="-128"/>
+                          <a:ea typeface="メイリオ" panose="020B0604030504040204" pitchFamily="50" charset="-128"/>
+                        </a:rPr>
+                        <a:t>応募 8,000円/件</a:t>
+                      </a:r>
+                      <a:endParaRPr lang="ja-JP" altLang="en-US" sz="1500" dirty="0"/>
+                    </a:p>
+                    <a:p>
+                      <a:pPr algn="ctr">
+                        <a:buNone/>
+                      </a:pPr>
+                      <a:r>
+                        <a:rPr lang="ja-JP" altLang="en-US" sz="1300" b="0" dirty="0">
+                          <a:solidFill>
+                            <a:srgbClr val="333333"/>
+                          </a:solidFill>
+                          <a:latin typeface="メイリオ" panose="020B0604030504040204" pitchFamily="50" charset="-128"/>
+                          <a:ea typeface="メイリオ" panose="020B0604030504040204" pitchFamily="50" charset="-128"/>
+                        </a:rPr>
+                        <a:t>会員登録 2,500円/件</a:t>
+                      </a:r>
+                      <a:endParaRPr lang="ja-JP" altLang="en-US" sz="1500" dirty="0"/>
+                    </a:p>
+                  </a:txBody>
+                  <a:tcPr marL="73152" marR="73152" marT="27432" marB="27432" anchor="ctr">
+                    <a:lnL w="9525" cap="flat" cmpd="sng" algn="ctr">
+                      <a:solidFill>
+                        <a:srgbClr val="BFC8DC"/>
+                      </a:solidFill>
+                      <a:prstDash val="solid"/>
+                      <a:round/>
+                      <a:headEnd type="none" w="med" len="med"/>
+                      <a:tailEnd type="none" w="med" len="med"/>
+                    </a:lnL>
+                    <a:lnR w="9525" cap="flat" cmpd="sng" algn="ctr">
+                      <a:solidFill>
+                        <a:srgbClr val="BFC8DC"/>
+                      </a:solidFill>
+                      <a:prstDash val="solid"/>
+                      <a:round/>
+                      <a:headEnd type="none" w="med" len="med"/>
+                      <a:tailEnd type="none" w="med" len="med"/>
+                    </a:lnR>
+                    <a:lnT w="9525" cap="flat" cmpd="sng" algn="ctr">
+                      <a:solidFill>
+                        <a:srgbClr val="BFC8DC"/>
+                      </a:solidFill>
+                      <a:prstDash val="solid"/>
+                      <a:round/>
+                      <a:headEnd type="none" w="med" len="med"/>
+                      <a:tailEnd type="none" w="med" len="med"/>
+                    </a:lnT>
+                    <a:lnB w="9525" cap="flat" cmpd="sng" algn="ctr">
+                      <a:solidFill>
+                        <a:srgbClr val="BFC8DC"/>
+                      </a:solidFill>
+                      <a:prstDash val="solid"/>
+                      <a:round/>
+                      <a:headEnd type="none" w="med" len="med"/>
+                      <a:tailEnd type="none" w="med" len="med"/>
+                    </a:lnB>
+                    <a:solidFill>
+                      <a:srgbClr val="FFFFFF"/>
+                    </a:solidFill>
+                  </a:tcPr>
+                </a:tc>
                 <a:extLst>
                   <a:ext uri="{0D108BD9-81ED-4DB2-BD59-A6C34878D82A}">
                     <a16:rowId xmlns:a16="http://schemas.microsoft.com/office/drawing/2014/main" val="10002"/>
@@ -12646,7 +13039,23 @@
                           <a:latin typeface="メイリオ" panose="020B0604030504040204" pitchFamily="50" charset="-128"/>
                           <a:ea typeface="メイリオ" panose="020B0604030504040204" pitchFamily="50" charset="-128"/>
                         </a:rPr>
-                        <a:t>月額ツール・LINE関連費</a:t>
+                        <a:t>月額ツール・</a:t>
+                      </a:r>
+                      <a:endParaRPr lang="ja-JP" altLang="en-US" sz="1400" dirty="0"/>
+                    </a:p>
+                    <a:p>
+                      <a:pPr algn="ctr">
+                        <a:buNone/>
+                      </a:pPr>
+                      <a:r>
+                        <a:rPr lang="ja-JP" altLang="en-US" sz="1400" b="1" dirty="0">
+                          <a:solidFill>
+                            <a:srgbClr val="1F285A"/>
+                          </a:solidFill>
+                          <a:latin typeface="メイリオ" panose="020B0604030504040204" pitchFamily="50" charset="-128"/>
+                          <a:ea typeface="メイリオ" panose="020B0604030504040204" pitchFamily="50" charset="-128"/>
+                        </a:rPr>
+                        <a:t>LINE関連費</a:t>
                       </a:r>
                       <a:endParaRPr lang="ja-JP" altLang="en-US" sz="1400" dirty="0"/>
                     </a:p>
@@ -12690,6 +13099,69 @@
                     </a:lnB>
                     <a:solidFill>
                       <a:srgbClr val="E8ECF6"/>
+                    </a:solidFill>
+                  </a:tcPr>
+                </a:tc>
+                <a:tc>
+                  <a:txBody>
+                    <a:bodyPr/>
+                    <a:lstStyle/>
+                    <a:p>
+                      <a:pPr algn="ctr">
+                        <a:buNone/>
+                      </a:pPr>
+                      <a:r>
+                        <a:rPr lang="ja-JP" altLang="en-US" sz="1500" b="0" dirty="0">
+                          <a:solidFill>
+                            <a:srgbClr val="333333"/>
+                          </a:solidFill>
+                          <a:latin typeface="メイリオ" panose="020B0604030504040204" pitchFamily="50" charset="-128"/>
+                          <a:ea typeface="メイリオ" panose="020B0604030504040204" pitchFamily="50" charset="-128"/>
+                        </a:rPr>
+                        <a:t>65,000円〜</a:t>
+                      </a:r>
+                      <a:endParaRPr lang="ja-JP" altLang="en-US" sz="1500" dirty="0"/>
+                    </a:p>
+                  </a:txBody>
+                  <a:tcPr marL="73152" marR="73152" marT="27432" marB="27432" anchor="ctr">
+                    <a:lnL w="9525" cap="flat" cmpd="sng" algn="ctr">
+                      <a:solidFill>
+                        <a:srgbClr val="BFC8DC"/>
+                      </a:solidFill>
+                      <a:prstDash val="solid"/>
+                      <a:round/>
+                      <a:headEnd type="none" w="med" len="med"/>
+                      <a:tailEnd type="none" w="med" len="med"/>
+                    </a:lnL>
+                    <a:lnR w="9525" cap="flat" cmpd="sng" algn="ctr">
+                      <a:solidFill>
+                        <a:srgbClr val="BFC8DC"/>
+                      </a:solidFill>
+                      <a:prstDash val="solid"/>
+                      <a:round/>
+                      <a:headEnd type="none" w="med" len="med"/>
+                      <a:tailEnd type="none" w="med" len="med"/>
+                    </a:lnR>
+                    <a:lnT w="9525" cap="flat" cmpd="sng" algn="ctr">
+                      <a:solidFill>
+                        <a:srgbClr val="BFC8DC"/>
+                      </a:solidFill>
+                      <a:prstDash val="solid"/>
+                      <a:round/>
+                      <a:headEnd type="none" w="med" len="med"/>
+                      <a:tailEnd type="none" w="med" len="med"/>
+                    </a:lnT>
+                    <a:lnB w="9525" cap="flat" cmpd="sng" algn="ctr">
+                      <a:solidFill>
+                        <a:srgbClr val="BFC8DC"/>
+                      </a:solidFill>
+                      <a:prstDash val="solid"/>
+                      <a:round/>
+                      <a:headEnd type="none" w="med" len="med"/>
+                      <a:tailEnd type="none" w="med" len="med"/>
+                    </a:lnB>
+                    <a:solidFill>
+                      <a:srgbClr val="FFFFFF"/>
                     </a:solidFill>
                   </a:tcPr>
                 </a:tc>
@@ -13095,1707 +13567,6 @@
                           <a:ea typeface="メイリオ" panose="020B0604030504040204" pitchFamily="50" charset="-128"/>
                         </a:rPr>
                         <a:t>315,000円〜</a:t>
-                      </a:r>
-                      <a:endParaRPr lang="ja-JP" altLang="en-US" sz="2000" dirty="0"/>
-                    </a:p>
-                  </a:txBody>
-                  <a:tcPr marL="73152" marR="73152" marT="27432" marB="27432" anchor="ctr">
-                    <a:lnL w="9525" cap="flat" cmpd="sng" algn="ctr">
-                      <a:solidFill>
-                        <a:srgbClr val="BFC8DC"/>
-                      </a:solidFill>
-                      <a:prstDash val="solid"/>
-                      <a:round/>
-                      <a:headEnd type="none" w="med" len="med"/>
-                      <a:tailEnd type="none" w="med" len="med"/>
-                    </a:lnL>
-                    <a:lnR w="9525" cap="flat" cmpd="sng" algn="ctr">
-                      <a:solidFill>
-                        <a:srgbClr val="BFC8DC"/>
-                      </a:solidFill>
-                      <a:prstDash val="solid"/>
-                      <a:round/>
-                      <a:headEnd type="none" w="med" len="med"/>
-                      <a:tailEnd type="none" w="med" len="med"/>
-                    </a:lnR>
-                    <a:lnT w="9525" cap="flat" cmpd="sng" algn="ctr">
-                      <a:solidFill>
-                        <a:srgbClr val="BFC8DC"/>
-                      </a:solidFill>
-                      <a:prstDash val="solid"/>
-                      <a:round/>
-                      <a:headEnd type="none" w="med" len="med"/>
-                      <a:tailEnd type="none" w="med" len="med"/>
-                    </a:lnT>
-                    <a:lnB w="9525" cap="flat" cmpd="sng" algn="ctr">
-                      <a:solidFill>
-                        <a:srgbClr val="BFC8DC"/>
-                      </a:solidFill>
-                      <a:prstDash val="solid"/>
-                      <a:round/>
-                      <a:headEnd type="none" w="med" len="med"/>
-                      <a:tailEnd type="none" w="med" len="med"/>
-                    </a:lnB>
-                    <a:solidFill>
-                      <a:srgbClr val="E8ECF6"/>
-                    </a:solidFill>
-                  </a:tcPr>
-                </a:tc>
-                <a:extLst>
-                  <a:ext uri="{0D108BD9-81ED-4DB2-BD59-A6C34878D82A}">
-                    <a16:rowId xmlns:a16="http://schemas.microsoft.com/office/drawing/2014/main" val="10004"/>
-                  </a:ext>
-                </a:extLst>
-              </a:tr>
-            </a:tbl>
-          </a:graphicData>
-        </a:graphic>
-      </p:graphicFrame>
-      <p:sp>
-        <p:nvSpPr>
-          <p:cNvPr id="640" name="注記"/>
-          <p:cNvSpPr/>
-          <p:nvPr/>
-        </p:nvSpPr>
-        <p:spPr>
-          <a:xfrm>
-            <a:off x="384048" y="5312412"/>
-            <a:ext cx="9144000" cy="246888"/>
-          </a:xfrm>
-          <a:prstGeom prst="rect">
-            <a:avLst/>
-          </a:prstGeom>
-          <a:noFill/>
-          <a:ln>
-            <a:noFill/>
-          </a:ln>
-        </p:spPr>
-        <p:txBody>
-          <a:bodyPr wrap="square" lIns="0" tIns="0" rIns="0" bIns="0" rtlCol="0" anchor="t">
-            <a:noAutofit/>
-          </a:bodyPr>
-          <a:lstStyle/>
-          <a:p>
-            <a:pPr algn="l">
-              <a:buNone/>
-            </a:pPr>
-            <a:r>
-              <a:rPr lang="ja-JP" altLang="en-US" sz="900" b="0" dirty="0">
-                <a:solidFill>
-                  <a:srgbClr val="7F7F7F"/>
-                </a:solidFill>
-                <a:latin typeface="メイリオ" panose="020B0604030504040204" pitchFamily="50" charset="-128"/>
-                <a:ea typeface="メイリオ" panose="020B0604030504040204" pitchFamily="50" charset="-128"/>
-              </a:rPr>
-              <a:t>※初期費用＝運用設計・構築 100,000円〜＋離脱防止 15,000円＋サンクスLINE誘導 150,000円＋LINE公式アカウント開設 30,000円</a:t>
-            </a:r>
-            <a:endParaRPr lang="ja-JP" altLang="en-US" sz="1200" dirty="0"/>
-          </a:p>
-        </p:txBody>
-      </p:sp>
-      <p:sp>
-        <p:nvSpPr>
-          <p:cNvPr id="641" name="注記"/>
-          <p:cNvSpPr/>
-          <p:nvPr/>
-        </p:nvSpPr>
-        <p:spPr>
-          <a:xfrm>
-            <a:off x="384048" y="5559300"/>
-            <a:ext cx="9144000" cy="246888"/>
-          </a:xfrm>
-          <a:prstGeom prst="rect">
-            <a:avLst/>
-          </a:prstGeom>
-          <a:noFill/>
-          <a:ln>
-            <a:noFill/>
-          </a:ln>
-        </p:spPr>
-        <p:txBody>
-          <a:bodyPr wrap="square" lIns="0" tIns="0" rIns="0" bIns="0" rtlCol="0" anchor="t">
-            <a:noAutofit/>
-          </a:bodyPr>
-          <a:lstStyle/>
-          <a:p>
-            <a:pPr algn="l">
-              <a:buNone/>
-            </a:pPr>
-            <a:r>
-              <a:rPr lang="ja-JP" altLang="en-US" sz="900" b="0" dirty="0">
-                <a:solidFill>
-                  <a:srgbClr val="7F7F7F"/>
-                </a:solidFill>
-                <a:latin typeface="メイリオ" panose="020B0604030504040204" pitchFamily="50" charset="-128"/>
-                <a:ea typeface="メイリオ" panose="020B0604030504040204" pitchFamily="50" charset="-128"/>
-              </a:rPr>
-              <a:t>※月額ツール・LINE関連費＝離脱防止 30,000円＋サンクスLINE誘導 30,000円〜＋LINE公式アカウント利用料 5,000円〜（ライトプラン想定）</a:t>
-            </a:r>
-            <a:endParaRPr lang="ja-JP" altLang="en-US" sz="1200" dirty="0"/>
-          </a:p>
-        </p:txBody>
-      </p:sp>
-      <p:sp>
-        <p:nvSpPr>
-          <p:cNvPr id="642" name="注記"/>
-          <p:cNvSpPr/>
-          <p:nvPr/>
-        </p:nvSpPr>
-        <p:spPr>
-          <a:xfrm>
-            <a:off x="384048" y="5806188"/>
-            <a:ext cx="9144000" cy="246888"/>
-          </a:xfrm>
-          <a:prstGeom prst="rect">
-            <a:avLst/>
-          </a:prstGeom>
-          <a:noFill/>
-          <a:ln>
-            <a:noFill/>
-          </a:ln>
-        </p:spPr>
-        <p:txBody>
-          <a:bodyPr wrap="square" lIns="0" tIns="0" rIns="0" bIns="0" rtlCol="0" anchor="t">
-            <a:noAutofit/>
-          </a:bodyPr>
-          <a:lstStyle/>
-          <a:p>
-            <a:pPr algn="l">
-              <a:buNone/>
-            </a:pPr>
-            <a:r>
-              <a:rPr lang="ja-JP" altLang="en-US" sz="900" b="0" dirty="0">
-                <a:solidFill>
-                  <a:srgbClr val="7F7F7F"/>
-                </a:solidFill>
-                <a:latin typeface="メイリオ" panose="020B0604030504040204" pitchFamily="50" charset="-128"/>
-                <a:ea typeface="メイリオ" panose="020B0604030504040204" pitchFamily="50" charset="-128"/>
-              </a:rPr>
-              <a:t>※契約期間は6か月〜。概算お見積りのページはプラン②の場合</a:t>
-            </a:r>
-            <a:endParaRPr lang="ja-JP" altLang="en-US" sz="1200" dirty="0"/>
-          </a:p>
-        </p:txBody>
-      </p:sp>
-      <p:sp>
-        <p:nvSpPr>
-          <p:cNvPr id="643" name="注記"/>
-          <p:cNvSpPr/>
-          <p:nvPr/>
-        </p:nvSpPr>
-        <p:spPr>
-          <a:xfrm>
-            <a:off x="384048" y="6053076"/>
-            <a:ext cx="9144000" cy="246888"/>
-          </a:xfrm>
-          <a:prstGeom prst="rect">
-            <a:avLst/>
-          </a:prstGeom>
-          <a:noFill/>
-          <a:ln>
-            <a:noFill/>
-          </a:ln>
-        </p:spPr>
-        <p:txBody>
-          <a:bodyPr wrap="square" lIns="0" tIns="0" rIns="0" bIns="0" rtlCol="0" anchor="t">
-            <a:noAutofit/>
-          </a:bodyPr>
-          <a:lstStyle/>
-          <a:p>
-            <a:pPr algn="l">
-              <a:buNone/>
-            </a:pPr>
-            <a:r>
-              <a:rPr lang="ja-JP" altLang="en-US" sz="900" b="0" dirty="0">
-                <a:solidFill>
-                  <a:srgbClr val="7F7F7F"/>
-                </a:solidFill>
-                <a:latin typeface="メイリオ" panose="020B0604030504040204" pitchFamily="50" charset="-128"/>
-                <a:ea typeface="メイリオ" panose="020B0604030504040204" pitchFamily="50" charset="-128"/>
-              </a:rPr>
-              <a:t>※施策内容・配信本数・連携範囲等により、費用は個別にお見積もりいたします。</a:t>
-            </a:r>
-            <a:endParaRPr lang="ja-JP" altLang="en-US" sz="1200" dirty="0"/>
-          </a:p>
-        </p:txBody>
-      </p:sp>
-    </p:spTree>
-  </p:cSld>
-  <p:clrMapOvr>
-    <a:masterClrMapping/>
-  </p:clrMapOvr>
-</p:sld>
-</file>
-
-<file path=ppt/slides/slide16.xml><?xml version="1.0" encoding="utf-8"?>
-<p:sld xmlns:a="http://schemas.openxmlformats.org/drawingml/2006/main" xmlns:r="http://schemas.openxmlformats.org/officeDocument/2006/relationships" xmlns:p="http://schemas.openxmlformats.org/presentationml/2006/main">
-  <p:cSld>
-    <p:spTree>
-      <p:nvGrpSpPr>
-        <p:cNvPr id="1" name=""/>
-        <p:cNvGrpSpPr/>
-        <p:nvPr/>
-      </p:nvGrpSpPr>
-      <p:grpSpPr>
-        <a:xfrm>
-          <a:off x="0" y="0"/>
-          <a:ext cx="0" cy="0"/>
-          <a:chOff x="0" y="0"/>
-          <a:chExt cx="0" cy="0"/>
-        </a:xfrm>
-      </p:grpSpPr>
-      <p:sp>
-        <p:nvSpPr>
-          <p:cNvPr id="635" name="Google Shape;752;p28"/>
-          <p:cNvSpPr/>
-          <p:nvPr/>
-        </p:nvSpPr>
-        <p:spPr>
-          <a:xfrm>
-            <a:off x="549000" y="138240"/>
-            <a:ext cx="6275880" cy="338040"/>
-          </a:xfrm>
-          <a:prstGeom prst="rect">
-            <a:avLst/>
-          </a:prstGeom>
-          <a:noFill/>
-          <a:ln w="0">
-            <a:noFill/>
-          </a:ln>
-        </p:spPr>
-        <p:style>
-          <a:lnRef idx="0">
-            <a:scrgbClr r="0" g="0" b="0"/>
-          </a:lnRef>
-          <a:fillRef idx="0">
-            <a:scrgbClr r="0" g="0" b="0"/>
-          </a:fillRef>
-          <a:effectRef idx="0">
-            <a:scrgbClr r="0" g="0" b="0"/>
-          </a:effectRef>
-          <a:fontRef idx="minor"/>
-        </p:style>
-        <p:txBody>
-          <a:bodyPr anchor="ctr">
-            <a:spAutoFit/>
-          </a:bodyPr>
-          <a:lstStyle/>
-          <a:p>
-            <a:pPr defTabSz="914400">
-              <a:lnSpc>
-                <a:spcPct val="100000"/>
-              </a:lnSpc>
-            </a:pPr>
-            <a:r>
-              <a:rPr lang="ja-JP" sz="1600" b="1" u="none" strike="noStrike">
-                <a:solidFill>
-                  <a:srgbClr val="323366"/>
-                </a:solidFill>
-                <a:effectLst/>
-                <a:uFillTx/>
-                <a:latin typeface="メイリオ"/>
-                <a:ea typeface="メイリオ"/>
-              </a:rPr>
-              <a:t>料金プラン（成果報酬）：月額を抑え、応募1件ごとにお支払い</a:t>
-            </a:r>
-            <a:endParaRPr lang="en-US" sz="1600" b="0" u="none" strike="noStrike">
-              <a:solidFill>
-                <a:srgbClr val="000000"/>
-              </a:solidFill>
-              <a:effectLst/>
-              <a:uFillTx/>
-              <a:latin typeface="メイリオ"/>
-            </a:endParaRPr>
-          </a:p>
-        </p:txBody>
-      </p:sp>
-      <p:sp>
-        <p:nvSpPr>
-          <p:cNvPr id="636" name="正方形/長方形 8"/>
-          <p:cNvSpPr/>
-          <p:nvPr/>
-        </p:nvSpPr>
-        <p:spPr>
-          <a:xfrm>
-            <a:off x="0" y="681480"/>
-            <a:ext cx="2914200" cy="502560"/>
-          </a:xfrm>
-          <a:prstGeom prst="rect">
-            <a:avLst/>
-          </a:prstGeom>
-          <a:solidFill>
-            <a:srgbClr val="002060"/>
-          </a:solidFill>
-          <a:ln>
-            <a:noFill/>
-          </a:ln>
-        </p:spPr>
-        <p:style>
-          <a:lnRef idx="2">
-            <a:schemeClr val="accent1">
-              <a:shade val="15000"/>
-            </a:schemeClr>
-          </a:lnRef>
-          <a:fillRef idx="1">
-            <a:schemeClr val="accent1"/>
-          </a:fillRef>
-          <a:effectRef idx="0">
-            <a:schemeClr val="accent1"/>
-          </a:effectRef>
-          <a:fontRef idx="minor"/>
-        </p:style>
-        <p:txBody>
-          <a:bodyPr lIns="90000" tIns="45000" rIns="90000" bIns="45000" anchor="ctr">
-            <a:noAutofit/>
-          </a:bodyPr>
-          <a:lstStyle/>
-          <a:p>
-            <a:pPr algn="ctr" defTabSz="914400">
-              <a:lnSpc>
-                <a:spcPct val="100000"/>
-              </a:lnSpc>
-            </a:pPr>
-            <a:r>
-              <a:rPr lang="ja-JP" sz="1400" b="0" u="none" strike="noStrike" dirty="0">
-                <a:solidFill>
-                  <a:schemeClr val="lt1"/>
-                </a:solidFill>
-                <a:effectLst/>
-                <a:uFillTx/>
-                <a:latin typeface="メイリオ"/>
-                <a:ea typeface="メイリオ"/>
-              </a:rPr>
-              <a:t>成果報酬プラン</a:t>
-            </a:r>
-            <a:endParaRPr lang="en-US" sz="1400" b="0" u="none" strike="noStrike" dirty="0">
-              <a:solidFill>
-                <a:srgbClr val="FFFFFF"/>
-              </a:solidFill>
-              <a:effectLst/>
-              <a:uFillTx/>
-              <a:latin typeface="メイリオ"/>
-            </a:endParaRPr>
-          </a:p>
-        </p:txBody>
-      </p:sp>
-      <p:sp>
-        <p:nvSpPr>
-          <p:cNvPr id="637" name="Google Shape;752;p28"/>
-          <p:cNvSpPr/>
-          <p:nvPr/>
-        </p:nvSpPr>
-        <p:spPr>
-          <a:xfrm>
-            <a:off x="2983680" y="783000"/>
-            <a:ext cx="6619680" cy="338040"/>
-          </a:xfrm>
-          <a:prstGeom prst="rect">
-            <a:avLst/>
-          </a:prstGeom>
-          <a:noFill/>
-          <a:ln w="0">
-            <a:noFill/>
-          </a:ln>
-        </p:spPr>
-        <p:style>
-          <a:lnRef idx="0">
-            <a:scrgbClr r="0" g="0" b="0"/>
-          </a:lnRef>
-          <a:fillRef idx="0">
-            <a:scrgbClr r="0" g="0" b="0"/>
-          </a:fillRef>
-          <a:effectRef idx="0">
-            <a:scrgbClr r="0" g="0" b="0"/>
-          </a:effectRef>
-          <a:fontRef idx="minor"/>
-        </p:style>
-        <p:txBody>
-          <a:bodyPr anchor="ctr">
-            <a:spAutoFit/>
-          </a:bodyPr>
-          <a:lstStyle/>
-          <a:p>
-            <a:pPr defTabSz="914400">
-              <a:lnSpc>
-                <a:spcPct val="100000"/>
-              </a:lnSpc>
-            </a:pPr>
-            <a:r>
-              <a:rPr lang="ja-JP" sz="1600" b="1" u="none" strike="noStrike" dirty="0">
-                <a:solidFill>
-                  <a:schemeClr val="dk1"/>
-                </a:solidFill>
-                <a:effectLst/>
-                <a:uFillTx/>
-                <a:latin typeface="メイリオ"/>
-                <a:ea typeface="メイリオ"/>
-              </a:rPr>
-              <a:t>初期費用は同じ。月額運用費の代わりに、応募1件ごとの成果報酬</a:t>
-            </a:r>
-            <a:endParaRPr lang="en-US" sz="1600" b="0" u="none" strike="noStrike" dirty="0">
-              <a:solidFill>
-                <a:srgbClr val="000000"/>
-              </a:solidFill>
-              <a:effectLst/>
-              <a:uFillTx/>
-              <a:latin typeface="メイリオ"/>
-            </a:endParaRPr>
-          </a:p>
-        </p:txBody>
-      </p:sp>
-      <p:graphicFrame>
-        <p:nvGraphicFramePr>
-          <p:cNvPr id="639" name="料金プラン比較表 638"/>
-          <p:cNvGraphicFramePr>
-            <a:graphicFrameLocks noGrp="1"/>
-          </p:cNvGraphicFramePr>
-          <p:nvPr>
-            <p:extLst>
-              <p:ext uri="{D42A27DB-BD31-4B8C-83A1-F6EECF244321}">
-                <p14:modId xmlns:p14="http://schemas.microsoft.com/office/powerpoint/2010/main" val="2705869607"/>
-              </p:ext>
-            </p:extLst>
-          </p:nvPr>
-        </p:nvGraphicFramePr>
-        <p:xfrm>
-          <a:off x="384048" y="1490760"/>
-          <a:ext cx="9144001" cy="3749040"/>
-        </p:xfrm>
-        <a:graphic>
-          <a:graphicData uri="http://schemas.openxmlformats.org/drawingml/2006/table">
-            <a:tbl>
-              <a:tblPr/>
-              <a:tblGrid>
-                <a:gridCol w="2032000">
-                  <a:extLst>
-                    <a:ext uri="{9D8B030D-6E8A-4147-A177-3AD203B41FA5}">
-                      <a16:colId xmlns:a16="http://schemas.microsoft.com/office/drawing/2014/main" val="20000"/>
-                    </a:ext>
-                  </a:extLst>
-                </a:gridCol>
-                <a:gridCol w="2370667">
-                  <a:extLst>
-                    <a:ext uri="{9D8B030D-6E8A-4147-A177-3AD203B41FA5}">
-                      <a16:colId xmlns:a16="http://schemas.microsoft.com/office/drawing/2014/main" val="2596778832"/>
-                    </a:ext>
-                  </a:extLst>
-                </a:gridCol>
-                <a:gridCol w="2370667">
-                  <a:extLst>
-                    <a:ext uri="{9D8B030D-6E8A-4147-A177-3AD203B41FA5}">
-                      <a16:colId xmlns:a16="http://schemas.microsoft.com/office/drawing/2014/main" val="20002"/>
-                    </a:ext>
-                  </a:extLst>
-                </a:gridCol>
-                <a:gridCol w="2370667">
-                  <a:extLst>
-                    <a:ext uri="{9D8B030D-6E8A-4147-A177-3AD203B41FA5}">
-                      <a16:colId xmlns:a16="http://schemas.microsoft.com/office/drawing/2014/main" val="20003"/>
-                    </a:ext>
-                  </a:extLst>
-                </a:gridCol>
-              </a:tblGrid>
-              <a:tr h="777240">
-                <a:tc>
-                  <a:txBody>
-                    <a:bodyPr/>
-                    <a:lstStyle/>
-                    <a:p>
-                      <a:pPr algn="ctr">
-                        <a:buNone/>
-                      </a:pPr>
-                      <a:r>
-                        <a:rPr lang="ja-JP" altLang="en-US" sz="1400" b="1" dirty="0">
-                          <a:solidFill>
-                            <a:srgbClr val="FFFFFF"/>
-                          </a:solidFill>
-                          <a:latin typeface="メイリオ" panose="020B0604030504040204" pitchFamily="50" charset="-128"/>
-                          <a:ea typeface="メイリオ" panose="020B0604030504040204" pitchFamily="50" charset="-128"/>
-                        </a:rPr>
-                        <a:t>項目</a:t>
-                      </a:r>
-                      <a:endParaRPr lang="ja-JP" altLang="en-US" sz="1400" dirty="0"/>
-                    </a:p>
-                  </a:txBody>
-                  <a:tcPr marL="73152" marR="73152" marT="27432" marB="27432" anchor="ctr">
-                    <a:lnL w="9525" cap="flat" cmpd="sng" algn="ctr">
-                      <a:solidFill>
-                        <a:srgbClr val="FFFFFF"/>
-                      </a:solidFill>
-                      <a:prstDash val="solid"/>
-                      <a:round/>
-                      <a:headEnd type="none" w="med" len="med"/>
-                      <a:tailEnd type="none" w="med" len="med"/>
-                    </a:lnL>
-                    <a:lnR w="9525" cap="flat" cmpd="sng" algn="ctr">
-                      <a:solidFill>
-                        <a:srgbClr val="FFFFFF"/>
-                      </a:solidFill>
-                      <a:prstDash val="solid"/>
-                      <a:round/>
-                      <a:headEnd type="none" w="med" len="med"/>
-                      <a:tailEnd type="none" w="med" len="med"/>
-                    </a:lnR>
-                    <a:lnT w="9525" cap="flat" cmpd="sng" algn="ctr">
-                      <a:solidFill>
-                        <a:srgbClr val="FFFFFF"/>
-                      </a:solidFill>
-                      <a:prstDash val="solid"/>
-                      <a:round/>
-                      <a:headEnd type="none" w="med" len="med"/>
-                      <a:tailEnd type="none" w="med" len="med"/>
-                    </a:lnT>
-                    <a:lnB w="9525" cap="flat" cmpd="sng" algn="ctr">
-                      <a:solidFill>
-                        <a:srgbClr val="FFFFFF"/>
-                      </a:solidFill>
-                      <a:prstDash val="solid"/>
-                      <a:round/>
-                      <a:headEnd type="none" w="med" len="med"/>
-                      <a:tailEnd type="none" w="med" len="med"/>
-                    </a:lnB>
-                    <a:solidFill>
-                      <a:srgbClr val="1F285A"/>
-                    </a:solidFill>
-                  </a:tcPr>
-                </a:tc>
-                <a:tc>
-                  <a:txBody>
-                    <a:bodyPr/>
-                    <a:lstStyle/>
-                    <a:p>
-                      <a:pPr algn="ctr">
-                        <a:buNone/>
-                      </a:pPr>
-                      <a:r>
-                        <a:rPr lang="ja-JP" altLang="en-US" sz="1400" b="1" dirty="0">
-                          <a:solidFill>
-                            <a:srgbClr val="FFFFFF"/>
-                          </a:solidFill>
-                          <a:latin typeface="メイリオ" panose="020B0604030504040204" pitchFamily="50" charset="-128"/>
-                          <a:ea typeface="メイリオ" panose="020B0604030504040204" pitchFamily="50" charset="-128"/>
-                        </a:rPr>
-                        <a:t>プラン①</a:t>
-                      </a:r>
-                      <a:endParaRPr lang="ja-JP" altLang="en-US" sz="1300" dirty="0"/>
-                    </a:p>
-                    <a:p>
-                      <a:pPr algn="ctr">
-                        <a:buNone/>
-                      </a:pPr>
-                      <a:r>
-                        <a:rPr lang="ja-JP" altLang="en-US" sz="1400" b="1" dirty="0">
-                          <a:solidFill>
-                            <a:srgbClr val="FFFFFF"/>
-                          </a:solidFill>
-                          <a:latin typeface="メイリオ" panose="020B0604030504040204" pitchFamily="50" charset="-128"/>
-                          <a:ea typeface="メイリオ" panose="020B0604030504040204" pitchFamily="50" charset="-128"/>
-                        </a:rPr>
-                        <a:t>初期設計・構築のみ</a:t>
-                      </a:r>
-                      <a:endParaRPr lang="ja-JP" altLang="en-US" sz="1300" dirty="0"/>
-                    </a:p>
-                  </a:txBody>
-                  <a:tcPr marL="73152" marR="73152" marT="27432" marB="27432" anchor="ctr">
-                    <a:lnL w="9525" cap="flat" cmpd="sng" algn="ctr">
-                      <a:solidFill>
-                        <a:srgbClr val="FFFFFF"/>
-                      </a:solidFill>
-                      <a:prstDash val="solid"/>
-                      <a:round/>
-                      <a:headEnd type="none" w="med" len="med"/>
-                      <a:tailEnd type="none" w="med" len="med"/>
-                    </a:lnL>
-                    <a:lnR w="9525" cap="flat" cmpd="sng" algn="ctr">
-                      <a:solidFill>
-                        <a:srgbClr val="FFFFFF"/>
-                      </a:solidFill>
-                      <a:prstDash val="solid"/>
-                      <a:round/>
-                      <a:headEnd type="none" w="med" len="med"/>
-                      <a:tailEnd type="none" w="med" len="med"/>
-                    </a:lnR>
-                    <a:lnT w="9525" cap="flat" cmpd="sng" algn="ctr">
-                      <a:solidFill>
-                        <a:srgbClr val="FFFFFF"/>
-                      </a:solidFill>
-                      <a:prstDash val="solid"/>
-                      <a:round/>
-                      <a:headEnd type="none" w="med" len="med"/>
-                      <a:tailEnd type="none" w="med" len="med"/>
-                    </a:lnT>
-                    <a:lnB w="9525" cap="flat" cmpd="sng" algn="ctr">
-                      <a:solidFill>
-                        <a:srgbClr val="FFFFFF"/>
-                      </a:solidFill>
-                      <a:prstDash val="solid"/>
-                      <a:round/>
-                      <a:headEnd type="none" w="med" len="med"/>
-                      <a:tailEnd type="none" w="med" len="med"/>
-                    </a:lnB>
-                    <a:solidFill>
-                      <a:srgbClr val="1F285A"/>
-                    </a:solidFill>
-                  </a:tcPr>
-                </a:tc>
-                <a:tc>
-                  <a:txBody>
-                    <a:bodyPr/>
-                    <a:lstStyle/>
-                    <a:p>
-                      <a:pPr algn="ctr">
-                        <a:buNone/>
-                      </a:pPr>
-                      <a:r>
-                        <a:rPr lang="ja-JP" altLang="en-US" sz="1400" b="1" dirty="0">
-                          <a:solidFill>
-                            <a:srgbClr val="FFFFFF"/>
-                          </a:solidFill>
-                          <a:latin typeface="メイリオ" panose="020B0604030504040204" pitchFamily="50" charset="-128"/>
-                          <a:ea typeface="メイリオ" panose="020B0604030504040204" pitchFamily="50" charset="-128"/>
-                        </a:rPr>
-                        <a:t>プラン②</a:t>
-                      </a:r>
-                      <a:endParaRPr lang="ja-JP" altLang="en-US" sz="1300" dirty="0"/>
-                    </a:p>
-                    <a:p>
-                      <a:pPr algn="ctr">
-                        <a:buNone/>
-                      </a:pPr>
-                      <a:r>
-                        <a:rPr lang="ja-JP" altLang="en-US" sz="1400" b="1" dirty="0">
-                          <a:solidFill>
-                            <a:srgbClr val="FFFFFF"/>
-                          </a:solidFill>
-                          <a:latin typeface="メイリオ" panose="020B0604030504040204" pitchFamily="50" charset="-128"/>
-                          <a:ea typeface="メイリオ" panose="020B0604030504040204" pitchFamily="50" charset="-128"/>
-                        </a:rPr>
-                        <a:t>運用代行・効率改善</a:t>
-                      </a:r>
-                      <a:endParaRPr lang="ja-JP" altLang="en-US" sz="1300" dirty="0"/>
-                    </a:p>
-                  </a:txBody>
-                  <a:tcPr marL="73152" marR="73152" marT="27432" marB="27432" anchor="ctr">
-                    <a:lnL w="9525" cap="flat" cmpd="sng" algn="ctr">
-                      <a:solidFill>
-                        <a:srgbClr val="FFFFFF"/>
-                      </a:solidFill>
-                      <a:prstDash val="solid"/>
-                      <a:round/>
-                      <a:headEnd type="none" w="med" len="med"/>
-                      <a:tailEnd type="none" w="med" len="med"/>
-                    </a:lnL>
-                    <a:lnR w="9525" cap="flat" cmpd="sng" algn="ctr">
-                      <a:solidFill>
-                        <a:srgbClr val="FFFFFF"/>
-                      </a:solidFill>
-                      <a:prstDash val="solid"/>
-                      <a:round/>
-                      <a:headEnd type="none" w="med" len="med"/>
-                      <a:tailEnd type="none" w="med" len="med"/>
-                    </a:lnR>
-                    <a:lnT w="9525" cap="flat" cmpd="sng" algn="ctr">
-                      <a:solidFill>
-                        <a:srgbClr val="FFFFFF"/>
-                      </a:solidFill>
-                      <a:prstDash val="solid"/>
-                      <a:round/>
-                      <a:headEnd type="none" w="med" len="med"/>
-                      <a:tailEnd type="none" w="med" len="med"/>
-                    </a:lnT>
-                    <a:lnB w="9525" cap="flat" cmpd="sng" algn="ctr">
-                      <a:solidFill>
-                        <a:srgbClr val="FFFFFF"/>
-                      </a:solidFill>
-                      <a:prstDash val="solid"/>
-                      <a:round/>
-                      <a:headEnd type="none" w="med" len="med"/>
-                      <a:tailEnd type="none" w="med" len="med"/>
-                    </a:lnB>
-                    <a:solidFill>
-                      <a:srgbClr val="1F285A"/>
-                    </a:solidFill>
-                  </a:tcPr>
-                </a:tc>
-                <a:tc>
-                  <a:txBody>
-                    <a:bodyPr/>
-                    <a:lstStyle/>
-                    <a:p>
-                      <a:pPr algn="ctr">
-                        <a:buNone/>
-                      </a:pPr>
-                      <a:r>
-                        <a:rPr lang="ja-JP" altLang="en-US" sz="1400" b="1" dirty="0">
-                          <a:solidFill>
-                            <a:srgbClr val="FFFFFF"/>
-                          </a:solidFill>
-                          <a:latin typeface="メイリオ" panose="020B0604030504040204" pitchFamily="50" charset="-128"/>
-                          <a:ea typeface="メイリオ" panose="020B0604030504040204" pitchFamily="50" charset="-128"/>
-                        </a:rPr>
-                        <a:t>プラン③</a:t>
-                      </a:r>
-                      <a:endParaRPr lang="ja-JP" altLang="en-US" sz="1300" dirty="0"/>
-                    </a:p>
-                    <a:p>
-                      <a:pPr algn="ctr">
-                        <a:buNone/>
-                      </a:pPr>
-                      <a:r>
-                        <a:rPr lang="ja-JP" altLang="en-US" sz="1400" b="1" dirty="0">
-                          <a:solidFill>
-                            <a:srgbClr val="FFFFFF"/>
-                          </a:solidFill>
-                          <a:latin typeface="メイリオ" panose="020B0604030504040204" pitchFamily="50" charset="-128"/>
-                          <a:ea typeface="メイリオ" panose="020B0604030504040204" pitchFamily="50" charset="-128"/>
-                        </a:rPr>
-                        <a:t>運用代行フルサポート</a:t>
-                      </a:r>
-                      <a:endParaRPr lang="ja-JP" altLang="en-US" sz="1300" dirty="0"/>
-                    </a:p>
-                  </a:txBody>
-                  <a:tcPr marL="73152" marR="73152" marT="27432" marB="27432" anchor="ctr">
-                    <a:lnL w="9525" cap="flat" cmpd="sng" algn="ctr">
-                      <a:solidFill>
-                        <a:srgbClr val="FFFFFF"/>
-                      </a:solidFill>
-                      <a:prstDash val="solid"/>
-                      <a:round/>
-                      <a:headEnd type="none" w="med" len="med"/>
-                      <a:tailEnd type="none" w="med" len="med"/>
-                    </a:lnL>
-                    <a:lnR w="9525" cap="flat" cmpd="sng" algn="ctr">
-                      <a:solidFill>
-                        <a:srgbClr val="FFFFFF"/>
-                      </a:solidFill>
-                      <a:prstDash val="solid"/>
-                      <a:round/>
-                      <a:headEnd type="none" w="med" len="med"/>
-                      <a:tailEnd type="none" w="med" len="med"/>
-                    </a:lnR>
-                    <a:lnT w="9525" cap="flat" cmpd="sng" algn="ctr">
-                      <a:solidFill>
-                        <a:srgbClr val="FFFFFF"/>
-                      </a:solidFill>
-                      <a:prstDash val="solid"/>
-                      <a:round/>
-                      <a:headEnd type="none" w="med" len="med"/>
-                      <a:tailEnd type="none" w="med" len="med"/>
-                    </a:lnT>
-                    <a:lnB w="9525" cap="flat" cmpd="sng" algn="ctr">
-                      <a:solidFill>
-                        <a:srgbClr val="FFFFFF"/>
-                      </a:solidFill>
-                      <a:prstDash val="solid"/>
-                      <a:round/>
-                      <a:headEnd type="none" w="med" len="med"/>
-                      <a:tailEnd type="none" w="med" len="med"/>
-                    </a:lnB>
-                    <a:solidFill>
-                      <a:srgbClr val="1F285A"/>
-                    </a:solidFill>
-                  </a:tcPr>
-                </a:tc>
-                <a:extLst>
-                  <a:ext uri="{0D108BD9-81ED-4DB2-BD59-A6C34878D82A}">
-                    <a16:rowId xmlns:a16="http://schemas.microsoft.com/office/drawing/2014/main" val="10000"/>
-                  </a:ext>
-                </a:extLst>
-              </a:tr>
-              <a:tr h="640080">
-                <a:tc>
-                  <a:txBody>
-                    <a:bodyPr/>
-                    <a:lstStyle/>
-                    <a:p>
-                      <a:pPr algn="ctr">
-                        <a:buNone/>
-                      </a:pPr>
-                      <a:r>
-                        <a:rPr lang="ja-JP" altLang="en-US" sz="1400" b="1" dirty="0">
-                          <a:solidFill>
-                            <a:srgbClr val="1F285A"/>
-                          </a:solidFill>
-                          <a:latin typeface="メイリオ" panose="020B0604030504040204" pitchFamily="50" charset="-128"/>
-                          <a:ea typeface="メイリオ" panose="020B0604030504040204" pitchFamily="50" charset="-128"/>
-                        </a:rPr>
-                        <a:t>初期費用</a:t>
-                      </a:r>
-                      <a:endParaRPr lang="ja-JP" altLang="en-US" sz="1400" dirty="0"/>
-                    </a:p>
-                  </a:txBody>
-                  <a:tcPr marL="73152" marR="73152" marT="27432" marB="27432" anchor="ctr">
-                    <a:lnL w="9525" cap="flat" cmpd="sng" algn="ctr">
-                      <a:solidFill>
-                        <a:srgbClr val="BFC8DC"/>
-                      </a:solidFill>
-                      <a:prstDash val="solid"/>
-                      <a:round/>
-                      <a:headEnd type="none" w="med" len="med"/>
-                      <a:tailEnd type="none" w="med" len="med"/>
-                    </a:lnL>
-                    <a:lnR w="9525" cap="flat" cmpd="sng" algn="ctr">
-                      <a:solidFill>
-                        <a:srgbClr val="BFC8DC"/>
-                      </a:solidFill>
-                      <a:prstDash val="solid"/>
-                      <a:round/>
-                      <a:headEnd type="none" w="med" len="med"/>
-                      <a:tailEnd type="none" w="med" len="med"/>
-                    </a:lnR>
-                    <a:lnT w="9525" cap="flat" cmpd="sng" algn="ctr">
-                      <a:solidFill>
-                        <a:srgbClr val="FFFFFF"/>
-                      </a:solidFill>
-                      <a:prstDash val="solid"/>
-                      <a:round/>
-                      <a:headEnd type="none" w="med" len="med"/>
-                      <a:tailEnd type="none" w="med" len="med"/>
-                    </a:lnT>
-                    <a:lnB w="9525" cap="flat" cmpd="sng" algn="ctr">
-                      <a:solidFill>
-                        <a:srgbClr val="BFC8DC"/>
-                      </a:solidFill>
-                      <a:prstDash val="solid"/>
-                      <a:round/>
-                      <a:headEnd type="none" w="med" len="med"/>
-                      <a:tailEnd type="none" w="med" len="med"/>
-                    </a:lnB>
-                    <a:solidFill>
-                      <a:srgbClr val="E8ECF6"/>
-                    </a:solidFill>
-                  </a:tcPr>
-                </a:tc>
-                <a:tc>
-                  <a:txBody>
-                    <a:bodyPr/>
-                    <a:lstStyle/>
-                    <a:p>
-                      <a:pPr algn="ctr">
-                        <a:buNone/>
-                      </a:pPr>
-                      <a:r>
-                        <a:rPr lang="ja-JP" altLang="en-US" sz="1500" b="0" dirty="0">
-                          <a:solidFill>
-                            <a:srgbClr val="333333"/>
-                          </a:solidFill>
-                          <a:latin typeface="メイリオ" panose="020B0604030504040204" pitchFamily="50" charset="-128"/>
-                          <a:ea typeface="メイリオ" panose="020B0604030504040204" pitchFamily="50" charset="-128"/>
-                        </a:rPr>
-                        <a:t>295,000円〜</a:t>
-                      </a:r>
-                      <a:endParaRPr lang="ja-JP" altLang="en-US" sz="1500" dirty="0"/>
-                    </a:p>
-                  </a:txBody>
-                  <a:tcPr marL="73152" marR="73152" marT="27432" marB="27432" anchor="ctr">
-                    <a:lnL w="9525" cap="flat" cmpd="sng" algn="ctr">
-                      <a:solidFill>
-                        <a:srgbClr val="BFC8DC"/>
-                      </a:solidFill>
-                      <a:prstDash val="solid"/>
-                      <a:round/>
-                      <a:headEnd type="none" w="med" len="med"/>
-                      <a:tailEnd type="none" w="med" len="med"/>
-                    </a:lnL>
-                    <a:lnR w="9525" cap="flat" cmpd="sng" algn="ctr">
-                      <a:solidFill>
-                        <a:srgbClr val="BFC8DC"/>
-                      </a:solidFill>
-                      <a:prstDash val="solid"/>
-                      <a:round/>
-                      <a:headEnd type="none" w="med" len="med"/>
-                      <a:tailEnd type="none" w="med" len="med"/>
-                    </a:lnR>
-                    <a:lnT w="9525" cap="flat" cmpd="sng" algn="ctr">
-                      <a:solidFill>
-                        <a:srgbClr val="FFFFFF"/>
-                      </a:solidFill>
-                      <a:prstDash val="solid"/>
-                      <a:round/>
-                      <a:headEnd type="none" w="med" len="med"/>
-                      <a:tailEnd type="none" w="med" len="med"/>
-                    </a:lnT>
-                    <a:lnB w="9525" cap="flat" cmpd="sng" algn="ctr">
-                      <a:solidFill>
-                        <a:srgbClr val="BFC8DC"/>
-                      </a:solidFill>
-                      <a:prstDash val="solid"/>
-                      <a:round/>
-                      <a:headEnd type="none" w="med" len="med"/>
-                      <a:tailEnd type="none" w="med" len="med"/>
-                    </a:lnB>
-                    <a:solidFill>
-                      <a:srgbClr val="FFFFFF"/>
-                    </a:solidFill>
-                  </a:tcPr>
-                </a:tc>
-                <a:tc>
-                  <a:txBody>
-                    <a:bodyPr/>
-                    <a:lstStyle/>
-                    <a:p>
-                      <a:pPr algn="ctr">
-                        <a:buNone/>
-                      </a:pPr>
-                      <a:r>
-                        <a:rPr lang="ja-JP" altLang="en-US" sz="1500" b="0" dirty="0">
-                          <a:solidFill>
-                            <a:srgbClr val="333333"/>
-                          </a:solidFill>
-                          <a:latin typeface="メイリオ" panose="020B0604030504040204" pitchFamily="50" charset="-128"/>
-                          <a:ea typeface="メイリオ" panose="020B0604030504040204" pitchFamily="50" charset="-128"/>
-                        </a:rPr>
-                        <a:t>295,000円〜</a:t>
-                      </a:r>
-                      <a:endParaRPr lang="ja-JP" altLang="en-US" sz="1500" dirty="0"/>
-                    </a:p>
-                  </a:txBody>
-                  <a:tcPr marL="73152" marR="73152" marT="27432" marB="27432" anchor="ctr">
-                    <a:lnL w="9525" cap="flat" cmpd="sng" algn="ctr">
-                      <a:solidFill>
-                        <a:srgbClr val="BFC8DC"/>
-                      </a:solidFill>
-                      <a:prstDash val="solid"/>
-                      <a:round/>
-                      <a:headEnd type="none" w="med" len="med"/>
-                      <a:tailEnd type="none" w="med" len="med"/>
-                    </a:lnL>
-                    <a:lnR w="9525" cap="flat" cmpd="sng" algn="ctr">
-                      <a:solidFill>
-                        <a:srgbClr val="BFC8DC"/>
-                      </a:solidFill>
-                      <a:prstDash val="solid"/>
-                      <a:round/>
-                      <a:headEnd type="none" w="med" len="med"/>
-                      <a:tailEnd type="none" w="med" len="med"/>
-                    </a:lnR>
-                    <a:lnT w="9525" cap="flat" cmpd="sng" algn="ctr">
-                      <a:solidFill>
-                        <a:srgbClr val="FFFFFF"/>
-                      </a:solidFill>
-                      <a:prstDash val="solid"/>
-                      <a:round/>
-                      <a:headEnd type="none" w="med" len="med"/>
-                      <a:tailEnd type="none" w="med" len="med"/>
-                    </a:lnT>
-                    <a:lnB w="9525" cap="flat" cmpd="sng" algn="ctr">
-                      <a:solidFill>
-                        <a:srgbClr val="BFC8DC"/>
-                      </a:solidFill>
-                      <a:prstDash val="solid"/>
-                      <a:round/>
-                      <a:headEnd type="none" w="med" len="med"/>
-                      <a:tailEnd type="none" w="med" len="med"/>
-                    </a:lnB>
-                    <a:solidFill>
-                      <a:srgbClr val="FFFFFF"/>
-                    </a:solidFill>
-                  </a:tcPr>
-                </a:tc>
-                <a:tc>
-                  <a:txBody>
-                    <a:bodyPr/>
-                    <a:lstStyle/>
-                    <a:p>
-                      <a:pPr algn="ctr">
-                        <a:buNone/>
-                      </a:pPr>
-                      <a:r>
-                        <a:rPr lang="ja-JP" altLang="en-US" sz="1500" b="0" dirty="0">
-                          <a:solidFill>
-                            <a:srgbClr val="333333"/>
-                          </a:solidFill>
-                          <a:latin typeface="メイリオ" panose="020B0604030504040204" pitchFamily="50" charset="-128"/>
-                          <a:ea typeface="メイリオ" panose="020B0604030504040204" pitchFamily="50" charset="-128"/>
-                        </a:rPr>
-                        <a:t>295,000円〜</a:t>
-                      </a:r>
-                      <a:endParaRPr lang="ja-JP" altLang="en-US" sz="1500" dirty="0"/>
-                    </a:p>
-                  </a:txBody>
-                  <a:tcPr marL="73152" marR="73152" marT="27432" marB="27432" anchor="ctr">
-                    <a:lnL w="9525" cap="flat" cmpd="sng" algn="ctr">
-                      <a:solidFill>
-                        <a:srgbClr val="BFC8DC"/>
-                      </a:solidFill>
-                      <a:prstDash val="solid"/>
-                      <a:round/>
-                      <a:headEnd type="none" w="med" len="med"/>
-                      <a:tailEnd type="none" w="med" len="med"/>
-                    </a:lnL>
-                    <a:lnR w="9525" cap="flat" cmpd="sng" algn="ctr">
-                      <a:solidFill>
-                        <a:srgbClr val="BFC8DC"/>
-                      </a:solidFill>
-                      <a:prstDash val="solid"/>
-                      <a:round/>
-                      <a:headEnd type="none" w="med" len="med"/>
-                      <a:tailEnd type="none" w="med" len="med"/>
-                    </a:lnR>
-                    <a:lnT w="9525" cap="flat" cmpd="sng" algn="ctr">
-                      <a:solidFill>
-                        <a:srgbClr val="FFFFFF"/>
-                      </a:solidFill>
-                      <a:prstDash val="solid"/>
-                      <a:round/>
-                      <a:headEnd type="none" w="med" len="med"/>
-                      <a:tailEnd type="none" w="med" len="med"/>
-                    </a:lnT>
-                    <a:lnB w="9525" cap="flat" cmpd="sng" algn="ctr">
-                      <a:solidFill>
-                        <a:srgbClr val="BFC8DC"/>
-                      </a:solidFill>
-                      <a:prstDash val="solid"/>
-                      <a:round/>
-                      <a:headEnd type="none" w="med" len="med"/>
-                      <a:tailEnd type="none" w="med" len="med"/>
-                    </a:lnB>
-                    <a:solidFill>
-                      <a:srgbClr val="FFFFFF"/>
-                    </a:solidFill>
-                  </a:tcPr>
-                </a:tc>
-                <a:extLst>
-                  <a:ext uri="{0D108BD9-81ED-4DB2-BD59-A6C34878D82A}">
-                    <a16:rowId xmlns:a16="http://schemas.microsoft.com/office/drawing/2014/main" val="10001"/>
-                  </a:ext>
-                </a:extLst>
-              </a:tr>
-              <a:tr h="640080">
-                <a:tc>
-                  <a:txBody>
-                    <a:bodyPr/>
-                    <a:lstStyle/>
-                    <a:p>
-                      <a:pPr algn="ctr">
-                        <a:buNone/>
-                      </a:pPr>
-                      <a:r>
-                        <a:rPr lang="ja-JP" altLang="en-US" sz="1400" b="1" dirty="0">
-                          <a:solidFill>
-                            <a:srgbClr val="1F285A"/>
-                          </a:solidFill>
-                          <a:latin typeface="メイリオ" panose="020B0604030504040204" pitchFamily="50" charset="-128"/>
-                          <a:ea typeface="メイリオ" panose="020B0604030504040204" pitchFamily="50" charset="-128"/>
-                        </a:rPr>
-                        <a:t>成果報酬</a:t>
-                      </a:r>
-                      <a:endParaRPr lang="ja-JP" altLang="en-US" sz="1400" dirty="0"/>
-                    </a:p>
-                    <a:p>
-                      <a:pPr algn="ctr">
-                        <a:buNone/>
-                      </a:pPr>
-                      <a:r>
-                        <a:rPr lang="ja-JP" altLang="en-US" sz="1400" b="1" dirty="0">
-                          <a:solidFill>
-                            <a:srgbClr val="1F285A"/>
-                          </a:solidFill>
-                          <a:latin typeface="メイリオ" panose="020B0604030504040204" pitchFamily="50" charset="-128"/>
-                          <a:ea typeface="メイリオ" panose="020B0604030504040204" pitchFamily="50" charset="-128"/>
-                        </a:rPr>
-                        <a:t>（応募1件）</a:t>
-                      </a:r>
-                      <a:endParaRPr lang="ja-JP" altLang="en-US" sz="1400" dirty="0"/>
-                    </a:p>
-                  </a:txBody>
-                  <a:tcPr marL="73152" marR="73152" marT="27432" marB="27432" anchor="ctr">
-                    <a:lnL w="9525" cap="flat" cmpd="sng" algn="ctr">
-                      <a:solidFill>
-                        <a:srgbClr val="BFC8DC"/>
-                      </a:solidFill>
-                      <a:prstDash val="solid"/>
-                      <a:round/>
-                      <a:headEnd type="none" w="med" len="med"/>
-                      <a:tailEnd type="none" w="med" len="med"/>
-                    </a:lnL>
-                    <a:lnR w="9525" cap="flat" cmpd="sng" algn="ctr">
-                      <a:solidFill>
-                        <a:srgbClr val="BFC8DC"/>
-                      </a:solidFill>
-                      <a:prstDash val="solid"/>
-                      <a:round/>
-                      <a:headEnd type="none" w="med" len="med"/>
-                      <a:tailEnd type="none" w="med" len="med"/>
-                    </a:lnR>
-                    <a:lnT w="9525" cap="flat" cmpd="sng" algn="ctr">
-                      <a:solidFill>
-                        <a:srgbClr val="BFC8DC"/>
-                      </a:solidFill>
-                      <a:prstDash val="solid"/>
-                      <a:round/>
-                      <a:headEnd type="none" w="med" len="med"/>
-                      <a:tailEnd type="none" w="med" len="med"/>
-                    </a:lnT>
-                    <a:lnB w="9525" cap="flat" cmpd="sng" algn="ctr">
-                      <a:solidFill>
-                        <a:srgbClr val="BFC8DC"/>
-                      </a:solidFill>
-                      <a:prstDash val="solid"/>
-                      <a:round/>
-                      <a:headEnd type="none" w="med" len="med"/>
-                      <a:tailEnd type="none" w="med" len="med"/>
-                    </a:lnB>
-                    <a:solidFill>
-                      <a:srgbClr val="E8ECF6"/>
-                    </a:solidFill>
-                  </a:tcPr>
-                </a:tc>
-                <a:tc>
-                  <a:txBody>
-                    <a:bodyPr/>
-                    <a:lstStyle/>
-                    <a:p>
-                      <a:pPr algn="ctr">
-                        <a:buNone/>
-                      </a:pPr>
-                      <a:r>
-                        <a:rPr lang="ja-JP" altLang="en-US" sz="1500" b="0" dirty="0">
-                          <a:solidFill>
-                            <a:srgbClr val="333333"/>
-                          </a:solidFill>
-                          <a:latin typeface="メイリオ" panose="020B0604030504040204" pitchFamily="50" charset="-128"/>
-                          <a:ea typeface="メイリオ" panose="020B0604030504040204" pitchFamily="50" charset="-128"/>
-                        </a:rPr>
-                        <a:t>なし</a:t>
-                      </a:r>
-                      <a:endParaRPr lang="ja-JP" altLang="en-US" sz="1500" dirty="0"/>
-                    </a:p>
-                  </a:txBody>
-                  <a:tcPr marL="73152" marR="73152" marT="27432" marB="27432" anchor="ctr">
-                    <a:lnL w="9525" cap="flat" cmpd="sng" algn="ctr">
-                      <a:solidFill>
-                        <a:srgbClr val="BFC8DC"/>
-                      </a:solidFill>
-                      <a:prstDash val="solid"/>
-                      <a:round/>
-                      <a:headEnd type="none" w="med" len="med"/>
-                      <a:tailEnd type="none" w="med" len="med"/>
-                    </a:lnL>
-                    <a:lnR w="9525" cap="flat" cmpd="sng" algn="ctr">
-                      <a:solidFill>
-                        <a:srgbClr val="BFC8DC"/>
-                      </a:solidFill>
-                      <a:prstDash val="solid"/>
-                      <a:round/>
-                      <a:headEnd type="none" w="med" len="med"/>
-                      <a:tailEnd type="none" w="med" len="med"/>
-                    </a:lnR>
-                    <a:lnT w="9525" cap="flat" cmpd="sng" algn="ctr">
-                      <a:solidFill>
-                        <a:srgbClr val="BFC8DC"/>
-                      </a:solidFill>
-                      <a:prstDash val="solid"/>
-                      <a:round/>
-                      <a:headEnd type="none" w="med" len="med"/>
-                      <a:tailEnd type="none" w="med" len="med"/>
-                    </a:lnT>
-                    <a:lnB w="9525" cap="flat" cmpd="sng" algn="ctr">
-                      <a:solidFill>
-                        <a:srgbClr val="BFC8DC"/>
-                      </a:solidFill>
-                      <a:prstDash val="solid"/>
-                      <a:round/>
-                      <a:headEnd type="none" w="med" len="med"/>
-                      <a:tailEnd type="none" w="med" len="med"/>
-                    </a:lnB>
-                    <a:solidFill>
-                      <a:srgbClr val="FFFFFF"/>
-                    </a:solidFill>
-                  </a:tcPr>
-                </a:tc>
-                <a:tc>
-                  <a:txBody>
-                    <a:bodyPr/>
-                    <a:lstStyle/>
-                    <a:p>
-                      <a:pPr algn="ctr">
-                        <a:buNone/>
-                      </a:pPr>
-                      <a:r>
-                        <a:rPr lang="en-US" altLang="ja-JP" sz="1500" b="0" dirty="0">
-                          <a:solidFill>
-                            <a:srgbClr val="333333"/>
-                          </a:solidFill>
-                          <a:latin typeface="メイリオ" panose="020B0604030504040204" pitchFamily="50" charset="-128"/>
-                          <a:ea typeface="メイリオ" panose="020B0604030504040204" pitchFamily="50" charset="-128"/>
-                        </a:rPr>
-                        <a:t>20</a:t>
-                      </a:r>
-                      <a:r>
-                        <a:rPr lang="ja-JP" altLang="en-US" sz="1500" b="0" dirty="0">
-                          <a:solidFill>
-                            <a:srgbClr val="333333"/>
-                          </a:solidFill>
-                          <a:latin typeface="メイリオ" panose="020B0604030504040204" pitchFamily="50" charset="-128"/>
-                          <a:ea typeface="メイリオ" panose="020B0604030504040204" pitchFamily="50" charset="-128"/>
-                        </a:rPr>
-                        <a:t>,000円</a:t>
-                      </a:r>
-                      <a:endParaRPr lang="ja-JP" altLang="en-US" sz="1500" dirty="0"/>
-                    </a:p>
-                  </a:txBody>
-                  <a:tcPr marL="73152" marR="73152" marT="27432" marB="27432" anchor="ctr">
-                    <a:lnL w="9525" cap="flat" cmpd="sng" algn="ctr">
-                      <a:solidFill>
-                        <a:srgbClr val="BFC8DC"/>
-                      </a:solidFill>
-                      <a:prstDash val="solid"/>
-                      <a:round/>
-                      <a:headEnd type="none" w="med" len="med"/>
-                      <a:tailEnd type="none" w="med" len="med"/>
-                    </a:lnL>
-                    <a:lnR w="9525" cap="flat" cmpd="sng" algn="ctr">
-                      <a:solidFill>
-                        <a:srgbClr val="BFC8DC"/>
-                      </a:solidFill>
-                      <a:prstDash val="solid"/>
-                      <a:round/>
-                      <a:headEnd type="none" w="med" len="med"/>
-                      <a:tailEnd type="none" w="med" len="med"/>
-                    </a:lnR>
-                    <a:lnT w="9525" cap="flat" cmpd="sng" algn="ctr">
-                      <a:solidFill>
-                        <a:srgbClr val="BFC8DC"/>
-                      </a:solidFill>
-                      <a:prstDash val="solid"/>
-                      <a:round/>
-                      <a:headEnd type="none" w="med" len="med"/>
-                      <a:tailEnd type="none" w="med" len="med"/>
-                    </a:lnT>
-                    <a:lnB w="9525" cap="flat" cmpd="sng" algn="ctr">
-                      <a:solidFill>
-                        <a:srgbClr val="BFC8DC"/>
-                      </a:solidFill>
-                      <a:prstDash val="solid"/>
-                      <a:round/>
-                      <a:headEnd type="none" w="med" len="med"/>
-                      <a:tailEnd type="none" w="med" len="med"/>
-                    </a:lnB>
-                    <a:solidFill>
-                      <a:srgbClr val="FFFFFF"/>
-                    </a:solidFill>
-                  </a:tcPr>
-                </a:tc>
-                <a:tc>
-                  <a:txBody>
-                    <a:bodyPr/>
-                    <a:lstStyle/>
-                    <a:p>
-                      <a:pPr algn="ctr">
-                        <a:buNone/>
-                      </a:pPr>
-                      <a:r>
-                        <a:rPr lang="en-US" altLang="ja-JP" sz="1500" b="0" dirty="0">
-                          <a:solidFill>
-                            <a:srgbClr val="333333"/>
-                          </a:solidFill>
-                          <a:latin typeface="メイリオ" panose="020B0604030504040204" pitchFamily="50" charset="-128"/>
-                          <a:ea typeface="メイリオ" panose="020B0604030504040204" pitchFamily="50" charset="-128"/>
-                        </a:rPr>
-                        <a:t>3</a:t>
-                      </a:r>
-                      <a:r>
-                        <a:rPr lang="ja-JP" altLang="en-US" sz="1500" b="0" dirty="0">
-                          <a:solidFill>
-                            <a:srgbClr val="333333"/>
-                          </a:solidFill>
-                          <a:latin typeface="メイリオ" panose="020B0604030504040204" pitchFamily="50" charset="-128"/>
-                          <a:ea typeface="メイリオ" panose="020B0604030504040204" pitchFamily="50" charset="-128"/>
-                        </a:rPr>
-                        <a:t>0,000円</a:t>
-                      </a:r>
-                      <a:endParaRPr lang="ja-JP" altLang="en-US" sz="1500" dirty="0"/>
-                    </a:p>
-                  </a:txBody>
-                  <a:tcPr marL="73152" marR="73152" marT="27432" marB="27432" anchor="ctr">
-                    <a:lnL w="9525" cap="flat" cmpd="sng" algn="ctr">
-                      <a:solidFill>
-                        <a:srgbClr val="BFC8DC"/>
-                      </a:solidFill>
-                      <a:prstDash val="solid"/>
-                      <a:round/>
-                      <a:headEnd type="none" w="med" len="med"/>
-                      <a:tailEnd type="none" w="med" len="med"/>
-                    </a:lnL>
-                    <a:lnR w="9525" cap="flat" cmpd="sng" algn="ctr">
-                      <a:solidFill>
-                        <a:srgbClr val="BFC8DC"/>
-                      </a:solidFill>
-                      <a:prstDash val="solid"/>
-                      <a:round/>
-                      <a:headEnd type="none" w="med" len="med"/>
-                      <a:tailEnd type="none" w="med" len="med"/>
-                    </a:lnR>
-                    <a:lnT w="9525" cap="flat" cmpd="sng" algn="ctr">
-                      <a:solidFill>
-                        <a:srgbClr val="BFC8DC"/>
-                      </a:solidFill>
-                      <a:prstDash val="solid"/>
-                      <a:round/>
-                      <a:headEnd type="none" w="med" len="med"/>
-                      <a:tailEnd type="none" w="med" len="med"/>
-                    </a:lnT>
-                    <a:lnB w="9525" cap="flat" cmpd="sng" algn="ctr">
-                      <a:solidFill>
-                        <a:srgbClr val="BFC8DC"/>
-                      </a:solidFill>
-                      <a:prstDash val="solid"/>
-                      <a:round/>
-                      <a:headEnd type="none" w="med" len="med"/>
-                      <a:tailEnd type="none" w="med" len="med"/>
-                    </a:lnB>
-                    <a:solidFill>
-                      <a:srgbClr val="FFFFFF"/>
-                    </a:solidFill>
-                  </a:tcPr>
-                </a:tc>
-                <a:extLst>
-                  <a:ext uri="{0D108BD9-81ED-4DB2-BD59-A6C34878D82A}">
-                    <a16:rowId xmlns:a16="http://schemas.microsoft.com/office/drawing/2014/main" val="10002"/>
-                  </a:ext>
-                </a:extLst>
-              </a:tr>
-              <a:tr h="777240">
-                <a:tc>
-                  <a:txBody>
-                    <a:bodyPr/>
-                    <a:lstStyle/>
-                    <a:p>
-                      <a:pPr algn="ctr">
-                        <a:buNone/>
-                      </a:pPr>
-                      <a:r>
-                        <a:rPr lang="ja-JP" altLang="en-US" sz="1400" b="1" dirty="0">
-                          <a:solidFill>
-                            <a:srgbClr val="1F285A"/>
-                          </a:solidFill>
-                          <a:latin typeface="メイリオ" panose="020B0604030504040204" pitchFamily="50" charset="-128"/>
-                          <a:ea typeface="メイリオ" panose="020B0604030504040204" pitchFamily="50" charset="-128"/>
-                        </a:rPr>
-                        <a:t>月額ツール・LINE関連費</a:t>
-                      </a:r>
-                      <a:endParaRPr lang="ja-JP" altLang="en-US" sz="1400" dirty="0"/>
-                    </a:p>
-                  </a:txBody>
-                  <a:tcPr marL="27432" marR="27432" marT="27432" marB="27432" anchor="ctr">
-                    <a:lnL w="9525" cap="flat" cmpd="sng" algn="ctr">
-                      <a:solidFill>
-                        <a:srgbClr val="BFC8DC"/>
-                      </a:solidFill>
-                      <a:prstDash val="solid"/>
-                      <a:round/>
-                      <a:headEnd type="none" w="med" len="med"/>
-                      <a:tailEnd type="none" w="med" len="med"/>
-                    </a:lnL>
-                    <a:lnR w="9525" cap="flat" cmpd="sng" algn="ctr">
-                      <a:solidFill>
-                        <a:srgbClr val="BFC8DC"/>
-                      </a:solidFill>
-                      <a:prstDash val="solid"/>
-                      <a:round/>
-                      <a:headEnd type="none" w="med" len="med"/>
-                      <a:tailEnd type="none" w="med" len="med"/>
-                    </a:lnR>
-                    <a:lnT w="9525" cap="flat" cmpd="sng" algn="ctr">
-                      <a:solidFill>
-                        <a:srgbClr val="BFC8DC"/>
-                      </a:solidFill>
-                      <a:prstDash val="solid"/>
-                      <a:round/>
-                      <a:headEnd type="none" w="med" len="med"/>
-                      <a:tailEnd type="none" w="med" len="med"/>
-                    </a:lnT>
-                    <a:lnB w="9525" cap="flat" cmpd="sng" algn="ctr">
-                      <a:solidFill>
-                        <a:srgbClr val="BFC8DC"/>
-                      </a:solidFill>
-                      <a:prstDash val="solid"/>
-                      <a:round/>
-                      <a:headEnd type="none" w="med" len="med"/>
-                      <a:tailEnd type="none" w="med" len="med"/>
-                    </a:lnB>
-                    <a:solidFill>
-                      <a:srgbClr val="E8ECF6"/>
-                    </a:solidFill>
-                  </a:tcPr>
-                </a:tc>
-                <a:tc>
-                  <a:txBody>
-                    <a:bodyPr/>
-                    <a:lstStyle/>
-                    <a:p>
-                      <a:pPr algn="ctr">
-                        <a:buNone/>
-                      </a:pPr>
-                      <a:r>
-                        <a:rPr lang="ja-JP" altLang="en-US" sz="1500" b="0" dirty="0">
-                          <a:solidFill>
-                            <a:srgbClr val="333333"/>
-                          </a:solidFill>
-                          <a:latin typeface="メイリオ" panose="020B0604030504040204" pitchFamily="50" charset="-128"/>
-                          <a:ea typeface="メイリオ" panose="020B0604030504040204" pitchFamily="50" charset="-128"/>
-                        </a:rPr>
-                        <a:t>65,000円〜</a:t>
-                      </a:r>
-                      <a:endParaRPr lang="ja-JP" altLang="en-US" sz="1500" dirty="0"/>
-                    </a:p>
-                  </a:txBody>
-                  <a:tcPr marL="73152" marR="73152" marT="27432" marB="27432" anchor="ctr">
-                    <a:lnL w="9525" cap="flat" cmpd="sng" algn="ctr">
-                      <a:solidFill>
-                        <a:srgbClr val="BFC8DC"/>
-                      </a:solidFill>
-                      <a:prstDash val="solid"/>
-                      <a:round/>
-                      <a:headEnd type="none" w="med" len="med"/>
-                      <a:tailEnd type="none" w="med" len="med"/>
-                    </a:lnL>
-                    <a:lnR w="9525" cap="flat" cmpd="sng" algn="ctr">
-                      <a:solidFill>
-                        <a:srgbClr val="BFC8DC"/>
-                      </a:solidFill>
-                      <a:prstDash val="solid"/>
-                      <a:round/>
-                      <a:headEnd type="none" w="med" len="med"/>
-                      <a:tailEnd type="none" w="med" len="med"/>
-                    </a:lnR>
-                    <a:lnT w="9525" cap="flat" cmpd="sng" algn="ctr">
-                      <a:solidFill>
-                        <a:srgbClr val="BFC8DC"/>
-                      </a:solidFill>
-                      <a:prstDash val="solid"/>
-                      <a:round/>
-                      <a:headEnd type="none" w="med" len="med"/>
-                      <a:tailEnd type="none" w="med" len="med"/>
-                    </a:lnT>
-                    <a:lnB w="9525" cap="flat" cmpd="sng" algn="ctr">
-                      <a:solidFill>
-                        <a:srgbClr val="BFC8DC"/>
-                      </a:solidFill>
-                      <a:prstDash val="solid"/>
-                      <a:round/>
-                      <a:headEnd type="none" w="med" len="med"/>
-                      <a:tailEnd type="none" w="med" len="med"/>
-                    </a:lnB>
-                    <a:solidFill>
-                      <a:srgbClr val="FFFFFF"/>
-                    </a:solidFill>
-                  </a:tcPr>
-                </a:tc>
-                <a:tc>
-                  <a:txBody>
-                    <a:bodyPr/>
-                    <a:lstStyle/>
-                    <a:p>
-                      <a:pPr algn="ctr">
-                        <a:buNone/>
-                      </a:pPr>
-                      <a:r>
-                        <a:rPr lang="ja-JP" altLang="en-US" sz="1500" b="0" dirty="0">
-                          <a:solidFill>
-                            <a:srgbClr val="333333"/>
-                          </a:solidFill>
-                          <a:latin typeface="メイリオ" panose="020B0604030504040204" pitchFamily="50" charset="-128"/>
-                          <a:ea typeface="メイリオ" panose="020B0604030504040204" pitchFamily="50" charset="-128"/>
-                        </a:rPr>
-                        <a:t>65,000円〜</a:t>
-                      </a:r>
-                      <a:endParaRPr lang="ja-JP" altLang="en-US" sz="1500" dirty="0"/>
-                    </a:p>
-                  </a:txBody>
-                  <a:tcPr marL="73152" marR="73152" marT="27432" marB="27432" anchor="ctr">
-                    <a:lnL w="9525" cap="flat" cmpd="sng" algn="ctr">
-                      <a:solidFill>
-                        <a:srgbClr val="BFC8DC"/>
-                      </a:solidFill>
-                      <a:prstDash val="solid"/>
-                      <a:round/>
-                      <a:headEnd type="none" w="med" len="med"/>
-                      <a:tailEnd type="none" w="med" len="med"/>
-                    </a:lnL>
-                    <a:lnR w="9525" cap="flat" cmpd="sng" algn="ctr">
-                      <a:solidFill>
-                        <a:srgbClr val="BFC8DC"/>
-                      </a:solidFill>
-                      <a:prstDash val="solid"/>
-                      <a:round/>
-                      <a:headEnd type="none" w="med" len="med"/>
-                      <a:tailEnd type="none" w="med" len="med"/>
-                    </a:lnR>
-                    <a:lnT w="9525" cap="flat" cmpd="sng" algn="ctr">
-                      <a:solidFill>
-                        <a:srgbClr val="BFC8DC"/>
-                      </a:solidFill>
-                      <a:prstDash val="solid"/>
-                      <a:round/>
-                      <a:headEnd type="none" w="med" len="med"/>
-                      <a:tailEnd type="none" w="med" len="med"/>
-                    </a:lnT>
-                    <a:lnB w="9525" cap="flat" cmpd="sng" algn="ctr">
-                      <a:solidFill>
-                        <a:srgbClr val="BFC8DC"/>
-                      </a:solidFill>
-                      <a:prstDash val="solid"/>
-                      <a:round/>
-                      <a:headEnd type="none" w="med" len="med"/>
-                      <a:tailEnd type="none" w="med" len="med"/>
-                    </a:lnB>
-                    <a:solidFill>
-                      <a:srgbClr val="FFFFFF"/>
-                    </a:solidFill>
-                  </a:tcPr>
-                </a:tc>
-                <a:tc>
-                  <a:txBody>
-                    <a:bodyPr/>
-                    <a:lstStyle/>
-                    <a:p>
-                      <a:pPr algn="ctr">
-                        <a:buNone/>
-                      </a:pPr>
-                      <a:r>
-                        <a:rPr lang="ja-JP" altLang="en-US" sz="1500" b="0" dirty="0">
-                          <a:solidFill>
-                            <a:srgbClr val="333333"/>
-                          </a:solidFill>
-                          <a:latin typeface="メイリオ" panose="020B0604030504040204" pitchFamily="50" charset="-128"/>
-                          <a:ea typeface="メイリオ" panose="020B0604030504040204" pitchFamily="50" charset="-128"/>
-                        </a:rPr>
-                        <a:t>65,000円〜</a:t>
-                      </a:r>
-                      <a:endParaRPr lang="ja-JP" altLang="en-US" sz="1500" dirty="0"/>
-                    </a:p>
-                  </a:txBody>
-                  <a:tcPr marL="73152" marR="73152" marT="27432" marB="27432" anchor="ctr">
-                    <a:lnL w="9525" cap="flat" cmpd="sng" algn="ctr">
-                      <a:solidFill>
-                        <a:srgbClr val="BFC8DC"/>
-                      </a:solidFill>
-                      <a:prstDash val="solid"/>
-                      <a:round/>
-                      <a:headEnd type="none" w="med" len="med"/>
-                      <a:tailEnd type="none" w="med" len="med"/>
-                    </a:lnL>
-                    <a:lnR w="9525" cap="flat" cmpd="sng" algn="ctr">
-                      <a:solidFill>
-                        <a:srgbClr val="BFC8DC"/>
-                      </a:solidFill>
-                      <a:prstDash val="solid"/>
-                      <a:round/>
-                      <a:headEnd type="none" w="med" len="med"/>
-                      <a:tailEnd type="none" w="med" len="med"/>
-                    </a:lnR>
-                    <a:lnT w="9525" cap="flat" cmpd="sng" algn="ctr">
-                      <a:solidFill>
-                        <a:srgbClr val="BFC8DC"/>
-                      </a:solidFill>
-                      <a:prstDash val="solid"/>
-                      <a:round/>
-                      <a:headEnd type="none" w="med" len="med"/>
-                      <a:tailEnd type="none" w="med" len="med"/>
-                    </a:lnT>
-                    <a:lnB w="9525" cap="flat" cmpd="sng" algn="ctr">
-                      <a:solidFill>
-                        <a:srgbClr val="BFC8DC"/>
-                      </a:solidFill>
-                      <a:prstDash val="solid"/>
-                      <a:round/>
-                      <a:headEnd type="none" w="med" len="med"/>
-                      <a:tailEnd type="none" w="med" len="med"/>
-                    </a:lnB>
-                    <a:solidFill>
-                      <a:srgbClr val="FFFFFF"/>
-                    </a:solidFill>
-                  </a:tcPr>
-                </a:tc>
-                <a:extLst>
-                  <a:ext uri="{0D108BD9-81ED-4DB2-BD59-A6C34878D82A}">
-                    <a16:rowId xmlns:a16="http://schemas.microsoft.com/office/drawing/2014/main" val="10003"/>
-                  </a:ext>
-                </a:extLst>
-              </a:tr>
-              <a:tr h="914400">
-                <a:tc>
-                  <a:txBody>
-                    <a:bodyPr/>
-                    <a:lstStyle/>
-                    <a:p>
-                      <a:pPr algn="ctr">
-                        <a:buNone/>
-                      </a:pPr>
-                      <a:r>
-                        <a:rPr lang="ja-JP" altLang="en-US" sz="1400" b="1" dirty="0">
-                          <a:solidFill>
-                            <a:srgbClr val="FFFFFF"/>
-                          </a:solidFill>
-                          <a:latin typeface="メイリオ" panose="020B0604030504040204" pitchFamily="50" charset="-128"/>
-                          <a:ea typeface="メイリオ" panose="020B0604030504040204" pitchFamily="50" charset="-128"/>
-                        </a:rPr>
-                        <a:t>月額費用</a:t>
-                      </a:r>
-                      <a:endParaRPr lang="ja-JP" altLang="en-US" sz="1400" dirty="0"/>
-                    </a:p>
-                  </a:txBody>
-                  <a:tcPr marL="73152" marR="73152" marT="27432" marB="27432" anchor="ctr">
-                    <a:lnL w="9525" cap="flat" cmpd="sng" algn="ctr">
-                      <a:solidFill>
-                        <a:srgbClr val="BFC8DC"/>
-                      </a:solidFill>
-                      <a:prstDash val="solid"/>
-                      <a:round/>
-                      <a:headEnd type="none" w="med" len="med"/>
-                      <a:tailEnd type="none" w="med" len="med"/>
-                    </a:lnL>
-                    <a:lnR w="9525" cap="flat" cmpd="sng" algn="ctr">
-                      <a:solidFill>
-                        <a:srgbClr val="BFC8DC"/>
-                      </a:solidFill>
-                      <a:prstDash val="solid"/>
-                      <a:round/>
-                      <a:headEnd type="none" w="med" len="med"/>
-                      <a:tailEnd type="none" w="med" len="med"/>
-                    </a:lnR>
-                    <a:lnT w="9525" cap="flat" cmpd="sng" algn="ctr">
-                      <a:solidFill>
-                        <a:srgbClr val="BFC8DC"/>
-                      </a:solidFill>
-                      <a:prstDash val="solid"/>
-                      <a:round/>
-                      <a:headEnd type="none" w="med" len="med"/>
-                      <a:tailEnd type="none" w="med" len="med"/>
-                    </a:lnT>
-                    <a:lnB w="9525" cap="flat" cmpd="sng" algn="ctr">
-                      <a:solidFill>
-                        <a:srgbClr val="BFC8DC"/>
-                      </a:solidFill>
-                      <a:prstDash val="solid"/>
-                      <a:round/>
-                      <a:headEnd type="none" w="med" len="med"/>
-                      <a:tailEnd type="none" w="med" len="med"/>
-                    </a:lnB>
-                    <a:solidFill>
-                      <a:srgbClr val="1F285A"/>
-                    </a:solidFill>
-                  </a:tcPr>
-                </a:tc>
-                <a:tc>
-                  <a:txBody>
-                    <a:bodyPr/>
-                    <a:lstStyle/>
-                    <a:p>
-                      <a:pPr algn="ctr">
-                        <a:buNone/>
-                      </a:pPr>
-                      <a:r>
-                        <a:rPr lang="ja-JP" altLang="en-US" sz="2000" b="1" dirty="0">
-                          <a:solidFill>
-                            <a:srgbClr val="1F285A"/>
-                          </a:solidFill>
-                          <a:latin typeface="メイリオ" panose="020B0604030504040204" pitchFamily="50" charset="-128"/>
-                          <a:ea typeface="メイリオ" panose="020B0604030504040204" pitchFamily="50" charset="-128"/>
-                        </a:rPr>
-                        <a:t>65,000円〜</a:t>
                       </a:r>
                       <a:endParaRPr lang="ja-JP" altLang="en-US" sz="2000" dirty="0"/>
                     </a:p>
@@ -14921,85 +13692,6 @@
                     </a:solidFill>
                   </a:tcPr>
                 </a:tc>
-                <a:tc>
-                  <a:txBody>
-                    <a:bodyPr/>
-                    <a:lstStyle/>
-                    <a:p>
-                      <a:pPr algn="ctr">
-                        <a:buNone/>
-                      </a:pPr>
-                      <a:r>
-                        <a:rPr lang="ja-JP" altLang="en-US" sz="2000" b="1" dirty="0">
-                          <a:solidFill>
-                            <a:srgbClr val="1F285A"/>
-                          </a:solidFill>
-                          <a:latin typeface="メイリオ" panose="020B0604030504040204" pitchFamily="50" charset="-128"/>
-                          <a:ea typeface="メイリオ" panose="020B0604030504040204" pitchFamily="50" charset="-128"/>
-                        </a:rPr>
-                        <a:t>65,000円〜</a:t>
-                      </a:r>
-                      <a:endParaRPr lang="ja-JP" altLang="en-US" sz="2000" dirty="0"/>
-                    </a:p>
-                    <a:p>
-                      <a:pPr algn="ctr">
-                        <a:buNone/>
-                      </a:pPr>
-                      <a:r>
-                        <a:rPr lang="ja-JP" altLang="en-US" sz="2000" b="1" dirty="0">
-                          <a:solidFill>
-                            <a:srgbClr val="1F285A"/>
-                          </a:solidFill>
-                          <a:latin typeface="メイリオ" panose="020B0604030504040204" pitchFamily="50" charset="-128"/>
-                          <a:ea typeface="メイリオ" panose="020B0604030504040204" pitchFamily="50" charset="-128"/>
-                        </a:rPr>
-                        <a:t>＋成果報酬</a:t>
-                      </a:r>
-                      <a:endParaRPr lang="ja-JP" altLang="en-US" sz="2000" dirty="0"/>
-                    </a:p>
-                  </a:txBody>
-                  <a:tcPr marL="73152" marR="73152" marT="27432" marB="27432" anchor="ctr">
-                    <a:lnL w="9525" cap="flat" cmpd="sng" algn="ctr">
-                      <a:solidFill>
-                        <a:srgbClr val="BFC8DC"/>
-                      </a:solidFill>
-                      <a:prstDash val="solid"/>
-                      <a:round/>
-                      <a:headEnd type="none" w="med" len="med"/>
-                      <a:tailEnd type="none" w="med" len="med"/>
-                    </a:lnL>
-                    <a:lnR w="9525" cap="flat" cmpd="sng" algn="ctr">
-                      <a:solidFill>
-                        <a:srgbClr val="BFC8DC"/>
-                      </a:solidFill>
-                      <a:prstDash val="solid"/>
-                      <a:round/>
-                      <a:headEnd type="none" w="med" len="med"/>
-                      <a:tailEnd type="none" w="med" len="med"/>
-                    </a:lnR>
-                    <a:lnT w="9525" cap="flat" cmpd="sng" algn="ctr">
-                      <a:solidFill>
-                        <a:srgbClr val="BFC8DC"/>
-                      </a:solidFill>
-                      <a:prstDash val="solid"/>
-                      <a:round/>
-                      <a:headEnd type="none" w="med" len="med"/>
-                      <a:tailEnd type="none" w="med" len="med"/>
-                    </a:lnT>
-                    <a:lnB w="9525" cap="flat" cmpd="sng" algn="ctr">
-                      <a:solidFill>
-                        <a:srgbClr val="BFC8DC"/>
-                      </a:solidFill>
-                      <a:prstDash val="solid"/>
-                      <a:round/>
-                      <a:headEnd type="none" w="med" len="med"/>
-                      <a:tailEnd type="none" w="med" len="med"/>
-                    </a:lnB>
-                    <a:solidFill>
-                      <a:srgbClr val="E8ECF6"/>
-                    </a:solidFill>
-                  </a:tcPr>
-                </a:tc>
                 <a:extLst>
                   <a:ext uri="{0D108BD9-81ED-4DB2-BD59-A6C34878D82A}">
                     <a16:rowId xmlns:a16="http://schemas.microsoft.com/office/drawing/2014/main" val="10004"/>
@@ -15018,7 +13710,7 @@
         </p:nvSpPr>
         <p:spPr>
           <a:xfrm>
-            <a:off x="384048" y="5312412"/>
+            <a:off x="384048" y="5312664"/>
             <a:ext cx="9144000" cy="246888"/>
           </a:xfrm>
           <a:prstGeom prst="rect">
@@ -15060,7 +13752,7 @@
         </p:nvSpPr>
         <p:spPr>
           <a:xfrm>
-            <a:off x="384048" y="5559300"/>
+            <a:off x="384048" y="5541264"/>
             <a:ext cx="9144000" cy="246888"/>
           </a:xfrm>
           <a:prstGeom prst="rect">
@@ -15102,7 +13794,7 @@
         </p:nvSpPr>
         <p:spPr>
           <a:xfrm>
-            <a:off x="384048" y="5806188"/>
+            <a:off x="384048" y="5769864"/>
             <a:ext cx="9144000" cy="246888"/>
           </a:xfrm>
           <a:prstGeom prst="rect">
@@ -15130,7 +13822,7 @@
                 <a:latin typeface="メイリオ" panose="020B0604030504040204" pitchFamily="50" charset="-128"/>
                 <a:ea typeface="メイリオ" panose="020B0604030504040204" pitchFamily="50" charset="-128"/>
               </a:rPr>
-              <a:t>※成果報酬の対象＝LINEからの新規応募・再応募（再応募は、勤務希望をLINEで受け付ける場合）。契約期間は6か月〜</a:t>
+              <a:t>※成果報酬の対象＝LINEからの新規応募・再応募・会員登録（再応募は、勤務希望をLINEで受け付ける場合）</a:t>
             </a:r>
             <a:endParaRPr lang="ja-JP" altLang="en-US" sz="1200" dirty="0"/>
           </a:p>
@@ -15144,7 +13836,49 @@
         </p:nvSpPr>
         <p:spPr>
           <a:xfrm>
-            <a:off x="384048" y="6053076"/>
+            <a:off x="384048" y="5998464"/>
+            <a:ext cx="9144000" cy="246888"/>
+          </a:xfrm>
+          <a:prstGeom prst="rect">
+            <a:avLst/>
+          </a:prstGeom>
+          <a:noFill/>
+          <a:ln>
+            <a:noFill/>
+          </a:ln>
+        </p:spPr>
+        <p:txBody>
+          <a:bodyPr wrap="square" lIns="0" tIns="0" rIns="0" bIns="0" rtlCol="0" anchor="t">
+            <a:noAutofit/>
+          </a:bodyPr>
+          <a:lstStyle/>
+          <a:p>
+            <a:pPr algn="l">
+              <a:buNone/>
+            </a:pPr>
+            <a:r>
+              <a:rPr lang="ja-JP" altLang="en-US" sz="900" b="0" dirty="0">
+                <a:solidFill>
+                  <a:srgbClr val="7F7F7F"/>
+                </a:solidFill>
+                <a:latin typeface="メイリオ" panose="020B0604030504040204" pitchFamily="50" charset="-128"/>
+                <a:ea typeface="メイリオ" panose="020B0604030504040204" pitchFamily="50" charset="-128"/>
+              </a:rPr>
+              <a:t>※契約期間は6か月〜。概算お見積りのページはプラン②の場合</a:t>
+            </a:r>
+            <a:endParaRPr lang="ja-JP" altLang="en-US" sz="1200" dirty="0"/>
+          </a:p>
+        </p:txBody>
+      </p:sp>
+      <p:sp>
+        <p:nvSpPr>
+          <p:cNvPr id="644" name="注記"/>
+          <p:cNvSpPr/>
+          <p:nvPr/>
+        </p:nvSpPr>
+        <p:spPr>
+          <a:xfrm>
+            <a:off x="384048" y="6227064"/>
             <a:ext cx="9144000" cy="246888"/>
           </a:xfrm>
           <a:prstGeom prst="rect">

--- a/202610_株式会社横浜シミズ御中_LINE公式アカウント運用のご提案.pptx
+++ b/202610_株式会社横浜シミズ御中_LINE公式アカウント運用のご提案.pptx
@@ -13920,7 +13920,7 @@
 </p:sld>
 </file>
 
-<file path=ppt/slides/slide17.xml><?xml version="1.0" encoding="utf-8"?>
+<file path=ppt/slides/slide16.xml><?xml version="1.0" encoding="utf-8"?>
 <p:sld xmlns:a="http://schemas.openxmlformats.org/drawingml/2006/main" xmlns:r="http://schemas.openxmlformats.org/officeDocument/2006/relationships" xmlns:p="http://schemas.openxmlformats.org/presentationml/2006/main">
   <p:cSld>
     <p:spTree>
@@ -14123,31 +14123,7 @@
                 <a:latin typeface="メイリオ"/>
                 <a:ea typeface="メイリオ"/>
               </a:rPr>
-              <a:t>3つのプランの運用内容</a:t>
-            </a:r>
-            <a:r>
-              <a:rPr lang="ja-JP" altLang="en-US" sz="1600" b="1" u="none" strike="noStrike" dirty="0">
-                <a:solidFill>
-                  <a:schemeClr val="dk1"/>
-                </a:solidFill>
-                <a:effectLst/>
-                <a:uFillTx/>
-                <a:latin typeface="メイリオ"/>
-                <a:ea typeface="メイリオ"/>
-              </a:rPr>
-              <a:t>の</a:t>
-            </a:r>
-            <a:r>
-              <a:rPr lang="ja-JP" sz="1600" b="1" u="none" strike="noStrike" dirty="0">
-                <a:solidFill>
-                  <a:schemeClr val="dk1"/>
-                </a:solidFill>
-                <a:effectLst/>
-                <a:uFillTx/>
-                <a:latin typeface="メイリオ"/>
-                <a:ea typeface="メイリオ"/>
-              </a:rPr>
-              <a:t>比較</a:t>
+              <a:t>4つのプランの運用内容の比較（プラン②と④は同じ）</a:t>
             </a:r>
             <a:endParaRPr lang="en-US" sz="1600" b="0" u="none" strike="noStrike" dirty="0">
               <a:solidFill>
@@ -14176,7 +14152,7 @@
         </p:nvGraphicFramePr>
         <p:xfrm>
           <a:off x="381000" y="1490760"/>
-          <a:ext cx="9144000" cy="3149193"/>
+          <a:ext cx="9144000" cy="3255264"/>
         </p:xfrm>
         <a:graphic>
           <a:graphicData uri="http://schemas.openxmlformats.org/drawingml/2006/table">
@@ -14212,7 +14188,7 @@
                   </a:extLst>
                 </a:gridCol>
               </a:tblGrid>
-              <a:tr h="680313">
+              <a:tr h="786384">
                 <a:tc>
                   <a:txBody>
                     <a:bodyPr/>
@@ -14371,7 +14347,7 @@
                           <a:latin typeface="メイリオ" panose="020B0604030504040204" pitchFamily="50" charset="-128"/>
                           <a:ea typeface="メイリオ" panose="020B0604030504040204" pitchFamily="50" charset="-128"/>
                         </a:rPr>
-                        <a:t>プラン②</a:t>
+                        <a:t>プラン②・プラン④</a:t>
                       </a:r>
                       <a:endParaRPr lang="ja-JP" altLang="en-US" sz="1300" dirty="0"/>
                     </a:p>
@@ -14388,6 +14364,22 @@
                           <a:ea typeface="メイリオ" panose="020B0604030504040204" pitchFamily="50" charset="-128"/>
                         </a:rPr>
                         <a:t>運用代行・効率改善</a:t>
+                      </a:r>
+                      <a:endParaRPr lang="ja-JP" altLang="en-US" sz="1300" dirty="0"/>
+                    </a:p>
+                    <a:p>
+                      <a:pPr algn="ctr">
+                        <a:buNone/>
+                      </a:pPr>
+                      <a:r>
+                        <a:rPr lang="ja-JP" altLang="en-US" sz="1400" b="1" dirty="0">
+                          <a:solidFill>
+                            <a:srgbClr val="FFFFFF"/>
+                          </a:solidFill>
+                          <a:latin typeface="メイリオ" panose="020B0604030504040204" pitchFamily="50" charset="-128"/>
+                          <a:ea typeface="メイリオ" panose="020B0604030504040204" pitchFamily="50" charset="-128"/>
+                        </a:rPr>
+                        <a:t>／成果報酬</a:t>
                       </a:r>
                       <a:endParaRPr lang="ja-JP" altLang="en-US" sz="1300" dirty="0"/>
                     </a:p>
@@ -15986,7 +15978,7 @@
 </p:sld>
 </file>
 
-<file path=ppt/slides/slide18.xml><?xml version="1.0" encoding="utf-8"?>
+<file path=ppt/slides/slide17.xml><?xml version="1.0" encoding="utf-8"?>
 <p:sld xmlns:a="http://schemas.openxmlformats.org/drawingml/2006/main" xmlns:r="http://schemas.openxmlformats.org/officeDocument/2006/relationships" xmlns:p="http://schemas.openxmlformats.org/presentationml/2006/main">
   <p:cSld>
     <p:spTree>
@@ -16854,7 +16846,7 @@
 </p:sld>
 </file>
 
-<file path=ppt/slides/slide19.xml><?xml version="1.0" encoding="utf-8"?>
+<file path=ppt/slides/slide18.xml><?xml version="1.0" encoding="utf-8"?>
 <p:sld xmlns:a="http://schemas.openxmlformats.org/drawingml/2006/main" xmlns:r="http://schemas.openxmlformats.org/officeDocument/2006/relationships" xmlns:p="http://schemas.openxmlformats.org/presentationml/2006/main">
   <p:cSld>
     <p:spTree>

--- a/202610_株式会社横浜シミズ御中_LINE公式アカウント運用のご提案.pptx
+++ b/202610_株式会社横浜シミズ御中_LINE公式アカウント運用のご提案.pptx
@@ -6397,8 +6397,8 @@
         </p:nvSpPr>
         <p:spPr>
           <a:xfrm>
-            <a:off x="549000" y="138240"/>
-            <a:ext cx="7680960" cy="338040"/>
+            <a:off x="547200" y="136800"/>
+            <a:ext cx="7680960" cy="338400"/>
           </a:xfrm>
           <a:prstGeom prst="rect">
             <a:avLst/>
@@ -6421,7 +6421,7 @@
           <a:fontRef idx="minor"/>
         </p:style>
         <p:txBody>
-          <a:bodyPr anchor="ctr">
+          <a:bodyPr anchor="ctr" lIns="28800" rIns="28800" tIns="7200" bIns="7200">
             <a:spAutoFit/>
           </a:bodyPr>
           <a:lstStyle/>
@@ -8959,8 +8959,8 @@
         </p:nvSpPr>
         <p:spPr>
           <a:xfrm>
-            <a:off x="549000" y="137983"/>
-            <a:ext cx="7680960" cy="338554"/>
+            <a:off x="547200" y="136800"/>
+            <a:ext cx="7680960" cy="338400"/>
           </a:xfrm>
           <a:prstGeom prst="rect">
             <a:avLst/>
@@ -8983,7 +8983,7 @@
           <a:fontRef idx="minor"/>
         </p:style>
         <p:txBody>
-          <a:bodyPr anchor="ctr">
+          <a:bodyPr anchor="ctr" lIns="28800" rIns="28800" tIns="7200" bIns="7200">
             <a:spAutoFit/>
           </a:bodyPr>
           <a:lstStyle/>
@@ -8996,7 +8996,7 @@
             <a:r>
               <a:rPr lang="ja-JP" sz="1600" b="1" u="none" strike="noStrike" dirty="0">
                 <a:solidFill>
-                  <a:srgbClr val="002060"/>
+                  <a:srgbClr val="323366"/>
                 </a:solidFill>
                 <a:effectLst/>
                 <a:uFillTx/>
@@ -11694,8 +11694,8 @@
         </p:nvSpPr>
         <p:spPr>
           <a:xfrm>
-            <a:off x="549000" y="138240"/>
-            <a:ext cx="6275880" cy="338040"/>
+            <a:off x="547200" y="136800"/>
+            <a:ext cx="6275880" cy="338400"/>
           </a:xfrm>
           <a:prstGeom prst="rect">
             <a:avLst/>
@@ -11718,7 +11718,7 @@
           <a:fontRef idx="minor"/>
         </p:style>
         <p:txBody>
-          <a:bodyPr anchor="ctr">
+          <a:bodyPr anchor="ctr" lIns="28800" rIns="28800" tIns="7200" bIns="7200">
             <a:spAutoFit/>
           </a:bodyPr>
           <a:lstStyle/>
@@ -13945,8 +13945,8 @@
         </p:nvSpPr>
         <p:spPr>
           <a:xfrm>
-            <a:off x="549000" y="138240"/>
-            <a:ext cx="6275880" cy="338040"/>
+            <a:off x="547200" y="136800"/>
+            <a:ext cx="6275880" cy="338400"/>
           </a:xfrm>
           <a:prstGeom prst="rect">
             <a:avLst/>
@@ -13969,7 +13969,7 @@
           <a:fontRef idx="minor"/>
         </p:style>
         <p:txBody>
-          <a:bodyPr anchor="ctr">
+          <a:bodyPr anchor="ctr" lIns="28800" rIns="28800" tIns="7200" bIns="7200">
             <a:spAutoFit/>
           </a:bodyPr>
           <a:lstStyle/>
@@ -24754,7 +24754,7 @@
           </a:ln>
         </p:spPr>
         <p:txBody>
-          <a:bodyPr spcFirstLastPara="1" wrap="square" lIns="91425" tIns="45700" rIns="91425" bIns="45700" anchor="ctr" anchorCtr="0">
+          <a:bodyPr spcFirstLastPara="1" wrap="square" lIns="28800" tIns="7200" rIns="28800" bIns="7200" anchor="ctr" anchorCtr="0">
             <a:spAutoFit/>
           </a:bodyPr>
           <a:lstStyle/>
@@ -24763,7 +24763,7 @@
             <a:r>
               <a:rPr lang="ja-JP" altLang="en-US" sz="1600" b="1" dirty="0">
                 <a:solidFill>
-                  <a:srgbClr val="002060"/>
+                  <a:srgbClr val="323366"/>
                 </a:solidFill>
                 <a:latin typeface="メイリオ"/>
                 <a:ea typeface="メイリオ"/>
@@ -24774,7 +24774,7 @@
             </a:r>
             <a:endParaRPr lang="en-US" altLang="ja-JP" sz="1600" b="1" dirty="0">
               <a:solidFill>
-                <a:srgbClr val="002060"/>
+                <a:srgbClr val="323366"/>
               </a:solidFill>
               <a:latin typeface="メイリオ"/>
               <a:ea typeface="メイリオ"/>
@@ -27802,7 +27802,7 @@
           <a:noFill/>
         </p:spPr>
         <p:txBody>
-          <a:bodyPr wrap="square" lIns="0" tIns="21600" rIns="0" bIns="21600" anchor="ctr">
+          <a:bodyPr wrap="square" lIns="28800" tIns="7200" rIns="28800" bIns="7200" anchor="ctr">
             <a:spAutoFit/>
           </a:bodyPr>
           <a:lstStyle/>
@@ -27811,7 +27811,7 @@
             <a:r>
               <a:rPr sz="1600" b="1" dirty="0" err="1">
                 <a:solidFill>
-                  <a:srgbClr val="002060"/>
+                  <a:srgbClr val="323366"/>
                 </a:solidFill>
                 <a:latin typeface="メイリオ"/>
                 <a:ea typeface="メイリオ"/>
@@ -27821,7 +27821,7 @@
             </a:r>
             <a:endParaRPr sz="1600" b="1" dirty="0">
               <a:solidFill>
-                <a:srgbClr val="002060"/>
+                <a:srgbClr val="323366"/>
               </a:solidFill>
               <a:latin typeface="メイリオ"/>
               <a:ea typeface="メイリオ"/>
